--- a/Capacitor Sizing- Ripple Minimization/Journal Paper-Minimization/IPEC-Poster/IPEC2026FinalPoster.pptx
+++ b/Capacitor Sizing- Ripple Minimization/Journal Paper-Minimization/IPEC-Poster/IPEC2026FinalPoster.pptx
@@ -4,6 +4,9 @@
   <p:sldMasterIdLst>
     <p:sldMasterId id="2147483660" r:id="rId4"/>
   </p:sldMasterIdLst>
+  <p:notesMasterIdLst>
+    <p:notesMasterId r:id="rId6"/>
+  </p:notesMasterIdLst>
   <p:sldIdLst>
     <p:sldId id="258" r:id="rId5"/>
   </p:sldIdLst>
@@ -120,550 +123,438 @@
 </p1510:revInfo>
 </file>
 
-<file path=ppt/changesInfos/changesInfo1.xml><?xml version="1.0" encoding="utf-8"?>
-<pc:chgInfo xmlns:a="http://schemas.openxmlformats.org/drawingml/2006/main" xmlns:r="http://schemas.openxmlformats.org/officeDocument/2006/relationships" xmlns:ac="http://schemas.microsoft.com/office/drawing/2013/main/command" xmlns:pc="http://schemas.microsoft.com/office/powerpoint/2013/main/command">
-  <pc:docChgLst>
-    <pc:chgData name="Ryosuke Ota" userId="ca473f5a-80a5-414f-8425-fd37d197ae63" providerId="ADAL" clId="{4AFA1E52-264A-4A1C-999F-31B049C3043A}"/>
-    <pc:docChg chg="undo custSel addSld delSld modSld sldOrd modMainMaster">
-      <pc:chgData name="Ryosuke Ota" userId="ca473f5a-80a5-414f-8425-fd37d197ae63" providerId="ADAL" clId="{4AFA1E52-264A-4A1C-999F-31B049C3043A}" dt="2026-04-18T02:53:02.216" v="720" actId="113"/>
-      <pc:docMkLst>
-        <pc:docMk/>
-      </pc:docMkLst>
-      <pc:sldChg chg="addSp delSp modSp new del mod">
-        <pc:chgData name="Ryosuke Ota" userId="ca473f5a-80a5-414f-8425-fd37d197ae63" providerId="ADAL" clId="{4AFA1E52-264A-4A1C-999F-31B049C3043A}" dt="2026-04-17T17:19:47.073" v="370" actId="47"/>
-        <pc:sldMkLst>
-          <pc:docMk/>
-          <pc:sldMk cId="1693600945" sldId="256"/>
-        </pc:sldMkLst>
-        <pc:spChg chg="add del mod">
-          <ac:chgData name="Ryosuke Ota" userId="ca473f5a-80a5-414f-8425-fd37d197ae63" providerId="ADAL" clId="{4AFA1E52-264A-4A1C-999F-31B049C3043A}" dt="2026-04-17T16:22:10.356" v="164" actId="14100"/>
-          <ac:spMkLst>
-            <pc:docMk/>
-            <pc:sldMk cId="1693600945" sldId="256"/>
-            <ac:spMk id="2" creationId="{A11AC74B-4A29-7B69-A525-938BC3CCDBE9}"/>
-          </ac:spMkLst>
-        </pc:spChg>
-        <pc:spChg chg="add del">
-          <ac:chgData name="Ryosuke Ota" userId="ca473f5a-80a5-414f-8425-fd37d197ae63" providerId="ADAL" clId="{4AFA1E52-264A-4A1C-999F-31B049C3043A}" dt="2026-04-17T16:01:35.061" v="5" actId="478"/>
-          <ac:spMkLst>
-            <pc:docMk/>
-            <pc:sldMk cId="1693600945" sldId="256"/>
-            <ac:spMk id="3" creationId="{4240F7F8-DAC8-6C57-393B-69B77DF75D8D}"/>
-          </ac:spMkLst>
-        </pc:spChg>
-        <pc:spChg chg="add del mod">
-          <ac:chgData name="Ryosuke Ota" userId="ca473f5a-80a5-414f-8425-fd37d197ae63" providerId="ADAL" clId="{4AFA1E52-264A-4A1C-999F-31B049C3043A}" dt="2026-04-17T16:22:27.848" v="168" actId="478"/>
-          <ac:spMkLst>
-            <pc:docMk/>
-            <pc:sldMk cId="1693600945" sldId="256"/>
-            <ac:spMk id="9" creationId="{6721AB6F-2006-E347-E652-86E491EAC102}"/>
-          </ac:spMkLst>
-        </pc:spChg>
-        <pc:spChg chg="add del mod">
-          <ac:chgData name="Ryosuke Ota" userId="ca473f5a-80a5-414f-8425-fd37d197ae63" providerId="ADAL" clId="{4AFA1E52-264A-4A1C-999F-31B049C3043A}" dt="2026-04-17T16:22:52.641" v="170" actId="478"/>
-          <ac:spMkLst>
-            <pc:docMk/>
-            <pc:sldMk cId="1693600945" sldId="256"/>
-            <ac:spMk id="10" creationId="{B7D928A1-0FD6-1C4F-5FB3-BEAB34219F66}"/>
-          </ac:spMkLst>
-        </pc:spChg>
-        <pc:spChg chg="add del mod">
-          <ac:chgData name="Ryosuke Ota" userId="ca473f5a-80a5-414f-8425-fd37d197ae63" providerId="ADAL" clId="{4AFA1E52-264A-4A1C-999F-31B049C3043A}" dt="2026-04-17T16:30:57.898" v="198" actId="478"/>
-          <ac:spMkLst>
-            <pc:docMk/>
-            <pc:sldMk cId="1693600945" sldId="256"/>
-            <ac:spMk id="11" creationId="{6E8CEFF9-CDA4-33D5-175B-72B816E8D345}"/>
-          </ac:spMkLst>
-        </pc:spChg>
-        <pc:spChg chg="add mod">
-          <ac:chgData name="Ryosuke Ota" userId="ca473f5a-80a5-414f-8425-fd37d197ae63" providerId="ADAL" clId="{4AFA1E52-264A-4A1C-999F-31B049C3043A}" dt="2026-04-17T16:19:03.911" v="145" actId="122"/>
-          <ac:spMkLst>
-            <pc:docMk/>
-            <pc:sldMk cId="1693600945" sldId="256"/>
-            <ac:spMk id="12" creationId="{C8377B36-C900-4C61-9F01-F3ABC86B0842}"/>
-          </ac:spMkLst>
-        </pc:spChg>
-        <pc:spChg chg="add mod">
-          <ac:chgData name="Ryosuke Ota" userId="ca473f5a-80a5-414f-8425-fd37d197ae63" providerId="ADAL" clId="{4AFA1E52-264A-4A1C-999F-31B049C3043A}" dt="2026-04-17T16:22:38.980" v="169" actId="115"/>
-          <ac:spMkLst>
-            <pc:docMk/>
-            <pc:sldMk cId="1693600945" sldId="256"/>
-            <ac:spMk id="13" creationId="{BF948996-04B9-5CFE-CE8F-132A62C29DFB}"/>
-          </ac:spMkLst>
-        </pc:spChg>
-        <pc:spChg chg="add mod">
-          <ac:chgData name="Ryosuke Ota" userId="ca473f5a-80a5-414f-8425-fd37d197ae63" providerId="ADAL" clId="{4AFA1E52-264A-4A1C-999F-31B049C3043A}" dt="2026-04-17T16:22:23.737" v="167" actId="1076"/>
-          <ac:spMkLst>
-            <pc:docMk/>
-            <pc:sldMk cId="1693600945" sldId="256"/>
-            <ac:spMk id="14" creationId="{620511F8-CEE0-42D1-95C3-9018ACAB45B3}"/>
-          </ac:spMkLst>
-        </pc:spChg>
-        <pc:spChg chg="add mod">
-          <ac:chgData name="Ryosuke Ota" userId="ca473f5a-80a5-414f-8425-fd37d197ae63" providerId="ADAL" clId="{4AFA1E52-264A-4A1C-999F-31B049C3043A}" dt="2026-04-17T16:24:15.558" v="185" actId="20577"/>
-          <ac:spMkLst>
-            <pc:docMk/>
-            <pc:sldMk cId="1693600945" sldId="256"/>
-            <ac:spMk id="15" creationId="{E51939C9-3D4D-6A42-4008-8FF46465248E}"/>
-          </ac:spMkLst>
-        </pc:spChg>
-        <pc:spChg chg="add del">
-          <ac:chgData name="Ryosuke Ota" userId="ca473f5a-80a5-414f-8425-fd37d197ae63" providerId="ADAL" clId="{4AFA1E52-264A-4A1C-999F-31B049C3043A}" dt="2026-04-17T16:29:53.884" v="192" actId="22"/>
-          <ac:spMkLst>
-            <pc:docMk/>
-            <pc:sldMk cId="1693600945" sldId="256"/>
-            <ac:spMk id="19" creationId="{A839395B-B693-FE12-9C8D-9E14C700EF0D}"/>
-          </ac:spMkLst>
-        </pc:spChg>
-        <pc:grpChg chg="add mod">
-          <ac:chgData name="Ryosuke Ota" userId="ca473f5a-80a5-414f-8425-fd37d197ae63" providerId="ADAL" clId="{4AFA1E52-264A-4A1C-999F-31B049C3043A}" dt="2026-04-17T16:05:50.769" v="101" actId="1076"/>
-          <ac:grpSpMkLst>
-            <pc:docMk/>
-            <pc:sldMk cId="1693600945" sldId="256"/>
-            <ac:grpSpMk id="4" creationId="{F25E1CD7-0F72-5501-8520-99FA4AF93EF5}"/>
-          </ac:grpSpMkLst>
-        </pc:grpChg>
-        <pc:picChg chg="mod">
-          <ac:chgData name="Ryosuke Ota" userId="ca473f5a-80a5-414f-8425-fd37d197ae63" providerId="ADAL" clId="{4AFA1E52-264A-4A1C-999F-31B049C3043A}" dt="2026-04-17T16:05:50.769" v="101" actId="1076"/>
-          <ac:picMkLst>
-            <pc:docMk/>
-            <pc:sldMk cId="1693600945" sldId="256"/>
-            <ac:picMk id="5" creationId="{0F760C0F-028C-41CE-DC1C-AC2E7487A3D5}"/>
-          </ac:picMkLst>
-        </pc:picChg>
-        <pc:picChg chg="mod">
-          <ac:chgData name="Ryosuke Ota" userId="ca473f5a-80a5-414f-8425-fd37d197ae63" providerId="ADAL" clId="{4AFA1E52-264A-4A1C-999F-31B049C3043A}" dt="2026-04-17T16:05:50.769" v="101" actId="1076"/>
-          <ac:picMkLst>
-            <pc:docMk/>
-            <pc:sldMk cId="1693600945" sldId="256"/>
-            <ac:picMk id="6" creationId="{F6F512B1-4D39-FA0B-B9DF-6E6CAC03A44B}"/>
-          </ac:picMkLst>
-        </pc:picChg>
-        <pc:picChg chg="add mod">
-          <ac:chgData name="Ryosuke Ota" userId="ca473f5a-80a5-414f-8425-fd37d197ae63" providerId="ADAL" clId="{4AFA1E52-264A-4A1C-999F-31B049C3043A}" dt="2026-04-17T16:07:30.561" v="104" actId="14100"/>
-          <ac:picMkLst>
-            <pc:docMk/>
-            <pc:sldMk cId="1693600945" sldId="256"/>
-            <ac:picMk id="8" creationId="{5CDD39D9-181F-93AE-2B23-86CF279B77FE}"/>
-          </ac:picMkLst>
-        </pc:picChg>
-        <pc:picChg chg="add del mod">
-          <ac:chgData name="Ryosuke Ota" userId="ca473f5a-80a5-414f-8425-fd37d197ae63" providerId="ADAL" clId="{4AFA1E52-264A-4A1C-999F-31B049C3043A}" dt="2026-04-17T16:28:25.575" v="190" actId="478"/>
-          <ac:picMkLst>
-            <pc:docMk/>
-            <pc:sldMk cId="1693600945" sldId="256"/>
-            <ac:picMk id="17" creationId="{8AEB1CC1-E0F5-5715-A91C-DBB67D2C9D3A}"/>
-          </ac:picMkLst>
-        </pc:picChg>
-      </pc:sldChg>
-      <pc:sldChg chg="addSp delSp modSp add del mod">
-        <pc:chgData name="Ryosuke Ota" userId="ca473f5a-80a5-414f-8425-fd37d197ae63" providerId="ADAL" clId="{4AFA1E52-264A-4A1C-999F-31B049C3043A}" dt="2026-04-17T17:48:05.147" v="500" actId="47"/>
-        <pc:sldMkLst>
-          <pc:docMk/>
-          <pc:sldMk cId="1994438483" sldId="257"/>
-        </pc:sldMkLst>
-        <pc:spChg chg="mod">
-          <ac:chgData name="Ryosuke Ota" userId="ca473f5a-80a5-414f-8425-fd37d197ae63" providerId="ADAL" clId="{4AFA1E52-264A-4A1C-999F-31B049C3043A}" dt="2026-04-17T17:07:06.470" v="355" actId="1076"/>
-          <ac:spMkLst>
-            <pc:docMk/>
-            <pc:sldMk cId="1994438483" sldId="257"/>
-            <ac:spMk id="2" creationId="{2AAD8222-D234-539B-BAF9-381DCC0310CF}"/>
-          </ac:spMkLst>
-        </pc:spChg>
-        <pc:spChg chg="add del mod">
-          <ac:chgData name="Ryosuke Ota" userId="ca473f5a-80a5-414f-8425-fd37d197ae63" providerId="ADAL" clId="{4AFA1E52-264A-4A1C-999F-31B049C3043A}" dt="2026-04-17T16:40:48.242" v="248" actId="478"/>
-          <ac:spMkLst>
-            <pc:docMk/>
-            <pc:sldMk cId="1994438483" sldId="257"/>
-            <ac:spMk id="9" creationId="{2CCE9948-8453-68F3-6311-8BE37B196E97}"/>
-          </ac:spMkLst>
-        </pc:spChg>
-        <pc:spChg chg="add mod">
-          <ac:chgData name="Ryosuke Ota" userId="ca473f5a-80a5-414f-8425-fd37d197ae63" providerId="ADAL" clId="{4AFA1E52-264A-4A1C-999F-31B049C3043A}" dt="2026-04-17T17:07:06.470" v="355" actId="1076"/>
-          <ac:spMkLst>
-            <pc:docMk/>
-            <pc:sldMk cId="1994438483" sldId="257"/>
-            <ac:spMk id="10" creationId="{92CB2225-075B-9C05-7161-966E92FE4D92}"/>
-          </ac:spMkLst>
-        </pc:spChg>
-        <pc:spChg chg="del">
-          <ac:chgData name="Ryosuke Ota" userId="ca473f5a-80a5-414f-8425-fd37d197ae63" providerId="ADAL" clId="{4AFA1E52-264A-4A1C-999F-31B049C3043A}" dt="2026-04-17T16:30:55.030" v="197" actId="478"/>
-          <ac:spMkLst>
-            <pc:docMk/>
-            <pc:sldMk cId="1994438483" sldId="257"/>
-            <ac:spMk id="11" creationId="{2B6A1437-56B0-724A-1D89-9AE382018AA8}"/>
-          </ac:spMkLst>
-        </pc:spChg>
-        <pc:spChg chg="mod">
-          <ac:chgData name="Ryosuke Ota" userId="ca473f5a-80a5-414f-8425-fd37d197ae63" providerId="ADAL" clId="{4AFA1E52-264A-4A1C-999F-31B049C3043A}" dt="2026-04-17T17:07:06.470" v="355" actId="1076"/>
-          <ac:spMkLst>
-            <pc:docMk/>
-            <pc:sldMk cId="1994438483" sldId="257"/>
-            <ac:spMk id="12" creationId="{49EEE9FA-DD2B-AB06-BF41-85FB3E39896E}"/>
-          </ac:spMkLst>
-        </pc:spChg>
-        <pc:spChg chg="mod">
-          <ac:chgData name="Ryosuke Ota" userId="ca473f5a-80a5-414f-8425-fd37d197ae63" providerId="ADAL" clId="{4AFA1E52-264A-4A1C-999F-31B049C3043A}" dt="2026-04-17T17:07:06.470" v="355" actId="1076"/>
-          <ac:spMkLst>
-            <pc:docMk/>
-            <pc:sldMk cId="1994438483" sldId="257"/>
-            <ac:spMk id="13" creationId="{03812423-9EC0-6655-B946-0375A502DF60}"/>
-          </ac:spMkLst>
-        </pc:spChg>
-        <pc:spChg chg="mod">
-          <ac:chgData name="Ryosuke Ota" userId="ca473f5a-80a5-414f-8425-fd37d197ae63" providerId="ADAL" clId="{4AFA1E52-264A-4A1C-999F-31B049C3043A}" dt="2026-04-17T17:07:06.470" v="355" actId="1076"/>
-          <ac:spMkLst>
-            <pc:docMk/>
-            <pc:sldMk cId="1994438483" sldId="257"/>
-            <ac:spMk id="14" creationId="{5437541B-C5FA-2FBB-2E4C-13C42FA408DC}"/>
-          </ac:spMkLst>
-        </pc:spChg>
-        <pc:spChg chg="del mod">
-          <ac:chgData name="Ryosuke Ota" userId="ca473f5a-80a5-414f-8425-fd37d197ae63" providerId="ADAL" clId="{4AFA1E52-264A-4A1C-999F-31B049C3043A}" dt="2026-04-17T16:42:16.704" v="257" actId="478"/>
-          <ac:spMkLst>
-            <pc:docMk/>
-            <pc:sldMk cId="1994438483" sldId="257"/>
-            <ac:spMk id="15" creationId="{669F009B-C776-351E-9282-EC5E11F524F5}"/>
-          </ac:spMkLst>
-        </pc:spChg>
-        <pc:grpChg chg="mod">
-          <ac:chgData name="Ryosuke Ota" userId="ca473f5a-80a5-414f-8425-fd37d197ae63" providerId="ADAL" clId="{4AFA1E52-264A-4A1C-999F-31B049C3043A}" dt="2026-04-17T17:07:00.499" v="354" actId="1076"/>
-          <ac:grpSpMkLst>
-            <pc:docMk/>
-            <pc:sldMk cId="1994438483" sldId="257"/>
-            <ac:grpSpMk id="4" creationId="{7EFC83FC-D487-6092-EA07-4237BAF9D089}"/>
-          </ac:grpSpMkLst>
-        </pc:grpChg>
-        <pc:picChg chg="mod">
-          <ac:chgData name="Ryosuke Ota" userId="ca473f5a-80a5-414f-8425-fd37d197ae63" providerId="ADAL" clId="{4AFA1E52-264A-4A1C-999F-31B049C3043A}" dt="2026-04-17T17:07:00.499" v="354" actId="1076"/>
-          <ac:picMkLst>
-            <pc:docMk/>
-            <pc:sldMk cId="1994438483" sldId="257"/>
-            <ac:picMk id="5" creationId="{DC857F39-3CD6-56A0-8D50-61A44415C9A5}"/>
-          </ac:picMkLst>
-        </pc:picChg>
-        <pc:picChg chg="mod">
-          <ac:chgData name="Ryosuke Ota" userId="ca473f5a-80a5-414f-8425-fd37d197ae63" providerId="ADAL" clId="{4AFA1E52-264A-4A1C-999F-31B049C3043A}" dt="2026-04-17T17:07:00.499" v="354" actId="1076"/>
-          <ac:picMkLst>
-            <pc:docMk/>
-            <pc:sldMk cId="1994438483" sldId="257"/>
-            <ac:picMk id="6" creationId="{D6DF8E56-1B40-4DB3-DE63-1EDBA5979838}"/>
-          </ac:picMkLst>
-        </pc:picChg>
-        <pc:picChg chg="add mod ord">
-          <ac:chgData name="Ryosuke Ota" userId="ca473f5a-80a5-414f-8425-fd37d197ae63" providerId="ADAL" clId="{4AFA1E52-264A-4A1C-999F-31B049C3043A}" dt="2026-04-17T17:06:38.905" v="349" actId="1076"/>
-          <ac:picMkLst>
-            <pc:docMk/>
-            <pc:sldMk cId="1994438483" sldId="257"/>
-            <ac:picMk id="7" creationId="{7FFE57F4-3787-BE41-7114-9D2F0A2BD619}"/>
-          </ac:picMkLst>
-        </pc:picChg>
-        <pc:picChg chg="del mod">
-          <ac:chgData name="Ryosuke Ota" userId="ca473f5a-80a5-414f-8425-fd37d197ae63" providerId="ADAL" clId="{4AFA1E52-264A-4A1C-999F-31B049C3043A}" dt="2026-04-17T16:31:32.542" v="204" actId="478"/>
-          <ac:picMkLst>
-            <pc:docMk/>
-            <pc:sldMk cId="1994438483" sldId="257"/>
-            <ac:picMk id="8" creationId="{9B3F4D43-960F-1F55-DB2A-D1287B12E402}"/>
-          </ac:picMkLst>
-        </pc:picChg>
-      </pc:sldChg>
-      <pc:sldChg chg="addSp delSp modSp new mod ord">
-        <pc:chgData name="Ryosuke Ota" userId="ca473f5a-80a5-414f-8425-fd37d197ae63" providerId="ADAL" clId="{4AFA1E52-264A-4A1C-999F-31B049C3043A}" dt="2026-04-18T02:53:02.216" v="720" actId="113"/>
-        <pc:sldMkLst>
-          <pc:docMk/>
-          <pc:sldMk cId="1943583278" sldId="258"/>
-        </pc:sldMkLst>
-        <pc:spChg chg="add mod">
-          <ac:chgData name="Ryosuke Ota" userId="ca473f5a-80a5-414f-8425-fd37d197ae63" providerId="ADAL" clId="{4AFA1E52-264A-4A1C-999F-31B049C3043A}" dt="2026-04-17T17:43:45.109" v="490" actId="207"/>
-          <ac:spMkLst>
-            <pc:docMk/>
-            <pc:sldMk cId="1943583278" sldId="258"/>
-            <ac:spMk id="5" creationId="{E67A1927-5ED9-C968-3604-3AFF64F43D34}"/>
-          </ac:spMkLst>
-        </pc:spChg>
-        <pc:spChg chg="add mod">
-          <ac:chgData name="Ryosuke Ota" userId="ca473f5a-80a5-414f-8425-fd37d197ae63" providerId="ADAL" clId="{4AFA1E52-264A-4A1C-999F-31B049C3043A}" dt="2026-04-18T02:53:02.216" v="720" actId="113"/>
-          <ac:spMkLst>
-            <pc:docMk/>
-            <pc:sldMk cId="1943583278" sldId="258"/>
-            <ac:spMk id="6" creationId="{56662CAC-D349-2142-F453-9F5A521D14F4}"/>
-          </ac:spMkLst>
-        </pc:spChg>
-        <pc:spChg chg="add mod">
-          <ac:chgData name="Ryosuke Ota" userId="ca473f5a-80a5-414f-8425-fd37d197ae63" providerId="ADAL" clId="{4AFA1E52-264A-4A1C-999F-31B049C3043A}" dt="2026-04-17T17:44:41.411" v="491" actId="1076"/>
-          <ac:spMkLst>
-            <pc:docMk/>
-            <pc:sldMk cId="1943583278" sldId="258"/>
-            <ac:spMk id="7" creationId="{78E3ECC0-BBA4-0A3C-1B66-22355F13B227}"/>
-          </ac:spMkLst>
-        </pc:spChg>
-        <pc:spChg chg="add mod">
-          <ac:chgData name="Ryosuke Ota" userId="ca473f5a-80a5-414f-8425-fd37d197ae63" providerId="ADAL" clId="{4AFA1E52-264A-4A1C-999F-31B049C3043A}" dt="2026-04-17T17:44:41.411" v="491" actId="1076"/>
-          <ac:spMkLst>
-            <pc:docMk/>
-            <pc:sldMk cId="1943583278" sldId="258"/>
-            <ac:spMk id="8" creationId="{DD81EC1E-DE77-AADC-918A-E724DCEA8991}"/>
-          </ac:spMkLst>
-        </pc:spChg>
-        <pc:spChg chg="add del mod">
-          <ac:chgData name="Ryosuke Ota" userId="ca473f5a-80a5-414f-8425-fd37d197ae63" providerId="ADAL" clId="{4AFA1E52-264A-4A1C-999F-31B049C3043A}" dt="2026-04-17T17:37:17.435" v="456" actId="21"/>
-          <ac:spMkLst>
-            <pc:docMk/>
-            <pc:sldMk cId="1943583278" sldId="258"/>
-            <ac:spMk id="9" creationId="{564E0F1D-22D7-66B7-9445-5D9FBAC8DA38}"/>
-          </ac:spMkLst>
-        </pc:spChg>
-        <pc:spChg chg="add mod">
-          <ac:chgData name="Ryosuke Ota" userId="ca473f5a-80a5-414f-8425-fd37d197ae63" providerId="ADAL" clId="{4AFA1E52-264A-4A1C-999F-31B049C3043A}" dt="2026-04-18T02:45:14.466" v="707" actId="1076"/>
-          <ac:spMkLst>
-            <pc:docMk/>
-            <pc:sldMk cId="1943583278" sldId="258"/>
-            <ac:spMk id="9" creationId="{B2D3CF20-2F9C-D546-E547-E1B899E99AA4}"/>
-          </ac:spMkLst>
-        </pc:spChg>
-        <pc:spChg chg="add mod">
-          <ac:chgData name="Ryosuke Ota" userId="ca473f5a-80a5-414f-8425-fd37d197ae63" providerId="ADAL" clId="{4AFA1E52-264A-4A1C-999F-31B049C3043A}" dt="2026-04-18T02:45:14.466" v="707" actId="1076"/>
-          <ac:spMkLst>
-            <pc:docMk/>
-            <pc:sldMk cId="1943583278" sldId="258"/>
-            <ac:spMk id="10" creationId="{5BF23702-473C-3911-2897-C13722E028B4}"/>
-          </ac:spMkLst>
-        </pc:spChg>
-        <pc:spChg chg="add del mod">
-          <ac:chgData name="Ryosuke Ota" userId="ca473f5a-80a5-414f-8425-fd37d197ae63" providerId="ADAL" clId="{4AFA1E52-264A-4A1C-999F-31B049C3043A}" dt="2026-04-17T17:27:04.571" v="407" actId="11529"/>
-          <ac:spMkLst>
-            <pc:docMk/>
-            <pc:sldMk cId="1943583278" sldId="258"/>
-            <ac:spMk id="12" creationId="{83110A58-1DB9-F2D3-F375-014DC0A1845D}"/>
-          </ac:spMkLst>
-        </pc:spChg>
-        <pc:spChg chg="add del mod">
-          <ac:chgData name="Ryosuke Ota" userId="ca473f5a-80a5-414f-8425-fd37d197ae63" providerId="ADAL" clId="{4AFA1E52-264A-4A1C-999F-31B049C3043A}" dt="2026-04-17T17:37:24.510" v="459" actId="478"/>
-          <ac:spMkLst>
-            <pc:docMk/>
-            <pc:sldMk cId="1943583278" sldId="258"/>
-            <ac:spMk id="13" creationId="{2837F4D0-964D-AAF1-50E3-C74D10190401}"/>
-          </ac:spMkLst>
-        </pc:spChg>
-        <pc:spChg chg="add del mod">
-          <ac:chgData name="Ryosuke Ota" userId="ca473f5a-80a5-414f-8425-fd37d197ae63" providerId="ADAL" clId="{4AFA1E52-264A-4A1C-999F-31B049C3043A}" dt="2026-04-17T18:22:53.218" v="548" actId="478"/>
-          <ac:spMkLst>
-            <pc:docMk/>
-            <pc:sldMk cId="1943583278" sldId="258"/>
-            <ac:spMk id="14" creationId="{79460007-9E02-9560-FD2D-D82B36582721}"/>
-          </ac:spMkLst>
-        </pc:spChg>
-        <pc:spChg chg="add del">
-          <ac:chgData name="Ryosuke Ota" userId="ca473f5a-80a5-414f-8425-fd37d197ae63" providerId="ADAL" clId="{4AFA1E52-264A-4A1C-999F-31B049C3043A}" dt="2026-04-17T17:37:04.064" v="453" actId="22"/>
-          <ac:spMkLst>
-            <pc:docMk/>
-            <pc:sldMk cId="1943583278" sldId="258"/>
-            <ac:spMk id="16" creationId="{BC0B3313-6810-4533-074F-63D0831D4A7F}"/>
-          </ac:spMkLst>
-        </pc:spChg>
-        <pc:spChg chg="add mod">
-          <ac:chgData name="Ryosuke Ota" userId="ca473f5a-80a5-414f-8425-fd37d197ae63" providerId="ADAL" clId="{4AFA1E52-264A-4A1C-999F-31B049C3043A}" dt="2026-04-17T17:45:18.111" v="493" actId="1076"/>
-          <ac:spMkLst>
-            <pc:docMk/>
-            <pc:sldMk cId="1943583278" sldId="258"/>
-            <ac:spMk id="17" creationId="{564E0F1D-22D7-66B7-9445-5D9FBAC8DA38}"/>
-          </ac:spMkLst>
-        </pc:spChg>
-        <pc:spChg chg="add del mod">
-          <ac:chgData name="Ryosuke Ota" userId="ca473f5a-80a5-414f-8425-fd37d197ae63" providerId="ADAL" clId="{4AFA1E52-264A-4A1C-999F-31B049C3043A}" dt="2026-04-17T17:40:26.962" v="484" actId="478"/>
-          <ac:spMkLst>
-            <pc:docMk/>
-            <pc:sldMk cId="1943583278" sldId="258"/>
-            <ac:spMk id="18" creationId="{5191F737-3BED-7928-3B57-42315B0B0588}"/>
-          </ac:spMkLst>
-        </pc:spChg>
-        <pc:spChg chg="add del mod">
-          <ac:chgData name="Ryosuke Ota" userId="ca473f5a-80a5-414f-8425-fd37d197ae63" providerId="ADAL" clId="{4AFA1E52-264A-4A1C-999F-31B049C3043A}" dt="2026-04-17T18:21:56.218" v="503" actId="478"/>
-          <ac:spMkLst>
-            <pc:docMk/>
-            <pc:sldMk cId="1943583278" sldId="258"/>
-            <ac:spMk id="19" creationId="{431DCC95-FF44-5516-6EA5-9AB2D0667F10}"/>
-          </ac:spMkLst>
-        </pc:spChg>
-        <pc:grpChg chg="add del mod">
-          <ac:chgData name="Ryosuke Ota" userId="ca473f5a-80a5-414f-8425-fd37d197ae63" providerId="ADAL" clId="{4AFA1E52-264A-4A1C-999F-31B049C3043A}" dt="2026-04-18T02:45:47.188" v="710" actId="478"/>
-          <ac:grpSpMkLst>
-            <pc:docMk/>
-            <pc:sldMk cId="1943583278" sldId="258"/>
-            <ac:grpSpMk id="2" creationId="{709FFCA0-AE71-44F2-5D37-D0EFE135DE14}"/>
-          </ac:grpSpMkLst>
-        </pc:grpChg>
-        <pc:picChg chg="mod">
-          <ac:chgData name="Ryosuke Ota" userId="ca473f5a-80a5-414f-8425-fd37d197ae63" providerId="ADAL" clId="{4AFA1E52-264A-4A1C-999F-31B049C3043A}" dt="2026-04-18T02:45:46.499" v="709" actId="1076"/>
-          <ac:picMkLst>
-            <pc:docMk/>
-            <pc:sldMk cId="1943583278" sldId="258"/>
-            <ac:picMk id="3" creationId="{2F648A8A-D8ED-094D-008A-12A2035FB652}"/>
-          </ac:picMkLst>
-        </pc:picChg>
-        <pc:picChg chg="mod">
-          <ac:chgData name="Ryosuke Ota" userId="ca473f5a-80a5-414f-8425-fd37d197ae63" providerId="ADAL" clId="{4AFA1E52-264A-4A1C-999F-31B049C3043A}" dt="2026-04-18T02:45:46.499" v="709" actId="1076"/>
-          <ac:picMkLst>
-            <pc:docMk/>
-            <pc:sldMk cId="1943583278" sldId="258"/>
-            <ac:picMk id="4" creationId="{F51C04D5-359F-4DB1-BB4D-8C2A282C66D0}"/>
-          </ac:picMkLst>
-        </pc:picChg>
-        <pc:picChg chg="add del mod modCrop">
-          <ac:chgData name="Ryosuke Ota" userId="ca473f5a-80a5-414f-8425-fd37d197ae63" providerId="ADAL" clId="{4AFA1E52-264A-4A1C-999F-31B049C3043A}" dt="2026-04-17T17:02:23.992" v="315" actId="478"/>
-          <ac:picMkLst>
-            <pc:docMk/>
-            <pc:sldMk cId="1943583278" sldId="258"/>
-            <ac:picMk id="11" creationId="{9AFFE6BD-1D16-FF6F-8419-632F54371378}"/>
-          </ac:picMkLst>
-        </pc:picChg>
-        <pc:cxnChg chg="add mod">
-          <ac:chgData name="Ryosuke Ota" userId="ca473f5a-80a5-414f-8425-fd37d197ae63" providerId="ADAL" clId="{4AFA1E52-264A-4A1C-999F-31B049C3043A}" dt="2026-04-18T02:45:14.466" v="707" actId="1076"/>
-          <ac:cxnSpMkLst>
-            <pc:docMk/>
-            <pc:sldMk cId="1943583278" sldId="258"/>
-            <ac:cxnSpMk id="12" creationId="{2C66B1EB-328D-334F-EB12-DF8F390E4905}"/>
-          </ac:cxnSpMkLst>
-        </pc:cxnChg>
-        <pc:cxnChg chg="add del mod">
-          <ac:chgData name="Ryosuke Ota" userId="ca473f5a-80a5-414f-8425-fd37d197ae63" providerId="ADAL" clId="{4AFA1E52-264A-4A1C-999F-31B049C3043A}" dt="2026-04-17T18:24:05.518" v="551" actId="478"/>
-          <ac:cxnSpMkLst>
-            <pc:docMk/>
-            <pc:sldMk cId="1943583278" sldId="258"/>
-            <ac:cxnSpMk id="21" creationId="{967314FC-AFCA-D49F-8D1A-79EAB187EAB1}"/>
-          </ac:cxnSpMkLst>
-        </pc:cxnChg>
-      </pc:sldChg>
-      <pc:sldChg chg="modSp add del mod">
-        <pc:chgData name="Ryosuke Ota" userId="ca473f5a-80a5-414f-8425-fd37d197ae63" providerId="ADAL" clId="{4AFA1E52-264A-4A1C-999F-31B049C3043A}" dt="2026-04-17T17:19:42.672" v="369" actId="47"/>
-        <pc:sldMkLst>
-          <pc:docMk/>
-          <pc:sldMk cId="215649814" sldId="259"/>
-        </pc:sldMkLst>
-        <pc:spChg chg="mod">
-          <ac:chgData name="Ryosuke Ota" userId="ca473f5a-80a5-414f-8425-fd37d197ae63" providerId="ADAL" clId="{4AFA1E52-264A-4A1C-999F-31B049C3043A}" dt="2026-04-17T17:06:01.704" v="342" actId="12788"/>
-          <ac:spMkLst>
-            <pc:docMk/>
-            <pc:sldMk cId="215649814" sldId="259"/>
-            <ac:spMk id="5" creationId="{C30E4651-5100-06BF-48D9-5F0B5F503CF0}"/>
-          </ac:spMkLst>
-        </pc:spChg>
-        <pc:spChg chg="mod">
-          <ac:chgData name="Ryosuke Ota" userId="ca473f5a-80a5-414f-8425-fd37d197ae63" providerId="ADAL" clId="{4AFA1E52-264A-4A1C-999F-31B049C3043A}" dt="2026-04-17T17:06:01.704" v="342" actId="12788"/>
-          <ac:spMkLst>
-            <pc:docMk/>
-            <pc:sldMk cId="215649814" sldId="259"/>
-            <ac:spMk id="6" creationId="{0C5F7D23-BE18-007E-B4E7-56DBA02378DC}"/>
-          </ac:spMkLst>
-        </pc:spChg>
-        <pc:spChg chg="mod">
-          <ac:chgData name="Ryosuke Ota" userId="ca473f5a-80a5-414f-8425-fd37d197ae63" providerId="ADAL" clId="{4AFA1E52-264A-4A1C-999F-31B049C3043A}" dt="2026-04-17T17:06:01.704" v="342" actId="12788"/>
-          <ac:spMkLst>
-            <pc:docMk/>
-            <pc:sldMk cId="215649814" sldId="259"/>
-            <ac:spMk id="7" creationId="{EB228A17-4173-02D3-3664-1DF5B6D53964}"/>
-          </ac:spMkLst>
-        </pc:spChg>
-        <pc:spChg chg="mod">
-          <ac:chgData name="Ryosuke Ota" userId="ca473f5a-80a5-414f-8425-fd37d197ae63" providerId="ADAL" clId="{4AFA1E52-264A-4A1C-999F-31B049C3043A}" dt="2026-04-17T17:06:01.704" v="342" actId="12788"/>
-          <ac:spMkLst>
-            <pc:docMk/>
-            <pc:sldMk cId="215649814" sldId="259"/>
-            <ac:spMk id="8" creationId="{E3B52670-4380-C0D0-410A-C10577387586}"/>
-          </ac:spMkLst>
-        </pc:spChg>
-        <pc:spChg chg="mod">
-          <ac:chgData name="Ryosuke Ota" userId="ca473f5a-80a5-414f-8425-fd37d197ae63" providerId="ADAL" clId="{4AFA1E52-264A-4A1C-999F-31B049C3043A}" dt="2026-04-17T17:09:20.404" v="357" actId="1076"/>
-          <ac:spMkLst>
-            <pc:docMk/>
-            <pc:sldMk cId="215649814" sldId="259"/>
-            <ac:spMk id="9" creationId="{E775B7C1-ED2A-CFD5-F2C6-513603E0779E}"/>
-          </ac:spMkLst>
-        </pc:spChg>
-        <pc:grpChg chg="mod">
-          <ac:chgData name="Ryosuke Ota" userId="ca473f5a-80a5-414f-8425-fd37d197ae63" providerId="ADAL" clId="{4AFA1E52-264A-4A1C-999F-31B049C3043A}" dt="2026-04-17T17:06:01.704" v="342" actId="12788"/>
-          <ac:grpSpMkLst>
-            <pc:docMk/>
-            <pc:sldMk cId="215649814" sldId="259"/>
-            <ac:grpSpMk id="2" creationId="{8A88A3EA-45DF-8EEA-E196-BBD87AB5DE89}"/>
-          </ac:grpSpMkLst>
-        </pc:grpChg>
-        <pc:picChg chg="mod">
-          <ac:chgData name="Ryosuke Ota" userId="ca473f5a-80a5-414f-8425-fd37d197ae63" providerId="ADAL" clId="{4AFA1E52-264A-4A1C-999F-31B049C3043A}" dt="2026-04-17T17:06:01.704" v="342" actId="12788"/>
-          <ac:picMkLst>
-            <pc:docMk/>
-            <pc:sldMk cId="215649814" sldId="259"/>
-            <ac:picMk id="3" creationId="{52557C1A-9A2A-A798-A378-8BCD5ACD7208}"/>
-          </ac:picMkLst>
-        </pc:picChg>
-        <pc:picChg chg="mod">
-          <ac:chgData name="Ryosuke Ota" userId="ca473f5a-80a5-414f-8425-fd37d197ae63" providerId="ADAL" clId="{4AFA1E52-264A-4A1C-999F-31B049C3043A}" dt="2026-04-17T17:06:01.704" v="342" actId="12788"/>
-          <ac:picMkLst>
-            <pc:docMk/>
-            <pc:sldMk cId="215649814" sldId="259"/>
-            <ac:picMk id="4" creationId="{C7036C10-90D0-8D6F-853A-1481F6489B2B}"/>
-          </ac:picMkLst>
-        </pc:picChg>
-      </pc:sldChg>
-      <pc:sldMasterChg chg="addSp modSp modSldLayout">
-        <pc:chgData name="Ryosuke Ota" userId="ca473f5a-80a5-414f-8425-fd37d197ae63" providerId="ADAL" clId="{4AFA1E52-264A-4A1C-999F-31B049C3043A}" dt="2026-04-18T02:45:42.475" v="708"/>
-        <pc:sldMasterMkLst>
-          <pc:docMk/>
-          <pc:sldMasterMk cId="2851995670" sldId="2147483660"/>
-        </pc:sldMasterMkLst>
-        <pc:spChg chg="add mod">
-          <ac:chgData name="Ryosuke Ota" userId="ca473f5a-80a5-414f-8425-fd37d197ae63" providerId="ADAL" clId="{4AFA1E52-264A-4A1C-999F-31B049C3043A}" dt="2026-04-17T17:46:06.580" v="497"/>
-          <ac:spMkLst>
-            <pc:docMk/>
-            <pc:sldMasterMk cId="2851995670" sldId="2147483660"/>
-            <ac:spMk id="7" creationId="{6F9A0556-18A2-390B-EDE8-E8C565A8D973}"/>
-          </ac:spMkLst>
-        </pc:spChg>
-        <pc:grpChg chg="add mod">
-          <ac:chgData name="Ryosuke Ota" userId="ca473f5a-80a5-414f-8425-fd37d197ae63" providerId="ADAL" clId="{4AFA1E52-264A-4A1C-999F-31B049C3043A}" dt="2026-04-18T02:45:42.475" v="708"/>
-          <ac:grpSpMkLst>
-            <pc:docMk/>
-            <pc:sldMasterMk cId="2851995670" sldId="2147483660"/>
-            <ac:grpSpMk id="8" creationId="{9A8B4C24-D74B-8AAF-4E05-75A68FB1BF1F}"/>
-          </ac:grpSpMkLst>
-        </pc:grpChg>
-        <pc:picChg chg="mod">
-          <ac:chgData name="Ryosuke Ota" userId="ca473f5a-80a5-414f-8425-fd37d197ae63" providerId="ADAL" clId="{4AFA1E52-264A-4A1C-999F-31B049C3043A}" dt="2026-04-18T02:45:42.475" v="708"/>
-          <ac:picMkLst>
-            <pc:docMk/>
-            <pc:sldMasterMk cId="2851995670" sldId="2147483660"/>
-            <ac:picMk id="9" creationId="{49450B0A-2544-E768-6798-7C5F8A1A0DE7}"/>
-          </ac:picMkLst>
-        </pc:picChg>
-        <pc:picChg chg="mod">
-          <ac:chgData name="Ryosuke Ota" userId="ca473f5a-80a5-414f-8425-fd37d197ae63" providerId="ADAL" clId="{4AFA1E52-264A-4A1C-999F-31B049C3043A}" dt="2026-04-18T02:45:42.475" v="708"/>
-          <ac:picMkLst>
-            <pc:docMk/>
-            <pc:sldMasterMk cId="2851995670" sldId="2147483660"/>
-            <ac:picMk id="10" creationId="{21BA35D7-873F-4C67-F471-4B420CA6B219}"/>
-          </ac:picMkLst>
-        </pc:picChg>
-        <pc:sldLayoutChg chg="addSp delSp modSp mod">
-          <pc:chgData name="Ryosuke Ota" userId="ca473f5a-80a5-414f-8425-fd37d197ae63" providerId="ADAL" clId="{4AFA1E52-264A-4A1C-999F-31B049C3043A}" dt="2026-04-17T17:46:10.912" v="499" actId="478"/>
-          <pc:sldLayoutMkLst>
-            <pc:docMk/>
-            <pc:sldMasterMk cId="2851995670" sldId="2147483660"/>
-            <pc:sldLayoutMk cId="2048206457" sldId="2147483661"/>
-          </pc:sldLayoutMkLst>
-          <pc:spChg chg="add del mod">
-            <ac:chgData name="Ryosuke Ota" userId="ca473f5a-80a5-414f-8425-fd37d197ae63" providerId="ADAL" clId="{4AFA1E52-264A-4A1C-999F-31B049C3043A}" dt="2026-04-17T17:46:10.912" v="499" actId="478"/>
-            <ac:spMkLst>
-              <pc:docMk/>
-              <pc:sldMasterMk cId="2851995670" sldId="2147483660"/>
-              <pc:sldLayoutMk cId="2048206457" sldId="2147483661"/>
-              <ac:spMk id="7" creationId="{BC945584-6BA0-E2BE-F747-3343C9E5A05D}"/>
-            </ac:spMkLst>
-          </pc:spChg>
-        </pc:sldLayoutChg>
-      </pc:sldMasterChg>
-    </pc:docChg>
-  </pc:docChgLst>
-</pc:chgInfo>
+<file path=ppt/notesMasters/notesMaster1.xml><?xml version="1.0" encoding="utf-8"?>
+<p:notesMaster xmlns:a="http://schemas.openxmlformats.org/drawingml/2006/main" xmlns:r="http://schemas.openxmlformats.org/officeDocument/2006/relationships" xmlns:p="http://schemas.openxmlformats.org/presentationml/2006/main">
+  <p:cSld>
+    <p:bg>
+      <p:bgRef idx="1001">
+        <a:schemeClr val="bg1"/>
+      </p:bgRef>
+    </p:bg>
+    <p:spTree>
+      <p:nvGrpSpPr>
+        <p:cNvPr id="1" name=""/>
+        <p:cNvGrpSpPr/>
+        <p:nvPr/>
+      </p:nvGrpSpPr>
+      <p:grpSpPr>
+        <a:xfrm>
+          <a:off x="0" y="0"/>
+          <a:ext cx="0" cy="0"/>
+          <a:chOff x="0" y="0"/>
+          <a:chExt cx="0" cy="0"/>
+        </a:xfrm>
+      </p:grpSpPr>
+      <p:sp>
+        <p:nvSpPr>
+          <p:cNvPr id="2" name="Header Placeholder 1"/>
+          <p:cNvSpPr>
+            <a:spLocks noGrp="1"/>
+          </p:cNvSpPr>
+          <p:nvPr>
+            <p:ph type="hdr" sz="quarter"/>
+          </p:nvPr>
+        </p:nvSpPr>
+        <p:spPr>
+          <a:xfrm>
+            <a:off x="0" y="0"/>
+            <a:ext cx="2971800" cy="458788"/>
+          </a:xfrm>
+          <a:prstGeom prst="rect">
+            <a:avLst/>
+          </a:prstGeom>
+        </p:spPr>
+        <p:txBody>
+          <a:bodyPr vert="horz" lIns="91440" tIns="45720" rIns="91440" bIns="45720" rtlCol="0"/>
+          <a:lstStyle>
+            <a:lvl1pPr algn="l">
+              <a:defRPr sz="1200"/>
+            </a:lvl1pPr>
+          </a:lstStyle>
+          <a:p>
+            <a:endParaRPr lang="sv-SE"/>
+          </a:p>
+        </p:txBody>
+      </p:sp>
+      <p:sp>
+        <p:nvSpPr>
+          <p:cNvPr id="3" name="Date Placeholder 2"/>
+          <p:cNvSpPr>
+            <a:spLocks noGrp="1"/>
+          </p:cNvSpPr>
+          <p:nvPr>
+            <p:ph type="dt" idx="1"/>
+          </p:nvPr>
+        </p:nvSpPr>
+        <p:spPr>
+          <a:xfrm>
+            <a:off x="3884613" y="0"/>
+            <a:ext cx="2971800" cy="458788"/>
+          </a:xfrm>
+          <a:prstGeom prst="rect">
+            <a:avLst/>
+          </a:prstGeom>
+        </p:spPr>
+        <p:txBody>
+          <a:bodyPr vert="horz" lIns="91440" tIns="45720" rIns="91440" bIns="45720" rtlCol="0"/>
+          <a:lstStyle>
+            <a:lvl1pPr algn="r">
+              <a:defRPr sz="1200"/>
+            </a:lvl1pPr>
+          </a:lstStyle>
+          <a:p>
+            <a:fld id="{9DBE3027-0DE6-46AD-89E3-00AA5A272244}" type="datetimeFigureOut">
+              <a:rPr lang="sv-SE" smtClean="0"/>
+              <a:t>2026-05-18</a:t>
+            </a:fld>
+            <a:endParaRPr lang="sv-SE"/>
+          </a:p>
+        </p:txBody>
+      </p:sp>
+      <p:sp>
+        <p:nvSpPr>
+          <p:cNvPr id="4" name="Slide Image Placeholder 3"/>
+          <p:cNvSpPr>
+            <a:spLocks noGrp="1" noRot="1" noChangeAspect="1"/>
+          </p:cNvSpPr>
+          <p:nvPr>
+            <p:ph type="sldImg" idx="2"/>
+          </p:nvPr>
+        </p:nvSpPr>
+        <p:spPr>
+          <a:xfrm>
+            <a:off x="2338388" y="1143000"/>
+            <a:ext cx="2181225" cy="3086100"/>
+          </a:xfrm>
+          <a:prstGeom prst="rect">
+            <a:avLst/>
+          </a:prstGeom>
+          <a:noFill/>
+          <a:ln w="12700">
+            <a:solidFill>
+              <a:prstClr val="black"/>
+            </a:solidFill>
+          </a:ln>
+        </p:spPr>
+        <p:txBody>
+          <a:bodyPr vert="horz" lIns="91440" tIns="45720" rIns="91440" bIns="45720" rtlCol="0" anchor="ctr"/>
+          <a:lstStyle/>
+          <a:p>
+            <a:endParaRPr lang="sv-SE"/>
+          </a:p>
+        </p:txBody>
+      </p:sp>
+      <p:sp>
+        <p:nvSpPr>
+          <p:cNvPr id="5" name="Notes Placeholder 4"/>
+          <p:cNvSpPr>
+            <a:spLocks noGrp="1"/>
+          </p:cNvSpPr>
+          <p:nvPr>
+            <p:ph type="body" sz="quarter" idx="3"/>
+          </p:nvPr>
+        </p:nvSpPr>
+        <p:spPr>
+          <a:xfrm>
+            <a:off x="685800" y="4400550"/>
+            <a:ext cx="5486400" cy="3600450"/>
+          </a:xfrm>
+          <a:prstGeom prst="rect">
+            <a:avLst/>
+          </a:prstGeom>
+        </p:spPr>
+        <p:txBody>
+          <a:bodyPr vert="horz" lIns="91440" tIns="45720" rIns="91440" bIns="45720" rtlCol="0"/>
+          <a:lstStyle/>
+          <a:p>
+            <a:pPr lvl="0"/>
+            <a:r>
+              <a:rPr lang="en-US"/>
+              <a:t>Click to edit Master text styles</a:t>
+            </a:r>
+          </a:p>
+          <a:p>
+            <a:pPr lvl="1"/>
+            <a:r>
+              <a:rPr lang="en-US"/>
+              <a:t>Second level</a:t>
+            </a:r>
+          </a:p>
+          <a:p>
+            <a:pPr lvl="2"/>
+            <a:r>
+              <a:rPr lang="en-US"/>
+              <a:t>Third level</a:t>
+            </a:r>
+          </a:p>
+          <a:p>
+            <a:pPr lvl="3"/>
+            <a:r>
+              <a:rPr lang="en-US"/>
+              <a:t>Fourth level</a:t>
+            </a:r>
+          </a:p>
+          <a:p>
+            <a:pPr lvl="4"/>
+            <a:r>
+              <a:rPr lang="en-US"/>
+              <a:t>Fifth level</a:t>
+            </a:r>
+            <a:endParaRPr lang="sv-SE"/>
+          </a:p>
+        </p:txBody>
+      </p:sp>
+      <p:sp>
+        <p:nvSpPr>
+          <p:cNvPr id="6" name="Footer Placeholder 5"/>
+          <p:cNvSpPr>
+            <a:spLocks noGrp="1"/>
+          </p:cNvSpPr>
+          <p:nvPr>
+            <p:ph type="ftr" sz="quarter" idx="4"/>
+          </p:nvPr>
+        </p:nvSpPr>
+        <p:spPr>
+          <a:xfrm>
+            <a:off x="0" y="8685213"/>
+            <a:ext cx="2971800" cy="458787"/>
+          </a:xfrm>
+          <a:prstGeom prst="rect">
+            <a:avLst/>
+          </a:prstGeom>
+        </p:spPr>
+        <p:txBody>
+          <a:bodyPr vert="horz" lIns="91440" tIns="45720" rIns="91440" bIns="45720" rtlCol="0" anchor="b"/>
+          <a:lstStyle>
+            <a:lvl1pPr algn="l">
+              <a:defRPr sz="1200"/>
+            </a:lvl1pPr>
+          </a:lstStyle>
+          <a:p>
+            <a:endParaRPr lang="sv-SE"/>
+          </a:p>
+        </p:txBody>
+      </p:sp>
+      <p:sp>
+        <p:nvSpPr>
+          <p:cNvPr id="7" name="Slide Number Placeholder 6"/>
+          <p:cNvSpPr>
+            <a:spLocks noGrp="1"/>
+          </p:cNvSpPr>
+          <p:nvPr>
+            <p:ph type="sldNum" sz="quarter" idx="5"/>
+          </p:nvPr>
+        </p:nvSpPr>
+        <p:spPr>
+          <a:xfrm>
+            <a:off x="3884613" y="8685213"/>
+            <a:ext cx="2971800" cy="458787"/>
+          </a:xfrm>
+          <a:prstGeom prst="rect">
+            <a:avLst/>
+          </a:prstGeom>
+        </p:spPr>
+        <p:txBody>
+          <a:bodyPr vert="horz" lIns="91440" tIns="45720" rIns="91440" bIns="45720" rtlCol="0" anchor="b"/>
+          <a:lstStyle>
+            <a:lvl1pPr algn="r">
+              <a:defRPr sz="1200"/>
+            </a:lvl1pPr>
+          </a:lstStyle>
+          <a:p>
+            <a:fld id="{2BCEFE64-D0F2-4C81-BCE3-6EC8A554D9B3}" type="slidenum">
+              <a:rPr lang="sv-SE" smtClean="0"/>
+              <a:t>‹#›</a:t>
+            </a:fld>
+            <a:endParaRPr lang="sv-SE"/>
+          </a:p>
+        </p:txBody>
+      </p:sp>
+    </p:spTree>
+    <p:extLst>
+      <p:ext uri="{BB962C8B-B14F-4D97-AF65-F5344CB8AC3E}">
+        <p14:creationId xmlns:p14="http://schemas.microsoft.com/office/powerpoint/2010/main" val="704788938"/>
+      </p:ext>
+    </p:extLst>
+  </p:cSld>
+  <p:clrMap bg1="lt1" tx1="dk1" bg2="lt2" tx2="dk2" accent1="accent1" accent2="accent2" accent3="accent3" accent4="accent4" accent5="accent5" accent6="accent6" hlink="hlink" folHlink="folHlink"/>
+  <p:notesStyle>
+    <a:lvl1pPr marL="0" algn="l" defTabSz="914400" rtl="0" eaLnBrk="1" latinLnBrk="0" hangingPunct="1">
+      <a:defRPr sz="1200" kern="1200">
+        <a:solidFill>
+          <a:schemeClr val="tx1"/>
+        </a:solidFill>
+        <a:latin typeface="+mn-lt"/>
+        <a:ea typeface="+mn-ea"/>
+        <a:cs typeface="+mn-cs"/>
+      </a:defRPr>
+    </a:lvl1pPr>
+    <a:lvl2pPr marL="457200" algn="l" defTabSz="914400" rtl="0" eaLnBrk="1" latinLnBrk="0" hangingPunct="1">
+      <a:defRPr sz="1200" kern="1200">
+        <a:solidFill>
+          <a:schemeClr val="tx1"/>
+        </a:solidFill>
+        <a:latin typeface="+mn-lt"/>
+        <a:ea typeface="+mn-ea"/>
+        <a:cs typeface="+mn-cs"/>
+      </a:defRPr>
+    </a:lvl2pPr>
+    <a:lvl3pPr marL="914400" algn="l" defTabSz="914400" rtl="0" eaLnBrk="1" latinLnBrk="0" hangingPunct="1">
+      <a:defRPr sz="1200" kern="1200">
+        <a:solidFill>
+          <a:schemeClr val="tx1"/>
+        </a:solidFill>
+        <a:latin typeface="+mn-lt"/>
+        <a:ea typeface="+mn-ea"/>
+        <a:cs typeface="+mn-cs"/>
+      </a:defRPr>
+    </a:lvl3pPr>
+    <a:lvl4pPr marL="1371600" algn="l" defTabSz="914400" rtl="0" eaLnBrk="1" latinLnBrk="0" hangingPunct="1">
+      <a:defRPr sz="1200" kern="1200">
+        <a:solidFill>
+          <a:schemeClr val="tx1"/>
+        </a:solidFill>
+        <a:latin typeface="+mn-lt"/>
+        <a:ea typeface="+mn-ea"/>
+        <a:cs typeface="+mn-cs"/>
+      </a:defRPr>
+    </a:lvl4pPr>
+    <a:lvl5pPr marL="1828800" algn="l" defTabSz="914400" rtl="0" eaLnBrk="1" latinLnBrk="0" hangingPunct="1">
+      <a:defRPr sz="1200" kern="1200">
+        <a:solidFill>
+          <a:schemeClr val="tx1"/>
+        </a:solidFill>
+        <a:latin typeface="+mn-lt"/>
+        <a:ea typeface="+mn-ea"/>
+        <a:cs typeface="+mn-cs"/>
+      </a:defRPr>
+    </a:lvl5pPr>
+    <a:lvl6pPr marL="2286000" algn="l" defTabSz="914400" rtl="0" eaLnBrk="1" latinLnBrk="0" hangingPunct="1">
+      <a:defRPr sz="1200" kern="1200">
+        <a:solidFill>
+          <a:schemeClr val="tx1"/>
+        </a:solidFill>
+        <a:latin typeface="+mn-lt"/>
+        <a:ea typeface="+mn-ea"/>
+        <a:cs typeface="+mn-cs"/>
+      </a:defRPr>
+    </a:lvl6pPr>
+    <a:lvl7pPr marL="2743200" algn="l" defTabSz="914400" rtl="0" eaLnBrk="1" latinLnBrk="0" hangingPunct="1">
+      <a:defRPr sz="1200" kern="1200">
+        <a:solidFill>
+          <a:schemeClr val="tx1"/>
+        </a:solidFill>
+        <a:latin typeface="+mn-lt"/>
+        <a:ea typeface="+mn-ea"/>
+        <a:cs typeface="+mn-cs"/>
+      </a:defRPr>
+    </a:lvl7pPr>
+    <a:lvl8pPr marL="3200400" algn="l" defTabSz="914400" rtl="0" eaLnBrk="1" latinLnBrk="0" hangingPunct="1">
+      <a:defRPr sz="1200" kern="1200">
+        <a:solidFill>
+          <a:schemeClr val="tx1"/>
+        </a:solidFill>
+        <a:latin typeface="+mn-lt"/>
+        <a:ea typeface="+mn-ea"/>
+        <a:cs typeface="+mn-cs"/>
+      </a:defRPr>
+    </a:lvl8pPr>
+    <a:lvl9pPr marL="3657600" algn="l" defTabSz="914400" rtl="0" eaLnBrk="1" latinLnBrk="0" hangingPunct="1">
+      <a:defRPr sz="1200" kern="1200">
+        <a:solidFill>
+          <a:schemeClr val="tx1"/>
+        </a:solidFill>
+        <a:latin typeface="+mn-lt"/>
+        <a:ea typeface="+mn-ea"/>
+        <a:cs typeface="+mn-cs"/>
+      </a:defRPr>
+    </a:lvl9pPr>
+  </p:notesStyle>
+</p:notesMaster>
+</file>
+
+<file path=ppt/notesSlides/notesSlide1.xml><?xml version="1.0" encoding="utf-8"?>
+<p:notes xmlns:a="http://schemas.openxmlformats.org/drawingml/2006/main" xmlns:r="http://schemas.openxmlformats.org/officeDocument/2006/relationships" xmlns:p="http://schemas.openxmlformats.org/presentationml/2006/main">
+  <p:cSld>
+    <p:spTree>
+      <p:nvGrpSpPr>
+        <p:cNvPr id="1" name=""/>
+        <p:cNvGrpSpPr/>
+        <p:nvPr/>
+      </p:nvGrpSpPr>
+      <p:grpSpPr>
+        <a:xfrm>
+          <a:off x="0" y="0"/>
+          <a:ext cx="0" cy="0"/>
+          <a:chOff x="0" y="0"/>
+          <a:chExt cx="0" cy="0"/>
+        </a:xfrm>
+      </p:grpSpPr>
+      <p:sp>
+        <p:nvSpPr>
+          <p:cNvPr id="2" name="Slide Image Placeholder 1"/>
+          <p:cNvSpPr>
+            <a:spLocks noGrp="1" noRot="1" noChangeAspect="1"/>
+          </p:cNvSpPr>
+          <p:nvPr>
+            <p:ph type="sldImg"/>
+          </p:nvPr>
+        </p:nvSpPr>
+        <p:spPr/>
+      </p:sp>
+      <p:sp>
+        <p:nvSpPr>
+          <p:cNvPr id="3" name="Notes Placeholder 2"/>
+          <p:cNvSpPr>
+            <a:spLocks noGrp="1"/>
+          </p:cNvSpPr>
+          <p:nvPr>
+            <p:ph type="body" idx="1"/>
+          </p:nvPr>
+        </p:nvSpPr>
+        <p:spPr/>
+        <p:txBody>
+          <a:bodyPr/>
+          <a:lstStyle/>
+          <a:p>
+            <a:endParaRPr lang="sv-SE" dirty="0"/>
+          </a:p>
+        </p:txBody>
+      </p:sp>
+      <p:sp>
+        <p:nvSpPr>
+          <p:cNvPr id="4" name="Slide Number Placeholder 3"/>
+          <p:cNvSpPr>
+            <a:spLocks noGrp="1"/>
+          </p:cNvSpPr>
+          <p:nvPr>
+            <p:ph type="sldNum" sz="quarter" idx="5"/>
+          </p:nvPr>
+        </p:nvSpPr>
+        <p:spPr/>
+        <p:txBody>
+          <a:bodyPr/>
+          <a:lstStyle/>
+          <a:p>
+            <a:fld id="{2BCEFE64-D0F2-4C81-BCE3-6EC8A554D9B3}" type="slidenum">
+              <a:rPr lang="sv-SE" smtClean="0"/>
+              <a:t>1</a:t>
+            </a:fld>
+            <a:endParaRPr lang="sv-SE"/>
+          </a:p>
+        </p:txBody>
+      </p:sp>
+    </p:spTree>
+    <p:extLst>
+      <p:ext uri="{BB962C8B-B14F-4D97-AF65-F5344CB8AC3E}">
+        <p14:creationId xmlns:p14="http://schemas.microsoft.com/office/powerpoint/2010/main" val="3800191485"/>
+      </p:ext>
+    </p:extLst>
+  </p:cSld>
+  <p:clrMapOvr>
+    <a:masterClrMapping/>
+  </p:clrMapOvr>
+</p:notes>
 </file>
 
 <file path=ppt/slideLayouts/slideLayout1.xml><?xml version="1.0" encoding="utf-8"?>
@@ -797,7 +688,7 @@
           <a:p>
             <a:fld id="{7723BCB7-844F-49E6-AE41-CE47892E9870}" type="datetimeFigureOut">
               <a:rPr kumimoji="1" lang="ja-JP" altLang="en-US" smtClean="0"/>
-              <a:t>2026/5/13</a:t>
+              <a:t>2026/5/18</a:t>
             </a:fld>
             <a:endParaRPr kumimoji="1" lang="ja-JP" altLang="en-US"/>
           </a:p>
@@ -999,7 +890,7 @@
           <a:p>
             <a:fld id="{7723BCB7-844F-49E6-AE41-CE47892E9870}" type="datetimeFigureOut">
               <a:rPr kumimoji="1" lang="ja-JP" altLang="en-US" smtClean="0"/>
-              <a:t>2026/5/13</a:t>
+              <a:t>2026/5/18</a:t>
             </a:fld>
             <a:endParaRPr kumimoji="1" lang="ja-JP" altLang="en-US"/>
           </a:p>
@@ -1211,7 +1102,7 @@
           <a:p>
             <a:fld id="{7723BCB7-844F-49E6-AE41-CE47892E9870}" type="datetimeFigureOut">
               <a:rPr kumimoji="1" lang="ja-JP" altLang="en-US" smtClean="0"/>
-              <a:t>2026/5/13</a:t>
+              <a:t>2026/5/18</a:t>
             </a:fld>
             <a:endParaRPr kumimoji="1" lang="ja-JP" altLang="en-US"/>
           </a:p>
@@ -1413,7 +1304,7 @@
           <a:p>
             <a:fld id="{7723BCB7-844F-49E6-AE41-CE47892E9870}" type="datetimeFigureOut">
               <a:rPr kumimoji="1" lang="ja-JP" altLang="en-US" smtClean="0"/>
-              <a:t>2026/5/13</a:t>
+              <a:t>2026/5/18</a:t>
             </a:fld>
             <a:endParaRPr kumimoji="1" lang="ja-JP" altLang="en-US"/>
           </a:p>
@@ -1659,7 +1550,7 @@
           <a:p>
             <a:fld id="{7723BCB7-844F-49E6-AE41-CE47892E9870}" type="datetimeFigureOut">
               <a:rPr kumimoji="1" lang="ja-JP" altLang="en-US" smtClean="0"/>
-              <a:t>2026/5/13</a:t>
+              <a:t>2026/5/18</a:t>
             </a:fld>
             <a:endParaRPr kumimoji="1" lang="ja-JP" altLang="en-US"/>
           </a:p>
@@ -1955,7 +1846,7 @@
           <a:p>
             <a:fld id="{7723BCB7-844F-49E6-AE41-CE47892E9870}" type="datetimeFigureOut">
               <a:rPr kumimoji="1" lang="ja-JP" altLang="en-US" smtClean="0"/>
-              <a:t>2026/5/13</a:t>
+              <a:t>2026/5/18</a:t>
             </a:fld>
             <a:endParaRPr kumimoji="1" lang="ja-JP" altLang="en-US"/>
           </a:p>
@@ -2386,7 +2277,7 @@
           <a:p>
             <a:fld id="{7723BCB7-844F-49E6-AE41-CE47892E9870}" type="datetimeFigureOut">
               <a:rPr kumimoji="1" lang="ja-JP" altLang="en-US" smtClean="0"/>
-              <a:t>2026/5/13</a:t>
+              <a:t>2026/5/18</a:t>
             </a:fld>
             <a:endParaRPr kumimoji="1" lang="ja-JP" altLang="en-US"/>
           </a:p>
@@ -2504,7 +2395,7 @@
           <a:p>
             <a:fld id="{7723BCB7-844F-49E6-AE41-CE47892E9870}" type="datetimeFigureOut">
               <a:rPr kumimoji="1" lang="ja-JP" altLang="en-US" smtClean="0"/>
-              <a:t>2026/5/13</a:t>
+              <a:t>2026/5/18</a:t>
             </a:fld>
             <a:endParaRPr kumimoji="1" lang="ja-JP" altLang="en-US"/>
           </a:p>
@@ -2599,7 +2490,7 @@
           <a:p>
             <a:fld id="{7723BCB7-844F-49E6-AE41-CE47892E9870}" type="datetimeFigureOut">
               <a:rPr kumimoji="1" lang="ja-JP" altLang="en-US" smtClean="0"/>
-              <a:t>2026/5/13</a:t>
+              <a:t>2026/5/18</a:t>
             </a:fld>
             <a:endParaRPr kumimoji="1" lang="ja-JP" altLang="en-US"/>
           </a:p>
@@ -2908,7 +2799,7 @@
           <a:p>
             <a:fld id="{7723BCB7-844F-49E6-AE41-CE47892E9870}" type="datetimeFigureOut">
               <a:rPr kumimoji="1" lang="ja-JP" altLang="en-US" smtClean="0"/>
-              <a:t>2026/5/13</a:t>
+              <a:t>2026/5/18</a:t>
             </a:fld>
             <a:endParaRPr kumimoji="1" lang="ja-JP" altLang="en-US"/>
           </a:p>
@@ -3165,7 +3056,7 @@
           <a:p>
             <a:fld id="{7723BCB7-844F-49E6-AE41-CE47892E9870}" type="datetimeFigureOut">
               <a:rPr kumimoji="1" lang="ja-JP" altLang="en-US" smtClean="0"/>
-              <a:t>2026/5/13</a:t>
+              <a:t>2026/5/18</a:t>
             </a:fld>
             <a:endParaRPr kumimoji="1" lang="ja-JP" altLang="en-US"/>
           </a:p>
@@ -3410,7 +3301,7 @@
           <a:p>
             <a:fld id="{7723BCB7-844F-49E6-AE41-CE47892E9870}" type="datetimeFigureOut">
               <a:rPr kumimoji="1" lang="ja-JP" altLang="en-US" smtClean="0"/>
-              <a:t>2026/5/13</a:t>
+              <a:t>2026/5/18</a:t>
             </a:fld>
             <a:endParaRPr kumimoji="1" lang="ja-JP" altLang="en-US"/>
           </a:p>
@@ -3998,8 +3889,8 @@
         </p:nvSpPr>
         <p:spPr>
           <a:xfrm>
-            <a:off x="4300453" y="649457"/>
-            <a:ext cx="24365949" cy="2686507"/>
+            <a:off x="4072043" y="328629"/>
+            <a:ext cx="24365949" cy="1776170"/>
           </a:xfrm>
           <a:prstGeom prst="rect">
             <a:avLst/>
@@ -4048,68 +3939,6 @@
       </p:sp>
       <p:sp>
         <p:nvSpPr>
-          <p:cNvPr id="6" name="テキスト ボックス 5">
-            <a:extLst>
-              <a:ext uri="{FF2B5EF4-FFF2-40B4-BE49-F238E27FC236}">
-                <a16:creationId xmlns:a16="http://schemas.microsoft.com/office/drawing/2014/main" id="{56662CAC-D349-2142-F453-9F5A521D14F4}"/>
-              </a:ext>
-            </a:extLst>
-          </p:cNvPr>
-          <p:cNvSpPr txBox="1"/>
-          <p:nvPr/>
-        </p:nvSpPr>
-        <p:spPr>
-          <a:xfrm>
-            <a:off x="2512848" y="32583099"/>
-            <a:ext cx="12197773" cy="3354765"/>
-          </a:xfrm>
-          <a:prstGeom prst="rect">
-            <a:avLst/>
-          </a:prstGeom>
-          <a:noFill/>
-        </p:spPr>
-        <p:txBody>
-          <a:bodyPr wrap="square" rtlCol="0">
-            <a:spAutoFit/>
-          </a:bodyPr>
-          <a:lstStyle/>
-          <a:p>
-            <a:pPr marL="685800" indent="-685800">
-              <a:spcBef>
-                <a:spcPts val="2400"/>
-              </a:spcBef>
-              <a:buClr>
-                <a:srgbClr val="018185"/>
-              </a:buClr>
-              <a:buFont typeface="Wingdings" panose="05000000000000000000" pitchFamily="2" charset="2"/>
-              <a:buChar char="p"/>
-            </a:pPr>
-            <a:r>
-              <a:rPr lang="en-US" altLang="ja-JP" sz="4800" dirty="0"/>
-              <a:t>You may choose either a one-column or two-column format at your discretion</a:t>
-            </a:r>
-          </a:p>
-          <a:p>
-            <a:pPr marL="685800" indent="-685800">
-              <a:spcBef>
-                <a:spcPts val="2400"/>
-              </a:spcBef>
-              <a:buClr>
-                <a:srgbClr val="018185"/>
-              </a:buClr>
-              <a:buFont typeface="Wingdings" panose="05000000000000000000" pitchFamily="2" charset="2"/>
-              <a:buChar char="p"/>
-            </a:pPr>
-            <a:r>
-              <a:rPr lang="en-US" altLang="ja-JP" sz="4800" dirty="0"/>
-              <a:t>Please print this poster on an A0-sized sheet and bring it to IPEC2026</a:t>
-            </a:r>
-            <a:endParaRPr kumimoji="1" lang="ja-JP" altLang="en-US" sz="4800" dirty="0"/>
-          </a:p>
-        </p:txBody>
-      </p:sp>
-      <p:sp>
-        <p:nvSpPr>
           <p:cNvPr id="7" name="テキスト プレースホルダー 2">
             <a:extLst>
               <a:ext uri="{FF2B5EF4-FFF2-40B4-BE49-F238E27FC236}">
@@ -4124,8 +3953,8 @@
         </p:nvSpPr>
         <p:spPr>
           <a:xfrm>
-            <a:off x="4123515" y="2234571"/>
-            <a:ext cx="22028183" cy="1990262"/>
+            <a:off x="4564105" y="2282460"/>
+            <a:ext cx="23732642" cy="787249"/>
           </a:xfrm>
           <a:prstGeom prst="rect">
             <a:avLst/>
@@ -4333,7 +4162,7 @@
                 </a:solidFill>
                 <a:effectLst/>
               </a:rPr>
-              <a:t>, Shahriar Sarmast </a:t>
+              <a:t>, Shahriar Sarmast Ghahfarokhi </a:t>
             </a:r>
             <a:r>
               <a:rPr lang="en-US" altLang="ja-JP" sz="4800" baseline="30000" dirty="0">
@@ -4426,7 +4255,7 @@
         </p:nvSpPr>
         <p:spPr>
           <a:xfrm>
-            <a:off x="3578766" y="3805518"/>
+            <a:off x="4072043" y="3198921"/>
             <a:ext cx="23117680" cy="769441"/>
           </a:xfrm>
           <a:prstGeom prst="rect">
@@ -4589,7 +4418,7 @@
             </a:lvl9pPr>
           </a:lstStyle>
           <a:p>
-            <a:pPr algn="ctr"/>
+            <a:pPr algn="just"/>
             <a:r>
               <a:rPr lang="en-US" sz="4800" dirty="0">
                 <a:solidFill>
@@ -4603,10 +4432,10 @@
       </p:sp>
       <p:sp>
         <p:nvSpPr>
-          <p:cNvPr id="9" name="テキスト ボックス 8">
+          <p:cNvPr id="13" name="テキスト ボックス 5">
             <a:extLst>
               <a:ext uri="{FF2B5EF4-FFF2-40B4-BE49-F238E27FC236}">
-                <a16:creationId xmlns:a16="http://schemas.microsoft.com/office/drawing/2014/main" id="{B2D3CF20-2F9C-D546-E547-E1B899E99AA4}"/>
+                <a16:creationId xmlns:a16="http://schemas.microsoft.com/office/drawing/2014/main" id="{CFC56C37-23B9-7BF0-38F0-1454C98F4ADE}"/>
               </a:ext>
             </a:extLst>
           </p:cNvPr>
@@ -4615,8 +4444,8 @@
         </p:nvSpPr>
         <p:spPr>
           <a:xfrm>
-            <a:off x="1859268" y="5113360"/>
-            <a:ext cx="26629406" cy="707886"/>
+            <a:off x="430738" y="5379374"/>
+            <a:ext cx="9149205" cy="954107"/>
           </a:xfrm>
           <a:prstGeom prst="rect">
             <a:avLst/>
@@ -4624,29 +4453,73 @@
           <a:noFill/>
         </p:spPr>
         <p:txBody>
+          <a:bodyPr wrap="square" rtlCol="0">
+            <a:spAutoFit/>
+          </a:bodyPr>
+          <a:lstStyle/>
+          <a:p>
+            <a:pPr marL="457200" indent="-457200" algn="just">
+              <a:spcBef>
+                <a:spcPts val="2400"/>
+              </a:spcBef>
+              <a:buClr>
+                <a:srgbClr val="018185"/>
+              </a:buClr>
+              <a:buFont typeface="Wingdings" panose="05000000000000000000" pitchFamily="2" charset="2"/>
+              <a:buChar char="q"/>
+            </a:pPr>
+            <a:r>
+              <a:rPr lang="en-US" sz="2800" dirty="0">
+                <a:solidFill>
+                  <a:srgbClr val="1F2933"/>
+                </a:solidFill>
+                <a:latin typeface="Arial" pitchFamily="34" charset="0"/>
+                <a:ea typeface="Arial" pitchFamily="34" charset="-122"/>
+                <a:cs typeface="Arial" pitchFamily="34" charset="-120"/>
+              </a:rPr>
+              <a:t>Two-level three-phase voltage source inverters are widely used in industrial motor drives. </a:t>
+            </a:r>
+          </a:p>
+        </p:txBody>
+      </p:sp>
+      <p:sp>
+        <p:nvSpPr>
+          <p:cNvPr id="14" name="テキスト ボックス 8">
+            <a:extLst>
+              <a:ext uri="{FF2B5EF4-FFF2-40B4-BE49-F238E27FC236}">
+                <a16:creationId xmlns:a16="http://schemas.microsoft.com/office/drawing/2014/main" id="{025244C0-8D5A-942D-116F-A90F8046EFB1}"/>
+              </a:ext>
+            </a:extLst>
+          </p:cNvPr>
+          <p:cNvSpPr txBox="1"/>
+          <p:nvPr/>
+        </p:nvSpPr>
+        <p:spPr>
+          <a:xfrm>
+            <a:off x="922975" y="4352666"/>
+            <a:ext cx="2938626" cy="523220"/>
+          </a:xfrm>
+          <a:prstGeom prst="rect">
+            <a:avLst/>
+          </a:prstGeom>
+          <a:noFill/>
+        </p:spPr>
+        <p:txBody>
           <a:bodyPr wrap="none" rtlCol="0">
             <a:spAutoFit/>
           </a:bodyPr>
           <a:lstStyle/>
           <a:p>
-            <a:pPr algn="ctr"/>
-            <a:r>
-              <a:rPr lang="en-US" altLang="ja-JP" sz="4000" b="1" dirty="0">
+            <a:pPr algn="just"/>
+            <a:r>
+              <a:rPr lang="en-US" altLang="ja-JP" sz="2800" b="1" dirty="0">
                 <a:solidFill>
                   <a:srgbClr val="018185"/>
                 </a:solidFill>
               </a:rPr>
-              <a:t>Core Idea: </a:t>
-            </a:r>
-            <a:r>
-              <a:rPr lang="en-US" altLang="ja-JP" sz="3000" b="1" dirty="0">
-                <a:solidFill>
-                  <a:srgbClr val="018185"/>
-                </a:solidFill>
-              </a:rPr>
-              <a:t>Adaptive interleaving between the legs of a single 2L-3Ph inverter reduces DC-link capacitor RMS current without extra hardware. </a:t>
-            </a:r>
-            <a:endParaRPr kumimoji="1" lang="ja-JP" altLang="en-US" sz="3000" b="1" dirty="0">
+              <a:t>INTRODUCTION</a:t>
+            </a:r>
+            <a:endParaRPr kumimoji="1" lang="ja-JP" altLang="en-US" sz="3600" b="1" dirty="0">
               <a:solidFill>
                 <a:srgbClr val="018185"/>
               </a:solidFill>
@@ -4656,10 +4529,10 @@
       </p:sp>
       <p:sp>
         <p:nvSpPr>
-          <p:cNvPr id="10" name="正方形/長方形 9">
+          <p:cNvPr id="15" name="正方形/長方形 9">
             <a:extLst>
               <a:ext uri="{FF2B5EF4-FFF2-40B4-BE49-F238E27FC236}">
-                <a16:creationId xmlns:a16="http://schemas.microsoft.com/office/drawing/2014/main" id="{5BF23702-473C-3911-2897-C13722E028B4}"/>
+                <a16:creationId xmlns:a16="http://schemas.microsoft.com/office/drawing/2014/main" id="{158509F0-E6E9-1FAF-AC1F-8A14E6E97176}"/>
               </a:ext>
             </a:extLst>
           </p:cNvPr>
@@ -4668,8 +4541,8 @@
         </p:nvSpPr>
         <p:spPr>
           <a:xfrm>
-            <a:off x="1304218" y="4918055"/>
-            <a:ext cx="419166" cy="1257132"/>
+            <a:off x="347052" y="4294051"/>
+            <a:ext cx="539462" cy="721907"/>
           </a:xfrm>
           <a:prstGeom prst="rect">
             <a:avLst/>
@@ -4701,17 +4574,21 @@
           <a:bodyPr rtlCol="0" anchor="ctr"/>
           <a:lstStyle/>
           <a:p>
-            <a:pPr algn="ctr"/>
-            <a:endParaRPr kumimoji="1" lang="ja-JP" altLang="en-US"/>
+            <a:pPr algn="just"/>
+            <a:r>
+              <a:rPr kumimoji="1" lang="en-US" altLang="ja-JP" sz="4400" dirty="0"/>
+              <a:t>1</a:t>
+            </a:r>
+            <a:endParaRPr kumimoji="1" lang="ja-JP" altLang="en-US" sz="4400" dirty="0"/>
           </a:p>
         </p:txBody>
       </p:sp>
       <p:cxnSp>
         <p:nvCxnSpPr>
-          <p:cNvPr id="12" name="直線コネクタ 11">
+          <p:cNvPr id="16" name="直線コネクタ 11">
             <a:extLst>
               <a:ext uri="{FF2B5EF4-FFF2-40B4-BE49-F238E27FC236}">
-                <a16:creationId xmlns:a16="http://schemas.microsoft.com/office/drawing/2014/main" id="{2C66B1EB-328D-334F-EB12-DF8F390E4905}"/>
+                <a16:creationId xmlns:a16="http://schemas.microsoft.com/office/drawing/2014/main" id="{38102944-3846-DAD0-D3C4-E1DB018FF127}"/>
               </a:ext>
             </a:extLst>
           </p:cNvPr>
@@ -4722,8 +4599,8 @@
         </p:nvCxnSpPr>
         <p:spPr>
           <a:xfrm>
-            <a:off x="1304218" y="6175187"/>
-            <a:ext cx="26942092" cy="0"/>
+            <a:off x="347052" y="5013460"/>
+            <a:ext cx="9211875" cy="2499"/>
           </a:xfrm>
           <a:prstGeom prst="line">
             <a:avLst/>
@@ -4751,10 +4628,433 @@
       </p:cxnSp>
       <p:sp>
         <p:nvSpPr>
-          <p:cNvPr id="2" name="テキスト ボックス 8">
+          <p:cNvPr id="23" name="Text 19">
             <a:extLst>
               <a:ext uri="{FF2B5EF4-FFF2-40B4-BE49-F238E27FC236}">
-                <a16:creationId xmlns:a16="http://schemas.microsoft.com/office/drawing/2014/main" id="{2E708739-3E0F-E89C-0258-7CA5A492796E}"/>
+                <a16:creationId xmlns:a16="http://schemas.microsoft.com/office/drawing/2014/main" id="{497CB52B-9AB9-EB60-EAD4-32969AD31577}"/>
+              </a:ext>
+            </a:extLst>
+          </p:cNvPr>
+          <p:cNvSpPr/>
+          <p:nvPr/>
+        </p:nvSpPr>
+        <p:spPr>
+          <a:xfrm>
+            <a:off x="23224199" y="39594944"/>
+            <a:ext cx="4230533" cy="411480"/>
+          </a:xfrm>
+          <a:prstGeom prst="rect">
+            <a:avLst/>
+          </a:prstGeom>
+          <a:noFill/>
+          <a:ln/>
+        </p:spPr>
+        <p:txBody>
+          <a:bodyPr wrap="square" lIns="635" tIns="635" rIns="635" bIns="635" rtlCol="0" anchor="ctr">
+            <a:noAutofit/>
+          </a:bodyPr>
+          <a:lstStyle/>
+          <a:p>
+            <a:pPr marL="0" indent="0" algn="ctr">
+              <a:buNone/>
+            </a:pPr>
+            <a:r>
+              <a:rPr lang="en-US" sz="2800" dirty="0">
+                <a:solidFill>
+                  <a:srgbClr val="677481"/>
+                </a:solidFill>
+                <a:latin typeface="Arial" pitchFamily="34" charset="0"/>
+                <a:ea typeface="Arial" pitchFamily="34" charset="-122"/>
+                <a:cs typeface="Arial" pitchFamily="34" charset="-120"/>
+              </a:rPr>
+              <a:t>up to</a:t>
+            </a:r>
+            <a:endParaRPr lang="en-US" sz="2800" dirty="0"/>
+          </a:p>
+        </p:txBody>
+      </p:sp>
+      <p:sp>
+        <p:nvSpPr>
+          <p:cNvPr id="24" name="Text 20">
+            <a:extLst>
+              <a:ext uri="{FF2B5EF4-FFF2-40B4-BE49-F238E27FC236}">
+                <a16:creationId xmlns:a16="http://schemas.microsoft.com/office/drawing/2014/main" id="{40AFC767-0DA9-ACDF-405E-D6400590758A}"/>
+              </a:ext>
+            </a:extLst>
+          </p:cNvPr>
+          <p:cNvSpPr/>
+          <p:nvPr/>
+        </p:nvSpPr>
+        <p:spPr>
+          <a:xfrm>
+            <a:off x="23258665" y="40273665"/>
+            <a:ext cx="4230533" cy="731520"/>
+          </a:xfrm>
+          <a:prstGeom prst="rect">
+            <a:avLst/>
+          </a:prstGeom>
+          <a:noFill/>
+          <a:ln/>
+        </p:spPr>
+        <p:txBody>
+          <a:bodyPr wrap="square" lIns="635" tIns="635" rIns="635" bIns="635" rtlCol="0" anchor="ctr">
+            <a:noAutofit/>
+          </a:bodyPr>
+          <a:lstStyle/>
+          <a:p>
+            <a:pPr marL="0" indent="0" algn="ctr">
+              <a:buNone/>
+            </a:pPr>
+            <a:r>
+              <a:rPr lang="en-US" sz="4800" b="1" dirty="0">
+                <a:solidFill>
+                  <a:srgbClr val="0066A1"/>
+                </a:solidFill>
+                <a:latin typeface="Arial" pitchFamily="34" charset="0"/>
+                <a:ea typeface="Arial" pitchFamily="34" charset="-122"/>
+                <a:cs typeface="Arial" pitchFamily="34" charset="-120"/>
+              </a:rPr>
+              <a:t>27%</a:t>
+            </a:r>
+            <a:endParaRPr lang="en-US" sz="4800" dirty="0"/>
+          </a:p>
+        </p:txBody>
+      </p:sp>
+      <p:sp>
+        <p:nvSpPr>
+          <p:cNvPr id="25" name="Text 21">
+            <a:extLst>
+              <a:ext uri="{FF2B5EF4-FFF2-40B4-BE49-F238E27FC236}">
+                <a16:creationId xmlns:a16="http://schemas.microsoft.com/office/drawing/2014/main" id="{2D45A27A-915A-B724-37A8-7488B42D9247}"/>
+              </a:ext>
+            </a:extLst>
+          </p:cNvPr>
+          <p:cNvSpPr/>
+          <p:nvPr/>
+        </p:nvSpPr>
+        <p:spPr>
+          <a:xfrm>
+            <a:off x="23315552" y="40919149"/>
+            <a:ext cx="4230533" cy="685800"/>
+          </a:xfrm>
+          <a:prstGeom prst="rect">
+            <a:avLst/>
+          </a:prstGeom>
+          <a:noFill/>
+          <a:ln/>
+        </p:spPr>
+        <p:txBody>
+          <a:bodyPr wrap="square" lIns="635" tIns="635" rIns="635" bIns="635" rtlCol="0" anchor="ctr">
+            <a:normAutofit/>
+          </a:bodyPr>
+          <a:lstStyle/>
+          <a:p>
+            <a:pPr marL="0" indent="0" algn="ctr">
+              <a:buNone/>
+            </a:pPr>
+            <a:r>
+              <a:rPr lang="en-US" sz="2800" dirty="0">
+                <a:solidFill>
+                  <a:srgbClr val="1F2933"/>
+                </a:solidFill>
+                <a:latin typeface="Arial" pitchFamily="34" charset="0"/>
+                <a:ea typeface="Arial" pitchFamily="34" charset="-122"/>
+                <a:cs typeface="Arial" pitchFamily="34" charset="-120"/>
+              </a:rPr>
+              <a:t>lower RMS current</a:t>
+            </a:r>
+            <a:endParaRPr lang="en-US" sz="2800" dirty="0"/>
+          </a:p>
+        </p:txBody>
+      </p:sp>
+      <p:sp>
+        <p:nvSpPr>
+          <p:cNvPr id="26" name="Text 22">
+            <a:extLst>
+              <a:ext uri="{FF2B5EF4-FFF2-40B4-BE49-F238E27FC236}">
+                <a16:creationId xmlns:a16="http://schemas.microsoft.com/office/drawing/2014/main" id="{1AAC9BD3-29E0-1B33-0E29-539575E9B1B8}"/>
+              </a:ext>
+            </a:extLst>
+          </p:cNvPr>
+          <p:cNvSpPr/>
+          <p:nvPr/>
+        </p:nvSpPr>
+        <p:spPr>
+          <a:xfrm>
+            <a:off x="21224222" y="37902184"/>
+            <a:ext cx="4230533" cy="411480"/>
+          </a:xfrm>
+          <a:prstGeom prst="rect">
+            <a:avLst/>
+          </a:prstGeom>
+          <a:noFill/>
+          <a:ln/>
+        </p:spPr>
+        <p:txBody>
+          <a:bodyPr wrap="square" lIns="635" tIns="635" rIns="635" bIns="635" rtlCol="0" anchor="ctr">
+            <a:noAutofit/>
+          </a:bodyPr>
+          <a:lstStyle/>
+          <a:p>
+            <a:pPr marL="0" indent="0" algn="ctr">
+              <a:buNone/>
+            </a:pPr>
+            <a:r>
+              <a:rPr lang="en-US" sz="2800" dirty="0">
+                <a:solidFill>
+                  <a:srgbClr val="677481"/>
+                </a:solidFill>
+                <a:latin typeface="Arial" pitchFamily="34" charset="0"/>
+                <a:ea typeface="Arial" pitchFamily="34" charset="-122"/>
+                <a:cs typeface="Arial" pitchFamily="34" charset="-120"/>
+              </a:rPr>
+              <a:t>23%</a:t>
+            </a:r>
+            <a:endParaRPr lang="en-US" sz="2800" dirty="0"/>
+          </a:p>
+        </p:txBody>
+      </p:sp>
+      <p:sp>
+        <p:nvSpPr>
+          <p:cNvPr id="27" name="Text 23">
+            <a:extLst>
+              <a:ext uri="{FF2B5EF4-FFF2-40B4-BE49-F238E27FC236}">
+                <a16:creationId xmlns:a16="http://schemas.microsoft.com/office/drawing/2014/main" id="{BA92114D-8FB0-1077-4D10-6026D1896C17}"/>
+              </a:ext>
+            </a:extLst>
+          </p:cNvPr>
+          <p:cNvSpPr/>
+          <p:nvPr/>
+        </p:nvSpPr>
+        <p:spPr>
+          <a:xfrm>
+            <a:off x="21151341" y="38313664"/>
+            <a:ext cx="4230533" cy="731520"/>
+          </a:xfrm>
+          <a:prstGeom prst="rect">
+            <a:avLst/>
+          </a:prstGeom>
+          <a:noFill/>
+          <a:ln/>
+        </p:spPr>
+        <p:txBody>
+          <a:bodyPr wrap="square" lIns="635" tIns="635" rIns="635" bIns="635" rtlCol="0" anchor="ctr">
+            <a:noAutofit/>
+          </a:bodyPr>
+          <a:lstStyle/>
+          <a:p>
+            <a:pPr marL="0" indent="0" algn="ctr">
+              <a:buNone/>
+            </a:pPr>
+            <a:r>
+              <a:rPr lang="en-US" sz="4800" b="1" dirty="0">
+                <a:solidFill>
+                  <a:srgbClr val="118C44"/>
+                </a:solidFill>
+                <a:latin typeface="Arial" pitchFamily="34" charset="0"/>
+                <a:ea typeface="Arial" pitchFamily="34" charset="-122"/>
+                <a:cs typeface="Arial" pitchFamily="34" charset="-120"/>
+              </a:rPr>
+              <a:t>case study</a:t>
+            </a:r>
+            <a:endParaRPr lang="en-US" sz="4800" dirty="0"/>
+          </a:p>
+        </p:txBody>
+      </p:sp>
+      <p:sp>
+        <p:nvSpPr>
+          <p:cNvPr id="28" name="Text 24">
+            <a:extLst>
+              <a:ext uri="{FF2B5EF4-FFF2-40B4-BE49-F238E27FC236}">
+                <a16:creationId xmlns:a16="http://schemas.microsoft.com/office/drawing/2014/main" id="{AF2E8BFC-B8AF-080F-148D-5A5060CB768D}"/>
+              </a:ext>
+            </a:extLst>
+          </p:cNvPr>
+          <p:cNvSpPr/>
+          <p:nvPr/>
+        </p:nvSpPr>
+        <p:spPr>
+          <a:xfrm>
+            <a:off x="21151341" y="39054511"/>
+            <a:ext cx="4230533" cy="685800"/>
+          </a:xfrm>
+          <a:prstGeom prst="rect">
+            <a:avLst/>
+          </a:prstGeom>
+          <a:noFill/>
+          <a:ln/>
+        </p:spPr>
+        <p:txBody>
+          <a:bodyPr wrap="square" lIns="635" tIns="635" rIns="635" bIns="635" rtlCol="0" anchor="ctr">
+            <a:normAutofit/>
+          </a:bodyPr>
+          <a:lstStyle/>
+          <a:p>
+            <a:pPr marL="0" indent="0" algn="ctr">
+              <a:buNone/>
+            </a:pPr>
+            <a:r>
+              <a:rPr lang="en-US" sz="2800" dirty="0">
+                <a:solidFill>
+                  <a:srgbClr val="1F2933"/>
+                </a:solidFill>
+                <a:latin typeface="Arial" pitchFamily="34" charset="0"/>
+                <a:ea typeface="Arial" pitchFamily="34" charset="-122"/>
+                <a:cs typeface="Arial" pitchFamily="34" charset="-120"/>
+              </a:rPr>
+              <a:t>27.6 A -&gt; 21.2 A</a:t>
+            </a:r>
+            <a:endParaRPr lang="en-US" sz="2800" dirty="0"/>
+          </a:p>
+        </p:txBody>
+      </p:sp>
+      <p:sp>
+        <p:nvSpPr>
+          <p:cNvPr id="29" name="Text 25">
+            <a:extLst>
+              <a:ext uri="{FF2B5EF4-FFF2-40B4-BE49-F238E27FC236}">
+                <a16:creationId xmlns:a16="http://schemas.microsoft.com/office/drawing/2014/main" id="{C4750E53-A6D6-E856-8A5C-77BEEB481F06}"/>
+              </a:ext>
+            </a:extLst>
+          </p:cNvPr>
+          <p:cNvSpPr/>
+          <p:nvPr/>
+        </p:nvSpPr>
+        <p:spPr>
+          <a:xfrm>
+            <a:off x="25224578" y="37858297"/>
+            <a:ext cx="4230533" cy="411480"/>
+          </a:xfrm>
+          <a:prstGeom prst="rect">
+            <a:avLst/>
+          </a:prstGeom>
+          <a:noFill/>
+          <a:ln/>
+        </p:spPr>
+        <p:txBody>
+          <a:bodyPr wrap="square" lIns="635" tIns="635" rIns="635" bIns="635" rtlCol="0" anchor="ctr">
+            <a:noAutofit/>
+          </a:bodyPr>
+          <a:lstStyle/>
+          <a:p>
+            <a:pPr marL="0" indent="0" algn="ctr">
+              <a:buNone/>
+            </a:pPr>
+            <a:r>
+              <a:rPr lang="en-US" sz="2800" dirty="0">
+                <a:solidFill>
+                  <a:srgbClr val="677481"/>
+                </a:solidFill>
+                <a:latin typeface="Arial" pitchFamily="34" charset="0"/>
+                <a:ea typeface="Arial" pitchFamily="34" charset="-122"/>
+                <a:cs typeface="Arial" pitchFamily="34" charset="-120"/>
+              </a:rPr>
+              <a:t>~50%</a:t>
+            </a:r>
+            <a:endParaRPr lang="en-US" sz="2800" dirty="0"/>
+          </a:p>
+        </p:txBody>
+      </p:sp>
+      <p:sp>
+        <p:nvSpPr>
+          <p:cNvPr id="30" name="Text 26">
+            <a:extLst>
+              <a:ext uri="{FF2B5EF4-FFF2-40B4-BE49-F238E27FC236}">
+                <a16:creationId xmlns:a16="http://schemas.microsoft.com/office/drawing/2014/main" id="{369010A6-E9F4-F1A4-F72A-3739AEC16882}"/>
+              </a:ext>
+            </a:extLst>
+          </p:cNvPr>
+          <p:cNvSpPr/>
+          <p:nvPr/>
+        </p:nvSpPr>
+        <p:spPr>
+          <a:xfrm>
+            <a:off x="25142544" y="38313664"/>
+            <a:ext cx="4722264" cy="731520"/>
+          </a:xfrm>
+          <a:prstGeom prst="rect">
+            <a:avLst/>
+          </a:prstGeom>
+          <a:noFill/>
+          <a:ln/>
+        </p:spPr>
+        <p:txBody>
+          <a:bodyPr wrap="square" lIns="635" tIns="635" rIns="635" bIns="635" rtlCol="0" anchor="ctr">
+            <a:noAutofit/>
+          </a:bodyPr>
+          <a:lstStyle/>
+          <a:p>
+            <a:pPr marL="0" indent="0" algn="ctr">
+              <a:buNone/>
+            </a:pPr>
+            <a:r>
+              <a:rPr lang="en-US" sz="4800" b="1" dirty="0">
+                <a:solidFill>
+                  <a:srgbClr val="0066A1"/>
+                </a:solidFill>
+                <a:latin typeface="Arial" pitchFamily="34" charset="0"/>
+                <a:ea typeface="Arial" pitchFamily="34" charset="-122"/>
+                <a:cs typeface="Arial" pitchFamily="34" charset="-120"/>
+              </a:rPr>
+              <a:t>lifetime gain</a:t>
+            </a:r>
+            <a:endParaRPr lang="en-US" sz="4800" dirty="0"/>
+          </a:p>
+        </p:txBody>
+      </p:sp>
+      <p:sp>
+        <p:nvSpPr>
+          <p:cNvPr id="31" name="Text 27">
+            <a:extLst>
+              <a:ext uri="{FF2B5EF4-FFF2-40B4-BE49-F238E27FC236}">
+                <a16:creationId xmlns:a16="http://schemas.microsoft.com/office/drawing/2014/main" id="{99B47617-D635-19C1-5BD7-4B8A9A04D929}"/>
+              </a:ext>
+            </a:extLst>
+          </p:cNvPr>
+          <p:cNvSpPr/>
+          <p:nvPr/>
+        </p:nvSpPr>
+        <p:spPr>
+          <a:xfrm>
+            <a:off x="25388410" y="39054511"/>
+            <a:ext cx="4230533" cy="685800"/>
+          </a:xfrm>
+          <a:prstGeom prst="rect">
+            <a:avLst/>
+          </a:prstGeom>
+          <a:noFill/>
+          <a:ln/>
+        </p:spPr>
+        <p:txBody>
+          <a:bodyPr wrap="square" lIns="635" tIns="635" rIns="635" bIns="635" rtlCol="0" anchor="ctr">
+            <a:normAutofit/>
+          </a:bodyPr>
+          <a:lstStyle/>
+          <a:p>
+            <a:pPr marL="0" indent="0" algn="ctr">
+              <a:buNone/>
+            </a:pPr>
+            <a:r>
+              <a:rPr lang="en-US" sz="2800" dirty="0">
+                <a:solidFill>
+                  <a:srgbClr val="1F2933"/>
+                </a:solidFill>
+                <a:latin typeface="Arial" pitchFamily="34" charset="0"/>
+                <a:ea typeface="Arial" pitchFamily="34" charset="-122"/>
+                <a:cs typeface="Arial" pitchFamily="34" charset="-120"/>
+              </a:rPr>
+              <a:t>example estimate</a:t>
+            </a:r>
+            <a:endParaRPr lang="en-US" sz="2800" dirty="0"/>
+          </a:p>
+        </p:txBody>
+      </p:sp>
+      <p:sp>
+        <p:nvSpPr>
+          <p:cNvPr id="75" name="テキスト ボックス 5">
+            <a:extLst>
+              <a:ext uri="{FF2B5EF4-FFF2-40B4-BE49-F238E27FC236}">
+                <a16:creationId xmlns:a16="http://schemas.microsoft.com/office/drawing/2014/main" id="{E2884625-0031-3BAC-2596-2C9DDBCD10B4}"/>
               </a:ext>
             </a:extLst>
           </p:cNvPr>
@@ -4763,8 +5063,8 @@
         </p:nvSpPr>
         <p:spPr>
           <a:xfrm>
-            <a:off x="3538870" y="30734344"/>
-            <a:ext cx="4669868" cy="1015663"/>
+            <a:off x="10523444" y="19719442"/>
+            <a:ext cx="9149205" cy="523220"/>
           </a:xfrm>
           <a:prstGeom prst="rect">
             <a:avLst/>
@@ -4772,21 +5072,73 @@
           <a:noFill/>
         </p:spPr>
         <p:txBody>
+          <a:bodyPr wrap="square" rtlCol="0">
+            <a:spAutoFit/>
+          </a:bodyPr>
+          <a:lstStyle/>
+          <a:p>
+            <a:pPr marL="514350" indent="-514350" algn="just">
+              <a:spcBef>
+                <a:spcPts val="2400"/>
+              </a:spcBef>
+              <a:buClr>
+                <a:srgbClr val="018185"/>
+              </a:buClr>
+              <a:buFont typeface="Wingdings" panose="05000000000000000000" pitchFamily="2" charset="2"/>
+              <a:buChar char="q"/>
+            </a:pPr>
+            <a:r>
+              <a:rPr lang="en-US" sz="2800" dirty="0">
+                <a:solidFill>
+                  <a:srgbClr val="1F2933"/>
+                </a:solidFill>
+                <a:latin typeface="Arial" pitchFamily="34" charset="0"/>
+                <a:ea typeface="Arial" pitchFamily="34" charset="-122"/>
+                <a:cs typeface="Arial" pitchFamily="34" charset="-120"/>
+              </a:rPr>
+              <a:t>Current normalization:</a:t>
+            </a:r>
+          </a:p>
+        </p:txBody>
+      </p:sp>
+      <p:sp>
+        <p:nvSpPr>
+          <p:cNvPr id="76" name="テキスト ボックス 8">
+            <a:extLst>
+              <a:ext uri="{FF2B5EF4-FFF2-40B4-BE49-F238E27FC236}">
+                <a16:creationId xmlns:a16="http://schemas.microsoft.com/office/drawing/2014/main" id="{63170633-5243-2BD5-110C-36C4909F1D37}"/>
+              </a:ext>
+            </a:extLst>
+          </p:cNvPr>
+          <p:cNvSpPr txBox="1"/>
+          <p:nvPr/>
+        </p:nvSpPr>
+        <p:spPr>
+          <a:xfrm>
+            <a:off x="886514" y="11362966"/>
+            <a:ext cx="7984365" cy="523220"/>
+          </a:xfrm>
+          <a:prstGeom prst="rect">
+            <a:avLst/>
+          </a:prstGeom>
+          <a:noFill/>
+        </p:spPr>
+        <p:txBody>
           <a:bodyPr wrap="none" rtlCol="0">
             <a:spAutoFit/>
           </a:bodyPr>
           <a:lstStyle/>
           <a:p>
-            <a:pPr algn="ctr"/>
-            <a:r>
-              <a:rPr lang="en-US" altLang="ja-JP" sz="6000" b="1" dirty="0">
+            <a:pPr algn="just"/>
+            <a:r>
+              <a:rPr lang="en-US" altLang="ja-JP" sz="2800" b="1" dirty="0">
                 <a:solidFill>
                   <a:srgbClr val="018185"/>
                 </a:solidFill>
               </a:rPr>
-              <a:t>Introduction</a:t>
-            </a:r>
-            <a:endParaRPr kumimoji="1" lang="ja-JP" altLang="en-US" sz="6000" b="1" dirty="0">
+              <a:t>DC-LINK CAPACITOR LIFETIME ESTIMATION</a:t>
+            </a:r>
+            <a:endParaRPr kumimoji="1" lang="ja-JP" altLang="en-US" sz="3600" b="1" dirty="0">
               <a:solidFill>
                 <a:srgbClr val="018185"/>
               </a:solidFill>
@@ -4796,10 +5148,107 @@
       </p:sp>
       <p:sp>
         <p:nvSpPr>
-          <p:cNvPr id="3" name="正方形/長方形 9">
+          <p:cNvPr id="97" name="テキスト ボックス 5">
             <a:extLst>
               <a:ext uri="{FF2B5EF4-FFF2-40B4-BE49-F238E27FC236}">
-                <a16:creationId xmlns:a16="http://schemas.microsoft.com/office/drawing/2014/main" id="{F9D24434-4E31-D6B6-AA1F-55B631836B94}"/>
+                <a16:creationId xmlns:a16="http://schemas.microsoft.com/office/drawing/2014/main" id="{6EB2A997-93CE-8C04-7610-F77D6618A2C8}"/>
+              </a:ext>
+            </a:extLst>
+          </p:cNvPr>
+          <p:cNvSpPr txBox="1"/>
+          <p:nvPr/>
+        </p:nvSpPr>
+        <p:spPr>
+          <a:xfrm>
+            <a:off x="461924" y="12224476"/>
+            <a:ext cx="9149205" cy="954107"/>
+          </a:xfrm>
+          <a:prstGeom prst="rect">
+            <a:avLst/>
+          </a:prstGeom>
+          <a:noFill/>
+        </p:spPr>
+        <p:txBody>
+          <a:bodyPr wrap="square" rtlCol="0">
+            <a:spAutoFit/>
+          </a:bodyPr>
+          <a:lstStyle/>
+          <a:p>
+            <a:pPr marL="457200" indent="-457200" algn="just">
+              <a:spcBef>
+                <a:spcPts val="2400"/>
+              </a:spcBef>
+              <a:buClr>
+                <a:srgbClr val="018185"/>
+              </a:buClr>
+              <a:buFont typeface="Wingdings" panose="05000000000000000000" pitchFamily="2" charset="2"/>
+              <a:buChar char="q"/>
+            </a:pPr>
+            <a:r>
+              <a:rPr lang="en-US" sz="2800" dirty="0">
+                <a:solidFill>
+                  <a:srgbClr val="1F2933"/>
+                </a:solidFill>
+                <a:latin typeface="Arial" pitchFamily="34" charset="0"/>
+                <a:ea typeface="Arial" pitchFamily="34" charset="-122"/>
+                <a:cs typeface="Arial" pitchFamily="34" charset="-120"/>
+              </a:rPr>
+              <a:t>The capacitor lifetime is strongly affected by voltage stress and hotspot temperature.</a:t>
+            </a:r>
+          </a:p>
+        </p:txBody>
+      </p:sp>
+      <p:sp>
+        <p:nvSpPr>
+          <p:cNvPr id="99" name="テキスト ボックス 8">
+            <a:extLst>
+              <a:ext uri="{FF2B5EF4-FFF2-40B4-BE49-F238E27FC236}">
+                <a16:creationId xmlns:a16="http://schemas.microsoft.com/office/drawing/2014/main" id="{B204B16B-0FC0-3F51-7B6E-ADF97F79ECEE}"/>
+              </a:ext>
+            </a:extLst>
+          </p:cNvPr>
+          <p:cNvSpPr txBox="1"/>
+          <p:nvPr/>
+        </p:nvSpPr>
+        <p:spPr>
+          <a:xfrm>
+            <a:off x="886514" y="19536141"/>
+            <a:ext cx="8716040" cy="523220"/>
+          </a:xfrm>
+          <a:prstGeom prst="rect">
+            <a:avLst/>
+          </a:prstGeom>
+          <a:noFill/>
+        </p:spPr>
+        <p:txBody>
+          <a:bodyPr wrap="square" rtlCol="0">
+            <a:spAutoFit/>
+          </a:bodyPr>
+          <a:lstStyle/>
+          <a:p>
+            <a:pPr algn="just"/>
+            <a:r>
+              <a:rPr lang="en-US" altLang="ja-JP" sz="2800" b="1" dirty="0">
+                <a:solidFill>
+                  <a:srgbClr val="018185"/>
+                </a:solidFill>
+              </a:rPr>
+              <a:t>DC-LINK CURRENT ANALYSIS OF THE INVERTER</a:t>
+            </a:r>
+            <a:endParaRPr kumimoji="1" lang="ja-JP" altLang="en-US" sz="3600" b="1" dirty="0">
+              <a:solidFill>
+                <a:srgbClr val="018185"/>
+              </a:solidFill>
+            </a:endParaRPr>
+          </a:p>
+        </p:txBody>
+      </p:sp>
+      <p:sp>
+        <p:nvSpPr>
+          <p:cNvPr id="106" name="正方形/長方形 9">
+            <a:extLst>
+              <a:ext uri="{FF2B5EF4-FFF2-40B4-BE49-F238E27FC236}">
+                <a16:creationId xmlns:a16="http://schemas.microsoft.com/office/drawing/2014/main" id="{9727DF7C-AF61-8AA5-E1B8-E42CABFA398C}"/>
               </a:ext>
             </a:extLst>
           </p:cNvPr>
@@ -4808,8 +5257,8 @@
         </p:nvSpPr>
         <p:spPr>
           <a:xfrm>
-            <a:off x="2648732" y="30632744"/>
-            <a:ext cx="419166" cy="1257132"/>
+            <a:off x="351136" y="11267285"/>
+            <a:ext cx="539462" cy="721907"/>
           </a:xfrm>
           <a:prstGeom prst="rect">
             <a:avLst/>
@@ -4841,17 +5290,21 @@
           <a:bodyPr rtlCol="0" anchor="ctr"/>
           <a:lstStyle/>
           <a:p>
-            <a:pPr algn="ctr"/>
-            <a:endParaRPr kumimoji="1" lang="ja-JP" altLang="en-US"/>
+            <a:pPr algn="just"/>
+            <a:r>
+              <a:rPr kumimoji="1" lang="en-US" altLang="ja-JP" sz="4400" dirty="0"/>
+              <a:t>2</a:t>
+            </a:r>
+            <a:endParaRPr kumimoji="1" lang="ja-JP" altLang="en-US" sz="4400" dirty="0"/>
           </a:p>
         </p:txBody>
       </p:sp>
       <p:cxnSp>
         <p:nvCxnSpPr>
-          <p:cNvPr id="4" name="直線コネクタ 11">
+          <p:cNvPr id="107" name="直線コネクタ 11">
             <a:extLst>
               <a:ext uri="{FF2B5EF4-FFF2-40B4-BE49-F238E27FC236}">
-                <a16:creationId xmlns:a16="http://schemas.microsoft.com/office/drawing/2014/main" id="{6BADB7B4-F764-F87D-A24B-DD46A2E56484}"/>
+                <a16:creationId xmlns:a16="http://schemas.microsoft.com/office/drawing/2014/main" id="{A9694429-04EE-BCF5-91BB-96DD7E900014}"/>
               </a:ext>
             </a:extLst>
           </p:cNvPr>
@@ -4862,8 +5315,8 @@
         </p:nvCxnSpPr>
         <p:spPr>
           <a:xfrm>
-            <a:off x="2512848" y="31889876"/>
-            <a:ext cx="12333657" cy="0"/>
+            <a:off x="351136" y="11986694"/>
+            <a:ext cx="9211875" cy="2499"/>
           </a:xfrm>
           <a:prstGeom prst="line">
             <a:avLst/>
@@ -4891,166 +5344,10 @@
       </p:cxnSp>
       <p:sp>
         <p:nvSpPr>
-          <p:cNvPr id="13" name="テキスト ボックス 5">
+          <p:cNvPr id="109" name="正方形/長方形 9">
             <a:extLst>
               <a:ext uri="{FF2B5EF4-FFF2-40B4-BE49-F238E27FC236}">
-                <a16:creationId xmlns:a16="http://schemas.microsoft.com/office/drawing/2014/main" id="{CFC56C37-23B9-7BF0-38F0-1454C98F4ADE}"/>
-              </a:ext>
-            </a:extLst>
-          </p:cNvPr>
-          <p:cNvSpPr txBox="1"/>
-          <p:nvPr/>
-        </p:nvSpPr>
-        <p:spPr>
-          <a:xfrm>
-            <a:off x="1357818" y="8387607"/>
-            <a:ext cx="12197773" cy="6063198"/>
-          </a:xfrm>
-          <a:prstGeom prst="rect">
-            <a:avLst/>
-          </a:prstGeom>
-          <a:noFill/>
-        </p:spPr>
-        <p:txBody>
-          <a:bodyPr wrap="square" rtlCol="0">
-            <a:spAutoFit/>
-          </a:bodyPr>
-          <a:lstStyle/>
-          <a:p>
-            <a:pPr marL="685800" indent="-685800">
-              <a:spcBef>
-                <a:spcPts val="2400"/>
-              </a:spcBef>
-              <a:buClr>
-                <a:srgbClr val="018185"/>
-              </a:buClr>
-              <a:buFont typeface="Wingdings" panose="05000000000000000000" pitchFamily="2" charset="2"/>
-              <a:buChar char="p"/>
-            </a:pPr>
-            <a:r>
-              <a:rPr lang="en-US" sz="4000" dirty="0">
-                <a:solidFill>
-                  <a:srgbClr val="1F2933"/>
-                </a:solidFill>
-                <a:latin typeface="Arial" pitchFamily="34" charset="0"/>
-                <a:ea typeface="Arial" pitchFamily="34" charset="-122"/>
-                <a:cs typeface="Arial" pitchFamily="34" charset="-120"/>
-              </a:rPr>
-              <a:t>DC-link capacitors are a major reliability bottleneck in industrial power converters. </a:t>
-            </a:r>
-          </a:p>
-          <a:p>
-            <a:pPr marL="685800" indent="-685800">
-              <a:spcBef>
-                <a:spcPts val="2400"/>
-              </a:spcBef>
-              <a:buClr>
-                <a:srgbClr val="018185"/>
-              </a:buClr>
-              <a:buFont typeface="Wingdings" panose="05000000000000000000" pitchFamily="2" charset="2"/>
-              <a:buChar char="p"/>
-            </a:pPr>
-            <a:r>
-              <a:rPr lang="en-US" sz="4000" dirty="0">
-                <a:solidFill>
-                  <a:srgbClr val="1F2933"/>
-                </a:solidFill>
-                <a:latin typeface="Arial" pitchFamily="34" charset="0"/>
-                <a:ea typeface="Arial" pitchFamily="34" charset="-122"/>
-                <a:cs typeface="Arial" pitchFamily="34" charset="-120"/>
-              </a:rPr>
-              <a:t>Ripple current increases ESR losses, hotspot temperature, and degradation.</a:t>
-            </a:r>
-          </a:p>
-          <a:p>
-            <a:pPr marL="685800" indent="-685800">
-              <a:spcBef>
-                <a:spcPts val="2400"/>
-              </a:spcBef>
-              <a:buClr>
-                <a:srgbClr val="018185"/>
-              </a:buClr>
-              <a:buFont typeface="Wingdings" panose="05000000000000000000" pitchFamily="2" charset="2"/>
-              <a:buChar char="p"/>
-            </a:pPr>
-            <a:r>
-              <a:rPr lang="en-US" sz="4000" dirty="0">
-                <a:solidFill>
-                  <a:srgbClr val="1F2933"/>
-                </a:solidFill>
-                <a:latin typeface="Arial" pitchFamily="34" charset="0"/>
-                <a:ea typeface="Arial" pitchFamily="34" charset="-122"/>
-                <a:cs typeface="Arial" pitchFamily="34" charset="-120"/>
-              </a:rPr>
-              <a:t>Conventional single-carrier SPWM cannot actively coordinate switching instants between inverter legs.</a:t>
-            </a:r>
-          </a:p>
-          <a:p>
-            <a:pPr marL="685800" indent="-685800">
-              <a:spcBef>
-                <a:spcPts val="2400"/>
-              </a:spcBef>
-              <a:buClr>
-                <a:srgbClr val="018185"/>
-              </a:buClr>
-              <a:buFont typeface="Wingdings" panose="05000000000000000000" pitchFamily="2" charset="2"/>
-              <a:buChar char="p"/>
-            </a:pPr>
-            <a:endParaRPr kumimoji="1" lang="ja-JP" altLang="en-US" sz="4800" dirty="0"/>
-          </a:p>
-        </p:txBody>
-      </p:sp>
-      <p:sp>
-        <p:nvSpPr>
-          <p:cNvPr id="14" name="テキスト ボックス 8">
-            <a:extLst>
-              <a:ext uri="{FF2B5EF4-FFF2-40B4-BE49-F238E27FC236}">
-                <a16:creationId xmlns:a16="http://schemas.microsoft.com/office/drawing/2014/main" id="{025244C0-8D5A-942D-116F-A90F8046EFB1}"/>
-              </a:ext>
-            </a:extLst>
-          </p:cNvPr>
-          <p:cNvSpPr txBox="1"/>
-          <p:nvPr/>
-        </p:nvSpPr>
-        <p:spPr>
-          <a:xfrm>
-            <a:off x="2567756" y="6865899"/>
-            <a:ext cx="4030270" cy="1015663"/>
-          </a:xfrm>
-          <a:prstGeom prst="rect">
-            <a:avLst/>
-          </a:prstGeom>
-          <a:noFill/>
-        </p:spPr>
-        <p:txBody>
-          <a:bodyPr wrap="none" rtlCol="0">
-            <a:spAutoFit/>
-          </a:bodyPr>
-          <a:lstStyle/>
-          <a:p>
-            <a:pPr algn="ctr"/>
-            <a:r>
-              <a:rPr lang="en-US" altLang="ja-JP" sz="6000" b="1" dirty="0">
-                <a:solidFill>
-                  <a:srgbClr val="018185"/>
-                </a:solidFill>
-              </a:rPr>
-              <a:t>Motivation</a:t>
-            </a:r>
-            <a:endParaRPr kumimoji="1" lang="ja-JP" altLang="en-US" sz="7200" b="1" dirty="0">
-              <a:solidFill>
-                <a:srgbClr val="018185"/>
-              </a:solidFill>
-            </a:endParaRPr>
-          </a:p>
-        </p:txBody>
-      </p:sp>
-      <p:sp>
-        <p:nvSpPr>
-          <p:cNvPr id="15" name="正方形/長方形 9">
-            <a:extLst>
-              <a:ext uri="{FF2B5EF4-FFF2-40B4-BE49-F238E27FC236}">
-                <a16:creationId xmlns:a16="http://schemas.microsoft.com/office/drawing/2014/main" id="{158509F0-E6E9-1FAF-AC1F-8A14E6E97176}"/>
+                <a16:creationId xmlns:a16="http://schemas.microsoft.com/office/drawing/2014/main" id="{6251A26D-D5B3-873D-B3DC-3C4DC9B0AE2D}"/>
               </a:ext>
             </a:extLst>
           </p:cNvPr>
@@ -5059,8 +5356,8 @@
         </p:nvSpPr>
         <p:spPr>
           <a:xfrm>
-            <a:off x="1357818" y="6764299"/>
-            <a:ext cx="419166" cy="1257132"/>
+            <a:off x="343645" y="19442959"/>
+            <a:ext cx="539462" cy="721907"/>
           </a:xfrm>
           <a:prstGeom prst="rect">
             <a:avLst/>
@@ -5092,17 +5389,20 @@
           <a:bodyPr rtlCol="0" anchor="ctr"/>
           <a:lstStyle/>
           <a:p>
-            <a:pPr algn="ctr"/>
-            <a:endParaRPr kumimoji="1" lang="ja-JP" altLang="en-US"/>
+            <a:pPr algn="just"/>
+            <a:r>
+              <a:rPr kumimoji="1" lang="en-US" altLang="ja-JP" sz="4400" dirty="0"/>
+              <a:t>3</a:t>
+            </a:r>
           </a:p>
         </p:txBody>
       </p:sp>
       <p:cxnSp>
         <p:nvCxnSpPr>
-          <p:cNvPr id="16" name="直線コネクタ 11">
+          <p:cNvPr id="110" name="直線コネクタ 11">
             <a:extLst>
               <a:ext uri="{FF2B5EF4-FFF2-40B4-BE49-F238E27FC236}">
-                <a16:creationId xmlns:a16="http://schemas.microsoft.com/office/drawing/2014/main" id="{38102944-3846-DAD0-D3C4-E1DB018FF127}"/>
+                <a16:creationId xmlns:a16="http://schemas.microsoft.com/office/drawing/2014/main" id="{4A87FCC6-9F13-5760-7D9C-4BA2702F1CD5}"/>
               </a:ext>
             </a:extLst>
           </p:cNvPr>
@@ -5113,8 +5413,8 @@
         </p:nvCxnSpPr>
         <p:spPr>
           <a:xfrm>
-            <a:off x="1357818" y="8021431"/>
-            <a:ext cx="12333657" cy="0"/>
+            <a:off x="343645" y="20162368"/>
+            <a:ext cx="9211875" cy="2499"/>
           </a:xfrm>
           <a:prstGeom prst="line">
             <a:avLst/>
@@ -5142,10 +5442,10 @@
       </p:cxnSp>
       <p:sp>
         <p:nvSpPr>
-          <p:cNvPr id="18" name="テキスト ボックス 5">
+          <p:cNvPr id="117" name="テキスト ボックス 5">
             <a:extLst>
               <a:ext uri="{FF2B5EF4-FFF2-40B4-BE49-F238E27FC236}">
-                <a16:creationId xmlns:a16="http://schemas.microsoft.com/office/drawing/2014/main" id="{7A48CA97-1047-4423-56BC-E1D253CE5511}"/>
+                <a16:creationId xmlns:a16="http://schemas.microsoft.com/office/drawing/2014/main" id="{9EAB9A03-F145-9C47-9640-0CAEBDBBD0FD}"/>
               </a:ext>
             </a:extLst>
           </p:cNvPr>
@@ -5154,8 +5454,8 @@
         </p:nvSpPr>
         <p:spPr>
           <a:xfrm>
-            <a:off x="16363840" y="29012891"/>
-            <a:ext cx="12197773" cy="6924973"/>
+            <a:off x="571316" y="23577077"/>
+            <a:ext cx="3881834" cy="523220"/>
           </a:xfrm>
           <a:prstGeom prst="rect">
             <a:avLst/>
@@ -5168,7 +5468,7 @@
           </a:bodyPr>
           <a:lstStyle/>
           <a:p>
-            <a:pPr marL="685800" indent="-685800">
+            <a:pPr marL="685800" indent="-685800" algn="just">
               <a:spcBef>
                 <a:spcPts val="2400"/>
               </a:spcBef>
@@ -5176,10 +5476,10 @@
                 <a:srgbClr val="018185"/>
               </a:buClr>
               <a:buFont typeface="Wingdings" panose="05000000000000000000" pitchFamily="2" charset="2"/>
-              <a:buChar char="p"/>
+              <a:buChar char="q"/>
             </a:pPr>
             <a:r>
-              <a:rPr lang="en-US" sz="4800" dirty="0">
+              <a:rPr lang="en-US" sz="2800" dirty="0">
                 <a:solidFill>
                   <a:srgbClr val="1F2933"/>
                 </a:solidFill>
@@ -5187,11 +5487,40 @@
                 <a:ea typeface="Arial" pitchFamily="34" charset="-122"/>
                 <a:cs typeface="Arial" pitchFamily="34" charset="-120"/>
               </a:rPr>
-              <a:t>DC-link capacitors are a major reliability bottleneck in industrial power converters. </a:t>
-            </a:r>
-          </a:p>
-          <a:p>
-            <a:pPr marL="685800" indent="-685800">
+              <a:t>Capacitor Current:</a:t>
+            </a:r>
+          </a:p>
+        </p:txBody>
+      </p:sp>
+      <p:sp>
+        <p:nvSpPr>
+          <p:cNvPr id="137" name="テキスト ボックス 5">
+            <a:extLst>
+              <a:ext uri="{FF2B5EF4-FFF2-40B4-BE49-F238E27FC236}">
+                <a16:creationId xmlns:a16="http://schemas.microsoft.com/office/drawing/2014/main" id="{D044910A-2647-431B-791B-C2F177E72391}"/>
+              </a:ext>
+            </a:extLst>
+          </p:cNvPr>
+          <p:cNvSpPr txBox="1"/>
+          <p:nvPr/>
+        </p:nvSpPr>
+        <p:spPr>
+          <a:xfrm>
+            <a:off x="571315" y="24586977"/>
+            <a:ext cx="9149205" cy="523220"/>
+          </a:xfrm>
+          <a:prstGeom prst="rect">
+            <a:avLst/>
+          </a:prstGeom>
+          <a:noFill/>
+        </p:spPr>
+        <p:txBody>
+          <a:bodyPr wrap="square" rtlCol="0">
+            <a:spAutoFit/>
+          </a:bodyPr>
+          <a:lstStyle/>
+          <a:p>
+            <a:pPr marL="685800" indent="-685800" algn="just">
               <a:spcBef>
                 <a:spcPts val="2400"/>
               </a:spcBef>
@@ -5199,10 +5528,10 @@
                 <a:srgbClr val="018185"/>
               </a:buClr>
               <a:buFont typeface="Wingdings" panose="05000000000000000000" pitchFamily="2" charset="2"/>
-              <a:buChar char="p"/>
+              <a:buChar char="q"/>
             </a:pPr>
             <a:r>
-              <a:rPr lang="en-US" sz="4800" dirty="0">
+              <a:rPr lang="en-US" sz="2800" dirty="0">
                 <a:solidFill>
                   <a:srgbClr val="1F2933"/>
                 </a:solidFill>
@@ -5210,53 +5539,17 @@
                 <a:ea typeface="Arial" pitchFamily="34" charset="-122"/>
                 <a:cs typeface="Arial" pitchFamily="34" charset="-120"/>
               </a:rPr>
-              <a:t>Ripple current increases ESR losses, hotspot temperature, and degradation.</a:t>
-            </a:r>
-          </a:p>
-          <a:p>
-            <a:pPr marL="685800" indent="-685800">
-              <a:spcBef>
-                <a:spcPts val="2400"/>
-              </a:spcBef>
-              <a:buClr>
-                <a:srgbClr val="018185"/>
-              </a:buClr>
-              <a:buFont typeface="Wingdings" panose="05000000000000000000" pitchFamily="2" charset="2"/>
-              <a:buChar char="p"/>
-            </a:pPr>
-            <a:r>
-              <a:rPr lang="en-US" sz="4800" dirty="0">
-                <a:solidFill>
-                  <a:srgbClr val="1F2933"/>
-                </a:solidFill>
-                <a:latin typeface="Arial" pitchFamily="34" charset="0"/>
-                <a:ea typeface="Arial" pitchFamily="34" charset="-122"/>
-                <a:cs typeface="Arial" pitchFamily="34" charset="-120"/>
-              </a:rPr>
-              <a:t>Conventional single-carrier SPWM cannot actively coordinate switching instants between inverter legs.</a:t>
-            </a:r>
-          </a:p>
-          <a:p>
-            <a:pPr marL="685800" indent="-685800">
-              <a:spcBef>
-                <a:spcPts val="2400"/>
-              </a:spcBef>
-              <a:buClr>
-                <a:srgbClr val="018185"/>
-              </a:buClr>
-              <a:buFont typeface="Wingdings" panose="05000000000000000000" pitchFamily="2" charset="2"/>
-              <a:buChar char="p"/>
-            </a:pPr>
-            <a:endParaRPr kumimoji="1" lang="ja-JP" altLang="en-US" sz="4800" dirty="0"/>
-          </a:p>
-        </p:txBody>
-      </p:sp>
-      <p:sp>
-        <p:nvSpPr>
-          <p:cNvPr id="19" name="テキスト ボックス 8">
+              <a:t>RMS calculation within switching periods:</a:t>
+            </a:r>
+          </a:p>
+        </p:txBody>
+      </p:sp>
+      <p:sp>
+        <p:nvSpPr>
+          <p:cNvPr id="140" name="テキスト ボックス 8">
             <a:extLst>
               <a:ext uri="{FF2B5EF4-FFF2-40B4-BE49-F238E27FC236}">
-                <a16:creationId xmlns:a16="http://schemas.microsoft.com/office/drawing/2014/main" id="{3B99841A-E622-6791-46BD-87723F726A05}"/>
+                <a16:creationId xmlns:a16="http://schemas.microsoft.com/office/drawing/2014/main" id="{CA2414EE-F1F4-2398-479F-D1D7AF34E331}"/>
               </a:ext>
             </a:extLst>
           </p:cNvPr>
@@ -5265,8 +5558,8 @@
         </p:nvSpPr>
         <p:spPr>
           <a:xfrm>
-            <a:off x="16033786" y="6825327"/>
-            <a:ext cx="4929555" cy="1015663"/>
+            <a:off x="852695" y="28411005"/>
+            <a:ext cx="8595558" cy="523220"/>
           </a:xfrm>
           <a:prstGeom prst="rect">
             <a:avLst/>
@@ -5279,16 +5572,16 @@
           </a:bodyPr>
           <a:lstStyle/>
           <a:p>
-            <a:pPr algn="ctr"/>
-            <a:r>
-              <a:rPr lang="en-US" altLang="ja-JP" sz="6000" b="1" dirty="0">
+            <a:pPr algn="just"/>
+            <a:r>
+              <a:rPr lang="en-US" altLang="ja-JP" sz="2800" b="1" dirty="0">
                 <a:solidFill>
                   <a:srgbClr val="018185"/>
                 </a:solidFill>
               </a:rPr>
-              <a:t>Main Results</a:t>
-            </a:r>
-            <a:endParaRPr kumimoji="1" lang="ja-JP" altLang="en-US" sz="6000" b="1" dirty="0">
+              <a:t>CONVENTIONAL SINGLE-CARRIER-BASED PWM</a:t>
+            </a:r>
+            <a:endParaRPr kumimoji="1" lang="ja-JP" altLang="en-US" sz="3600" b="1" dirty="0">
               <a:solidFill>
                 <a:srgbClr val="018185"/>
               </a:solidFill>
@@ -5298,10 +5591,10 @@
       </p:sp>
       <p:sp>
         <p:nvSpPr>
-          <p:cNvPr id="20" name="正方形/長方形 9">
+          <p:cNvPr id="141" name="正方形/長方形 9">
             <a:extLst>
               <a:ext uri="{FF2B5EF4-FFF2-40B4-BE49-F238E27FC236}">
-                <a16:creationId xmlns:a16="http://schemas.microsoft.com/office/drawing/2014/main" id="{329997E1-9598-6AFA-417C-5001CBD28C3B}"/>
+                <a16:creationId xmlns:a16="http://schemas.microsoft.com/office/drawing/2014/main" id="{CDC96B96-BE6F-664E-8A2D-D1420DAA3A87}"/>
               </a:ext>
             </a:extLst>
           </p:cNvPr>
@@ -5310,8 +5603,8 @@
         </p:nvSpPr>
         <p:spPr>
           <a:xfrm>
-            <a:off x="15273490" y="6723727"/>
-            <a:ext cx="419166" cy="1257132"/>
+            <a:off x="340911" y="28311662"/>
+            <a:ext cx="539462" cy="721907"/>
           </a:xfrm>
           <a:prstGeom prst="rect">
             <a:avLst/>
@@ -5343,17 +5636,21 @@
           <a:bodyPr rtlCol="0" anchor="ctr"/>
           <a:lstStyle/>
           <a:p>
-            <a:pPr algn="ctr"/>
-            <a:endParaRPr kumimoji="1" lang="ja-JP" altLang="en-US"/>
+            <a:pPr algn="just"/>
+            <a:r>
+              <a:rPr kumimoji="1" lang="en-US" altLang="ja-JP" sz="4400" dirty="0"/>
+              <a:t>4</a:t>
+            </a:r>
+            <a:endParaRPr kumimoji="1" lang="ja-JP" altLang="en-US" sz="4400" dirty="0"/>
           </a:p>
         </p:txBody>
       </p:sp>
       <p:cxnSp>
         <p:nvCxnSpPr>
-          <p:cNvPr id="21" name="直線コネクタ 11">
+          <p:cNvPr id="142" name="直線コネクタ 11">
             <a:extLst>
               <a:ext uri="{FF2B5EF4-FFF2-40B4-BE49-F238E27FC236}">
-                <a16:creationId xmlns:a16="http://schemas.microsoft.com/office/drawing/2014/main" id="{13219B19-12F4-2C58-8566-1495F9971DBB}"/>
+                <a16:creationId xmlns:a16="http://schemas.microsoft.com/office/drawing/2014/main" id="{C8199B52-4DB9-A5A5-5BF2-D13CB12D5531}"/>
               </a:ext>
             </a:extLst>
           </p:cNvPr>
@@ -5364,8 +5661,8 @@
         </p:nvCxnSpPr>
         <p:spPr>
           <a:xfrm>
-            <a:off x="15273490" y="7980859"/>
-            <a:ext cx="12333657" cy="0"/>
+            <a:off x="340911" y="29031071"/>
+            <a:ext cx="9211875" cy="2499"/>
           </a:xfrm>
           <a:prstGeom prst="line">
             <a:avLst/>
@@ -5393,10 +5690,55 @@
       </p:cxnSp>
       <p:sp>
         <p:nvSpPr>
-          <p:cNvPr id="23" name="Text 19">
+          <p:cNvPr id="148" name="テキスト ボックス 8">
             <a:extLst>
               <a:ext uri="{FF2B5EF4-FFF2-40B4-BE49-F238E27FC236}">
-                <a16:creationId xmlns:a16="http://schemas.microsoft.com/office/drawing/2014/main" id="{497CB52B-9AB9-EB60-EAD4-32969AD31577}"/>
+                <a16:creationId xmlns:a16="http://schemas.microsoft.com/office/drawing/2014/main" id="{1EAFAEB0-A16B-F87E-F1B5-9243AB99AA3F}"/>
+              </a:ext>
+            </a:extLst>
+          </p:cNvPr>
+          <p:cNvSpPr txBox="1"/>
+          <p:nvPr/>
+        </p:nvSpPr>
+        <p:spPr>
+          <a:xfrm>
+            <a:off x="10893796" y="4389393"/>
+            <a:ext cx="8573758" cy="523220"/>
+          </a:xfrm>
+          <a:prstGeom prst="rect">
+            <a:avLst/>
+          </a:prstGeom>
+          <a:noFill/>
+        </p:spPr>
+        <p:txBody>
+          <a:bodyPr wrap="none" rtlCol="0">
+            <a:spAutoFit/>
+          </a:bodyPr>
+          <a:lstStyle/>
+          <a:p>
+            <a:pPr algn="just"/>
+            <a:r>
+              <a:rPr lang="en-US" altLang="ja-JP" sz="2800" b="1" dirty="0">
+                <a:solidFill>
+                  <a:srgbClr val="018185"/>
+                </a:solidFill>
+              </a:rPr>
+              <a:t>PROPOSED MULTI-CARRIER PWM TECHNIQUE</a:t>
+            </a:r>
+            <a:endParaRPr kumimoji="1" lang="ja-JP" altLang="en-US" sz="3600" b="1" dirty="0">
+              <a:solidFill>
+                <a:srgbClr val="018185"/>
+              </a:solidFill>
+            </a:endParaRPr>
+          </a:p>
+        </p:txBody>
+      </p:sp>
+      <p:sp>
+        <p:nvSpPr>
+          <p:cNvPr id="149" name="正方形/長方形 9">
+            <a:extLst>
+              <a:ext uri="{FF2B5EF4-FFF2-40B4-BE49-F238E27FC236}">
+                <a16:creationId xmlns:a16="http://schemas.microsoft.com/office/drawing/2014/main" id="{6D60CAA8-B1A2-4091-3F21-560B0006B3C5}"/>
               </a:ext>
             </a:extLst>
           </p:cNvPr>
@@ -5405,487 +5747,8 @@
         </p:nvSpPr>
         <p:spPr>
           <a:xfrm>
-            <a:off x="15020444" y="8675422"/>
-            <a:ext cx="4230533" cy="411480"/>
-          </a:xfrm>
-          <a:prstGeom prst="rect">
-            <a:avLst/>
-          </a:prstGeom>
-          <a:noFill/>
-          <a:ln/>
-        </p:spPr>
-        <p:txBody>
-          <a:bodyPr wrap="square" lIns="635" tIns="635" rIns="635" bIns="635" rtlCol="0" anchor="ctr">
-            <a:noAutofit/>
-          </a:bodyPr>
-          <a:lstStyle/>
-          <a:p>
-            <a:pPr marL="0" indent="0" algn="ctr">
-              <a:buNone/>
-            </a:pPr>
-            <a:r>
-              <a:rPr lang="en-US" sz="3600" dirty="0">
-                <a:solidFill>
-                  <a:srgbClr val="677481"/>
-                </a:solidFill>
-                <a:latin typeface="Arial" pitchFamily="34" charset="0"/>
-                <a:ea typeface="Arial" pitchFamily="34" charset="-122"/>
-                <a:cs typeface="Arial" pitchFamily="34" charset="-120"/>
-              </a:rPr>
-              <a:t>up to</a:t>
-            </a:r>
-            <a:endParaRPr lang="en-US" sz="3600" dirty="0"/>
-          </a:p>
-        </p:txBody>
-      </p:sp>
-      <p:sp>
-        <p:nvSpPr>
-          <p:cNvPr id="24" name="Text 20">
-            <a:extLst>
-              <a:ext uri="{FF2B5EF4-FFF2-40B4-BE49-F238E27FC236}">
-                <a16:creationId xmlns:a16="http://schemas.microsoft.com/office/drawing/2014/main" id="{40AFC767-0DA9-ACDF-405E-D6400590758A}"/>
-              </a:ext>
-            </a:extLst>
-          </p:cNvPr>
-          <p:cNvSpPr/>
-          <p:nvPr/>
-        </p:nvSpPr>
-        <p:spPr>
-          <a:xfrm>
-            <a:off x="14963557" y="9474172"/>
-            <a:ext cx="4230533" cy="731520"/>
-          </a:xfrm>
-          <a:prstGeom prst="rect">
-            <a:avLst/>
-          </a:prstGeom>
-          <a:noFill/>
-          <a:ln/>
-        </p:spPr>
-        <p:txBody>
-          <a:bodyPr wrap="square" lIns="635" tIns="635" rIns="635" bIns="635" rtlCol="0" anchor="ctr">
-            <a:noAutofit/>
-          </a:bodyPr>
-          <a:lstStyle/>
-          <a:p>
-            <a:pPr marL="0" indent="0" algn="ctr">
-              <a:buNone/>
-            </a:pPr>
-            <a:r>
-              <a:rPr lang="en-US" sz="6000" b="1" dirty="0">
-                <a:solidFill>
-                  <a:srgbClr val="0066A1"/>
-                </a:solidFill>
-                <a:latin typeface="Arial" pitchFamily="34" charset="0"/>
-                <a:ea typeface="Arial" pitchFamily="34" charset="-122"/>
-                <a:cs typeface="Arial" pitchFamily="34" charset="-120"/>
-              </a:rPr>
-              <a:t>27%</a:t>
-            </a:r>
-            <a:endParaRPr lang="en-US" sz="6000" dirty="0"/>
-          </a:p>
-        </p:txBody>
-      </p:sp>
-      <p:sp>
-        <p:nvSpPr>
-          <p:cNvPr id="25" name="Text 21">
-            <a:extLst>
-              <a:ext uri="{FF2B5EF4-FFF2-40B4-BE49-F238E27FC236}">
-                <a16:creationId xmlns:a16="http://schemas.microsoft.com/office/drawing/2014/main" id="{2D45A27A-915A-B724-37A8-7488B42D9247}"/>
-              </a:ext>
-            </a:extLst>
-          </p:cNvPr>
-          <p:cNvSpPr/>
-          <p:nvPr/>
-        </p:nvSpPr>
-        <p:spPr>
-          <a:xfrm>
-            <a:off x="15020445" y="10597637"/>
-            <a:ext cx="4230533" cy="685800"/>
-          </a:xfrm>
-          <a:prstGeom prst="rect">
-            <a:avLst/>
-          </a:prstGeom>
-          <a:noFill/>
-          <a:ln/>
-        </p:spPr>
-        <p:txBody>
-          <a:bodyPr wrap="square" lIns="635" tIns="635" rIns="635" bIns="635" rtlCol="0" anchor="ctr">
-            <a:normAutofit/>
-          </a:bodyPr>
-          <a:lstStyle/>
-          <a:p>
-            <a:pPr marL="0" indent="0" algn="ctr">
-              <a:buNone/>
-            </a:pPr>
-            <a:r>
-              <a:rPr lang="en-US" sz="3600" dirty="0">
-                <a:solidFill>
-                  <a:srgbClr val="1F2933"/>
-                </a:solidFill>
-                <a:latin typeface="Arial" pitchFamily="34" charset="0"/>
-                <a:ea typeface="Arial" pitchFamily="34" charset="-122"/>
-                <a:cs typeface="Arial" pitchFamily="34" charset="-120"/>
-              </a:rPr>
-              <a:t>lower RMS current</a:t>
-            </a:r>
-            <a:endParaRPr lang="en-US" sz="3600" dirty="0"/>
-          </a:p>
-        </p:txBody>
-      </p:sp>
-      <p:sp>
-        <p:nvSpPr>
-          <p:cNvPr id="26" name="Text 22">
-            <a:extLst>
-              <a:ext uri="{FF2B5EF4-FFF2-40B4-BE49-F238E27FC236}">
-                <a16:creationId xmlns:a16="http://schemas.microsoft.com/office/drawing/2014/main" id="{1AAC9BD3-29E0-1B33-0E29-539575E9B1B8}"/>
-              </a:ext>
-            </a:extLst>
-          </p:cNvPr>
-          <p:cNvSpPr/>
-          <p:nvPr/>
-        </p:nvSpPr>
-        <p:spPr>
-          <a:xfrm>
-            <a:off x="19250977" y="8585137"/>
-            <a:ext cx="4230533" cy="411480"/>
-          </a:xfrm>
-          <a:prstGeom prst="rect">
-            <a:avLst/>
-          </a:prstGeom>
-          <a:noFill/>
-          <a:ln/>
-        </p:spPr>
-        <p:txBody>
-          <a:bodyPr wrap="square" lIns="635" tIns="635" rIns="635" bIns="635" rtlCol="0" anchor="ctr">
-            <a:noAutofit/>
-          </a:bodyPr>
-          <a:lstStyle/>
-          <a:p>
-            <a:pPr marL="0" indent="0" algn="ctr">
-              <a:buNone/>
-            </a:pPr>
-            <a:r>
-              <a:rPr lang="en-US" sz="3600" dirty="0">
-                <a:solidFill>
-                  <a:srgbClr val="677481"/>
-                </a:solidFill>
-                <a:latin typeface="Arial" pitchFamily="34" charset="0"/>
-                <a:ea typeface="Arial" pitchFamily="34" charset="-122"/>
-                <a:cs typeface="Arial" pitchFamily="34" charset="-120"/>
-              </a:rPr>
-              <a:t>23%</a:t>
-            </a:r>
-            <a:endParaRPr lang="en-US" sz="3600" dirty="0"/>
-          </a:p>
-        </p:txBody>
-      </p:sp>
-      <p:sp>
-        <p:nvSpPr>
-          <p:cNvPr id="27" name="Text 23">
-            <a:extLst>
-              <a:ext uri="{FF2B5EF4-FFF2-40B4-BE49-F238E27FC236}">
-                <a16:creationId xmlns:a16="http://schemas.microsoft.com/office/drawing/2014/main" id="{BA92114D-8FB0-1077-4D10-6026D1896C17}"/>
-              </a:ext>
-            </a:extLst>
-          </p:cNvPr>
-          <p:cNvSpPr/>
-          <p:nvPr/>
-        </p:nvSpPr>
-        <p:spPr>
-          <a:xfrm>
-            <a:off x="19194089" y="9454354"/>
-            <a:ext cx="4230533" cy="731520"/>
-          </a:xfrm>
-          <a:prstGeom prst="rect">
-            <a:avLst/>
-          </a:prstGeom>
-          <a:noFill/>
-          <a:ln/>
-        </p:spPr>
-        <p:txBody>
-          <a:bodyPr wrap="square" lIns="635" tIns="635" rIns="635" bIns="635" rtlCol="0" anchor="ctr">
-            <a:noAutofit/>
-          </a:bodyPr>
-          <a:lstStyle/>
-          <a:p>
-            <a:pPr marL="0" indent="0" algn="ctr">
-              <a:buNone/>
-            </a:pPr>
-            <a:r>
-              <a:rPr lang="en-US" sz="6000" b="1" dirty="0">
-                <a:solidFill>
-                  <a:srgbClr val="118C44"/>
-                </a:solidFill>
-                <a:latin typeface="Arial" pitchFamily="34" charset="0"/>
-                <a:ea typeface="Arial" pitchFamily="34" charset="-122"/>
-                <a:cs typeface="Arial" pitchFamily="34" charset="-120"/>
-              </a:rPr>
-              <a:t>case study</a:t>
-            </a:r>
-            <a:endParaRPr lang="en-US" sz="6000" dirty="0"/>
-          </a:p>
-        </p:txBody>
-      </p:sp>
-      <p:sp>
-        <p:nvSpPr>
-          <p:cNvPr id="28" name="Text 24">
-            <a:extLst>
-              <a:ext uri="{FF2B5EF4-FFF2-40B4-BE49-F238E27FC236}">
-                <a16:creationId xmlns:a16="http://schemas.microsoft.com/office/drawing/2014/main" id="{AF2E8BFC-B8AF-080F-148D-5A5060CB768D}"/>
-              </a:ext>
-            </a:extLst>
-          </p:cNvPr>
-          <p:cNvSpPr/>
-          <p:nvPr/>
-        </p:nvSpPr>
-        <p:spPr>
-          <a:xfrm>
-            <a:off x="19250977" y="10689643"/>
-            <a:ext cx="4230533" cy="685800"/>
-          </a:xfrm>
-          <a:prstGeom prst="rect">
-            <a:avLst/>
-          </a:prstGeom>
-          <a:noFill/>
-          <a:ln/>
-        </p:spPr>
-        <p:txBody>
-          <a:bodyPr wrap="square" lIns="635" tIns="635" rIns="635" bIns="635" rtlCol="0" anchor="ctr">
-            <a:normAutofit/>
-          </a:bodyPr>
-          <a:lstStyle/>
-          <a:p>
-            <a:pPr marL="0" indent="0" algn="ctr">
-              <a:buNone/>
-            </a:pPr>
-            <a:r>
-              <a:rPr lang="en-US" sz="3600" dirty="0">
-                <a:solidFill>
-                  <a:srgbClr val="1F2933"/>
-                </a:solidFill>
-                <a:latin typeface="Arial" pitchFamily="34" charset="0"/>
-                <a:ea typeface="Arial" pitchFamily="34" charset="-122"/>
-                <a:cs typeface="Arial" pitchFamily="34" charset="-120"/>
-              </a:rPr>
-              <a:t>27.6 A -&gt; 21.2 A</a:t>
-            </a:r>
-            <a:endParaRPr lang="en-US" sz="3600" dirty="0"/>
-          </a:p>
-        </p:txBody>
-      </p:sp>
-      <p:sp>
-        <p:nvSpPr>
-          <p:cNvPr id="29" name="Text 25">
-            <a:extLst>
-              <a:ext uri="{FF2B5EF4-FFF2-40B4-BE49-F238E27FC236}">
-                <a16:creationId xmlns:a16="http://schemas.microsoft.com/office/drawing/2014/main" id="{C4750E53-A6D6-E856-8A5C-77BEEB481F06}"/>
-              </a:ext>
-            </a:extLst>
-          </p:cNvPr>
-          <p:cNvSpPr/>
-          <p:nvPr/>
-        </p:nvSpPr>
-        <p:spPr>
-          <a:xfrm>
-            <a:off x="23481510" y="8585137"/>
-            <a:ext cx="4230533" cy="411480"/>
-          </a:xfrm>
-          <a:prstGeom prst="rect">
-            <a:avLst/>
-          </a:prstGeom>
-          <a:noFill/>
-          <a:ln/>
-        </p:spPr>
-        <p:txBody>
-          <a:bodyPr wrap="square" lIns="635" tIns="635" rIns="635" bIns="635" rtlCol="0" anchor="ctr">
-            <a:noAutofit/>
-          </a:bodyPr>
-          <a:lstStyle/>
-          <a:p>
-            <a:pPr marL="0" indent="0" algn="ctr">
-              <a:buNone/>
-            </a:pPr>
-            <a:r>
-              <a:rPr lang="en-US" sz="3600" dirty="0">
-                <a:solidFill>
-                  <a:srgbClr val="677481"/>
-                </a:solidFill>
-                <a:latin typeface="Arial" pitchFamily="34" charset="0"/>
-                <a:ea typeface="Arial" pitchFamily="34" charset="-122"/>
-                <a:cs typeface="Arial" pitchFamily="34" charset="-120"/>
-              </a:rPr>
-              <a:t>~50%</a:t>
-            </a:r>
-            <a:endParaRPr lang="en-US" sz="3600" dirty="0"/>
-          </a:p>
-        </p:txBody>
-      </p:sp>
-      <p:sp>
-        <p:nvSpPr>
-          <p:cNvPr id="30" name="Text 26">
-            <a:extLst>
-              <a:ext uri="{FF2B5EF4-FFF2-40B4-BE49-F238E27FC236}">
-                <a16:creationId xmlns:a16="http://schemas.microsoft.com/office/drawing/2014/main" id="{369010A6-E9F4-F1A4-F72A-3739AEC16882}"/>
-              </a:ext>
-            </a:extLst>
-          </p:cNvPr>
-          <p:cNvSpPr/>
-          <p:nvPr/>
-        </p:nvSpPr>
-        <p:spPr>
-          <a:xfrm>
-            <a:off x="23675615" y="9431207"/>
-            <a:ext cx="4722264" cy="731520"/>
-          </a:xfrm>
-          <a:prstGeom prst="rect">
-            <a:avLst/>
-          </a:prstGeom>
-          <a:noFill/>
-          <a:ln/>
-        </p:spPr>
-        <p:txBody>
-          <a:bodyPr wrap="square" lIns="635" tIns="635" rIns="635" bIns="635" rtlCol="0" anchor="ctr">
-            <a:noAutofit/>
-          </a:bodyPr>
-          <a:lstStyle/>
-          <a:p>
-            <a:pPr marL="0" indent="0" algn="ctr">
-              <a:buNone/>
-            </a:pPr>
-            <a:r>
-              <a:rPr lang="en-US" sz="6000" b="1" dirty="0">
-                <a:solidFill>
-                  <a:srgbClr val="0066A1"/>
-                </a:solidFill>
-                <a:latin typeface="Arial" pitchFamily="34" charset="0"/>
-                <a:ea typeface="Arial" pitchFamily="34" charset="-122"/>
-                <a:cs typeface="Arial" pitchFamily="34" charset="-120"/>
-              </a:rPr>
-              <a:t>lifetime gain</a:t>
-            </a:r>
-            <a:endParaRPr lang="en-US" sz="6000" dirty="0"/>
-          </a:p>
-        </p:txBody>
-      </p:sp>
-      <p:sp>
-        <p:nvSpPr>
-          <p:cNvPr id="31" name="Text 27">
-            <a:extLst>
-              <a:ext uri="{FF2B5EF4-FFF2-40B4-BE49-F238E27FC236}">
-                <a16:creationId xmlns:a16="http://schemas.microsoft.com/office/drawing/2014/main" id="{99B47617-D635-19C1-5BD7-4B8A9A04D929}"/>
-              </a:ext>
-            </a:extLst>
-          </p:cNvPr>
-          <p:cNvSpPr/>
-          <p:nvPr/>
-        </p:nvSpPr>
-        <p:spPr>
-          <a:xfrm>
-            <a:off x="24001026" y="10650963"/>
-            <a:ext cx="4230533" cy="685800"/>
-          </a:xfrm>
-          <a:prstGeom prst="rect">
-            <a:avLst/>
-          </a:prstGeom>
-          <a:noFill/>
-          <a:ln/>
-        </p:spPr>
-        <p:txBody>
-          <a:bodyPr wrap="square" lIns="635" tIns="635" rIns="635" bIns="635" rtlCol="0" anchor="ctr">
-            <a:normAutofit/>
-          </a:bodyPr>
-          <a:lstStyle/>
-          <a:p>
-            <a:pPr marL="0" indent="0" algn="ctr">
-              <a:buNone/>
-            </a:pPr>
-            <a:r>
-              <a:rPr lang="en-US" sz="3600" dirty="0">
-                <a:solidFill>
-                  <a:srgbClr val="1F2933"/>
-                </a:solidFill>
-                <a:latin typeface="Arial" pitchFamily="34" charset="0"/>
-                <a:ea typeface="Arial" pitchFamily="34" charset="-122"/>
-                <a:cs typeface="Arial" pitchFamily="34" charset="-120"/>
-              </a:rPr>
-              <a:t>example estimate</a:t>
-            </a:r>
-            <a:endParaRPr lang="en-US" sz="3600" dirty="0"/>
-          </a:p>
-        </p:txBody>
-      </p:sp>
-      <p:sp>
-        <p:nvSpPr>
-          <p:cNvPr id="32" name="テキスト ボックス 8">
-            <a:extLst>
-              <a:ext uri="{FF2B5EF4-FFF2-40B4-BE49-F238E27FC236}">
-                <a16:creationId xmlns:a16="http://schemas.microsoft.com/office/drawing/2014/main" id="{63B111A1-BF3E-98FD-E6A8-288DE860144C}"/>
-              </a:ext>
-            </a:extLst>
-          </p:cNvPr>
-          <p:cNvSpPr txBox="1"/>
-          <p:nvPr/>
-        </p:nvSpPr>
-        <p:spPr>
-          <a:xfrm>
-            <a:off x="2068851" y="13827920"/>
-            <a:ext cx="13306848" cy="1938992"/>
-          </a:xfrm>
-          <a:prstGeom prst="rect">
-            <a:avLst/>
-          </a:prstGeom>
-          <a:noFill/>
-        </p:spPr>
-        <p:txBody>
-          <a:bodyPr wrap="none" rtlCol="0">
-            <a:spAutoFit/>
-          </a:bodyPr>
-          <a:lstStyle/>
-          <a:p>
-            <a:pPr algn="ctr"/>
-            <a:r>
-              <a:rPr lang="en-US" altLang="ja-JP" sz="6000" b="1" dirty="0">
-                <a:solidFill>
-                  <a:srgbClr val="018185"/>
-                </a:solidFill>
-              </a:rPr>
-              <a:t>Method: Adaptive multi-carrier PWM</a:t>
-            </a:r>
-          </a:p>
-          <a:p>
-            <a:pPr algn="ctr"/>
-            <a:r>
-              <a:rPr lang="en-US" altLang="ja-JP" sz="6000" b="1" dirty="0">
-                <a:solidFill>
-                  <a:srgbClr val="018185"/>
-                </a:solidFill>
-              </a:rPr>
-              <a:t> </a:t>
-            </a:r>
-            <a:endParaRPr kumimoji="1" lang="ja-JP" altLang="en-US" sz="6000" b="1" dirty="0">
-              <a:solidFill>
-                <a:srgbClr val="018185"/>
-              </a:solidFill>
-            </a:endParaRPr>
-          </a:p>
-        </p:txBody>
-      </p:sp>
-      <p:sp>
-        <p:nvSpPr>
-          <p:cNvPr id="33" name="正方形/長方形 9">
-            <a:extLst>
-              <a:ext uri="{FF2B5EF4-FFF2-40B4-BE49-F238E27FC236}">
-                <a16:creationId xmlns:a16="http://schemas.microsoft.com/office/drawing/2014/main" id="{24DCC285-D778-5439-A004-EF8639A8008A}"/>
-              </a:ext>
-            </a:extLst>
-          </p:cNvPr>
-          <p:cNvSpPr/>
-          <p:nvPr/>
-        </p:nvSpPr>
-        <p:spPr>
-          <a:xfrm>
-            <a:off x="1388296" y="13834916"/>
-            <a:ext cx="419166" cy="1257132"/>
+            <a:off x="10336342" y="4318549"/>
+            <a:ext cx="539462" cy="721907"/>
           </a:xfrm>
           <a:prstGeom prst="rect">
             <a:avLst/>
@@ -5917,17 +5780,21 @@
           <a:bodyPr rtlCol="0" anchor="ctr"/>
           <a:lstStyle/>
           <a:p>
-            <a:pPr algn="ctr"/>
-            <a:endParaRPr kumimoji="1" lang="ja-JP" altLang="en-US"/>
+            <a:pPr algn="just"/>
+            <a:r>
+              <a:rPr kumimoji="1" lang="en-US" altLang="ja-JP" sz="4400" dirty="0"/>
+              <a:t>5</a:t>
+            </a:r>
+            <a:endParaRPr kumimoji="1" lang="ja-JP" altLang="en-US" sz="4400" dirty="0"/>
           </a:p>
         </p:txBody>
       </p:sp>
       <p:cxnSp>
         <p:nvCxnSpPr>
-          <p:cNvPr id="34" name="直線コネクタ 11">
+          <p:cNvPr id="150" name="直線コネクタ 11">
             <a:extLst>
               <a:ext uri="{FF2B5EF4-FFF2-40B4-BE49-F238E27FC236}">
-                <a16:creationId xmlns:a16="http://schemas.microsoft.com/office/drawing/2014/main" id="{035DD731-FDD0-B8B4-E1B7-4A582E6966F3}"/>
+                <a16:creationId xmlns:a16="http://schemas.microsoft.com/office/drawing/2014/main" id="{6F07F37D-0176-5462-C68A-29227F135305}"/>
               </a:ext>
             </a:extLst>
           </p:cNvPr>
@@ -5938,8 +5805,8 @@
         </p:nvCxnSpPr>
         <p:spPr>
           <a:xfrm>
-            <a:off x="1388296" y="15092048"/>
-            <a:ext cx="26843263" cy="0"/>
+            <a:off x="10336342" y="5037958"/>
+            <a:ext cx="9211875" cy="2499"/>
           </a:xfrm>
           <a:prstGeom prst="line">
             <a:avLst/>
@@ -5965,12 +5832,312 @@
           </a:fontRef>
         </p:style>
       </p:cxnSp>
-      <p:sp>
-        <p:nvSpPr>
-          <p:cNvPr id="39" name="テキスト ボックス 5">
+      <mc:AlternateContent xmlns:mc="http://schemas.openxmlformats.org/markup-compatibility/2006">
+        <mc:Choice xmlns:a14="http://schemas.microsoft.com/office/drawing/2010/main" Requires="a14">
+          <p:sp>
+            <p:nvSpPr>
+              <p:cNvPr id="175" name="TextBox 174">
+                <a:extLst>
+                  <a:ext uri="{FF2B5EF4-FFF2-40B4-BE49-F238E27FC236}">
+                    <a16:creationId xmlns:a16="http://schemas.microsoft.com/office/drawing/2014/main" id="{C3D5038E-8EA0-0A5F-060C-0BD098CDF667}"/>
+                  </a:ext>
+                </a:extLst>
+              </p:cNvPr>
+              <p:cNvSpPr txBox="1"/>
+              <p:nvPr/>
+            </p:nvSpPr>
+            <p:spPr>
+              <a:xfrm>
+                <a:off x="20325632" y="5572708"/>
+                <a:ext cx="9211875" cy="523220"/>
+              </a:xfrm>
+              <a:prstGeom prst="rect">
+                <a:avLst/>
+              </a:prstGeom>
+              <a:noFill/>
+            </p:spPr>
+            <p:txBody>
+              <a:bodyPr wrap="square">
+                <a:spAutoFit/>
+              </a:bodyPr>
+              <a:lstStyle/>
+              <a:p>
+                <a:pPr algn="ctr">
+                  <a:spcBef>
+                    <a:spcPts val="2400"/>
+                  </a:spcBef>
+                  <a:buClr>
+                    <a:srgbClr val="018185"/>
+                  </a:buClr>
+                </a:pPr>
+                <a:r>
+                  <a:rPr lang="en-US" sz="2800" b="1" dirty="0">
+                    <a:solidFill>
+                      <a:srgbClr val="018185"/>
+                    </a:solidFill>
+                    <a:latin typeface="Arial" pitchFamily="34" charset="0"/>
+                    <a:ea typeface="Arial" pitchFamily="34" charset="-122"/>
+                    <a:cs typeface="Arial" pitchFamily="34" charset="-120"/>
+                  </a:rPr>
+                  <a:t>Steady-state comparison (</a:t>
+                </a:r>
+                <a14:m>
+                  <m:oMath xmlns:m="http://schemas.openxmlformats.org/officeDocument/2006/math">
+                    <m:sSub>
+                      <m:sSubPr>
+                        <m:ctrlPr>
+                          <a:rPr lang="en-US" sz="2800" b="1" i="1" dirty="0" smtClean="0">
+                            <a:solidFill>
+                              <a:srgbClr val="018185"/>
+                            </a:solidFill>
+                            <a:latin typeface="Cambria Math" panose="02040503050406030204" pitchFamily="18" charset="0"/>
+                            <a:ea typeface="Arial" pitchFamily="34" charset="-122"/>
+                            <a:cs typeface="Arial" pitchFamily="34" charset="-120"/>
+                          </a:rPr>
+                        </m:ctrlPr>
+                      </m:sSubPr>
+                      <m:e>
+                        <m:r>
+                          <a:rPr lang="en-US" sz="2800" b="1" i="1" dirty="0" smtClean="0">
+                            <a:solidFill>
+                              <a:srgbClr val="018185"/>
+                            </a:solidFill>
+                            <a:latin typeface="Cambria Math" panose="02040503050406030204" pitchFamily="18" charset="0"/>
+                            <a:ea typeface="Arial" pitchFamily="34" charset="-122"/>
+                            <a:cs typeface="Arial" pitchFamily="34" charset="-120"/>
+                          </a:rPr>
+                          <m:t>𝒎</m:t>
+                        </m:r>
+                      </m:e>
+                      <m:sub>
+                        <m:r>
+                          <a:rPr lang="en-US" sz="2800" b="1" i="1" dirty="0" smtClean="0">
+                            <a:solidFill>
+                              <a:srgbClr val="018185"/>
+                            </a:solidFill>
+                            <a:latin typeface="Cambria Math" panose="02040503050406030204" pitchFamily="18" charset="0"/>
+                            <a:ea typeface="Arial" pitchFamily="34" charset="-122"/>
+                            <a:cs typeface="Arial" pitchFamily="34" charset="-120"/>
+                          </a:rPr>
+                          <m:t>𝒂</m:t>
+                        </m:r>
+                      </m:sub>
+                    </m:sSub>
+                    <m:r>
+                      <a:rPr lang="en-US" sz="2800" b="1" i="1" dirty="0" smtClean="0">
+                        <a:solidFill>
+                          <a:srgbClr val="018185"/>
+                        </a:solidFill>
+                        <a:latin typeface="Cambria Math" panose="02040503050406030204" pitchFamily="18" charset="0"/>
+                        <a:ea typeface="Arial" pitchFamily="34" charset="-122"/>
+                        <a:cs typeface="Arial" pitchFamily="34" charset="-120"/>
+                      </a:rPr>
+                      <m:t>=</m:t>
+                    </m:r>
+                    <m:r>
+                      <a:rPr lang="en-US" sz="2800" b="1" i="1" dirty="0" smtClean="0">
+                        <a:solidFill>
+                          <a:srgbClr val="018185"/>
+                        </a:solidFill>
+                        <a:latin typeface="Cambria Math" panose="02040503050406030204" pitchFamily="18" charset="0"/>
+                        <a:ea typeface="Arial" pitchFamily="34" charset="-122"/>
+                        <a:cs typeface="Arial" pitchFamily="34" charset="-120"/>
+                      </a:rPr>
+                      <m:t>𝟎</m:t>
+                    </m:r>
+                    <m:r>
+                      <a:rPr lang="en-US" sz="2800" b="1" i="1" dirty="0" smtClean="0">
+                        <a:solidFill>
+                          <a:srgbClr val="018185"/>
+                        </a:solidFill>
+                        <a:latin typeface="Cambria Math" panose="02040503050406030204" pitchFamily="18" charset="0"/>
+                        <a:ea typeface="Arial" pitchFamily="34" charset="-122"/>
+                        <a:cs typeface="Arial" pitchFamily="34" charset="-120"/>
+                      </a:rPr>
+                      <m:t>.</m:t>
+                    </m:r>
+                    <m:r>
+                      <a:rPr lang="en-US" sz="2800" b="1" i="1" dirty="0" smtClean="0">
+                        <a:solidFill>
+                          <a:srgbClr val="018185"/>
+                        </a:solidFill>
+                        <a:latin typeface="Cambria Math" panose="02040503050406030204" pitchFamily="18" charset="0"/>
+                        <a:ea typeface="Arial" pitchFamily="34" charset="-122"/>
+                        <a:cs typeface="Arial" pitchFamily="34" charset="-120"/>
+                      </a:rPr>
+                      <m:t>𝟔</m:t>
+                    </m:r>
+                    <m:r>
+                      <a:rPr lang="en-US" sz="2800" b="1" i="1" dirty="0" smtClean="0">
+                        <a:solidFill>
+                          <a:srgbClr val="018185"/>
+                        </a:solidFill>
+                        <a:latin typeface="Cambria Math" panose="02040503050406030204" pitchFamily="18" charset="0"/>
+                        <a:ea typeface="Arial" pitchFamily="34" charset="-122"/>
+                        <a:cs typeface="Arial" pitchFamily="34" charset="-120"/>
+                      </a:rPr>
+                      <m:t> </m:t>
+                    </m:r>
+                  </m:oMath>
+                </a14:m>
+                <a:r>
+                  <a:rPr lang="en-US" sz="2800" b="1" dirty="0">
+                    <a:solidFill>
+                      <a:srgbClr val="018185"/>
+                    </a:solidFill>
+                    <a:latin typeface="Arial" pitchFamily="34" charset="0"/>
+                    <a:ea typeface="Arial" pitchFamily="34" charset="-122"/>
+                    <a:cs typeface="Arial" pitchFamily="34" charset="-120"/>
+                  </a:rPr>
+                  <a:t>, </a:t>
+                </a:r>
+                <a14:m>
+                  <m:oMath xmlns:m="http://schemas.openxmlformats.org/officeDocument/2006/math">
+                    <m:r>
+                      <a:rPr lang="en-US" sz="2800" b="1" i="1" dirty="0" smtClean="0">
+                        <a:solidFill>
+                          <a:srgbClr val="018185"/>
+                        </a:solidFill>
+                        <a:latin typeface="Cambria Math" panose="02040503050406030204" pitchFamily="18" charset="0"/>
+                        <a:ea typeface="Arial" pitchFamily="34" charset="-122"/>
+                        <a:cs typeface="Arial" pitchFamily="34" charset="-120"/>
+                      </a:rPr>
+                      <m:t>𝒑</m:t>
+                    </m:r>
+                    <m:r>
+                      <a:rPr lang="en-US" sz="2800" b="1" i="1" dirty="0" smtClean="0">
+                        <a:solidFill>
+                          <a:srgbClr val="018185"/>
+                        </a:solidFill>
+                        <a:latin typeface="Cambria Math" panose="02040503050406030204" pitchFamily="18" charset="0"/>
+                        <a:ea typeface="Arial" pitchFamily="34" charset="-122"/>
+                        <a:cs typeface="Arial" pitchFamily="34" charset="-120"/>
+                      </a:rPr>
+                      <m:t>.</m:t>
+                    </m:r>
+                    <m:r>
+                      <a:rPr lang="en-US" sz="2800" b="1" i="1" dirty="0" smtClean="0">
+                        <a:solidFill>
+                          <a:srgbClr val="018185"/>
+                        </a:solidFill>
+                        <a:latin typeface="Cambria Math" panose="02040503050406030204" pitchFamily="18" charset="0"/>
+                        <a:ea typeface="Arial" pitchFamily="34" charset="-122"/>
+                        <a:cs typeface="Arial" pitchFamily="34" charset="-120"/>
+                      </a:rPr>
+                      <m:t>𝒇</m:t>
+                    </m:r>
+                    <m:r>
+                      <a:rPr lang="en-US" sz="2800" b="1" i="1" dirty="0" smtClean="0">
+                        <a:solidFill>
+                          <a:srgbClr val="018185"/>
+                        </a:solidFill>
+                        <a:latin typeface="Cambria Math" panose="02040503050406030204" pitchFamily="18" charset="0"/>
+                        <a:ea typeface="Arial" pitchFamily="34" charset="-122"/>
+                        <a:cs typeface="Arial" pitchFamily="34" charset="-120"/>
+                      </a:rPr>
+                      <m:t>.= </m:t>
+                    </m:r>
+                    <m:r>
+                      <a:rPr lang="en-US" sz="2800" b="1" i="1" dirty="0" smtClean="0">
+                        <a:solidFill>
+                          <a:srgbClr val="018185"/>
+                        </a:solidFill>
+                        <a:latin typeface="Cambria Math" panose="02040503050406030204" pitchFamily="18" charset="0"/>
+                        <a:ea typeface="Arial" pitchFamily="34" charset="-122"/>
+                        <a:cs typeface="Arial" pitchFamily="34" charset="-120"/>
+                      </a:rPr>
+                      <m:t>𝟎</m:t>
+                    </m:r>
+                    <m:r>
+                      <a:rPr lang="en-US" sz="2800" b="1" i="1" dirty="0" smtClean="0">
+                        <a:solidFill>
+                          <a:srgbClr val="018185"/>
+                        </a:solidFill>
+                        <a:latin typeface="Cambria Math" panose="02040503050406030204" pitchFamily="18" charset="0"/>
+                        <a:ea typeface="Arial" pitchFamily="34" charset="-122"/>
+                        <a:cs typeface="Arial" pitchFamily="34" charset="-120"/>
+                      </a:rPr>
+                      <m:t>.</m:t>
+                    </m:r>
+                    <m:r>
+                      <a:rPr lang="en-US" sz="2800" b="1" i="1" dirty="0" smtClean="0">
+                        <a:solidFill>
+                          <a:srgbClr val="018185"/>
+                        </a:solidFill>
+                        <a:latin typeface="Cambria Math" panose="02040503050406030204" pitchFamily="18" charset="0"/>
+                        <a:ea typeface="Arial" pitchFamily="34" charset="-122"/>
+                        <a:cs typeface="Arial" pitchFamily="34" charset="-120"/>
+                      </a:rPr>
+                      <m:t>𝟗</m:t>
+                    </m:r>
+                  </m:oMath>
+                </a14:m>
+                <a:r>
+                  <a:rPr lang="en-US" sz="2800" b="1" dirty="0">
+                    <a:solidFill>
+                      <a:srgbClr val="018185"/>
+                    </a:solidFill>
+                    <a:latin typeface="Arial" pitchFamily="34" charset="0"/>
+                    <a:ea typeface="Arial" pitchFamily="34" charset="-122"/>
+                    <a:cs typeface="Arial" pitchFamily="34" charset="-120"/>
+                  </a:rPr>
+                  <a:t>)</a:t>
+                </a:r>
+              </a:p>
+            </p:txBody>
+          </p:sp>
+        </mc:Choice>
+        <mc:Fallback>
+          <p:sp>
+            <p:nvSpPr>
+              <p:cNvPr id="175" name="TextBox 174">
+                <a:extLst>
+                  <a:ext uri="{FF2B5EF4-FFF2-40B4-BE49-F238E27FC236}">
+                    <a16:creationId xmlns:a16="http://schemas.microsoft.com/office/drawing/2014/main" id="{C3D5038E-8EA0-0A5F-060C-0BD098CDF667}"/>
+                  </a:ext>
+                </a:extLst>
+              </p:cNvPr>
+              <p:cNvSpPr txBox="1">
+                <a:spLocks noRot="1" noChangeAspect="1" noMove="1" noResize="1" noEditPoints="1" noAdjustHandles="1" noChangeArrowheads="1" noChangeShapeType="1" noTextEdit="1"/>
+              </p:cNvSpPr>
+              <p:nvPr/>
+            </p:nvSpPr>
+            <p:spPr>
+              <a:xfrm>
+                <a:off x="20325632" y="5572708"/>
+                <a:ext cx="9211875" cy="523220"/>
+              </a:xfrm>
+              <a:prstGeom prst="rect">
+                <a:avLst/>
+              </a:prstGeom>
+              <a:blipFill>
+                <a:blip r:embed="rId3"/>
+                <a:stretch>
+                  <a:fillRect t="-11628" b="-31395"/>
+                </a:stretch>
+              </a:blipFill>
+            </p:spPr>
+            <p:txBody>
+              <a:bodyPr/>
+              <a:lstStyle/>
+              <a:p>
+                <a:r>
+                  <a:rPr lang="sv-SE">
+                    <a:noFill/>
+                  </a:rPr>
+                  <a:t> </a:t>
+                </a:r>
+              </a:p>
+            </p:txBody>
+          </p:sp>
+        </mc:Fallback>
+      </mc:AlternateContent>
+      <p:sp>
+        <p:nvSpPr>
+          <p:cNvPr id="180" name="TextBox 179">
             <a:extLst>
               <a:ext uri="{FF2B5EF4-FFF2-40B4-BE49-F238E27FC236}">
-                <a16:creationId xmlns:a16="http://schemas.microsoft.com/office/drawing/2014/main" id="{223071E3-EFF9-100B-38A7-897E69C8CAAB}"/>
+                <a16:creationId xmlns:a16="http://schemas.microsoft.com/office/drawing/2014/main" id="{F5869615-C8D2-6227-4E59-4F6519107190}"/>
               </a:ext>
             </a:extLst>
           </p:cNvPr>
@@ -5979,8 +6146,8 @@
         </p:nvSpPr>
         <p:spPr>
           <a:xfrm>
-            <a:off x="1493702" y="15674163"/>
-            <a:ext cx="26843263" cy="3293209"/>
+            <a:off x="21416030" y="29626413"/>
+            <a:ext cx="8225472" cy="2000548"/>
           </a:xfrm>
           <a:prstGeom prst="rect">
             <a:avLst/>
@@ -5988,12 +6155,33 @@
           <a:noFill/>
         </p:spPr>
         <p:txBody>
-          <a:bodyPr wrap="square" rtlCol="0">
+          <a:bodyPr wrap="square">
             <a:spAutoFit/>
           </a:bodyPr>
           <a:lstStyle/>
           <a:p>
-            <a:pPr marL="685800" indent="-685800">
+            <a:pPr algn="just">
+              <a:spcBef>
+                <a:spcPts val="2400"/>
+              </a:spcBef>
+              <a:buClr>
+                <a:srgbClr val="018185"/>
+              </a:buClr>
+            </a:pPr>
+            <a:r>
+              <a:rPr lang="en-US" sz="2800" dirty="0">
+                <a:solidFill>
+                  <a:srgbClr val="1F2933"/>
+                </a:solidFill>
+                <a:latin typeface="Arial" pitchFamily="34" charset="0"/>
+                <a:ea typeface="Arial" pitchFamily="34" charset="-122"/>
+                <a:cs typeface="Arial" pitchFamily="34" charset="-120"/>
+              </a:rPr>
+              <a:t>Transient performance:</a:t>
+            </a:r>
+          </a:p>
+          <a:p>
+            <a:pPr marL="457200" indent="-457200" algn="just">
               <a:spcBef>
                 <a:spcPts val="2400"/>
               </a:spcBef>
@@ -6001,10 +6189,10 @@
                 <a:srgbClr val="018185"/>
               </a:buClr>
               <a:buFont typeface="Wingdings" panose="05000000000000000000" pitchFamily="2" charset="2"/>
-              <a:buChar char="p"/>
+              <a:buChar char="Ø"/>
             </a:pPr>
             <a:r>
-              <a:rPr lang="en-US" sz="4000" dirty="0">
+              <a:rPr lang="en-US" sz="2800" dirty="0">
                 <a:solidFill>
                   <a:srgbClr val="1F2933"/>
                 </a:solidFill>
@@ -6012,11 +6200,11 @@
                 <a:ea typeface="Arial" pitchFamily="34" charset="-122"/>
                 <a:cs typeface="Arial" pitchFamily="34" charset="-120"/>
               </a:rPr>
-              <a:t>Conventional SPWM uses a common triangular carrier for all inverter legs.</a:t>
-            </a:r>
-          </a:p>
-          <a:p>
-            <a:pPr marL="685800" indent="-685800">
+              <a:t>Smooth adaptation of carrier phase shifts.</a:t>
+            </a:r>
+          </a:p>
+          <a:p>
+            <a:pPr marL="457200" indent="-457200" algn="just">
               <a:spcBef>
                 <a:spcPts val="2400"/>
               </a:spcBef>
@@ -6024,10 +6212,10 @@
                 <a:srgbClr val="018185"/>
               </a:buClr>
               <a:buFont typeface="Wingdings" panose="05000000000000000000" pitchFamily="2" charset="2"/>
-              <a:buChar char="p"/>
+              <a:buChar char="Ø"/>
             </a:pPr>
             <a:r>
-              <a:rPr lang="en-US" sz="4000" dirty="0">
+              <a:rPr lang="en-US" sz="2800" dirty="0">
                 <a:solidFill>
                   <a:srgbClr val="1F2933"/>
                 </a:solidFill>
@@ -6035,90 +6223,17 @@
                 <a:ea typeface="Arial" pitchFamily="34" charset="-122"/>
                 <a:cs typeface="Arial" pitchFamily="34" charset="-120"/>
               </a:rPr>
-              <a:t> The proposed method assigns individual carriers to each leg and optimizes the phase shifts of legs B and C during each switching period.</a:t>
-            </a:r>
-          </a:p>
-          <a:p>
-            <a:pPr marL="685800" indent="-685800">
-              <a:spcBef>
-                <a:spcPts val="2400"/>
-              </a:spcBef>
-              <a:buClr>
-                <a:srgbClr val="018185"/>
-              </a:buClr>
-              <a:buFont typeface="Wingdings" panose="05000000000000000000" pitchFamily="2" charset="2"/>
-              <a:buChar char="p"/>
-            </a:pPr>
-            <a:endParaRPr kumimoji="1" lang="ja-JP" altLang="en-US" sz="4800" dirty="0"/>
-          </a:p>
-        </p:txBody>
-      </p:sp>
-      <p:pic>
-        <p:nvPicPr>
-          <p:cNvPr id="40" name="Image 0" descr="/mnt/data/cropped_figs/p3_0_0.png">
+              <a:t>Confirms real-time feasibility.</a:t>
+            </a:r>
+          </a:p>
+        </p:txBody>
+      </p:sp>
+      <p:sp>
+        <p:nvSpPr>
+          <p:cNvPr id="181" name="テキスト ボックス 8">
             <a:extLst>
               <a:ext uri="{FF2B5EF4-FFF2-40B4-BE49-F238E27FC236}">
-                <a16:creationId xmlns:a16="http://schemas.microsoft.com/office/drawing/2014/main" id="{0BD8D950-17E9-5F12-ED0E-A0BA24C56EA8}"/>
-              </a:ext>
-            </a:extLst>
-          </p:cNvPr>
-          <p:cNvPicPr>
-            <a:picLocks noChangeAspect="1"/>
-          </p:cNvPicPr>
-          <p:nvPr/>
-        </p:nvPicPr>
-        <p:blipFill>
-          <a:blip r:embed="rId2"/>
-          <a:stretch>
-            <a:fillRect/>
-          </a:stretch>
-        </p:blipFill>
-        <p:spPr>
-          <a:xfrm>
-            <a:off x="695654" y="18146550"/>
-            <a:ext cx="6342844" cy="3749637"/>
-          </a:xfrm>
-          <a:prstGeom prst="rect">
-            <a:avLst/>
-          </a:prstGeom>
-        </p:spPr>
-      </p:pic>
-      <p:pic>
-        <p:nvPicPr>
-          <p:cNvPr id="41" name="Image 1" descr="/mnt/data/cropped_figs/p3_2_0.png">
-            <a:extLst>
-              <a:ext uri="{FF2B5EF4-FFF2-40B4-BE49-F238E27FC236}">
-                <a16:creationId xmlns:a16="http://schemas.microsoft.com/office/drawing/2014/main" id="{8B043442-8FCE-4A90-1FB1-A44179F297E5}"/>
-              </a:ext>
-            </a:extLst>
-          </p:cNvPr>
-          <p:cNvPicPr>
-            <a:picLocks noChangeAspect="1"/>
-          </p:cNvPicPr>
-          <p:nvPr/>
-        </p:nvPicPr>
-        <p:blipFill>
-          <a:blip r:embed="rId3"/>
-          <a:stretch>
-            <a:fillRect/>
-          </a:stretch>
-        </p:blipFill>
-        <p:spPr>
-          <a:xfrm>
-            <a:off x="7002774" y="18226217"/>
-            <a:ext cx="7807153" cy="3941475"/>
-          </a:xfrm>
-          <a:prstGeom prst="rect">
-            <a:avLst/>
-          </a:prstGeom>
-        </p:spPr>
-      </p:pic>
-      <p:sp>
-        <p:nvSpPr>
-          <p:cNvPr id="42" name="テキスト ボックス 8">
-            <a:extLst>
-              <a:ext uri="{FF2B5EF4-FFF2-40B4-BE49-F238E27FC236}">
-                <a16:creationId xmlns:a16="http://schemas.microsoft.com/office/drawing/2014/main" id="{C51E5592-6712-C9AB-A3A6-032DAE09019D}"/>
+                <a16:creationId xmlns:a16="http://schemas.microsoft.com/office/drawing/2014/main" id="{74B28D5F-6201-5888-D287-8E6F39D804FC}"/>
               </a:ext>
             </a:extLst>
           </p:cNvPr>
@@ -6127,8 +6242,8 @@
         </p:nvSpPr>
         <p:spPr>
           <a:xfrm>
-            <a:off x="16454910" y="17795500"/>
-            <a:ext cx="8517076" cy="1015663"/>
+            <a:off x="10893796" y="17823658"/>
+            <a:ext cx="6314101" cy="523220"/>
           </a:xfrm>
           <a:prstGeom prst="rect">
             <a:avLst/>
@@ -6141,16 +6256,16 @@
           </a:bodyPr>
           <a:lstStyle/>
           <a:p>
-            <a:pPr algn="ctr"/>
-            <a:r>
-              <a:rPr lang="en-US" altLang="ja-JP" sz="6000" b="1" dirty="0">
+            <a:pPr algn="just"/>
+            <a:r>
+              <a:rPr lang="en-US" altLang="ja-JP" sz="2800" b="1" dirty="0">
                 <a:solidFill>
                   <a:srgbClr val="018185"/>
                 </a:solidFill>
               </a:rPr>
-              <a:t>Optimization Objective</a:t>
-            </a:r>
-            <a:endParaRPr kumimoji="1" lang="ja-JP" altLang="en-US" sz="6000" b="1" dirty="0">
+              <a:t>IMPLEMENTATION METHODOLOGY</a:t>
+            </a:r>
+            <a:endParaRPr kumimoji="1" lang="ja-JP" altLang="en-US" sz="3600" b="1" dirty="0">
               <a:solidFill>
                 <a:srgbClr val="018185"/>
               </a:solidFill>
@@ -6160,10 +6275,10 @@
       </p:sp>
       <p:sp>
         <p:nvSpPr>
-          <p:cNvPr id="43" name="正方形/長方形 9">
+          <p:cNvPr id="182" name="正方形/長方形 9">
             <a:extLst>
               <a:ext uri="{FF2B5EF4-FFF2-40B4-BE49-F238E27FC236}">
-                <a16:creationId xmlns:a16="http://schemas.microsoft.com/office/drawing/2014/main" id="{1C220108-4F41-5741-5B5A-5A881CCD7041}"/>
+                <a16:creationId xmlns:a16="http://schemas.microsoft.com/office/drawing/2014/main" id="{77F4D6E2-9C4D-7A41-EE39-83C76FB740EE}"/>
               </a:ext>
             </a:extLst>
           </p:cNvPr>
@@ -6172,8 +6287,8 @@
         </p:nvSpPr>
         <p:spPr>
           <a:xfrm>
-            <a:off x="15651018" y="17730071"/>
-            <a:ext cx="419166" cy="1257132"/>
+            <a:off x="10336078" y="17766817"/>
+            <a:ext cx="539462" cy="721907"/>
           </a:xfrm>
           <a:prstGeom prst="rect">
             <a:avLst/>
@@ -6205,17 +6320,21 @@
           <a:bodyPr rtlCol="0" anchor="ctr"/>
           <a:lstStyle/>
           <a:p>
-            <a:pPr algn="ctr"/>
-            <a:endParaRPr kumimoji="1" lang="ja-JP" altLang="en-US"/>
+            <a:pPr algn="just"/>
+            <a:r>
+              <a:rPr kumimoji="1" lang="en-US" altLang="ja-JP" sz="4400" dirty="0"/>
+              <a:t>6</a:t>
+            </a:r>
+            <a:endParaRPr kumimoji="1" lang="ja-JP" altLang="en-US" sz="4400" dirty="0"/>
           </a:p>
         </p:txBody>
       </p:sp>
       <p:cxnSp>
         <p:nvCxnSpPr>
-          <p:cNvPr id="44" name="直線コネクタ 11">
+          <p:cNvPr id="183" name="直線コネクタ 11">
             <a:extLst>
               <a:ext uri="{FF2B5EF4-FFF2-40B4-BE49-F238E27FC236}">
-                <a16:creationId xmlns:a16="http://schemas.microsoft.com/office/drawing/2014/main" id="{03015BDD-E779-D999-BDDA-499BE1D45BFD}"/>
+                <a16:creationId xmlns:a16="http://schemas.microsoft.com/office/drawing/2014/main" id="{131BDA5D-DA3F-7519-6BBA-4069169DE3AC}"/>
               </a:ext>
             </a:extLst>
           </p:cNvPr>
@@ -6226,8 +6345,8 @@
         </p:nvCxnSpPr>
         <p:spPr>
           <a:xfrm>
-            <a:off x="15651018" y="18987203"/>
-            <a:ext cx="12333657" cy="0"/>
+            <a:off x="10338511" y="18467524"/>
+            <a:ext cx="9211875" cy="2499"/>
           </a:xfrm>
           <a:prstGeom prst="line">
             <a:avLst/>
@@ -6255,10 +6374,315 @@
       </p:cxnSp>
       <p:sp>
         <p:nvSpPr>
-          <p:cNvPr id="45" name="Shape 39">
+          <p:cNvPr id="184" name="テキスト ボックス 5">
             <a:extLst>
               <a:ext uri="{FF2B5EF4-FFF2-40B4-BE49-F238E27FC236}">
-                <a16:creationId xmlns:a16="http://schemas.microsoft.com/office/drawing/2014/main" id="{0970DD81-5772-A26D-0E0C-BC0F477868CA}"/>
+                <a16:creationId xmlns:a16="http://schemas.microsoft.com/office/drawing/2014/main" id="{72D29E43-856C-CD12-AD36-56321DB7AA29}"/>
+              </a:ext>
+            </a:extLst>
+          </p:cNvPr>
+          <p:cNvSpPr txBox="1"/>
+          <p:nvPr/>
+        </p:nvSpPr>
+        <p:spPr>
+          <a:xfrm>
+            <a:off x="10523444" y="18711068"/>
+            <a:ext cx="9149205" cy="954107"/>
+          </a:xfrm>
+          <a:prstGeom prst="rect">
+            <a:avLst/>
+          </a:prstGeom>
+          <a:noFill/>
+        </p:spPr>
+        <p:txBody>
+          <a:bodyPr wrap="square" rtlCol="0">
+            <a:spAutoFit/>
+          </a:bodyPr>
+          <a:lstStyle/>
+          <a:p>
+            <a:pPr marL="457200" indent="-457200" algn="just">
+              <a:spcBef>
+                <a:spcPts val="2400"/>
+              </a:spcBef>
+              <a:buClr>
+                <a:srgbClr val="018185"/>
+              </a:buClr>
+              <a:buFont typeface="Wingdings" panose="05000000000000000000" pitchFamily="2" charset="2"/>
+              <a:buChar char="q"/>
+            </a:pPr>
+            <a:r>
+              <a:rPr lang="en-US" sz="2800" dirty="0">
+                <a:solidFill>
+                  <a:srgbClr val="1F2933"/>
+                </a:solidFill>
+                <a:latin typeface="Arial" pitchFamily="34" charset="0"/>
+                <a:ea typeface="Arial" pitchFamily="34" charset="-122"/>
+                <a:cs typeface="Arial" pitchFamily="34" charset="-120"/>
+              </a:rPr>
+              <a:t>Offline optimization &amp; LUT-based real-time implementation</a:t>
+            </a:r>
+          </a:p>
+        </p:txBody>
+      </p:sp>
+      <p:sp>
+        <p:nvSpPr>
+          <p:cNvPr id="196" name="テキスト ボックス 5">
+            <a:extLst>
+              <a:ext uri="{FF2B5EF4-FFF2-40B4-BE49-F238E27FC236}">
+                <a16:creationId xmlns:a16="http://schemas.microsoft.com/office/drawing/2014/main" id="{ADD6DEFC-F54D-F168-F8D5-CFE9C7E11326}"/>
+              </a:ext>
+            </a:extLst>
+          </p:cNvPr>
+          <p:cNvSpPr txBox="1"/>
+          <p:nvPr/>
+        </p:nvSpPr>
+        <p:spPr>
+          <a:xfrm>
+            <a:off x="10505533" y="21427231"/>
+            <a:ext cx="8984476" cy="954107"/>
+          </a:xfrm>
+          <a:prstGeom prst="rect">
+            <a:avLst/>
+          </a:prstGeom>
+          <a:noFill/>
+        </p:spPr>
+        <p:txBody>
+          <a:bodyPr wrap="square" rtlCol="0">
+            <a:spAutoFit/>
+          </a:bodyPr>
+          <a:lstStyle/>
+          <a:p>
+            <a:pPr marL="457200" indent="-457200" algn="just">
+              <a:spcBef>
+                <a:spcPts val="2400"/>
+              </a:spcBef>
+              <a:buClr>
+                <a:srgbClr val="018185"/>
+              </a:buClr>
+              <a:buFont typeface="Wingdings" panose="05000000000000000000" pitchFamily="2" charset="2"/>
+              <a:buChar char="q"/>
+            </a:pPr>
+            <a:r>
+              <a:rPr lang="en-US" sz="2800" dirty="0">
+                <a:solidFill>
+                  <a:srgbClr val="1F2933"/>
+                </a:solidFill>
+                <a:latin typeface="Arial" pitchFamily="34" charset="0"/>
+                <a:ea typeface="Arial" pitchFamily="34" charset="-122"/>
+                <a:cs typeface="Arial" pitchFamily="34" charset="-120"/>
+              </a:rPr>
+              <a:t>Under the balanced three-phase condition, current inputs reduce to </a:t>
+            </a:r>
+          </a:p>
+        </p:txBody>
+      </p:sp>
+      <p:sp>
+        <p:nvSpPr>
+          <p:cNvPr id="198" name="テキスト ボックス 5">
+            <a:extLst>
+              <a:ext uri="{FF2B5EF4-FFF2-40B4-BE49-F238E27FC236}">
+                <a16:creationId xmlns:a16="http://schemas.microsoft.com/office/drawing/2014/main" id="{1A4484F7-273F-80B4-EB68-771B604DC2D4}"/>
+              </a:ext>
+            </a:extLst>
+          </p:cNvPr>
+          <p:cNvSpPr txBox="1"/>
+          <p:nvPr/>
+        </p:nvSpPr>
+        <p:spPr>
+          <a:xfrm>
+            <a:off x="10525736" y="23395609"/>
+            <a:ext cx="8800822" cy="954107"/>
+          </a:xfrm>
+          <a:prstGeom prst="rect">
+            <a:avLst/>
+          </a:prstGeom>
+          <a:noFill/>
+        </p:spPr>
+        <p:txBody>
+          <a:bodyPr wrap="square" rtlCol="0">
+            <a:spAutoFit/>
+          </a:bodyPr>
+          <a:lstStyle/>
+          <a:p>
+            <a:pPr marL="457200" indent="-457200" algn="just">
+              <a:spcBef>
+                <a:spcPts val="2400"/>
+              </a:spcBef>
+              <a:buClr>
+                <a:srgbClr val="018185"/>
+              </a:buClr>
+              <a:buFont typeface="Wingdings" panose="05000000000000000000" pitchFamily="2" charset="2"/>
+              <a:buChar char="q"/>
+            </a:pPr>
+            <a:r>
+              <a:rPr lang="en-US" sz="2800" dirty="0">
+                <a:solidFill>
+                  <a:srgbClr val="1F2933"/>
+                </a:solidFill>
+                <a:latin typeface="Arial" pitchFamily="34" charset="0"/>
+                <a:ea typeface="Arial" pitchFamily="34" charset="-122"/>
+                <a:cs typeface="Arial" pitchFamily="34" charset="-120"/>
+              </a:rPr>
+              <a:t>Using the duty-cycle constraint in SPWM, duty inputs reduce to </a:t>
+            </a:r>
+          </a:p>
+        </p:txBody>
+      </p:sp>
+      <p:sp>
+        <p:nvSpPr>
+          <p:cNvPr id="200" name="テキスト ボックス 5">
+            <a:extLst>
+              <a:ext uri="{FF2B5EF4-FFF2-40B4-BE49-F238E27FC236}">
+                <a16:creationId xmlns:a16="http://schemas.microsoft.com/office/drawing/2014/main" id="{96A8B0B8-5926-5199-43FB-5D3399B83267}"/>
+              </a:ext>
+            </a:extLst>
+          </p:cNvPr>
+          <p:cNvSpPr txBox="1"/>
+          <p:nvPr/>
+        </p:nvSpPr>
+        <p:spPr>
+          <a:xfrm>
+            <a:off x="10523443" y="25071116"/>
+            <a:ext cx="9149205" cy="523220"/>
+          </a:xfrm>
+          <a:prstGeom prst="rect">
+            <a:avLst/>
+          </a:prstGeom>
+          <a:noFill/>
+        </p:spPr>
+        <p:txBody>
+          <a:bodyPr wrap="square" rtlCol="0">
+            <a:spAutoFit/>
+          </a:bodyPr>
+          <a:lstStyle/>
+          <a:p>
+            <a:pPr marL="457200" indent="-457200" algn="just">
+              <a:spcBef>
+                <a:spcPts val="2400"/>
+              </a:spcBef>
+              <a:buClr>
+                <a:srgbClr val="018185"/>
+              </a:buClr>
+              <a:buFont typeface="Wingdings" panose="05000000000000000000" pitchFamily="2" charset="2"/>
+              <a:buChar char="q"/>
+            </a:pPr>
+            <a:r>
+              <a:rPr lang="en-US" sz="2800" dirty="0">
+                <a:solidFill>
+                  <a:srgbClr val="1F2933"/>
+                </a:solidFill>
+                <a:latin typeface="Arial" pitchFamily="34" charset="0"/>
+                <a:ea typeface="Arial" pitchFamily="34" charset="-122"/>
+                <a:cs typeface="Arial" pitchFamily="34" charset="-120"/>
+              </a:rPr>
+              <a:t>Look-up-table mapping</a:t>
+            </a:r>
+          </a:p>
+        </p:txBody>
+      </p:sp>
+      <p:sp>
+        <p:nvSpPr>
+          <p:cNvPr id="207" name="テキスト ボックス 5">
+            <a:extLst>
+              <a:ext uri="{FF2B5EF4-FFF2-40B4-BE49-F238E27FC236}">
+                <a16:creationId xmlns:a16="http://schemas.microsoft.com/office/drawing/2014/main" id="{7137CDA8-183C-B782-F7ED-B763F187EA19}"/>
+              </a:ext>
+            </a:extLst>
+          </p:cNvPr>
+          <p:cNvSpPr txBox="1"/>
+          <p:nvPr/>
+        </p:nvSpPr>
+        <p:spPr>
+          <a:xfrm>
+            <a:off x="10523442" y="26503564"/>
+            <a:ext cx="9149205" cy="523220"/>
+          </a:xfrm>
+          <a:prstGeom prst="rect">
+            <a:avLst/>
+          </a:prstGeom>
+          <a:noFill/>
+        </p:spPr>
+        <p:txBody>
+          <a:bodyPr wrap="square" rtlCol="0">
+            <a:spAutoFit/>
+          </a:bodyPr>
+          <a:lstStyle/>
+          <a:p>
+            <a:pPr marL="457200" indent="-457200" algn="just">
+              <a:spcBef>
+                <a:spcPts val="2400"/>
+              </a:spcBef>
+              <a:buClr>
+                <a:srgbClr val="018185"/>
+              </a:buClr>
+              <a:buFont typeface="Wingdings" panose="05000000000000000000" pitchFamily="2" charset="2"/>
+              <a:buChar char="q"/>
+            </a:pPr>
+            <a:r>
+              <a:rPr lang="en-US" sz="2800" dirty="0">
+                <a:solidFill>
+                  <a:srgbClr val="1F2933"/>
+                </a:solidFill>
+                <a:latin typeface="Arial" pitchFamily="34" charset="0"/>
+                <a:ea typeface="Arial" pitchFamily="34" charset="-122"/>
+                <a:cs typeface="Arial" pitchFamily="34" charset="-120"/>
+              </a:rPr>
+              <a:t>Optimization objective (per switching period k)</a:t>
+            </a:r>
+          </a:p>
+        </p:txBody>
+      </p:sp>
+      <p:sp>
+        <p:nvSpPr>
+          <p:cNvPr id="209" name="テキスト ボックス 8">
+            <a:extLst>
+              <a:ext uri="{FF2B5EF4-FFF2-40B4-BE49-F238E27FC236}">
+                <a16:creationId xmlns:a16="http://schemas.microsoft.com/office/drawing/2014/main" id="{B5B13917-7C1E-8E17-2759-6798B00CF206}"/>
+              </a:ext>
+            </a:extLst>
+          </p:cNvPr>
+          <p:cNvSpPr txBox="1"/>
+          <p:nvPr/>
+        </p:nvSpPr>
+        <p:spPr>
+          <a:xfrm>
+            <a:off x="10960578" y="28427215"/>
+            <a:ext cx="5555816" cy="523220"/>
+          </a:xfrm>
+          <a:prstGeom prst="rect">
+            <a:avLst/>
+          </a:prstGeom>
+          <a:noFill/>
+        </p:spPr>
+        <p:txBody>
+          <a:bodyPr wrap="none" rtlCol="0">
+            <a:spAutoFit/>
+          </a:bodyPr>
+          <a:lstStyle/>
+          <a:p>
+            <a:pPr algn="just"/>
+            <a:r>
+              <a:rPr lang="en-US" altLang="ja-JP" sz="2800" b="1" dirty="0">
+                <a:solidFill>
+                  <a:srgbClr val="018185"/>
+                </a:solidFill>
+              </a:rPr>
+              <a:t>PERFORMANCE ASSESSMENT</a:t>
+            </a:r>
+            <a:endParaRPr kumimoji="1" lang="ja-JP" altLang="en-US" sz="3600" b="1" dirty="0">
+              <a:solidFill>
+                <a:srgbClr val="018185"/>
+              </a:solidFill>
+            </a:endParaRPr>
+          </a:p>
+        </p:txBody>
+      </p:sp>
+      <p:sp>
+        <p:nvSpPr>
+          <p:cNvPr id="210" name="正方形/長方形 9">
+            <a:extLst>
+              <a:ext uri="{FF2B5EF4-FFF2-40B4-BE49-F238E27FC236}">
+                <a16:creationId xmlns:a16="http://schemas.microsoft.com/office/drawing/2014/main" id="{B7F5823C-02AD-C1AB-866C-58D2121162F0}"/>
               </a:ext>
             </a:extLst>
           </p:cNvPr>
@@ -6267,771 +6691,8 @@
         </p:nvSpPr>
         <p:spPr>
           <a:xfrm>
-            <a:off x="1418209" y="23245737"/>
-            <a:ext cx="5414967" cy="1234440"/>
-          </a:xfrm>
-          <a:prstGeom prst="roundRect">
-            <a:avLst>
-              <a:gd name="adj" fmla="val 11111"/>
-            </a:avLst>
-          </a:prstGeom>
-          <a:solidFill>
-            <a:srgbClr val="EAF3F8"/>
-          </a:solidFill>
-          <a:ln w="12700">
-            <a:solidFill>
-              <a:srgbClr val="FFFFFF">
-                <a:alpha val="0"/>
-              </a:srgbClr>
-            </a:solidFill>
-            <a:prstDash val="solid"/>
-          </a:ln>
-        </p:spPr>
-        <p:txBody>
-          <a:bodyPr/>
-          <a:lstStyle/>
-          <a:p>
-            <a:endParaRPr lang="sv-SE" sz="3600"/>
-          </a:p>
-        </p:txBody>
-      </p:sp>
-      <p:sp>
-        <p:nvSpPr>
-          <p:cNvPr id="46" name="Text 40">
-            <a:extLst>
-              <a:ext uri="{FF2B5EF4-FFF2-40B4-BE49-F238E27FC236}">
-                <a16:creationId xmlns:a16="http://schemas.microsoft.com/office/drawing/2014/main" id="{69812514-53DB-77B4-7E6A-C73A5AFCE8A7}"/>
-              </a:ext>
-            </a:extLst>
-          </p:cNvPr>
-          <p:cNvSpPr/>
-          <p:nvPr/>
-        </p:nvSpPr>
-        <p:spPr>
-          <a:xfrm>
-            <a:off x="1527937" y="23465193"/>
-            <a:ext cx="5195511" cy="777240"/>
-          </a:xfrm>
-          <a:prstGeom prst="rect">
-            <a:avLst/>
-          </a:prstGeom>
-          <a:noFill/>
-          <a:ln/>
-        </p:spPr>
-        <p:txBody>
-          <a:bodyPr wrap="square" lIns="635" tIns="635" rIns="635" bIns="635" rtlCol="0" anchor="ctr">
-            <a:noAutofit/>
-          </a:bodyPr>
-          <a:lstStyle/>
-          <a:p>
-            <a:pPr marL="0" indent="0" algn="ctr">
-              <a:buNone/>
-            </a:pPr>
-            <a:r>
-              <a:rPr lang="en-US" sz="3600" b="1" dirty="0">
-                <a:solidFill>
-                  <a:srgbClr val="113E67"/>
-                </a:solidFill>
-                <a:latin typeface="Arial" pitchFamily="34" charset="0"/>
-                <a:ea typeface="Arial" pitchFamily="34" charset="-122"/>
-                <a:cs typeface="Arial" pitchFamily="34" charset="-120"/>
-              </a:rPr>
-              <a:t>Measure</a:t>
-            </a:r>
-            <a:endParaRPr lang="en-US" sz="3600" dirty="0"/>
-          </a:p>
-          <a:p>
-            <a:pPr marL="0" indent="0" algn="ctr">
-              <a:buNone/>
-            </a:pPr>
-            <a:r>
-              <a:rPr lang="en-US" sz="3600" b="1" dirty="0">
-                <a:solidFill>
-                  <a:srgbClr val="113E67"/>
-                </a:solidFill>
-                <a:latin typeface="Arial" pitchFamily="34" charset="0"/>
-                <a:ea typeface="Arial" pitchFamily="34" charset="-122"/>
-                <a:cs typeface="Arial" pitchFamily="34" charset="-120"/>
-              </a:rPr>
-              <a:t>phase currents</a:t>
-            </a:r>
-            <a:endParaRPr lang="en-US" sz="3600" dirty="0"/>
-          </a:p>
-        </p:txBody>
-      </p:sp>
-      <p:sp>
-        <p:nvSpPr>
-          <p:cNvPr id="47" name="Text 41">
-            <a:extLst>
-              <a:ext uri="{FF2B5EF4-FFF2-40B4-BE49-F238E27FC236}">
-                <a16:creationId xmlns:a16="http://schemas.microsoft.com/office/drawing/2014/main" id="{56B38409-7821-F327-ECFE-39DC2361139F}"/>
-              </a:ext>
-            </a:extLst>
-          </p:cNvPr>
-          <p:cNvSpPr/>
-          <p:nvPr/>
-        </p:nvSpPr>
-        <p:spPr>
-          <a:xfrm>
-            <a:off x="6897184" y="23593209"/>
-            <a:ext cx="274320" cy="457200"/>
-          </a:xfrm>
-          <a:prstGeom prst="rect">
-            <a:avLst/>
-          </a:prstGeom>
-          <a:noFill/>
-          <a:ln/>
-        </p:spPr>
-        <p:txBody>
-          <a:bodyPr wrap="square" lIns="635" tIns="635" rIns="635" bIns="635" rtlCol="0" anchor="ctr">
-            <a:noAutofit/>
-          </a:bodyPr>
-          <a:lstStyle/>
-          <a:p>
-            <a:pPr marL="0" indent="0">
-              <a:buNone/>
-            </a:pPr>
-            <a:r>
-              <a:rPr lang="en-US" sz="4400" b="1" dirty="0">
-                <a:solidFill>
-                  <a:srgbClr val="0066A1"/>
-                </a:solidFill>
-                <a:latin typeface="Arial" pitchFamily="34" charset="0"/>
-                <a:ea typeface="Arial" pitchFamily="34" charset="-122"/>
-                <a:cs typeface="Arial" pitchFamily="34" charset="-120"/>
-              </a:rPr>
-              <a:t>→</a:t>
-            </a:r>
-            <a:endParaRPr lang="en-US" sz="4400" dirty="0"/>
-          </a:p>
-        </p:txBody>
-      </p:sp>
-      <p:sp>
-        <p:nvSpPr>
-          <p:cNvPr id="48" name="Shape 42">
-            <a:extLst>
-              <a:ext uri="{FF2B5EF4-FFF2-40B4-BE49-F238E27FC236}">
-                <a16:creationId xmlns:a16="http://schemas.microsoft.com/office/drawing/2014/main" id="{E0E10839-0518-2538-19D3-78B689758415}"/>
-              </a:ext>
-            </a:extLst>
-          </p:cNvPr>
-          <p:cNvSpPr/>
-          <p:nvPr/>
-        </p:nvSpPr>
-        <p:spPr>
-          <a:xfrm>
-            <a:off x="7061776" y="23245737"/>
-            <a:ext cx="5414967" cy="1234440"/>
-          </a:xfrm>
-          <a:prstGeom prst="roundRect">
-            <a:avLst>
-              <a:gd name="adj" fmla="val 11111"/>
-            </a:avLst>
-          </a:prstGeom>
-          <a:solidFill>
-            <a:srgbClr val="EAF3F8"/>
-          </a:solidFill>
-          <a:ln w="12700">
-            <a:solidFill>
-              <a:srgbClr val="FFFFFF">
-                <a:alpha val="0"/>
-              </a:srgbClr>
-            </a:solidFill>
-            <a:prstDash val="solid"/>
-          </a:ln>
-        </p:spPr>
-        <p:txBody>
-          <a:bodyPr/>
-          <a:lstStyle/>
-          <a:p>
-            <a:endParaRPr lang="sv-SE" sz="3600"/>
-          </a:p>
-        </p:txBody>
-      </p:sp>
-      <p:sp>
-        <p:nvSpPr>
-          <p:cNvPr id="49" name="Text 43">
-            <a:extLst>
-              <a:ext uri="{FF2B5EF4-FFF2-40B4-BE49-F238E27FC236}">
-                <a16:creationId xmlns:a16="http://schemas.microsoft.com/office/drawing/2014/main" id="{CCABACCC-1CD3-5B21-8F62-210EBE980A7D}"/>
-              </a:ext>
-            </a:extLst>
-          </p:cNvPr>
-          <p:cNvSpPr/>
-          <p:nvPr/>
-        </p:nvSpPr>
-        <p:spPr>
-          <a:xfrm>
-            <a:off x="7171504" y="23465193"/>
-            <a:ext cx="5195511" cy="777240"/>
-          </a:xfrm>
-          <a:prstGeom prst="rect">
-            <a:avLst/>
-          </a:prstGeom>
-          <a:noFill/>
-          <a:ln/>
-        </p:spPr>
-        <p:txBody>
-          <a:bodyPr wrap="square" lIns="635" tIns="635" rIns="635" bIns="635" rtlCol="0" anchor="ctr">
-            <a:noAutofit/>
-          </a:bodyPr>
-          <a:lstStyle/>
-          <a:p>
-            <a:pPr marL="0" indent="0" algn="ctr">
-              <a:buNone/>
-            </a:pPr>
-            <a:r>
-              <a:rPr lang="en-US" sz="3600" b="1" dirty="0">
-                <a:solidFill>
-                  <a:srgbClr val="113E67"/>
-                </a:solidFill>
-                <a:latin typeface="Arial" pitchFamily="34" charset="0"/>
-                <a:ea typeface="Arial" pitchFamily="34" charset="-122"/>
-                <a:cs typeface="Arial" pitchFamily="34" charset="-120"/>
-              </a:rPr>
-              <a:t>Normalize</a:t>
-            </a:r>
-            <a:endParaRPr lang="en-US" sz="3600" dirty="0"/>
-          </a:p>
-          <a:p>
-            <a:pPr marL="0" indent="0" algn="ctr">
-              <a:buNone/>
-            </a:pPr>
-            <a:r>
-              <a:rPr lang="en-US" sz="3600" b="1" dirty="0">
-                <a:solidFill>
-                  <a:srgbClr val="113E67"/>
-                </a:solidFill>
-                <a:latin typeface="Arial" pitchFamily="34" charset="0"/>
-                <a:ea typeface="Arial" pitchFamily="34" charset="-122"/>
-                <a:cs typeface="Arial" pitchFamily="34" charset="-120"/>
-              </a:rPr>
-              <a:t>current inputs</a:t>
-            </a:r>
-            <a:endParaRPr lang="en-US" sz="3600" dirty="0"/>
-          </a:p>
-        </p:txBody>
-      </p:sp>
-      <p:sp>
-        <p:nvSpPr>
-          <p:cNvPr id="50" name="Text 44">
-            <a:extLst>
-              <a:ext uri="{FF2B5EF4-FFF2-40B4-BE49-F238E27FC236}">
-                <a16:creationId xmlns:a16="http://schemas.microsoft.com/office/drawing/2014/main" id="{A1254F49-70C4-A8EF-E092-6AA3EE29DB2F}"/>
-              </a:ext>
-            </a:extLst>
-          </p:cNvPr>
-          <p:cNvSpPr/>
-          <p:nvPr/>
-        </p:nvSpPr>
-        <p:spPr>
-          <a:xfrm>
-            <a:off x="12540751" y="23593209"/>
-            <a:ext cx="274320" cy="457200"/>
-          </a:xfrm>
-          <a:prstGeom prst="rect">
-            <a:avLst/>
-          </a:prstGeom>
-          <a:noFill/>
-          <a:ln/>
-        </p:spPr>
-        <p:txBody>
-          <a:bodyPr wrap="square" lIns="635" tIns="635" rIns="635" bIns="635" rtlCol="0" anchor="ctr">
-            <a:noAutofit/>
-          </a:bodyPr>
-          <a:lstStyle/>
-          <a:p>
-            <a:pPr marL="0" indent="0">
-              <a:buNone/>
-            </a:pPr>
-            <a:r>
-              <a:rPr lang="en-US" sz="4400" b="1" dirty="0">
-                <a:solidFill>
-                  <a:srgbClr val="0066A1"/>
-                </a:solidFill>
-                <a:latin typeface="Arial" pitchFamily="34" charset="0"/>
-                <a:ea typeface="Arial" pitchFamily="34" charset="-122"/>
-                <a:cs typeface="Arial" pitchFamily="34" charset="-120"/>
-              </a:rPr>
-              <a:t>→</a:t>
-            </a:r>
-            <a:endParaRPr lang="en-US" sz="4400" dirty="0"/>
-          </a:p>
-        </p:txBody>
-      </p:sp>
-      <p:sp>
-        <p:nvSpPr>
-          <p:cNvPr id="51" name="Shape 45">
-            <a:extLst>
-              <a:ext uri="{FF2B5EF4-FFF2-40B4-BE49-F238E27FC236}">
-                <a16:creationId xmlns:a16="http://schemas.microsoft.com/office/drawing/2014/main" id="{8F513A24-4F32-C8C1-D148-D680CBE10A51}"/>
-              </a:ext>
-            </a:extLst>
-          </p:cNvPr>
-          <p:cNvSpPr/>
-          <p:nvPr/>
-        </p:nvSpPr>
-        <p:spPr>
-          <a:xfrm>
-            <a:off x="12705343" y="23245737"/>
-            <a:ext cx="5414967" cy="1234440"/>
-          </a:xfrm>
-          <a:prstGeom prst="roundRect">
-            <a:avLst>
-              <a:gd name="adj" fmla="val 11111"/>
-            </a:avLst>
-          </a:prstGeom>
-          <a:solidFill>
-            <a:srgbClr val="EAF3F8"/>
-          </a:solidFill>
-          <a:ln w="12700">
-            <a:solidFill>
-              <a:srgbClr val="FFFFFF">
-                <a:alpha val="0"/>
-              </a:srgbClr>
-            </a:solidFill>
-            <a:prstDash val="solid"/>
-          </a:ln>
-        </p:spPr>
-        <p:txBody>
-          <a:bodyPr/>
-          <a:lstStyle/>
-          <a:p>
-            <a:endParaRPr lang="sv-SE" sz="3600"/>
-          </a:p>
-        </p:txBody>
-      </p:sp>
-      <p:sp>
-        <p:nvSpPr>
-          <p:cNvPr id="52" name="Text 46">
-            <a:extLst>
-              <a:ext uri="{FF2B5EF4-FFF2-40B4-BE49-F238E27FC236}">
-                <a16:creationId xmlns:a16="http://schemas.microsoft.com/office/drawing/2014/main" id="{AE7E8510-6167-1110-B2FC-75A4BCCAD4F9}"/>
-              </a:ext>
-            </a:extLst>
-          </p:cNvPr>
-          <p:cNvSpPr/>
-          <p:nvPr/>
-        </p:nvSpPr>
-        <p:spPr>
-          <a:xfrm>
-            <a:off x="12815071" y="23465193"/>
-            <a:ext cx="5195511" cy="777240"/>
-          </a:xfrm>
-          <a:prstGeom prst="rect">
-            <a:avLst/>
-          </a:prstGeom>
-          <a:noFill/>
-          <a:ln/>
-        </p:spPr>
-        <p:txBody>
-          <a:bodyPr wrap="square" lIns="635" tIns="635" rIns="635" bIns="635" rtlCol="0" anchor="ctr">
-            <a:noAutofit/>
-          </a:bodyPr>
-          <a:lstStyle/>
-          <a:p>
-            <a:pPr marL="0" indent="0" algn="ctr">
-              <a:buNone/>
-            </a:pPr>
-            <a:r>
-              <a:rPr lang="en-US" sz="3600" b="1" dirty="0">
-                <a:solidFill>
-                  <a:srgbClr val="113E67"/>
-                </a:solidFill>
-                <a:latin typeface="Arial" pitchFamily="34" charset="0"/>
-                <a:ea typeface="Arial" pitchFamily="34" charset="-122"/>
-                <a:cs typeface="Arial" pitchFamily="34" charset="-120"/>
-              </a:rPr>
-              <a:t>Compute</a:t>
-            </a:r>
-            <a:endParaRPr lang="en-US" sz="3600" dirty="0"/>
-          </a:p>
-          <a:p>
-            <a:pPr marL="0" indent="0" algn="ctr">
-              <a:buNone/>
-            </a:pPr>
-            <a:r>
-              <a:rPr lang="en-US" sz="3600" b="1" dirty="0">
-                <a:solidFill>
-                  <a:srgbClr val="113E67"/>
-                </a:solidFill>
-                <a:latin typeface="Arial" pitchFamily="34" charset="0"/>
-                <a:ea typeface="Arial" pitchFamily="34" charset="-122"/>
-                <a:cs typeface="Arial" pitchFamily="34" charset="-120"/>
-              </a:rPr>
-              <a:t>duty ratios</a:t>
-            </a:r>
-            <a:endParaRPr lang="en-US" sz="3600" dirty="0"/>
-          </a:p>
-        </p:txBody>
-      </p:sp>
-      <p:sp>
-        <p:nvSpPr>
-          <p:cNvPr id="53" name="Text 47">
-            <a:extLst>
-              <a:ext uri="{FF2B5EF4-FFF2-40B4-BE49-F238E27FC236}">
-                <a16:creationId xmlns:a16="http://schemas.microsoft.com/office/drawing/2014/main" id="{AFFCFF5E-748B-378D-CCDC-F4061CE9BF9A}"/>
-              </a:ext>
-            </a:extLst>
-          </p:cNvPr>
-          <p:cNvSpPr/>
-          <p:nvPr/>
-        </p:nvSpPr>
-        <p:spPr>
-          <a:xfrm>
-            <a:off x="18184318" y="23593209"/>
-            <a:ext cx="274320" cy="457200"/>
-          </a:xfrm>
-          <a:prstGeom prst="rect">
-            <a:avLst/>
-          </a:prstGeom>
-          <a:noFill/>
-          <a:ln/>
-        </p:spPr>
-        <p:txBody>
-          <a:bodyPr wrap="square" lIns="635" tIns="635" rIns="635" bIns="635" rtlCol="0" anchor="ctr">
-            <a:noAutofit/>
-          </a:bodyPr>
-          <a:lstStyle/>
-          <a:p>
-            <a:pPr marL="0" indent="0">
-              <a:buNone/>
-            </a:pPr>
-            <a:r>
-              <a:rPr lang="en-US" sz="4400" b="1" dirty="0">
-                <a:solidFill>
-                  <a:srgbClr val="0066A1"/>
-                </a:solidFill>
-                <a:latin typeface="Arial" pitchFamily="34" charset="0"/>
-                <a:ea typeface="Arial" pitchFamily="34" charset="-122"/>
-                <a:cs typeface="Arial" pitchFamily="34" charset="-120"/>
-              </a:rPr>
-              <a:t>→</a:t>
-            </a:r>
-            <a:endParaRPr lang="en-US" sz="4400" dirty="0"/>
-          </a:p>
-        </p:txBody>
-      </p:sp>
-      <p:sp>
-        <p:nvSpPr>
-          <p:cNvPr id="54" name="Shape 48">
-            <a:extLst>
-              <a:ext uri="{FF2B5EF4-FFF2-40B4-BE49-F238E27FC236}">
-                <a16:creationId xmlns:a16="http://schemas.microsoft.com/office/drawing/2014/main" id="{C9985574-E425-853E-4537-E52FB3677A75}"/>
-              </a:ext>
-            </a:extLst>
-          </p:cNvPr>
-          <p:cNvSpPr/>
-          <p:nvPr/>
-        </p:nvSpPr>
-        <p:spPr>
-          <a:xfrm>
-            <a:off x="18348910" y="23245737"/>
-            <a:ext cx="5414967" cy="1234440"/>
-          </a:xfrm>
-          <a:prstGeom prst="roundRect">
-            <a:avLst>
-              <a:gd name="adj" fmla="val 11111"/>
-            </a:avLst>
-          </a:prstGeom>
-          <a:solidFill>
-            <a:srgbClr val="DFF1E5"/>
-          </a:solidFill>
-          <a:ln w="12700">
-            <a:solidFill>
-              <a:srgbClr val="FFFFFF">
-                <a:alpha val="0"/>
-              </a:srgbClr>
-            </a:solidFill>
-            <a:prstDash val="solid"/>
-          </a:ln>
-        </p:spPr>
-        <p:txBody>
-          <a:bodyPr/>
-          <a:lstStyle/>
-          <a:p>
-            <a:endParaRPr lang="sv-SE" sz="3600"/>
-          </a:p>
-        </p:txBody>
-      </p:sp>
-      <p:sp>
-        <p:nvSpPr>
-          <p:cNvPr id="55" name="Text 49">
-            <a:extLst>
-              <a:ext uri="{FF2B5EF4-FFF2-40B4-BE49-F238E27FC236}">
-                <a16:creationId xmlns:a16="http://schemas.microsoft.com/office/drawing/2014/main" id="{55D175BD-FF7C-710C-387A-678003C413E2}"/>
-              </a:ext>
-            </a:extLst>
-          </p:cNvPr>
-          <p:cNvSpPr/>
-          <p:nvPr/>
-        </p:nvSpPr>
-        <p:spPr>
-          <a:xfrm>
-            <a:off x="18458638" y="23465193"/>
-            <a:ext cx="5195511" cy="777240"/>
-          </a:xfrm>
-          <a:prstGeom prst="rect">
-            <a:avLst/>
-          </a:prstGeom>
-          <a:noFill/>
-          <a:ln/>
-        </p:spPr>
-        <p:txBody>
-          <a:bodyPr wrap="square" lIns="635" tIns="635" rIns="635" bIns="635" rtlCol="0" anchor="ctr">
-            <a:noAutofit/>
-          </a:bodyPr>
-          <a:lstStyle/>
-          <a:p>
-            <a:pPr marL="0" indent="0" algn="ctr">
-              <a:buNone/>
-            </a:pPr>
-            <a:r>
-              <a:rPr lang="en-US" sz="3600" b="1" dirty="0">
-                <a:solidFill>
-                  <a:srgbClr val="113E67"/>
-                </a:solidFill>
-                <a:latin typeface="Arial" pitchFamily="34" charset="0"/>
-                <a:ea typeface="Arial" pitchFamily="34" charset="-122"/>
-                <a:cs typeface="Arial" pitchFamily="34" charset="-120"/>
-              </a:rPr>
-              <a:t>Read compact</a:t>
-            </a:r>
-            <a:endParaRPr lang="en-US" sz="3600" dirty="0"/>
-          </a:p>
-          <a:p>
-            <a:pPr marL="0" indent="0" algn="ctr">
-              <a:buNone/>
-            </a:pPr>
-            <a:r>
-              <a:rPr lang="en-US" sz="3600" b="1" dirty="0">
-                <a:solidFill>
-                  <a:srgbClr val="113E67"/>
-                </a:solidFill>
-                <a:latin typeface="Arial" pitchFamily="34" charset="0"/>
-                <a:ea typeface="Arial" pitchFamily="34" charset="-122"/>
-                <a:cs typeface="Arial" pitchFamily="34" charset="-120"/>
-              </a:rPr>
-              <a:t>LUT</a:t>
-            </a:r>
-            <a:endParaRPr lang="en-US" sz="3600" dirty="0"/>
-          </a:p>
-        </p:txBody>
-      </p:sp>
-      <p:sp>
-        <p:nvSpPr>
-          <p:cNvPr id="56" name="Text 50">
-            <a:extLst>
-              <a:ext uri="{FF2B5EF4-FFF2-40B4-BE49-F238E27FC236}">
-                <a16:creationId xmlns:a16="http://schemas.microsoft.com/office/drawing/2014/main" id="{A3F02CAE-EA80-C47E-CB15-B3843F8A3AFA}"/>
-              </a:ext>
-            </a:extLst>
-          </p:cNvPr>
-          <p:cNvSpPr/>
-          <p:nvPr/>
-        </p:nvSpPr>
-        <p:spPr>
-          <a:xfrm>
-            <a:off x="23827885" y="23593209"/>
-            <a:ext cx="274320" cy="457200"/>
-          </a:xfrm>
-          <a:prstGeom prst="rect">
-            <a:avLst/>
-          </a:prstGeom>
-          <a:noFill/>
-          <a:ln/>
-        </p:spPr>
-        <p:txBody>
-          <a:bodyPr wrap="square" lIns="635" tIns="635" rIns="635" bIns="635" rtlCol="0" anchor="ctr">
-            <a:noAutofit/>
-          </a:bodyPr>
-          <a:lstStyle/>
-          <a:p>
-            <a:pPr marL="0" indent="0">
-              <a:buNone/>
-            </a:pPr>
-            <a:r>
-              <a:rPr lang="en-US" sz="4400" b="1" dirty="0">
-                <a:solidFill>
-                  <a:srgbClr val="0066A1"/>
-                </a:solidFill>
-                <a:latin typeface="Arial" pitchFamily="34" charset="0"/>
-                <a:ea typeface="Arial" pitchFamily="34" charset="-122"/>
-                <a:cs typeface="Arial" pitchFamily="34" charset="-120"/>
-              </a:rPr>
-              <a:t>→</a:t>
-            </a:r>
-            <a:endParaRPr lang="en-US" sz="4400" dirty="0"/>
-          </a:p>
-        </p:txBody>
-      </p:sp>
-      <p:sp>
-        <p:nvSpPr>
-          <p:cNvPr id="57" name="Shape 51">
-            <a:extLst>
-              <a:ext uri="{FF2B5EF4-FFF2-40B4-BE49-F238E27FC236}">
-                <a16:creationId xmlns:a16="http://schemas.microsoft.com/office/drawing/2014/main" id="{06D9CF7C-C8DA-BBD7-DA05-9FC3E57384E8}"/>
-              </a:ext>
-            </a:extLst>
-          </p:cNvPr>
-          <p:cNvSpPr/>
-          <p:nvPr/>
-        </p:nvSpPr>
-        <p:spPr>
-          <a:xfrm>
-            <a:off x="23992477" y="23245737"/>
-            <a:ext cx="5414967" cy="1234440"/>
-          </a:xfrm>
-          <a:prstGeom prst="roundRect">
-            <a:avLst>
-              <a:gd name="adj" fmla="val 11111"/>
-            </a:avLst>
-          </a:prstGeom>
-          <a:solidFill>
-            <a:srgbClr val="EAF3F8"/>
-          </a:solidFill>
-          <a:ln w="12700">
-            <a:solidFill>
-              <a:srgbClr val="FFFFFF">
-                <a:alpha val="0"/>
-              </a:srgbClr>
-            </a:solidFill>
-            <a:prstDash val="solid"/>
-          </a:ln>
-        </p:spPr>
-        <p:txBody>
-          <a:bodyPr/>
-          <a:lstStyle/>
-          <a:p>
-            <a:endParaRPr lang="sv-SE" sz="3600"/>
-          </a:p>
-        </p:txBody>
-      </p:sp>
-      <p:sp>
-        <p:nvSpPr>
-          <p:cNvPr id="58" name="Text 52">
-            <a:extLst>
-              <a:ext uri="{FF2B5EF4-FFF2-40B4-BE49-F238E27FC236}">
-                <a16:creationId xmlns:a16="http://schemas.microsoft.com/office/drawing/2014/main" id="{7786EBA7-12E4-E342-A984-64870CC57217}"/>
-              </a:ext>
-            </a:extLst>
-          </p:cNvPr>
-          <p:cNvSpPr/>
-          <p:nvPr/>
-        </p:nvSpPr>
-        <p:spPr>
-          <a:xfrm>
-            <a:off x="24102205" y="23265569"/>
-            <a:ext cx="5305239" cy="976864"/>
-          </a:xfrm>
-          <a:prstGeom prst="rect">
-            <a:avLst/>
-          </a:prstGeom>
-          <a:noFill/>
-          <a:ln/>
-        </p:spPr>
-        <p:txBody>
-          <a:bodyPr wrap="square" lIns="635" tIns="635" rIns="635" bIns="635" rtlCol="0" anchor="ctr">
-            <a:normAutofit/>
-          </a:bodyPr>
-          <a:lstStyle/>
-          <a:p>
-            <a:pPr marL="0" indent="0" algn="ctr">
-              <a:buNone/>
-            </a:pPr>
-            <a:r>
-              <a:rPr lang="en-US" sz="3200" b="1" dirty="0">
-                <a:solidFill>
-                  <a:srgbClr val="113E67"/>
-                </a:solidFill>
-                <a:latin typeface="Arial" pitchFamily="34" charset="0"/>
-                <a:ea typeface="Arial" pitchFamily="34" charset="-122"/>
-                <a:cs typeface="Arial" pitchFamily="34" charset="-120"/>
-              </a:rPr>
-              <a:t>Apply carrier</a:t>
-            </a:r>
-            <a:endParaRPr lang="en-US" sz="3200" dirty="0"/>
-          </a:p>
-          <a:p>
-            <a:pPr marL="0" indent="0" algn="ctr">
-              <a:buNone/>
-            </a:pPr>
-            <a:r>
-              <a:rPr lang="en-US" sz="3200" b="1" dirty="0">
-                <a:solidFill>
-                  <a:srgbClr val="113E67"/>
-                </a:solidFill>
-                <a:latin typeface="Arial" pitchFamily="34" charset="0"/>
-                <a:ea typeface="Arial" pitchFamily="34" charset="-122"/>
-                <a:cs typeface="Arial" pitchFamily="34" charset="-120"/>
-              </a:rPr>
-              <a:t>phase shifts</a:t>
-            </a:r>
-            <a:endParaRPr lang="en-US" sz="3200" dirty="0"/>
-          </a:p>
-        </p:txBody>
-      </p:sp>
-      <p:sp>
-        <p:nvSpPr>
-          <p:cNvPr id="59" name="テキスト ボックス 8">
-            <a:extLst>
-              <a:ext uri="{FF2B5EF4-FFF2-40B4-BE49-F238E27FC236}">
-                <a16:creationId xmlns:a16="http://schemas.microsoft.com/office/drawing/2014/main" id="{D6B12AF5-6F72-7C97-B5B2-1BEBB7739F72}"/>
-              </a:ext>
-            </a:extLst>
-          </p:cNvPr>
-          <p:cNvSpPr txBox="1"/>
-          <p:nvPr/>
-        </p:nvSpPr>
-        <p:spPr>
-          <a:xfrm>
-            <a:off x="2068851" y="25499565"/>
-            <a:ext cx="9722534" cy="1015663"/>
-          </a:xfrm>
-          <a:prstGeom prst="rect">
-            <a:avLst/>
-          </a:prstGeom>
-          <a:noFill/>
-        </p:spPr>
-        <p:txBody>
-          <a:bodyPr wrap="none" rtlCol="0">
-            <a:spAutoFit/>
-          </a:bodyPr>
-          <a:lstStyle/>
-          <a:p>
-            <a:pPr algn="ctr"/>
-            <a:r>
-              <a:rPr lang="en-US" altLang="ja-JP" sz="6000" b="1" dirty="0">
-                <a:solidFill>
-                  <a:srgbClr val="018185"/>
-                </a:solidFill>
-              </a:rPr>
-              <a:t>Performance assessment </a:t>
-            </a:r>
-            <a:endParaRPr kumimoji="1" lang="ja-JP" altLang="en-US" sz="6000" b="1" dirty="0">
-              <a:solidFill>
-                <a:srgbClr val="018185"/>
-              </a:solidFill>
-            </a:endParaRPr>
-          </a:p>
-        </p:txBody>
-      </p:sp>
-      <p:sp>
-        <p:nvSpPr>
-          <p:cNvPr id="60" name="正方形/長方形 9">
-            <a:extLst>
-              <a:ext uri="{FF2B5EF4-FFF2-40B4-BE49-F238E27FC236}">
-                <a16:creationId xmlns:a16="http://schemas.microsoft.com/office/drawing/2014/main" id="{CC6A4644-B2A3-EECB-DA87-3AB6597DE085}"/>
-              </a:ext>
-            </a:extLst>
-          </p:cNvPr>
-          <p:cNvSpPr/>
-          <p:nvPr/>
-        </p:nvSpPr>
-        <p:spPr>
-          <a:xfrm>
-            <a:off x="1294870" y="25434136"/>
-            <a:ext cx="419166" cy="1257132"/>
+            <a:off x="10354334" y="28384176"/>
+            <a:ext cx="539462" cy="721907"/>
           </a:xfrm>
           <a:prstGeom prst="rect">
             <a:avLst/>
@@ -7063,17 +6724,21 @@
           <a:bodyPr rtlCol="0" anchor="ctr"/>
           <a:lstStyle/>
           <a:p>
-            <a:pPr algn="ctr"/>
-            <a:endParaRPr kumimoji="1" lang="ja-JP" altLang="en-US"/>
+            <a:pPr algn="just"/>
+            <a:r>
+              <a:rPr kumimoji="1" lang="en-US" altLang="ja-JP" sz="4400" dirty="0"/>
+              <a:t>7</a:t>
+            </a:r>
+            <a:endParaRPr kumimoji="1" lang="ja-JP" altLang="en-US" sz="4400" dirty="0"/>
           </a:p>
         </p:txBody>
       </p:sp>
       <p:cxnSp>
         <p:nvCxnSpPr>
-          <p:cNvPr id="61" name="直線コネクタ 11">
+          <p:cNvPr id="211" name="直線コネクタ 11">
             <a:extLst>
               <a:ext uri="{FF2B5EF4-FFF2-40B4-BE49-F238E27FC236}">
-                <a16:creationId xmlns:a16="http://schemas.microsoft.com/office/drawing/2014/main" id="{6E511FBB-477D-18FD-5FB6-046AAFCAAAA8}"/>
+                <a16:creationId xmlns:a16="http://schemas.microsoft.com/office/drawing/2014/main" id="{ED253968-CD3F-626A-A1AD-03F9697C2D9E}"/>
               </a:ext>
             </a:extLst>
           </p:cNvPr>
@@ -7084,8 +6749,8 @@
         </p:nvCxnSpPr>
         <p:spPr>
           <a:xfrm>
-            <a:off x="1294870" y="26691268"/>
-            <a:ext cx="12333657" cy="0"/>
+            <a:off x="10354334" y="29054619"/>
+            <a:ext cx="9211875" cy="2499"/>
           </a:xfrm>
           <a:prstGeom prst="line">
             <a:avLst/>
@@ -7113,10 +6778,10 @@
       </p:cxnSp>
       <p:sp>
         <p:nvSpPr>
-          <p:cNvPr id="62" name="テキスト ボックス 8">
+          <p:cNvPr id="232" name="テキスト ボックス 8">
             <a:extLst>
               <a:ext uri="{FF2B5EF4-FFF2-40B4-BE49-F238E27FC236}">
-                <a16:creationId xmlns:a16="http://schemas.microsoft.com/office/drawing/2014/main" id="{7BD3051A-D7CC-FC0E-5E54-F25EA00E199E}"/>
+                <a16:creationId xmlns:a16="http://schemas.microsoft.com/office/drawing/2014/main" id="{F15EF302-D5E5-3285-98FF-AC875C5BFCE4}"/>
               </a:ext>
             </a:extLst>
           </p:cNvPr>
@@ -7125,8 +6790,8 @@
         </p:nvSpPr>
         <p:spPr>
           <a:xfrm>
-            <a:off x="16844029" y="25223187"/>
-            <a:ext cx="7960064" cy="1015663"/>
+            <a:off x="20941669" y="32049607"/>
+            <a:ext cx="2598788" cy="523220"/>
           </a:xfrm>
           <a:prstGeom prst="rect">
             <a:avLst/>
@@ -7139,16 +6804,16 @@
           </a:bodyPr>
           <a:lstStyle/>
           <a:p>
-            <a:pPr algn="ctr"/>
-            <a:r>
-              <a:rPr lang="en-US" altLang="ja-JP" sz="6000" b="1" dirty="0">
+            <a:pPr algn="just"/>
+            <a:r>
+              <a:rPr lang="en-US" altLang="ja-JP" sz="2800" b="1" dirty="0">
                 <a:solidFill>
                   <a:srgbClr val="018185"/>
                 </a:solidFill>
               </a:rPr>
-              <a:t>Simulation Validation</a:t>
-            </a:r>
-            <a:endParaRPr kumimoji="1" lang="ja-JP" altLang="en-US" sz="6000" b="1" dirty="0">
+              <a:t>CONCLUSION</a:t>
+            </a:r>
+            <a:endParaRPr kumimoji="1" lang="ja-JP" altLang="en-US" sz="3600" b="1" dirty="0">
               <a:solidFill>
                 <a:srgbClr val="018185"/>
               </a:solidFill>
@@ -7158,10 +6823,10 @@
       </p:sp>
       <p:sp>
         <p:nvSpPr>
-          <p:cNvPr id="63" name="正方形/長方形 9">
+          <p:cNvPr id="233" name="正方形/長方形 9">
             <a:extLst>
               <a:ext uri="{FF2B5EF4-FFF2-40B4-BE49-F238E27FC236}">
-                <a16:creationId xmlns:a16="http://schemas.microsoft.com/office/drawing/2014/main" id="{B1CDCEE0-4406-C2AB-D021-5C8C9E59D6A0}"/>
+                <a16:creationId xmlns:a16="http://schemas.microsoft.com/office/drawing/2014/main" id="{75158C07-FB60-683F-DC4B-37EF7F65DDFE}"/>
               </a:ext>
             </a:extLst>
           </p:cNvPr>
@@ -7170,8 +6835,8 @@
         </p:nvSpPr>
         <p:spPr>
           <a:xfrm>
-            <a:off x="15761624" y="25157758"/>
-            <a:ext cx="419166" cy="1257132"/>
+            <a:off x="20402207" y="31950264"/>
+            <a:ext cx="539462" cy="721907"/>
           </a:xfrm>
           <a:prstGeom prst="rect">
             <a:avLst/>
@@ -7203,17 +6868,21 @@
           <a:bodyPr rtlCol="0" anchor="ctr"/>
           <a:lstStyle/>
           <a:p>
-            <a:pPr algn="ctr"/>
-            <a:endParaRPr kumimoji="1" lang="ja-JP" altLang="en-US"/>
+            <a:pPr algn="just"/>
+            <a:r>
+              <a:rPr kumimoji="1" lang="en-US" altLang="ja-JP" sz="4400" dirty="0"/>
+              <a:t>9</a:t>
+            </a:r>
+            <a:endParaRPr kumimoji="1" lang="ja-JP" altLang="en-US" sz="4400" dirty="0"/>
           </a:p>
         </p:txBody>
       </p:sp>
       <p:cxnSp>
         <p:nvCxnSpPr>
-          <p:cNvPr id="64" name="直線コネクタ 11">
+          <p:cNvPr id="234" name="直線コネクタ 11">
             <a:extLst>
               <a:ext uri="{FF2B5EF4-FFF2-40B4-BE49-F238E27FC236}">
-                <a16:creationId xmlns:a16="http://schemas.microsoft.com/office/drawing/2014/main" id="{C3BF37A2-178A-0DD3-BD48-CE08F266A366}"/>
+                <a16:creationId xmlns:a16="http://schemas.microsoft.com/office/drawing/2014/main" id="{4319E518-588A-B75D-728E-5CFC6EF7CD91}"/>
               </a:ext>
             </a:extLst>
           </p:cNvPr>
@@ -7224,8 +6893,8 @@
         </p:nvCxnSpPr>
         <p:spPr>
           <a:xfrm>
-            <a:off x="15761624" y="26414890"/>
-            <a:ext cx="12333657" cy="0"/>
+            <a:off x="20402207" y="32669673"/>
+            <a:ext cx="9211875" cy="2499"/>
           </a:xfrm>
           <a:prstGeom prst="line">
             <a:avLst/>
@@ -7253,73 +6922,7 @@
       </p:cxnSp>
       <p:pic>
         <p:nvPicPr>
-          <p:cNvPr id="66" name="Picture 65">
-            <a:extLst>
-              <a:ext uri="{FF2B5EF4-FFF2-40B4-BE49-F238E27FC236}">
-                <a16:creationId xmlns:a16="http://schemas.microsoft.com/office/drawing/2014/main" id="{E243BA5A-D601-0FF0-CC50-D66505715822}"/>
-              </a:ext>
-            </a:extLst>
-          </p:cNvPr>
-          <p:cNvPicPr>
-            <a:picLocks noChangeAspect="1"/>
-          </p:cNvPicPr>
-          <p:nvPr/>
-        </p:nvPicPr>
-        <p:blipFill>
-          <a:blip r:embed="rId4"/>
-          <a:stretch>
-            <a:fillRect/>
-          </a:stretch>
-        </p:blipFill>
-        <p:spPr>
-          <a:xfrm>
-            <a:off x="16272788" y="19295012"/>
-            <a:ext cx="11090116" cy="1743125"/>
-          </a:xfrm>
-          <a:prstGeom prst="rect">
-            <a:avLst/>
-          </a:prstGeom>
-        </p:spPr>
-      </p:pic>
-      <p:pic>
-        <p:nvPicPr>
-          <p:cNvPr id="68" name="Picture 67">
-            <a:extLst>
-              <a:ext uri="{FF2B5EF4-FFF2-40B4-BE49-F238E27FC236}">
-                <a16:creationId xmlns:a16="http://schemas.microsoft.com/office/drawing/2014/main" id="{AC6B4D1D-1346-175A-08B5-D5FD0F19E61F}"/>
-              </a:ext>
-            </a:extLst>
-          </p:cNvPr>
-          <p:cNvPicPr>
-            <a:picLocks noChangeAspect="1"/>
-          </p:cNvPicPr>
-          <p:nvPr/>
-        </p:nvPicPr>
-        <p:blipFill>
-          <a:blip r:embed="rId5">
-            <a:extLst>
-              <a:ext uri="{28A0092B-C50C-407E-A947-70E740481C1C}">
-                <a14:useLocalDpi xmlns:a14="http://schemas.microsoft.com/office/drawing/2010/main" val="0"/>
-              </a:ext>
-            </a:extLst>
-          </a:blip>
-          <a:stretch>
-            <a:fillRect/>
-          </a:stretch>
-        </p:blipFill>
-        <p:spPr>
-          <a:xfrm>
-            <a:off x="27159798" y="39259738"/>
-            <a:ext cx="3013207" cy="3376341"/>
-          </a:xfrm>
-          <a:prstGeom prst="rect">
-            <a:avLst/>
-          </a:prstGeom>
-        </p:spPr>
-      </p:pic>
-      <p:pic>
-        <p:nvPicPr>
-          <p:cNvPr id="72" name="Picture 71">
+          <p:cNvPr id="236" name="Picture 235">
             <a:extLst>
               <a:ext uri="{FF2B5EF4-FFF2-40B4-BE49-F238E27FC236}">
                 <a16:creationId xmlns:a16="http://schemas.microsoft.com/office/drawing/2014/main" id="{3F1E36CF-B0D2-A102-9502-E0490DB68CF0}"/>
@@ -7332,7 +6935,7 @@
           <p:nvPr/>
         </p:nvPicPr>
         <p:blipFill>
-          <a:blip r:embed="rId5">
+          <a:blip r:embed="rId4">
             <a:extLst>
               <a:ext uri="{28A0092B-C50C-407E-A947-70E740481C1C}">
                 <a14:useLocalDpi xmlns:a14="http://schemas.microsoft.com/office/drawing/2010/main" val="0"/>
@@ -7345,14 +6948,3453 @@
         </p:blipFill>
         <p:spPr>
           <a:xfrm>
-            <a:off x="183227" y="39259738"/>
-            <a:ext cx="3013207" cy="3376341"/>
+            <a:off x="28296747" y="40476719"/>
+            <a:ext cx="1765960" cy="1978783"/>
           </a:xfrm>
           <a:prstGeom prst="rect">
             <a:avLst/>
           </a:prstGeom>
         </p:spPr>
       </p:pic>
+      <p:sp>
+        <p:nvSpPr>
+          <p:cNvPr id="245" name="テキスト ボックス 5">
+            <a:extLst>
+              <a:ext uri="{FF2B5EF4-FFF2-40B4-BE49-F238E27FC236}">
+                <a16:creationId xmlns:a16="http://schemas.microsoft.com/office/drawing/2014/main" id="{F54A3833-4F27-3EAD-DD97-145539C4DFEB}"/>
+              </a:ext>
+            </a:extLst>
+          </p:cNvPr>
+          <p:cNvSpPr txBox="1"/>
+          <p:nvPr/>
+        </p:nvSpPr>
+        <p:spPr>
+          <a:xfrm>
+            <a:off x="20492297" y="35985832"/>
+            <a:ext cx="9149205" cy="1384995"/>
+          </a:xfrm>
+          <a:prstGeom prst="rect">
+            <a:avLst/>
+          </a:prstGeom>
+          <a:noFill/>
+        </p:spPr>
+        <p:txBody>
+          <a:bodyPr wrap="square" rtlCol="0">
+            <a:spAutoFit/>
+          </a:bodyPr>
+          <a:lstStyle/>
+          <a:p>
+            <a:pPr marL="457200" indent="-457200" algn="just">
+              <a:spcBef>
+                <a:spcPts val="2400"/>
+              </a:spcBef>
+              <a:buClr>
+                <a:srgbClr val="018185"/>
+              </a:buClr>
+              <a:buFont typeface="Wingdings" panose="05000000000000000000" pitchFamily="2" charset="2"/>
+              <a:buChar char="q"/>
+            </a:pPr>
+            <a:r>
+              <a:rPr lang="en-US" sz="2800" dirty="0">
+                <a:solidFill>
+                  <a:srgbClr val="1F2933"/>
+                </a:solidFill>
+                <a:latin typeface="Arial" pitchFamily="34" charset="0"/>
+                <a:ea typeface="Arial" pitchFamily="34" charset="-122"/>
+                <a:cs typeface="Arial" pitchFamily="34" charset="-120"/>
+              </a:rPr>
+              <a:t>The results show consistent DC-link capacitor RMS current reduction, improved thermal performance, and extended capacitor lifetime.</a:t>
+            </a:r>
+          </a:p>
+        </p:txBody>
+      </p:sp>
+      <p:sp>
+        <p:nvSpPr>
+          <p:cNvPr id="246" name="テキスト ボックス 5">
+            <a:extLst>
+              <a:ext uri="{FF2B5EF4-FFF2-40B4-BE49-F238E27FC236}">
+                <a16:creationId xmlns:a16="http://schemas.microsoft.com/office/drawing/2014/main" id="{C133383A-C025-8972-4427-9F9C72F45591}"/>
+              </a:ext>
+            </a:extLst>
+          </p:cNvPr>
+          <p:cNvSpPr txBox="1"/>
+          <p:nvPr/>
+        </p:nvSpPr>
+        <p:spPr>
+          <a:xfrm>
+            <a:off x="430738" y="6431811"/>
+            <a:ext cx="9149205" cy="1815882"/>
+          </a:xfrm>
+          <a:prstGeom prst="rect">
+            <a:avLst/>
+          </a:prstGeom>
+          <a:noFill/>
+        </p:spPr>
+        <p:txBody>
+          <a:bodyPr wrap="square" rtlCol="0">
+            <a:spAutoFit/>
+          </a:bodyPr>
+          <a:lstStyle/>
+          <a:p>
+            <a:pPr marL="457200" indent="-457200" algn="just">
+              <a:spcBef>
+                <a:spcPts val="2400"/>
+              </a:spcBef>
+              <a:buClr>
+                <a:srgbClr val="018185"/>
+              </a:buClr>
+              <a:buFont typeface="Wingdings" panose="05000000000000000000" pitchFamily="2" charset="2"/>
+              <a:buChar char="q"/>
+            </a:pPr>
+            <a:r>
+              <a:rPr lang="en-US" sz="2800" dirty="0">
+                <a:solidFill>
+                  <a:srgbClr val="1F2933"/>
+                </a:solidFill>
+                <a:latin typeface="Arial" pitchFamily="34" charset="0"/>
+                <a:ea typeface="Arial" pitchFamily="34" charset="-122"/>
+                <a:cs typeface="Arial" pitchFamily="34" charset="-120"/>
+              </a:rPr>
+              <a:t>DC-link capacitors remain a major reliability bottleneck. Ripple current causes ESR heating, thermal stress, degradation, and reduced capacitor lifetime. </a:t>
+            </a:r>
+          </a:p>
+        </p:txBody>
+      </p:sp>
+      <p:sp>
+        <p:nvSpPr>
+          <p:cNvPr id="247" name="テキスト ボックス 5">
+            <a:extLst>
+              <a:ext uri="{FF2B5EF4-FFF2-40B4-BE49-F238E27FC236}">
+                <a16:creationId xmlns:a16="http://schemas.microsoft.com/office/drawing/2014/main" id="{DDF3C201-7C4E-22F4-E888-6B0AA4A00DBE}"/>
+              </a:ext>
+            </a:extLst>
+          </p:cNvPr>
+          <p:cNvSpPr txBox="1"/>
+          <p:nvPr/>
+        </p:nvSpPr>
+        <p:spPr>
+          <a:xfrm>
+            <a:off x="430738" y="9403502"/>
+            <a:ext cx="9149205" cy="1384995"/>
+          </a:xfrm>
+          <a:prstGeom prst="rect">
+            <a:avLst/>
+          </a:prstGeom>
+          <a:noFill/>
+        </p:spPr>
+        <p:txBody>
+          <a:bodyPr wrap="square" rtlCol="0">
+            <a:spAutoFit/>
+          </a:bodyPr>
+          <a:lstStyle/>
+          <a:p>
+            <a:pPr marL="457200" indent="-457200" algn="just">
+              <a:spcBef>
+                <a:spcPts val="2400"/>
+              </a:spcBef>
+              <a:buClr>
+                <a:srgbClr val="018185"/>
+              </a:buClr>
+              <a:buFont typeface="Wingdings" panose="05000000000000000000" pitchFamily="2" charset="2"/>
+              <a:buChar char="q"/>
+            </a:pPr>
+            <a:r>
+              <a:rPr lang="en-US" sz="2800" dirty="0">
+                <a:solidFill>
+                  <a:srgbClr val="1F2933"/>
+                </a:solidFill>
+                <a:latin typeface="Arial" pitchFamily="34" charset="0"/>
+                <a:ea typeface="Arial" pitchFamily="34" charset="-122"/>
+                <a:cs typeface="Arial" pitchFamily="34" charset="-120"/>
+              </a:rPr>
+              <a:t>This work proposes adaptive interleaving among the three legs of a single inverter using real-time multi-carrier PWM, without adding extra hardware.</a:t>
+            </a:r>
+          </a:p>
+        </p:txBody>
+      </p:sp>
+      <p:sp>
+        <p:nvSpPr>
+          <p:cNvPr id="248" name="テキスト ボックス 5">
+            <a:extLst>
+              <a:ext uri="{FF2B5EF4-FFF2-40B4-BE49-F238E27FC236}">
+                <a16:creationId xmlns:a16="http://schemas.microsoft.com/office/drawing/2014/main" id="{A79CF627-F6E7-9A10-D54F-11D39DB693BD}"/>
+              </a:ext>
+            </a:extLst>
+          </p:cNvPr>
+          <p:cNvSpPr txBox="1"/>
+          <p:nvPr/>
+        </p:nvSpPr>
+        <p:spPr>
+          <a:xfrm>
+            <a:off x="430739" y="8322021"/>
+            <a:ext cx="9149205" cy="954107"/>
+          </a:xfrm>
+          <a:prstGeom prst="rect">
+            <a:avLst/>
+          </a:prstGeom>
+          <a:noFill/>
+        </p:spPr>
+        <p:txBody>
+          <a:bodyPr wrap="square" rtlCol="0">
+            <a:spAutoFit/>
+          </a:bodyPr>
+          <a:lstStyle/>
+          <a:p>
+            <a:pPr marL="457200" indent="-457200" algn="just">
+              <a:spcBef>
+                <a:spcPts val="2400"/>
+              </a:spcBef>
+              <a:buClr>
+                <a:srgbClr val="018185"/>
+              </a:buClr>
+              <a:buFont typeface="Wingdings" panose="05000000000000000000" pitchFamily="2" charset="2"/>
+              <a:buChar char="q"/>
+            </a:pPr>
+            <a:r>
+              <a:rPr lang="en-US" sz="2800" dirty="0">
+                <a:solidFill>
+                  <a:srgbClr val="1F2933"/>
+                </a:solidFill>
+                <a:latin typeface="Arial" pitchFamily="34" charset="0"/>
+                <a:ea typeface="Arial" pitchFamily="34" charset="-122"/>
+                <a:cs typeface="Arial" pitchFamily="34" charset="-120"/>
+              </a:rPr>
+              <a:t>Existing ripple-reduction methods often require multiple inverter units or additional converter stages. </a:t>
+            </a:r>
+          </a:p>
+        </p:txBody>
+      </p:sp>
+      <p:sp>
+        <p:nvSpPr>
+          <p:cNvPr id="251" name="テキスト ボックス 5">
+            <a:extLst>
+              <a:ext uri="{FF2B5EF4-FFF2-40B4-BE49-F238E27FC236}">
+                <a16:creationId xmlns:a16="http://schemas.microsoft.com/office/drawing/2014/main" id="{02A44D1B-196A-2156-6494-72096A51BB55}"/>
+              </a:ext>
+            </a:extLst>
+          </p:cNvPr>
+          <p:cNvSpPr txBox="1"/>
+          <p:nvPr/>
+        </p:nvSpPr>
+        <p:spPr>
+          <a:xfrm>
+            <a:off x="461924" y="14255397"/>
+            <a:ext cx="9149205" cy="954107"/>
+          </a:xfrm>
+          <a:prstGeom prst="rect">
+            <a:avLst/>
+          </a:prstGeom>
+          <a:noFill/>
+        </p:spPr>
+        <p:txBody>
+          <a:bodyPr wrap="square" rtlCol="0">
+            <a:spAutoFit/>
+          </a:bodyPr>
+          <a:lstStyle/>
+          <a:p>
+            <a:pPr marL="457200" indent="-457200" algn="just">
+              <a:spcBef>
+                <a:spcPts val="2400"/>
+              </a:spcBef>
+              <a:buClr>
+                <a:srgbClr val="018185"/>
+              </a:buClr>
+              <a:buFont typeface="Wingdings" panose="05000000000000000000" pitchFamily="2" charset="2"/>
+              <a:buChar char="q"/>
+            </a:pPr>
+            <a:r>
+              <a:rPr lang="en-US" sz="2800" dirty="0">
+                <a:solidFill>
+                  <a:srgbClr val="1F2933"/>
+                </a:solidFill>
+                <a:latin typeface="Arial" pitchFamily="34" charset="0"/>
+                <a:ea typeface="Arial" pitchFamily="34" charset="-122"/>
+                <a:cs typeface="Arial" pitchFamily="34" charset="-120"/>
+              </a:rPr>
+              <a:t>Ripple-current-induced ESR losses increase the hotspot temperature, which accelerates degradation.</a:t>
+            </a:r>
+          </a:p>
+        </p:txBody>
+      </p:sp>
+      <p:sp>
+        <p:nvSpPr>
+          <p:cNvPr id="252" name="テキスト ボックス 5">
+            <a:extLst>
+              <a:ext uri="{FF2B5EF4-FFF2-40B4-BE49-F238E27FC236}">
+                <a16:creationId xmlns:a16="http://schemas.microsoft.com/office/drawing/2014/main" id="{08DC16D5-1DFE-2023-9EBD-AA868FE328BE}"/>
+              </a:ext>
+            </a:extLst>
+          </p:cNvPr>
+          <p:cNvSpPr txBox="1"/>
+          <p:nvPr/>
+        </p:nvSpPr>
+        <p:spPr>
+          <a:xfrm>
+            <a:off x="461924" y="16590793"/>
+            <a:ext cx="9149205" cy="1384995"/>
+          </a:xfrm>
+          <a:prstGeom prst="rect">
+            <a:avLst/>
+          </a:prstGeom>
+          <a:noFill/>
+        </p:spPr>
+        <p:txBody>
+          <a:bodyPr wrap="square" rtlCol="0">
+            <a:spAutoFit/>
+          </a:bodyPr>
+          <a:lstStyle/>
+          <a:p>
+            <a:pPr marL="457200" indent="-457200" algn="just">
+              <a:spcBef>
+                <a:spcPts val="2400"/>
+              </a:spcBef>
+              <a:buClr>
+                <a:srgbClr val="018185"/>
+              </a:buClr>
+              <a:buFont typeface="Wingdings" panose="05000000000000000000" pitchFamily="2" charset="2"/>
+              <a:buChar char="q"/>
+            </a:pPr>
+            <a:r>
+              <a:rPr lang="en-US" sz="2800" dirty="0">
+                <a:solidFill>
+                  <a:srgbClr val="1F2933"/>
+                </a:solidFill>
+                <a:latin typeface="Arial" pitchFamily="34" charset="0"/>
+                <a:ea typeface="Arial" pitchFamily="34" charset="-122"/>
+                <a:cs typeface="Arial" pitchFamily="34" charset="-120"/>
+              </a:rPr>
+              <a:t>Therefore, reducing the RMS capacitor current directly reduces thermal stress and can extend the capacitor’s lifetime.</a:t>
+            </a:r>
+          </a:p>
+        </p:txBody>
+      </p:sp>
+      <p:sp>
+        <p:nvSpPr>
+          <p:cNvPr id="253" name="テキスト ボックス 8">
+            <a:extLst>
+              <a:ext uri="{FF2B5EF4-FFF2-40B4-BE49-F238E27FC236}">
+                <a16:creationId xmlns:a16="http://schemas.microsoft.com/office/drawing/2014/main" id="{328C0B3A-988C-9149-43D6-0A9C2FF0012D}"/>
+              </a:ext>
+            </a:extLst>
+          </p:cNvPr>
+          <p:cNvSpPr txBox="1"/>
+          <p:nvPr/>
+        </p:nvSpPr>
+        <p:spPr>
+          <a:xfrm>
+            <a:off x="20845872" y="4393870"/>
+            <a:ext cx="4633128" cy="523220"/>
+          </a:xfrm>
+          <a:prstGeom prst="rect">
+            <a:avLst/>
+          </a:prstGeom>
+          <a:noFill/>
+        </p:spPr>
+        <p:txBody>
+          <a:bodyPr wrap="none" rtlCol="0">
+            <a:spAutoFit/>
+          </a:bodyPr>
+          <a:lstStyle/>
+          <a:p>
+            <a:pPr algn="just"/>
+            <a:r>
+              <a:rPr lang="en-US" altLang="ja-JP" sz="2800" b="1" dirty="0">
+                <a:solidFill>
+                  <a:srgbClr val="018185"/>
+                </a:solidFill>
+              </a:rPr>
+              <a:t>SIMULATION VALIDATION</a:t>
+            </a:r>
+            <a:endParaRPr kumimoji="1" lang="ja-JP" altLang="en-US" sz="3600" b="1" dirty="0">
+              <a:solidFill>
+                <a:srgbClr val="018185"/>
+              </a:solidFill>
+            </a:endParaRPr>
+          </a:p>
+        </p:txBody>
+      </p:sp>
+      <p:sp>
+        <p:nvSpPr>
+          <p:cNvPr id="254" name="正方形/長方形 9">
+            <a:extLst>
+              <a:ext uri="{FF2B5EF4-FFF2-40B4-BE49-F238E27FC236}">
+                <a16:creationId xmlns:a16="http://schemas.microsoft.com/office/drawing/2014/main" id="{5E74B085-72F5-5B67-CD3E-E96BECE4F04A}"/>
+              </a:ext>
+            </a:extLst>
+          </p:cNvPr>
+          <p:cNvSpPr/>
+          <p:nvPr/>
+        </p:nvSpPr>
+        <p:spPr>
+          <a:xfrm>
+            <a:off x="20325632" y="4318549"/>
+            <a:ext cx="539462" cy="721907"/>
+          </a:xfrm>
+          <a:prstGeom prst="rect">
+            <a:avLst/>
+          </a:prstGeom>
+          <a:solidFill>
+            <a:srgbClr val="018185"/>
+          </a:solidFill>
+          <a:ln>
+            <a:noFill/>
+          </a:ln>
+        </p:spPr>
+        <p:style>
+          <a:lnRef idx="2">
+            <a:schemeClr val="accent1">
+              <a:shade val="15000"/>
+            </a:schemeClr>
+          </a:lnRef>
+          <a:fillRef idx="1">
+            <a:schemeClr val="accent1"/>
+          </a:fillRef>
+          <a:effectRef idx="0">
+            <a:schemeClr val="accent1"/>
+          </a:effectRef>
+          <a:fontRef idx="minor">
+            <a:schemeClr val="lt1"/>
+          </a:fontRef>
+        </p:style>
+        <p:txBody>
+          <a:bodyPr rtlCol="0" anchor="ctr"/>
+          <a:lstStyle/>
+          <a:p>
+            <a:pPr algn="just"/>
+            <a:r>
+              <a:rPr kumimoji="1" lang="en-US" altLang="ja-JP" sz="4400" dirty="0"/>
+              <a:t>8</a:t>
+            </a:r>
+            <a:endParaRPr kumimoji="1" lang="ja-JP" altLang="en-US" sz="4400" dirty="0"/>
+          </a:p>
+        </p:txBody>
+      </p:sp>
+      <p:cxnSp>
+        <p:nvCxnSpPr>
+          <p:cNvPr id="255" name="直線コネクタ 11">
+            <a:extLst>
+              <a:ext uri="{FF2B5EF4-FFF2-40B4-BE49-F238E27FC236}">
+                <a16:creationId xmlns:a16="http://schemas.microsoft.com/office/drawing/2014/main" id="{C63AACF2-2AE6-C138-A6E1-8951AB6AF988}"/>
+              </a:ext>
+            </a:extLst>
+          </p:cNvPr>
+          <p:cNvCxnSpPr>
+            <a:cxnSpLocks/>
+          </p:cNvCxnSpPr>
+          <p:nvPr/>
+        </p:nvCxnSpPr>
+        <p:spPr>
+          <a:xfrm>
+            <a:off x="20325632" y="5037958"/>
+            <a:ext cx="9211875" cy="2499"/>
+          </a:xfrm>
+          <a:prstGeom prst="line">
+            <a:avLst/>
+          </a:prstGeom>
+          <a:ln w="101600">
+            <a:solidFill>
+              <a:srgbClr val="018185"/>
+            </a:solidFill>
+          </a:ln>
+        </p:spPr>
+        <p:style>
+          <a:lnRef idx="2">
+            <a:schemeClr val="accent1"/>
+          </a:lnRef>
+          <a:fillRef idx="0">
+            <a:schemeClr val="accent1"/>
+          </a:fillRef>
+          <a:effectRef idx="1">
+            <a:schemeClr val="accent1"/>
+          </a:effectRef>
+          <a:fontRef idx="minor">
+            <a:schemeClr val="tx1"/>
+          </a:fontRef>
+        </p:style>
+      </p:cxnSp>
+      <p:sp>
+        <p:nvSpPr>
+          <p:cNvPr id="256" name="テキスト ボックス 5">
+            <a:extLst>
+              <a:ext uri="{FF2B5EF4-FFF2-40B4-BE49-F238E27FC236}">
+                <a16:creationId xmlns:a16="http://schemas.microsoft.com/office/drawing/2014/main" id="{547E3C44-5BFA-3103-C4AF-20E7FEEB1B59}"/>
+              </a:ext>
+            </a:extLst>
+          </p:cNvPr>
+          <p:cNvSpPr txBox="1"/>
+          <p:nvPr/>
+        </p:nvSpPr>
+        <p:spPr>
+          <a:xfrm>
+            <a:off x="20544589" y="33353398"/>
+            <a:ext cx="9149205" cy="954107"/>
+          </a:xfrm>
+          <a:prstGeom prst="rect">
+            <a:avLst/>
+          </a:prstGeom>
+          <a:noFill/>
+        </p:spPr>
+        <p:txBody>
+          <a:bodyPr wrap="square" rtlCol="0">
+            <a:spAutoFit/>
+          </a:bodyPr>
+          <a:lstStyle/>
+          <a:p>
+            <a:pPr marL="457200" indent="-457200" algn="just">
+              <a:spcBef>
+                <a:spcPts val="2400"/>
+              </a:spcBef>
+              <a:buClr>
+                <a:srgbClr val="018185"/>
+              </a:buClr>
+              <a:buFont typeface="Wingdings" panose="05000000000000000000" pitchFamily="2" charset="2"/>
+              <a:buChar char="q"/>
+            </a:pPr>
+            <a:r>
+              <a:rPr lang="en-US" sz="2800" dirty="0">
+                <a:solidFill>
+                  <a:srgbClr val="1F2933"/>
+                </a:solidFill>
+                <a:latin typeface="Arial" pitchFamily="34" charset="0"/>
+                <a:ea typeface="Arial" pitchFamily="34" charset="-122"/>
+                <a:cs typeface="Arial" pitchFamily="34" charset="-120"/>
+              </a:rPr>
+              <a:t>A novel adaptive multi-carrier PWM method is proposed for a single two-level three-phase inverter. </a:t>
+            </a:r>
+          </a:p>
+        </p:txBody>
+      </p:sp>
+      <p:sp>
+        <p:nvSpPr>
+          <p:cNvPr id="257" name="テキスト ボックス 5">
+            <a:extLst>
+              <a:ext uri="{FF2B5EF4-FFF2-40B4-BE49-F238E27FC236}">
+                <a16:creationId xmlns:a16="http://schemas.microsoft.com/office/drawing/2014/main" id="{6FC3EE05-F96E-3EEC-AC90-3579BCE6BAC3}"/>
+              </a:ext>
+            </a:extLst>
+          </p:cNvPr>
+          <p:cNvSpPr txBox="1"/>
+          <p:nvPr/>
+        </p:nvSpPr>
+        <p:spPr>
+          <a:xfrm>
+            <a:off x="20524882" y="34574746"/>
+            <a:ext cx="9149205" cy="1384995"/>
+          </a:xfrm>
+          <a:prstGeom prst="rect">
+            <a:avLst/>
+          </a:prstGeom>
+          <a:noFill/>
+        </p:spPr>
+        <p:txBody>
+          <a:bodyPr wrap="square" rtlCol="0">
+            <a:spAutoFit/>
+          </a:bodyPr>
+          <a:lstStyle/>
+          <a:p>
+            <a:pPr marL="457200" indent="-457200" algn="just">
+              <a:spcBef>
+                <a:spcPts val="2400"/>
+              </a:spcBef>
+              <a:buClr>
+                <a:srgbClr val="018185"/>
+              </a:buClr>
+              <a:buFont typeface="Wingdings" panose="05000000000000000000" pitchFamily="2" charset="2"/>
+              <a:buChar char="q"/>
+            </a:pPr>
+            <a:r>
+              <a:rPr lang="en-US" sz="2800" dirty="0">
+                <a:solidFill>
+                  <a:srgbClr val="1F2933"/>
+                </a:solidFill>
+                <a:latin typeface="Arial" pitchFamily="34" charset="0"/>
+                <a:ea typeface="Arial" pitchFamily="34" charset="-122"/>
+                <a:cs typeface="Arial" pitchFamily="34" charset="-120"/>
+              </a:rPr>
+              <a:t>The method requires no additional hardware and uses a reduced-dimension LUT for real-time implementation. </a:t>
+            </a:r>
+          </a:p>
+        </p:txBody>
+      </p:sp>
+      <p:pic>
+        <p:nvPicPr>
+          <p:cNvPr id="258" name="Picture 257">
+            <a:extLst>
+              <a:ext uri="{FF2B5EF4-FFF2-40B4-BE49-F238E27FC236}">
+                <a16:creationId xmlns:a16="http://schemas.microsoft.com/office/drawing/2014/main" id="{9444A8D6-C0A2-D81A-B993-1136FF7BBF6F}"/>
+              </a:ext>
+            </a:extLst>
+          </p:cNvPr>
+          <p:cNvPicPr>
+            <a:picLocks noChangeAspect="1"/>
+          </p:cNvPicPr>
+          <p:nvPr/>
+        </p:nvPicPr>
+        <p:blipFill>
+          <a:blip r:embed="rId4">
+            <a:extLst>
+              <a:ext uri="{28A0092B-C50C-407E-A947-70E740481C1C}">
+                <a14:useLocalDpi xmlns:a14="http://schemas.microsoft.com/office/drawing/2010/main" val="0"/>
+              </a:ext>
+            </a:extLst>
+          </a:blip>
+          <a:stretch>
+            <a:fillRect/>
+          </a:stretch>
+        </p:blipFill>
+        <p:spPr>
+          <a:xfrm>
+            <a:off x="212506" y="40464789"/>
+            <a:ext cx="1765960" cy="1978783"/>
+          </a:xfrm>
+          <a:prstGeom prst="rect">
+            <a:avLst/>
+          </a:prstGeom>
+        </p:spPr>
+      </p:pic>
+      <mc:AlternateContent xmlns:mc="http://schemas.openxmlformats.org/markup-compatibility/2006">
+        <mc:Choice xmlns:a14="http://schemas.microsoft.com/office/drawing/2010/main" Requires="a14">
+          <p:sp>
+            <p:nvSpPr>
+              <p:cNvPr id="269" name="TextBox 268">
+                <a:extLst>
+                  <a:ext uri="{FF2B5EF4-FFF2-40B4-BE49-F238E27FC236}">
+                    <a16:creationId xmlns:a16="http://schemas.microsoft.com/office/drawing/2014/main" id="{4553F57B-4CFA-68E3-E131-D4E11E016964}"/>
+                  </a:ext>
+                </a:extLst>
+              </p:cNvPr>
+              <p:cNvSpPr txBox="1"/>
+              <p:nvPr/>
+            </p:nvSpPr>
+            <p:spPr>
+              <a:xfrm>
+                <a:off x="21146324" y="15413535"/>
+                <a:ext cx="4733054" cy="556434"/>
+              </a:xfrm>
+              <a:prstGeom prst="rect">
+                <a:avLst/>
+              </a:prstGeom>
+              <a:noFill/>
+            </p:spPr>
+            <p:txBody>
+              <a:bodyPr wrap="square">
+                <a:spAutoFit/>
+              </a:bodyPr>
+              <a:lstStyle/>
+              <a:p>
+                <a:pPr algn="just">
+                  <a:spcBef>
+                    <a:spcPts val="2400"/>
+                  </a:spcBef>
+                  <a:buClr>
+                    <a:srgbClr val="018185"/>
+                  </a:buClr>
+                </a:pPr>
+                <a14:m>
+                  <m:oMathPara xmlns:m="http://schemas.openxmlformats.org/officeDocument/2006/math">
+                    <m:oMathParaPr>
+                      <m:jc m:val="centerGroup"/>
+                    </m:oMathParaPr>
+                    <m:oMath xmlns:m="http://schemas.openxmlformats.org/officeDocument/2006/math">
+                      <m:sSub>
+                        <m:sSubPr>
+                          <m:ctrlPr>
+                            <a:rPr lang="en-US" sz="2800" i="1" dirty="0" smtClean="0">
+                              <a:solidFill>
+                                <a:srgbClr val="1F2933"/>
+                              </a:solidFill>
+                              <a:latin typeface="Cambria Math" panose="02040503050406030204" pitchFamily="18" charset="0"/>
+                              <a:ea typeface="Arial" pitchFamily="34" charset="-122"/>
+                              <a:cs typeface="Arial" pitchFamily="34" charset="-120"/>
+                            </a:rPr>
+                          </m:ctrlPr>
+                        </m:sSubPr>
+                        <m:e>
+                          <m:r>
+                            <a:rPr lang="en-US" sz="2800" i="1" dirty="0" smtClean="0">
+                              <a:solidFill>
+                                <a:srgbClr val="1F2933"/>
+                              </a:solidFill>
+                              <a:latin typeface="Cambria Math" panose="02040503050406030204" pitchFamily="18" charset="0"/>
+                              <a:ea typeface="Arial" pitchFamily="34" charset="-122"/>
+                              <a:cs typeface="Arial" pitchFamily="34" charset="-120"/>
+                            </a:rPr>
+                            <m:t>𝐼</m:t>
+                          </m:r>
+                        </m:e>
+                        <m:sub>
+                          <m:r>
+                            <a:rPr lang="en-US" sz="2800" i="1" dirty="0" smtClean="0">
+                              <a:solidFill>
+                                <a:srgbClr val="1F2933"/>
+                              </a:solidFill>
+                              <a:latin typeface="Cambria Math" panose="02040503050406030204" pitchFamily="18" charset="0"/>
+                              <a:ea typeface="Arial" pitchFamily="34" charset="-122"/>
+                              <a:cs typeface="Arial" pitchFamily="34" charset="-120"/>
+                            </a:rPr>
+                            <m:t>𝑐𝑎𝑝</m:t>
+                          </m:r>
+                          <m:r>
+                            <a:rPr lang="en-US" sz="2800" b="0" i="1" dirty="0" smtClean="0">
+                              <a:solidFill>
+                                <a:srgbClr val="1F2933"/>
+                              </a:solidFill>
+                              <a:latin typeface="Cambria Math" panose="02040503050406030204" pitchFamily="18" charset="0"/>
+                              <a:ea typeface="Arial" pitchFamily="34" charset="-122"/>
+                              <a:cs typeface="Arial" pitchFamily="34" charset="-120"/>
+                            </a:rPr>
+                            <m:t>, </m:t>
+                          </m:r>
+                          <m:r>
+                            <a:rPr lang="en-US" sz="2800" b="0" i="1" dirty="0" smtClean="0">
+                              <a:solidFill>
+                                <a:srgbClr val="1F2933"/>
+                              </a:solidFill>
+                              <a:latin typeface="Cambria Math" panose="02040503050406030204" pitchFamily="18" charset="0"/>
+                              <a:ea typeface="Arial" pitchFamily="34" charset="-122"/>
+                              <a:cs typeface="Arial" pitchFamily="34" charset="-120"/>
+                            </a:rPr>
+                            <m:t>𝑅𝑀𝑆</m:t>
+                          </m:r>
+                        </m:sub>
+                      </m:sSub>
+                      <m:r>
+                        <a:rPr lang="en-US" sz="2800" b="0" i="1" dirty="0" smtClean="0">
+                          <a:solidFill>
+                            <a:srgbClr val="1F2933"/>
+                          </a:solidFill>
+                          <a:latin typeface="Cambria Math" panose="02040503050406030204" pitchFamily="18" charset="0"/>
+                          <a:ea typeface="Arial" pitchFamily="34" charset="-122"/>
+                          <a:cs typeface="Arial" pitchFamily="34" charset="-120"/>
+                        </a:rPr>
+                        <m:t>=</m:t>
+                      </m:r>
+                      <m:r>
+                        <a:rPr lang="en-US" sz="2800" i="1" dirty="0" smtClean="0">
+                          <a:solidFill>
+                            <a:srgbClr val="1F2933"/>
+                          </a:solidFill>
+                          <a:latin typeface="Cambria Math" panose="02040503050406030204" pitchFamily="18" charset="0"/>
+                          <a:ea typeface="Arial" pitchFamily="34" charset="-122"/>
+                          <a:cs typeface="Arial" pitchFamily="34" charset="-120"/>
+                        </a:rPr>
+                        <m:t>27.6 </m:t>
+                      </m:r>
+                      <m:r>
+                        <a:rPr lang="en-US" sz="2800" i="1" dirty="0" smtClean="0">
+                          <a:solidFill>
+                            <a:srgbClr val="1F2933"/>
+                          </a:solidFill>
+                          <a:latin typeface="Cambria Math" panose="02040503050406030204" pitchFamily="18" charset="0"/>
+                          <a:ea typeface="Arial" pitchFamily="34" charset="-122"/>
+                          <a:cs typeface="Arial" pitchFamily="34" charset="-120"/>
+                        </a:rPr>
+                        <m:t>𝐴</m:t>
+                      </m:r>
+                    </m:oMath>
+                  </m:oMathPara>
+                </a14:m>
+                <a:endParaRPr lang="en-US" sz="2800" dirty="0">
+                  <a:solidFill>
+                    <a:srgbClr val="1F2933"/>
+                  </a:solidFill>
+                  <a:latin typeface="Arial" pitchFamily="34" charset="0"/>
+                  <a:ea typeface="Arial" pitchFamily="34" charset="-122"/>
+                  <a:cs typeface="Arial" pitchFamily="34" charset="-120"/>
+                </a:endParaRPr>
+              </a:p>
+            </p:txBody>
+          </p:sp>
+        </mc:Choice>
+        <mc:Fallback>
+          <p:sp>
+            <p:nvSpPr>
+              <p:cNvPr id="269" name="TextBox 268">
+                <a:extLst>
+                  <a:ext uri="{FF2B5EF4-FFF2-40B4-BE49-F238E27FC236}">
+                    <a16:creationId xmlns:a16="http://schemas.microsoft.com/office/drawing/2014/main" id="{4553F57B-4CFA-68E3-E131-D4E11E016964}"/>
+                  </a:ext>
+                </a:extLst>
+              </p:cNvPr>
+              <p:cNvSpPr txBox="1">
+                <a:spLocks noRot="1" noChangeAspect="1" noMove="1" noResize="1" noEditPoints="1" noAdjustHandles="1" noChangeArrowheads="1" noChangeShapeType="1" noTextEdit="1"/>
+              </p:cNvSpPr>
+              <p:nvPr/>
+            </p:nvSpPr>
+            <p:spPr>
+              <a:xfrm>
+                <a:off x="21146324" y="15413535"/>
+                <a:ext cx="4733054" cy="556434"/>
+              </a:xfrm>
+              <a:prstGeom prst="rect">
+                <a:avLst/>
+              </a:prstGeom>
+              <a:blipFill>
+                <a:blip r:embed="rId5"/>
+                <a:stretch>
+                  <a:fillRect/>
+                </a:stretch>
+              </a:blipFill>
+            </p:spPr>
+            <p:txBody>
+              <a:bodyPr/>
+              <a:lstStyle/>
+              <a:p>
+                <a:r>
+                  <a:rPr lang="sv-SE">
+                    <a:noFill/>
+                  </a:rPr>
+                  <a:t> </a:t>
+                </a:r>
+              </a:p>
+            </p:txBody>
+          </p:sp>
+        </mc:Fallback>
+      </mc:AlternateContent>
+      <mc:AlternateContent xmlns:mc="http://schemas.openxmlformats.org/markup-compatibility/2006">
+        <mc:Choice xmlns:a14="http://schemas.microsoft.com/office/drawing/2010/main" Requires="a14">
+          <p:sp>
+            <p:nvSpPr>
+              <p:cNvPr id="270" name="TextBox 269">
+                <a:extLst>
+                  <a:ext uri="{FF2B5EF4-FFF2-40B4-BE49-F238E27FC236}">
+                    <a16:creationId xmlns:a16="http://schemas.microsoft.com/office/drawing/2014/main" id="{EA577131-53FD-0A3C-F500-EBABDF510E66}"/>
+                  </a:ext>
+                </a:extLst>
+              </p:cNvPr>
+              <p:cNvSpPr txBox="1"/>
+              <p:nvPr/>
+            </p:nvSpPr>
+            <p:spPr>
+              <a:xfrm>
+                <a:off x="25681864" y="15402723"/>
+                <a:ext cx="3497863" cy="556434"/>
+              </a:xfrm>
+              <a:prstGeom prst="rect">
+                <a:avLst/>
+              </a:prstGeom>
+              <a:noFill/>
+            </p:spPr>
+            <p:txBody>
+              <a:bodyPr wrap="square">
+                <a:spAutoFit/>
+              </a:bodyPr>
+              <a:lstStyle/>
+              <a:p>
+                <a:pPr algn="just">
+                  <a:spcBef>
+                    <a:spcPts val="2400"/>
+                  </a:spcBef>
+                  <a:buClr>
+                    <a:srgbClr val="018185"/>
+                  </a:buClr>
+                </a:pPr>
+                <a14:m>
+                  <m:oMathPara xmlns:m="http://schemas.openxmlformats.org/officeDocument/2006/math">
+                    <m:oMathParaPr>
+                      <m:jc m:val="centerGroup"/>
+                    </m:oMathParaPr>
+                    <m:oMath xmlns:m="http://schemas.openxmlformats.org/officeDocument/2006/math">
+                      <m:sSub>
+                        <m:sSubPr>
+                          <m:ctrlPr>
+                            <a:rPr lang="en-US" sz="2800" i="1" dirty="0" smtClean="0">
+                              <a:solidFill>
+                                <a:srgbClr val="1F2933"/>
+                              </a:solidFill>
+                              <a:latin typeface="Cambria Math" panose="02040503050406030204" pitchFamily="18" charset="0"/>
+                              <a:ea typeface="Arial" pitchFamily="34" charset="-122"/>
+                              <a:cs typeface="Arial" pitchFamily="34" charset="-120"/>
+                            </a:rPr>
+                          </m:ctrlPr>
+                        </m:sSubPr>
+                        <m:e>
+                          <m:r>
+                            <a:rPr lang="en-US" sz="2800" i="1" dirty="0" smtClean="0">
+                              <a:solidFill>
+                                <a:srgbClr val="1F2933"/>
+                              </a:solidFill>
+                              <a:latin typeface="Cambria Math" panose="02040503050406030204" pitchFamily="18" charset="0"/>
+                              <a:ea typeface="Arial" pitchFamily="34" charset="-122"/>
+                              <a:cs typeface="Arial" pitchFamily="34" charset="-120"/>
+                            </a:rPr>
+                            <m:t>𝐼</m:t>
+                          </m:r>
+                        </m:e>
+                        <m:sub>
+                          <m:r>
+                            <a:rPr lang="en-US" sz="2800" i="1" dirty="0" smtClean="0">
+                              <a:solidFill>
+                                <a:srgbClr val="1F2933"/>
+                              </a:solidFill>
+                              <a:latin typeface="Cambria Math" panose="02040503050406030204" pitchFamily="18" charset="0"/>
+                              <a:ea typeface="Arial" pitchFamily="34" charset="-122"/>
+                              <a:cs typeface="Arial" pitchFamily="34" charset="-120"/>
+                            </a:rPr>
+                            <m:t>𝑐𝑎𝑝</m:t>
+                          </m:r>
+                          <m:r>
+                            <a:rPr lang="en-US" sz="2800" b="0" i="1" dirty="0" smtClean="0">
+                              <a:solidFill>
+                                <a:srgbClr val="1F2933"/>
+                              </a:solidFill>
+                              <a:latin typeface="Cambria Math" panose="02040503050406030204" pitchFamily="18" charset="0"/>
+                              <a:ea typeface="Arial" pitchFamily="34" charset="-122"/>
+                              <a:cs typeface="Arial" pitchFamily="34" charset="-120"/>
+                            </a:rPr>
+                            <m:t>, </m:t>
+                          </m:r>
+                          <m:r>
+                            <a:rPr lang="en-US" sz="2800" b="0" i="1" dirty="0" smtClean="0">
+                              <a:solidFill>
+                                <a:srgbClr val="1F2933"/>
+                              </a:solidFill>
+                              <a:latin typeface="Cambria Math" panose="02040503050406030204" pitchFamily="18" charset="0"/>
+                              <a:ea typeface="Arial" pitchFamily="34" charset="-122"/>
+                              <a:cs typeface="Arial" pitchFamily="34" charset="-120"/>
+                            </a:rPr>
+                            <m:t>𝑅𝑀𝑆</m:t>
+                          </m:r>
+                        </m:sub>
+                      </m:sSub>
+                      <m:r>
+                        <a:rPr lang="en-US" sz="2800" b="0" i="1" dirty="0" smtClean="0">
+                          <a:solidFill>
+                            <a:srgbClr val="1F2933"/>
+                          </a:solidFill>
+                          <a:latin typeface="Cambria Math" panose="02040503050406030204" pitchFamily="18" charset="0"/>
+                          <a:ea typeface="Arial" pitchFamily="34" charset="-122"/>
+                          <a:cs typeface="Arial" pitchFamily="34" charset="-120"/>
+                        </a:rPr>
+                        <m:t>=</m:t>
+                      </m:r>
+                      <m:r>
+                        <a:rPr lang="en-US" sz="2800" i="1" dirty="0" smtClean="0">
+                          <a:solidFill>
+                            <a:srgbClr val="1F2933"/>
+                          </a:solidFill>
+                          <a:latin typeface="Cambria Math" panose="02040503050406030204" pitchFamily="18" charset="0"/>
+                          <a:ea typeface="Arial" pitchFamily="34" charset="-122"/>
+                          <a:cs typeface="Arial" pitchFamily="34" charset="-120"/>
+                        </a:rPr>
+                        <m:t>2</m:t>
+                      </m:r>
+                      <m:r>
+                        <a:rPr lang="en-US" sz="2800" b="0" i="1" dirty="0" smtClean="0">
+                          <a:solidFill>
+                            <a:srgbClr val="1F2933"/>
+                          </a:solidFill>
+                          <a:latin typeface="Cambria Math" panose="02040503050406030204" pitchFamily="18" charset="0"/>
+                          <a:ea typeface="Arial" pitchFamily="34" charset="-122"/>
+                          <a:cs typeface="Arial" pitchFamily="34" charset="-120"/>
+                        </a:rPr>
+                        <m:t>1</m:t>
+                      </m:r>
+                      <m:r>
+                        <a:rPr lang="en-US" sz="2800" i="1" dirty="0" smtClean="0">
+                          <a:solidFill>
+                            <a:srgbClr val="1F2933"/>
+                          </a:solidFill>
+                          <a:latin typeface="Cambria Math" panose="02040503050406030204" pitchFamily="18" charset="0"/>
+                          <a:ea typeface="Arial" pitchFamily="34" charset="-122"/>
+                          <a:cs typeface="Arial" pitchFamily="34" charset="-120"/>
+                        </a:rPr>
+                        <m:t>.</m:t>
+                      </m:r>
+                      <m:r>
+                        <a:rPr lang="en-US" sz="2800" b="0" i="1" dirty="0" smtClean="0">
+                          <a:solidFill>
+                            <a:srgbClr val="1F2933"/>
+                          </a:solidFill>
+                          <a:latin typeface="Cambria Math" panose="02040503050406030204" pitchFamily="18" charset="0"/>
+                          <a:ea typeface="Arial" pitchFamily="34" charset="-122"/>
+                          <a:cs typeface="Arial" pitchFamily="34" charset="-120"/>
+                        </a:rPr>
+                        <m:t>2</m:t>
+                      </m:r>
+                      <m:r>
+                        <a:rPr lang="en-US" sz="2800" i="1" dirty="0" smtClean="0">
+                          <a:solidFill>
+                            <a:srgbClr val="1F2933"/>
+                          </a:solidFill>
+                          <a:latin typeface="Cambria Math" panose="02040503050406030204" pitchFamily="18" charset="0"/>
+                          <a:ea typeface="Arial" pitchFamily="34" charset="-122"/>
+                          <a:cs typeface="Arial" pitchFamily="34" charset="-120"/>
+                        </a:rPr>
+                        <m:t> </m:t>
+                      </m:r>
+                      <m:r>
+                        <a:rPr lang="en-US" sz="2800" i="1" dirty="0" smtClean="0">
+                          <a:solidFill>
+                            <a:srgbClr val="1F2933"/>
+                          </a:solidFill>
+                          <a:latin typeface="Cambria Math" panose="02040503050406030204" pitchFamily="18" charset="0"/>
+                          <a:ea typeface="Arial" pitchFamily="34" charset="-122"/>
+                          <a:cs typeface="Arial" pitchFamily="34" charset="-120"/>
+                        </a:rPr>
+                        <m:t>𝐴</m:t>
+                      </m:r>
+                    </m:oMath>
+                  </m:oMathPara>
+                </a14:m>
+                <a:endParaRPr lang="en-US" sz="2800" dirty="0">
+                  <a:solidFill>
+                    <a:srgbClr val="1F2933"/>
+                  </a:solidFill>
+                  <a:latin typeface="Arial" pitchFamily="34" charset="0"/>
+                  <a:ea typeface="Arial" pitchFamily="34" charset="-122"/>
+                  <a:cs typeface="Arial" pitchFamily="34" charset="-120"/>
+                </a:endParaRPr>
+              </a:p>
+            </p:txBody>
+          </p:sp>
+        </mc:Choice>
+        <mc:Fallback>
+          <p:sp>
+            <p:nvSpPr>
+              <p:cNvPr id="270" name="TextBox 269">
+                <a:extLst>
+                  <a:ext uri="{FF2B5EF4-FFF2-40B4-BE49-F238E27FC236}">
+                    <a16:creationId xmlns:a16="http://schemas.microsoft.com/office/drawing/2014/main" id="{EA577131-53FD-0A3C-F500-EBABDF510E66}"/>
+                  </a:ext>
+                </a:extLst>
+              </p:cNvPr>
+              <p:cNvSpPr txBox="1">
+                <a:spLocks noRot="1" noChangeAspect="1" noMove="1" noResize="1" noEditPoints="1" noAdjustHandles="1" noChangeArrowheads="1" noChangeShapeType="1" noTextEdit="1"/>
+              </p:cNvSpPr>
+              <p:nvPr/>
+            </p:nvSpPr>
+            <p:spPr>
+              <a:xfrm>
+                <a:off x="25681864" y="15402723"/>
+                <a:ext cx="3497863" cy="556434"/>
+              </a:xfrm>
+              <a:prstGeom prst="rect">
+                <a:avLst/>
+              </a:prstGeom>
+              <a:blipFill>
+                <a:blip r:embed="rId6"/>
+                <a:stretch>
+                  <a:fillRect/>
+                </a:stretch>
+              </a:blipFill>
+            </p:spPr>
+            <p:txBody>
+              <a:bodyPr/>
+              <a:lstStyle/>
+              <a:p>
+                <a:r>
+                  <a:rPr lang="sv-SE">
+                    <a:noFill/>
+                  </a:rPr>
+                  <a:t> </a:t>
+                </a:r>
+              </a:p>
+            </p:txBody>
+          </p:sp>
+        </mc:Fallback>
+      </mc:AlternateContent>
+      <mc:AlternateContent xmlns:mc="http://schemas.openxmlformats.org/markup-compatibility/2006">
+        <mc:Choice xmlns:a14="http://schemas.microsoft.com/office/drawing/2010/main" Requires="a14">
+          <p:sp>
+            <p:nvSpPr>
+              <p:cNvPr id="275" name="TextBox 274">
+                <a:extLst>
+                  <a:ext uri="{FF2B5EF4-FFF2-40B4-BE49-F238E27FC236}">
+                    <a16:creationId xmlns:a16="http://schemas.microsoft.com/office/drawing/2014/main" id="{FA47D2DD-FF03-CE78-B306-D5F081901D15}"/>
+                  </a:ext>
+                </a:extLst>
+              </p:cNvPr>
+              <p:cNvSpPr txBox="1"/>
+              <p:nvPr/>
+            </p:nvSpPr>
+            <p:spPr>
+              <a:xfrm>
+                <a:off x="24119671" y="18111756"/>
+                <a:ext cx="3964586" cy="523220"/>
+              </a:xfrm>
+              <a:prstGeom prst="rect">
+                <a:avLst/>
+              </a:prstGeom>
+              <a:noFill/>
+            </p:spPr>
+            <p:txBody>
+              <a:bodyPr wrap="square">
+                <a:spAutoFit/>
+              </a:bodyPr>
+              <a:lstStyle/>
+              <a:p>
+                <a:pPr algn="just">
+                  <a:spcBef>
+                    <a:spcPts val="2400"/>
+                  </a:spcBef>
+                  <a:buClr>
+                    <a:srgbClr val="018185"/>
+                  </a:buClr>
+                </a:pPr>
+                <a:r>
+                  <a:rPr lang="en-US" sz="2800" dirty="0">
+                    <a:solidFill>
+                      <a:srgbClr val="1F2933"/>
+                    </a:solidFill>
+                    <a:latin typeface="Arial" pitchFamily="34" charset="0"/>
+                    <a:ea typeface="Arial" pitchFamily="34" charset="-122"/>
+                    <a:cs typeface="Arial" pitchFamily="34" charset="-120"/>
+                  </a:rPr>
+                  <a:t>Reduction </a:t>
+                </a:r>
+                <a14:m>
+                  <m:oMath xmlns:m="http://schemas.openxmlformats.org/officeDocument/2006/math">
+                    <m:r>
+                      <a:rPr lang="en-US" sz="2800" i="1" dirty="0" smtClean="0">
+                        <a:solidFill>
+                          <a:srgbClr val="1F2933"/>
+                        </a:solidFill>
+                        <a:latin typeface="Cambria Math" panose="02040503050406030204" pitchFamily="18" charset="0"/>
+                        <a:ea typeface="Arial" pitchFamily="34" charset="-122"/>
+                        <a:cs typeface="Arial" pitchFamily="34" charset="-120"/>
+                      </a:rPr>
+                      <m:t>~</m:t>
+                    </m:r>
+                    <m:r>
+                      <a:rPr lang="en-US" sz="2800" b="0" i="1" dirty="0" smtClean="0">
+                        <a:solidFill>
+                          <a:srgbClr val="1F2933"/>
+                        </a:solidFill>
+                        <a:latin typeface="Cambria Math" panose="02040503050406030204" pitchFamily="18" charset="0"/>
+                        <a:ea typeface="Arial" pitchFamily="34" charset="-122"/>
+                        <a:cs typeface="Arial" pitchFamily="34" charset="-120"/>
+                      </a:rPr>
+                      <m:t>40</m:t>
+                    </m:r>
+                    <m:r>
+                      <a:rPr lang="en-US" sz="2800" i="1" dirty="0" smtClean="0">
+                        <a:solidFill>
+                          <a:srgbClr val="1F2933"/>
+                        </a:solidFill>
+                        <a:latin typeface="Cambria Math" panose="02040503050406030204" pitchFamily="18" charset="0"/>
+                        <a:ea typeface="Arial" pitchFamily="34" charset="-122"/>
+                        <a:cs typeface="Arial" pitchFamily="34" charset="-120"/>
+                      </a:rPr>
+                      <m:t>%</m:t>
+                    </m:r>
+                  </m:oMath>
+                </a14:m>
+                <a:endParaRPr lang="en-US" sz="2800" dirty="0">
+                  <a:solidFill>
+                    <a:srgbClr val="1F2933"/>
+                  </a:solidFill>
+                  <a:latin typeface="Arial" pitchFamily="34" charset="0"/>
+                  <a:ea typeface="Arial" pitchFamily="34" charset="-122"/>
+                  <a:cs typeface="Arial" pitchFamily="34" charset="-120"/>
+                </a:endParaRPr>
+              </a:p>
+            </p:txBody>
+          </p:sp>
+        </mc:Choice>
+        <mc:Fallback>
+          <p:sp>
+            <p:nvSpPr>
+              <p:cNvPr id="275" name="TextBox 274">
+                <a:extLst>
+                  <a:ext uri="{FF2B5EF4-FFF2-40B4-BE49-F238E27FC236}">
+                    <a16:creationId xmlns:a16="http://schemas.microsoft.com/office/drawing/2014/main" id="{FA47D2DD-FF03-CE78-B306-D5F081901D15}"/>
+                  </a:ext>
+                </a:extLst>
+              </p:cNvPr>
+              <p:cNvSpPr txBox="1">
+                <a:spLocks noRot="1" noChangeAspect="1" noMove="1" noResize="1" noEditPoints="1" noAdjustHandles="1" noChangeArrowheads="1" noChangeShapeType="1" noTextEdit="1"/>
+              </p:cNvSpPr>
+              <p:nvPr/>
+            </p:nvSpPr>
+            <p:spPr>
+              <a:xfrm>
+                <a:off x="24119671" y="18111756"/>
+                <a:ext cx="3964586" cy="523220"/>
+              </a:xfrm>
+              <a:prstGeom prst="rect">
+                <a:avLst/>
+              </a:prstGeom>
+              <a:blipFill>
+                <a:blip r:embed="rId7"/>
+                <a:stretch>
+                  <a:fillRect l="-3231" t="-11628" b="-31395"/>
+                </a:stretch>
+              </a:blipFill>
+            </p:spPr>
+            <p:txBody>
+              <a:bodyPr/>
+              <a:lstStyle/>
+              <a:p>
+                <a:r>
+                  <a:rPr lang="sv-SE">
+                    <a:noFill/>
+                  </a:rPr>
+                  <a:t> </a:t>
+                </a:r>
+              </a:p>
+            </p:txBody>
+          </p:sp>
+        </mc:Fallback>
+      </mc:AlternateContent>
+      <mc:AlternateContent xmlns:mc="http://schemas.openxmlformats.org/markup-compatibility/2006">
+        <mc:Choice xmlns:a14="http://schemas.microsoft.com/office/drawing/2010/main" Requires="a14">
+          <p:sp>
+            <p:nvSpPr>
+              <p:cNvPr id="276" name="TextBox 275">
+                <a:extLst>
+                  <a:ext uri="{FF2B5EF4-FFF2-40B4-BE49-F238E27FC236}">
+                    <a16:creationId xmlns:a16="http://schemas.microsoft.com/office/drawing/2014/main" id="{E77B7418-8C89-E3BB-473D-76CFC99630B3}"/>
+                  </a:ext>
+                </a:extLst>
+              </p:cNvPr>
+              <p:cNvSpPr txBox="1"/>
+              <p:nvPr/>
+            </p:nvSpPr>
+            <p:spPr>
+              <a:xfrm>
+                <a:off x="21531695" y="17505207"/>
+                <a:ext cx="3977074" cy="523220"/>
+              </a:xfrm>
+              <a:prstGeom prst="rect">
+                <a:avLst/>
+              </a:prstGeom>
+              <a:noFill/>
+            </p:spPr>
+            <p:txBody>
+              <a:bodyPr wrap="square">
+                <a:spAutoFit/>
+              </a:bodyPr>
+              <a:lstStyle/>
+              <a:p>
+                <a:pPr algn="just">
+                  <a:spcBef>
+                    <a:spcPts val="2400"/>
+                  </a:spcBef>
+                  <a:buClr>
+                    <a:srgbClr val="018185"/>
+                  </a:buClr>
+                </a:pPr>
+                <a14:m>
+                  <m:oMathPara xmlns:m="http://schemas.openxmlformats.org/officeDocument/2006/math">
+                    <m:oMathParaPr>
+                      <m:jc m:val="centerGroup"/>
+                    </m:oMathParaPr>
+                    <m:oMath xmlns:m="http://schemas.openxmlformats.org/officeDocument/2006/math">
+                      <m:sSup>
+                        <m:sSupPr>
+                          <m:ctrlPr>
+                            <a:rPr lang="en-US" sz="2800" b="0" i="1" dirty="0" smtClean="0">
+                              <a:solidFill>
+                                <a:srgbClr val="1F2933"/>
+                              </a:solidFill>
+                              <a:latin typeface="Cambria Math" panose="02040503050406030204" pitchFamily="18" charset="0"/>
+                              <a:ea typeface="Arial" pitchFamily="34" charset="-122"/>
+                              <a:cs typeface="Arial" pitchFamily="34" charset="-120"/>
+                            </a:rPr>
+                          </m:ctrlPr>
+                        </m:sSupPr>
+                        <m:e>
+                          <m:r>
+                            <a:rPr lang="en-US" sz="2800" i="1" dirty="0">
+                              <a:solidFill>
+                                <a:srgbClr val="1F2933"/>
+                              </a:solidFill>
+                              <a:latin typeface="Cambria Math" panose="02040503050406030204" pitchFamily="18" charset="0"/>
+                              <a:ea typeface="Arial" pitchFamily="34" charset="-122"/>
+                              <a:cs typeface="Arial" pitchFamily="34" charset="-120"/>
+                            </a:rPr>
+                            <m:t>15.2</m:t>
+                          </m:r>
+                        </m:e>
+                        <m:sup>
+                          <m:r>
+                            <a:rPr lang="en-US" sz="2800" b="0" i="1" dirty="0" smtClean="0">
+                              <a:solidFill>
+                                <a:srgbClr val="1F2933"/>
+                              </a:solidFill>
+                              <a:latin typeface="Cambria Math" panose="02040503050406030204" pitchFamily="18" charset="0"/>
+                              <a:ea typeface="Arial" pitchFamily="34" charset="-122"/>
+                              <a:cs typeface="Arial" pitchFamily="34" charset="-120"/>
+                            </a:rPr>
+                            <m:t> </m:t>
+                          </m:r>
+                          <m:r>
+                            <a:rPr lang="en-US" sz="2800" b="0" i="1" dirty="0" smtClean="0">
+                              <a:solidFill>
+                                <a:srgbClr val="1F2933"/>
+                              </a:solidFill>
+                              <a:latin typeface="Cambria Math" panose="02040503050406030204" pitchFamily="18" charset="0"/>
+                              <a:ea typeface="Arial" pitchFamily="34" charset="-122"/>
+                              <a:cs typeface="Arial" pitchFamily="34" charset="-120"/>
+                            </a:rPr>
+                            <m:t>𝑜</m:t>
+                          </m:r>
+                        </m:sup>
+                      </m:sSup>
+                      <m:r>
+                        <a:rPr lang="en-US" sz="2800" i="1" dirty="0" smtClean="0">
+                          <a:solidFill>
+                            <a:srgbClr val="1F2933"/>
+                          </a:solidFill>
+                          <a:latin typeface="Cambria Math" panose="02040503050406030204" pitchFamily="18" charset="0"/>
+                          <a:ea typeface="Arial" pitchFamily="34" charset="-122"/>
+                          <a:cs typeface="Arial" pitchFamily="34" charset="-120"/>
+                        </a:rPr>
+                        <m:t>𝐶</m:t>
+                      </m:r>
+                    </m:oMath>
+                  </m:oMathPara>
+                </a14:m>
+                <a:endParaRPr lang="en-US" sz="2800" dirty="0">
+                  <a:solidFill>
+                    <a:srgbClr val="1F2933"/>
+                  </a:solidFill>
+                  <a:latin typeface="Arial" pitchFamily="34" charset="0"/>
+                  <a:ea typeface="Arial" pitchFamily="34" charset="-122"/>
+                  <a:cs typeface="Arial" pitchFamily="34" charset="-120"/>
+                </a:endParaRPr>
+              </a:p>
+            </p:txBody>
+          </p:sp>
+        </mc:Choice>
+        <mc:Fallback>
+          <p:sp>
+            <p:nvSpPr>
+              <p:cNvPr id="276" name="TextBox 275">
+                <a:extLst>
+                  <a:ext uri="{FF2B5EF4-FFF2-40B4-BE49-F238E27FC236}">
+                    <a16:creationId xmlns:a16="http://schemas.microsoft.com/office/drawing/2014/main" id="{E77B7418-8C89-E3BB-473D-76CFC99630B3}"/>
+                  </a:ext>
+                </a:extLst>
+              </p:cNvPr>
+              <p:cNvSpPr txBox="1">
+                <a:spLocks noRot="1" noChangeAspect="1" noMove="1" noResize="1" noEditPoints="1" noAdjustHandles="1" noChangeArrowheads="1" noChangeShapeType="1" noTextEdit="1"/>
+              </p:cNvSpPr>
+              <p:nvPr/>
+            </p:nvSpPr>
+            <p:spPr>
+              <a:xfrm>
+                <a:off x="21531695" y="17505207"/>
+                <a:ext cx="3977074" cy="523220"/>
+              </a:xfrm>
+              <a:prstGeom prst="rect">
+                <a:avLst/>
+              </a:prstGeom>
+              <a:blipFill>
+                <a:blip r:embed="rId8"/>
+                <a:stretch>
+                  <a:fillRect/>
+                </a:stretch>
+              </a:blipFill>
+            </p:spPr>
+            <p:txBody>
+              <a:bodyPr/>
+              <a:lstStyle/>
+              <a:p>
+                <a:r>
+                  <a:rPr lang="sv-SE">
+                    <a:noFill/>
+                  </a:rPr>
+                  <a:t> </a:t>
+                </a:r>
+              </a:p>
+            </p:txBody>
+          </p:sp>
+        </mc:Fallback>
+      </mc:AlternateContent>
+      <mc:AlternateContent xmlns:mc="http://schemas.openxmlformats.org/markup-compatibility/2006">
+        <mc:Choice xmlns:a14="http://schemas.microsoft.com/office/drawing/2010/main" Requires="a14">
+          <p:sp>
+            <p:nvSpPr>
+              <p:cNvPr id="278" name="TextBox 277">
+                <a:extLst>
+                  <a:ext uri="{FF2B5EF4-FFF2-40B4-BE49-F238E27FC236}">
+                    <a16:creationId xmlns:a16="http://schemas.microsoft.com/office/drawing/2014/main" id="{812F0EE8-7F7D-FDA9-2071-38550046B410}"/>
+                  </a:ext>
+                </a:extLst>
+              </p:cNvPr>
+              <p:cNvSpPr txBox="1"/>
+              <p:nvPr/>
+            </p:nvSpPr>
+            <p:spPr>
+              <a:xfrm>
+                <a:off x="26407014" y="17434923"/>
+                <a:ext cx="2508483" cy="523220"/>
+              </a:xfrm>
+              <a:prstGeom prst="rect">
+                <a:avLst/>
+              </a:prstGeom>
+              <a:noFill/>
+            </p:spPr>
+            <p:txBody>
+              <a:bodyPr wrap="square">
+                <a:spAutoFit/>
+              </a:bodyPr>
+              <a:lstStyle/>
+              <a:p>
+                <a:pPr algn="just">
+                  <a:spcBef>
+                    <a:spcPts val="2400"/>
+                  </a:spcBef>
+                  <a:buClr>
+                    <a:srgbClr val="018185"/>
+                  </a:buClr>
+                </a:pPr>
+                <a14:m>
+                  <m:oMathPara xmlns:m="http://schemas.openxmlformats.org/officeDocument/2006/math">
+                    <m:oMathParaPr>
+                      <m:jc m:val="centerGroup"/>
+                    </m:oMathParaPr>
+                    <m:oMath xmlns:m="http://schemas.openxmlformats.org/officeDocument/2006/math">
+                      <m:sSup>
+                        <m:sSupPr>
+                          <m:ctrlPr>
+                            <a:rPr lang="en-US" sz="2800" b="0" i="1" dirty="0" smtClean="0">
+                              <a:solidFill>
+                                <a:srgbClr val="1F2933"/>
+                              </a:solidFill>
+                              <a:latin typeface="Cambria Math" panose="02040503050406030204" pitchFamily="18" charset="0"/>
+                              <a:ea typeface="Arial" pitchFamily="34" charset="-122"/>
+                              <a:cs typeface="Arial" pitchFamily="34" charset="-120"/>
+                            </a:rPr>
+                          </m:ctrlPr>
+                        </m:sSupPr>
+                        <m:e>
+                          <m:r>
+                            <a:rPr lang="en-US" sz="2800" b="0" i="1" dirty="0" smtClean="0">
+                              <a:solidFill>
+                                <a:srgbClr val="1F2933"/>
+                              </a:solidFill>
+                              <a:latin typeface="Cambria Math" panose="02040503050406030204" pitchFamily="18" charset="0"/>
+                              <a:ea typeface="Arial" pitchFamily="34" charset="-122"/>
+                              <a:cs typeface="Arial" pitchFamily="34" charset="-120"/>
+                            </a:rPr>
+                            <m:t>9 </m:t>
+                          </m:r>
+                        </m:e>
+                        <m:sup>
+                          <m:r>
+                            <a:rPr lang="en-US" sz="2800" b="0" i="1" dirty="0" smtClean="0">
+                              <a:solidFill>
+                                <a:srgbClr val="1F2933"/>
+                              </a:solidFill>
+                              <a:latin typeface="Cambria Math" panose="02040503050406030204" pitchFamily="18" charset="0"/>
+                              <a:ea typeface="Arial" pitchFamily="34" charset="-122"/>
+                              <a:cs typeface="Arial" pitchFamily="34" charset="-120"/>
+                            </a:rPr>
+                            <m:t>𝑜</m:t>
+                          </m:r>
+                        </m:sup>
+                      </m:sSup>
+                      <m:r>
+                        <a:rPr lang="en-US" sz="2800" i="1" dirty="0" smtClean="0">
+                          <a:solidFill>
+                            <a:srgbClr val="1F2933"/>
+                          </a:solidFill>
+                          <a:latin typeface="Cambria Math" panose="02040503050406030204" pitchFamily="18" charset="0"/>
+                          <a:ea typeface="Arial" pitchFamily="34" charset="-122"/>
+                          <a:cs typeface="Arial" pitchFamily="34" charset="-120"/>
+                        </a:rPr>
+                        <m:t>𝐶</m:t>
+                      </m:r>
+                    </m:oMath>
+                  </m:oMathPara>
+                </a14:m>
+                <a:endParaRPr lang="en-US" sz="2800" dirty="0">
+                  <a:solidFill>
+                    <a:srgbClr val="1F2933"/>
+                  </a:solidFill>
+                  <a:latin typeface="Arial" pitchFamily="34" charset="0"/>
+                  <a:ea typeface="Arial" pitchFamily="34" charset="-122"/>
+                  <a:cs typeface="Arial" pitchFamily="34" charset="-120"/>
+                </a:endParaRPr>
+              </a:p>
+            </p:txBody>
+          </p:sp>
+        </mc:Choice>
+        <mc:Fallback>
+          <p:sp>
+            <p:nvSpPr>
+              <p:cNvPr id="278" name="TextBox 277">
+                <a:extLst>
+                  <a:ext uri="{FF2B5EF4-FFF2-40B4-BE49-F238E27FC236}">
+                    <a16:creationId xmlns:a16="http://schemas.microsoft.com/office/drawing/2014/main" id="{812F0EE8-7F7D-FDA9-2071-38550046B410}"/>
+                  </a:ext>
+                </a:extLst>
+              </p:cNvPr>
+              <p:cNvSpPr txBox="1">
+                <a:spLocks noRot="1" noChangeAspect="1" noMove="1" noResize="1" noEditPoints="1" noAdjustHandles="1" noChangeArrowheads="1" noChangeShapeType="1" noTextEdit="1"/>
+              </p:cNvSpPr>
+              <p:nvPr/>
+            </p:nvSpPr>
+            <p:spPr>
+              <a:xfrm>
+                <a:off x="26407014" y="17434923"/>
+                <a:ext cx="2508483" cy="523220"/>
+              </a:xfrm>
+              <a:prstGeom prst="rect">
+                <a:avLst/>
+              </a:prstGeom>
+              <a:blipFill>
+                <a:blip r:embed="rId9"/>
+                <a:stretch>
+                  <a:fillRect/>
+                </a:stretch>
+              </a:blipFill>
+            </p:spPr>
+            <p:txBody>
+              <a:bodyPr/>
+              <a:lstStyle/>
+              <a:p>
+                <a:r>
+                  <a:rPr lang="sv-SE">
+                    <a:noFill/>
+                  </a:rPr>
+                  <a:t> </a:t>
+                </a:r>
+              </a:p>
+            </p:txBody>
+          </p:sp>
+        </mc:Fallback>
+      </mc:AlternateContent>
+      <mc:AlternateContent xmlns:mc="http://schemas.openxmlformats.org/markup-compatibility/2006">
+        <mc:Choice xmlns:a14="http://schemas.microsoft.com/office/drawing/2010/main" Requires="a14">
+          <p:sp>
+            <p:nvSpPr>
+              <p:cNvPr id="279" name="TextBox 278">
+                <a:extLst>
+                  <a:ext uri="{FF2B5EF4-FFF2-40B4-BE49-F238E27FC236}">
+                    <a16:creationId xmlns:a16="http://schemas.microsoft.com/office/drawing/2014/main" id="{627F6E29-EFB4-5BEA-02AA-71AF9430AA20}"/>
+                  </a:ext>
+                </a:extLst>
+              </p:cNvPr>
+              <p:cNvSpPr txBox="1"/>
+              <p:nvPr/>
+            </p:nvSpPr>
+            <p:spPr>
+              <a:xfrm>
+                <a:off x="24119671" y="16232501"/>
+                <a:ext cx="3572989" cy="523220"/>
+              </a:xfrm>
+              <a:prstGeom prst="rect">
+                <a:avLst/>
+              </a:prstGeom>
+              <a:noFill/>
+            </p:spPr>
+            <p:txBody>
+              <a:bodyPr wrap="square">
+                <a:spAutoFit/>
+              </a:bodyPr>
+              <a:lstStyle/>
+              <a:p>
+                <a:pPr algn="just">
+                  <a:spcBef>
+                    <a:spcPts val="2400"/>
+                  </a:spcBef>
+                  <a:buClr>
+                    <a:srgbClr val="018185"/>
+                  </a:buClr>
+                </a:pPr>
+                <a:r>
+                  <a:rPr lang="en-US" sz="2800" dirty="0">
+                    <a:solidFill>
+                      <a:srgbClr val="1F2933"/>
+                    </a:solidFill>
+                    <a:latin typeface="Arial" pitchFamily="34" charset="0"/>
+                    <a:ea typeface="Arial" pitchFamily="34" charset="-122"/>
+                    <a:cs typeface="Arial" pitchFamily="34" charset="-120"/>
+                  </a:rPr>
+                  <a:t>Reduction </a:t>
+                </a:r>
+                <a14:m>
+                  <m:oMath xmlns:m="http://schemas.openxmlformats.org/officeDocument/2006/math">
+                    <m:r>
+                      <a:rPr lang="en-US" sz="2800" i="1" dirty="0" smtClean="0">
+                        <a:solidFill>
+                          <a:srgbClr val="1F2933"/>
+                        </a:solidFill>
+                        <a:latin typeface="Cambria Math" panose="02040503050406030204" pitchFamily="18" charset="0"/>
+                        <a:ea typeface="Arial" pitchFamily="34" charset="-122"/>
+                        <a:cs typeface="Arial" pitchFamily="34" charset="-120"/>
+                      </a:rPr>
+                      <m:t>~23%</m:t>
+                    </m:r>
+                  </m:oMath>
+                </a14:m>
+                <a:endParaRPr lang="en-US" sz="2800" dirty="0">
+                  <a:solidFill>
+                    <a:srgbClr val="1F2933"/>
+                  </a:solidFill>
+                  <a:latin typeface="Arial" pitchFamily="34" charset="0"/>
+                  <a:ea typeface="Arial" pitchFamily="34" charset="-122"/>
+                  <a:cs typeface="Arial" pitchFamily="34" charset="-120"/>
+                </a:endParaRPr>
+              </a:p>
+            </p:txBody>
+          </p:sp>
+        </mc:Choice>
+        <mc:Fallback>
+          <p:sp>
+            <p:nvSpPr>
+              <p:cNvPr id="279" name="TextBox 278">
+                <a:extLst>
+                  <a:ext uri="{FF2B5EF4-FFF2-40B4-BE49-F238E27FC236}">
+                    <a16:creationId xmlns:a16="http://schemas.microsoft.com/office/drawing/2014/main" id="{627F6E29-EFB4-5BEA-02AA-71AF9430AA20}"/>
+                  </a:ext>
+                </a:extLst>
+              </p:cNvPr>
+              <p:cNvSpPr txBox="1">
+                <a:spLocks noRot="1" noChangeAspect="1" noMove="1" noResize="1" noEditPoints="1" noAdjustHandles="1" noChangeArrowheads="1" noChangeShapeType="1" noTextEdit="1"/>
+              </p:cNvSpPr>
+              <p:nvPr/>
+            </p:nvSpPr>
+            <p:spPr>
+              <a:xfrm>
+                <a:off x="24119671" y="16232501"/>
+                <a:ext cx="3572989" cy="523220"/>
+              </a:xfrm>
+              <a:prstGeom prst="rect">
+                <a:avLst/>
+              </a:prstGeom>
+              <a:blipFill>
+                <a:blip r:embed="rId10"/>
+                <a:stretch>
+                  <a:fillRect l="-3584" t="-12791" b="-31395"/>
+                </a:stretch>
+              </a:blipFill>
+            </p:spPr>
+            <p:txBody>
+              <a:bodyPr/>
+              <a:lstStyle/>
+              <a:p>
+                <a:r>
+                  <a:rPr lang="sv-SE">
+                    <a:noFill/>
+                  </a:rPr>
+                  <a:t> </a:t>
+                </a:r>
+              </a:p>
+            </p:txBody>
+          </p:sp>
+        </mc:Fallback>
+      </mc:AlternateContent>
+      <mc:AlternateContent xmlns:mc="http://schemas.openxmlformats.org/markup-compatibility/2006">
+        <mc:Choice xmlns:a14="http://schemas.microsoft.com/office/drawing/2010/main" Requires="a14">
+          <p:sp>
+            <p:nvSpPr>
+              <p:cNvPr id="280" name="TextBox 279">
+                <a:extLst>
+                  <a:ext uri="{FF2B5EF4-FFF2-40B4-BE49-F238E27FC236}">
+                    <a16:creationId xmlns:a16="http://schemas.microsoft.com/office/drawing/2014/main" id="{A6B95824-278C-957D-C6CE-C7103F2EAA72}"/>
+                  </a:ext>
+                </a:extLst>
+              </p:cNvPr>
+              <p:cNvSpPr txBox="1"/>
+              <p:nvPr/>
+            </p:nvSpPr>
+            <p:spPr>
+              <a:xfrm>
+                <a:off x="22710106" y="18759947"/>
+                <a:ext cx="7135946" cy="523220"/>
+              </a:xfrm>
+              <a:prstGeom prst="rect">
+                <a:avLst/>
+              </a:prstGeom>
+              <a:noFill/>
+            </p:spPr>
+            <p:txBody>
+              <a:bodyPr wrap="square">
+                <a:spAutoFit/>
+              </a:bodyPr>
+              <a:lstStyle/>
+              <a:p>
+                <a:pPr algn="just">
+                  <a:spcBef>
+                    <a:spcPts val="2400"/>
+                  </a:spcBef>
+                  <a:buClr>
+                    <a:srgbClr val="018185"/>
+                  </a:buClr>
+                </a:pPr>
+                <a:r>
+                  <a:rPr lang="en-US" sz="2800" dirty="0">
+                    <a:solidFill>
+                      <a:srgbClr val="1F2933"/>
+                    </a:solidFill>
+                    <a:latin typeface="Arial" pitchFamily="34" charset="0"/>
+                    <a:ea typeface="Arial" pitchFamily="34" charset="-122"/>
+                    <a:cs typeface="Arial" pitchFamily="34" charset="-120"/>
+                  </a:rPr>
+                  <a:t>Estimated lifetime extension: </a:t>
+                </a:r>
+                <a14:m>
+                  <m:oMath xmlns:m="http://schemas.openxmlformats.org/officeDocument/2006/math">
+                    <m:r>
+                      <a:rPr lang="en-US" sz="2800" i="1" dirty="0" smtClean="0">
+                        <a:solidFill>
+                          <a:srgbClr val="1F2933"/>
+                        </a:solidFill>
+                        <a:latin typeface="Cambria Math" panose="02040503050406030204" pitchFamily="18" charset="0"/>
+                        <a:ea typeface="Arial" pitchFamily="34" charset="-122"/>
+                        <a:cs typeface="Arial" pitchFamily="34" charset="-120"/>
+                      </a:rPr>
+                      <m:t>~50 %</m:t>
+                    </m:r>
+                  </m:oMath>
+                </a14:m>
+                <a:endParaRPr lang="en-US" sz="2800" dirty="0">
+                  <a:solidFill>
+                    <a:srgbClr val="1F2933"/>
+                  </a:solidFill>
+                  <a:latin typeface="Arial" pitchFamily="34" charset="0"/>
+                  <a:ea typeface="Arial" pitchFamily="34" charset="-122"/>
+                  <a:cs typeface="Arial" pitchFamily="34" charset="-120"/>
+                </a:endParaRPr>
+              </a:p>
+            </p:txBody>
+          </p:sp>
+        </mc:Choice>
+        <mc:Fallback>
+          <p:sp>
+            <p:nvSpPr>
+              <p:cNvPr id="280" name="TextBox 279">
+                <a:extLst>
+                  <a:ext uri="{FF2B5EF4-FFF2-40B4-BE49-F238E27FC236}">
+                    <a16:creationId xmlns:a16="http://schemas.microsoft.com/office/drawing/2014/main" id="{A6B95824-278C-957D-C6CE-C7103F2EAA72}"/>
+                  </a:ext>
+                </a:extLst>
+              </p:cNvPr>
+              <p:cNvSpPr txBox="1">
+                <a:spLocks noRot="1" noChangeAspect="1" noMove="1" noResize="1" noEditPoints="1" noAdjustHandles="1" noChangeArrowheads="1" noChangeShapeType="1" noTextEdit="1"/>
+              </p:cNvSpPr>
+              <p:nvPr/>
+            </p:nvSpPr>
+            <p:spPr>
+              <a:xfrm>
+                <a:off x="22710106" y="18759947"/>
+                <a:ext cx="7135946" cy="523220"/>
+              </a:xfrm>
+              <a:prstGeom prst="rect">
+                <a:avLst/>
+              </a:prstGeom>
+              <a:blipFill>
+                <a:blip r:embed="rId11"/>
+                <a:stretch>
+                  <a:fillRect l="-1708" t="-11628" b="-31395"/>
+                </a:stretch>
+              </a:blipFill>
+            </p:spPr>
+            <p:txBody>
+              <a:bodyPr/>
+              <a:lstStyle/>
+              <a:p>
+                <a:r>
+                  <a:rPr lang="sv-SE">
+                    <a:noFill/>
+                  </a:rPr>
+                  <a:t> </a:t>
+                </a:r>
+              </a:p>
+            </p:txBody>
+          </p:sp>
+        </mc:Fallback>
+      </mc:AlternateContent>
+      <mc:AlternateContent xmlns:mc="http://schemas.openxmlformats.org/markup-compatibility/2006">
+        <mc:Choice xmlns:a14="http://schemas.microsoft.com/office/drawing/2010/main" Requires="a14">
+          <p:sp>
+            <p:nvSpPr>
+              <p:cNvPr id="281" name="TextBox 280">
+                <a:extLst>
+                  <a:ext uri="{FF2B5EF4-FFF2-40B4-BE49-F238E27FC236}">
+                    <a16:creationId xmlns:a16="http://schemas.microsoft.com/office/drawing/2014/main" id="{7DFE32DC-A4A8-15E5-7416-F69C1C9A60BA}"/>
+                  </a:ext>
+                </a:extLst>
+              </p:cNvPr>
+              <p:cNvSpPr txBox="1"/>
+              <p:nvPr/>
+            </p:nvSpPr>
+            <p:spPr>
+              <a:xfrm>
+                <a:off x="20325632" y="19545277"/>
+                <a:ext cx="9224606" cy="523220"/>
+              </a:xfrm>
+              <a:prstGeom prst="rect">
+                <a:avLst/>
+              </a:prstGeom>
+              <a:noFill/>
+            </p:spPr>
+            <p:txBody>
+              <a:bodyPr wrap="square">
+                <a:spAutoFit/>
+              </a:bodyPr>
+              <a:lstStyle/>
+              <a:p>
+                <a:pPr algn="ctr">
+                  <a:spcBef>
+                    <a:spcPts val="2400"/>
+                  </a:spcBef>
+                  <a:buClr>
+                    <a:srgbClr val="018185"/>
+                  </a:buClr>
+                </a:pPr>
+                <a:r>
+                  <a:rPr lang="en-US" sz="2800" b="1" dirty="0">
+                    <a:solidFill>
+                      <a:srgbClr val="018185"/>
+                    </a:solidFill>
+                    <a:latin typeface="Arial" pitchFamily="34" charset="0"/>
+                    <a:ea typeface="Arial" pitchFamily="34" charset="-122"/>
+                    <a:cs typeface="Arial" pitchFamily="34" charset="-120"/>
+                  </a:rPr>
+                  <a:t>Step change </a:t>
+                </a:r>
+                <a:r>
+                  <a:rPr lang="en-US" sz="2800" b="1" dirty="0" err="1">
+                    <a:solidFill>
+                      <a:srgbClr val="018185"/>
+                    </a:solidFill>
+                    <a:latin typeface="Arial" pitchFamily="34" charset="0"/>
+                    <a:ea typeface="Arial" pitchFamily="34" charset="-122"/>
+                    <a:cs typeface="Arial" pitchFamily="34" charset="-120"/>
+                  </a:rPr>
+                  <a:t>fr</a:t>
+                </a:r>
+                <a:r>
+                  <a:rPr lang="en-US" sz="2800" b="1" dirty="0">
+                    <a:solidFill>
+                      <a:srgbClr val="018185"/>
+                    </a:solidFill>
+                    <a:latin typeface="Arial" pitchFamily="34" charset="0"/>
+                    <a:ea typeface="Arial" pitchFamily="34" charset="-122"/>
+                    <a:cs typeface="Arial" pitchFamily="34" charset="-120"/>
+                  </a:rPr>
+                  <a:t>om </a:t>
+                </a:r>
+                <a14:m>
+                  <m:oMath xmlns:m="http://schemas.openxmlformats.org/officeDocument/2006/math">
+                    <m:sSub>
+                      <m:sSubPr>
+                        <m:ctrlPr>
+                          <a:rPr lang="en-US" sz="2800" b="1" i="1" dirty="0" smtClean="0">
+                            <a:solidFill>
+                              <a:srgbClr val="018185"/>
+                            </a:solidFill>
+                            <a:latin typeface="Cambria Math" panose="02040503050406030204" pitchFamily="18" charset="0"/>
+                            <a:ea typeface="Arial" pitchFamily="34" charset="-122"/>
+                            <a:cs typeface="Arial" pitchFamily="34" charset="-120"/>
+                          </a:rPr>
+                        </m:ctrlPr>
+                      </m:sSubPr>
+                      <m:e>
+                        <m:r>
+                          <a:rPr lang="en-US" sz="2800" b="1" i="1" dirty="0" smtClean="0">
+                            <a:solidFill>
+                              <a:srgbClr val="018185"/>
+                            </a:solidFill>
+                            <a:latin typeface="Cambria Math" panose="02040503050406030204" pitchFamily="18" charset="0"/>
+                            <a:ea typeface="Arial" pitchFamily="34" charset="-122"/>
+                            <a:cs typeface="Arial" pitchFamily="34" charset="-120"/>
+                          </a:rPr>
+                          <m:t>𝒎</m:t>
+                        </m:r>
+                      </m:e>
+                      <m:sub>
+                        <m:r>
+                          <a:rPr lang="en-US" sz="2800" b="1" i="1" dirty="0" smtClean="0">
+                            <a:solidFill>
+                              <a:srgbClr val="018185"/>
+                            </a:solidFill>
+                            <a:latin typeface="Cambria Math" panose="02040503050406030204" pitchFamily="18" charset="0"/>
+                            <a:ea typeface="Arial" pitchFamily="34" charset="-122"/>
+                            <a:cs typeface="Arial" pitchFamily="34" charset="-120"/>
+                          </a:rPr>
+                          <m:t>𝒂</m:t>
+                        </m:r>
+                      </m:sub>
+                    </m:sSub>
+                    <m:r>
+                      <a:rPr lang="en-US" sz="2800" b="1" i="1" dirty="0" smtClean="0">
+                        <a:solidFill>
+                          <a:srgbClr val="018185"/>
+                        </a:solidFill>
+                        <a:latin typeface="Cambria Math" panose="02040503050406030204" pitchFamily="18" charset="0"/>
+                        <a:ea typeface="Arial" pitchFamily="34" charset="-122"/>
+                        <a:cs typeface="Arial" pitchFamily="34" charset="-120"/>
+                      </a:rPr>
+                      <m:t>=</m:t>
+                    </m:r>
+                    <m:r>
+                      <a:rPr lang="en-US" sz="2800" b="1" i="1" dirty="0" smtClean="0">
+                        <a:solidFill>
+                          <a:srgbClr val="018185"/>
+                        </a:solidFill>
+                        <a:latin typeface="Cambria Math" panose="02040503050406030204" pitchFamily="18" charset="0"/>
+                        <a:ea typeface="Arial" pitchFamily="34" charset="-122"/>
+                        <a:cs typeface="Arial" pitchFamily="34" charset="-120"/>
+                      </a:rPr>
+                      <m:t>𝟎</m:t>
+                    </m:r>
+                    <m:r>
+                      <a:rPr lang="en-US" sz="2800" b="1" i="1" dirty="0" smtClean="0">
+                        <a:solidFill>
+                          <a:srgbClr val="018185"/>
+                        </a:solidFill>
+                        <a:latin typeface="Cambria Math" panose="02040503050406030204" pitchFamily="18" charset="0"/>
+                        <a:ea typeface="Arial" pitchFamily="34" charset="-122"/>
+                        <a:cs typeface="Arial" pitchFamily="34" charset="-120"/>
+                      </a:rPr>
+                      <m:t>.</m:t>
+                    </m:r>
+                    <m:r>
+                      <a:rPr lang="en-US" sz="2800" b="1" i="1" dirty="0" smtClean="0">
+                        <a:solidFill>
+                          <a:srgbClr val="018185"/>
+                        </a:solidFill>
+                        <a:latin typeface="Cambria Math" panose="02040503050406030204" pitchFamily="18" charset="0"/>
+                        <a:ea typeface="Arial" pitchFamily="34" charset="-122"/>
+                        <a:cs typeface="Arial" pitchFamily="34" charset="-120"/>
+                      </a:rPr>
+                      <m:t>𝟔</m:t>
+                    </m:r>
+                    <m:r>
+                      <a:rPr lang="en-US" sz="2800" b="1" i="1" dirty="0" smtClean="0">
+                        <a:solidFill>
+                          <a:srgbClr val="018185"/>
+                        </a:solidFill>
+                        <a:latin typeface="Cambria Math" panose="02040503050406030204" pitchFamily="18" charset="0"/>
+                        <a:ea typeface="Arial" pitchFamily="34" charset="-122"/>
+                        <a:cs typeface="Arial" pitchFamily="34" charset="-120"/>
+                      </a:rPr>
+                      <m:t> </m:t>
+                    </m:r>
+                  </m:oMath>
+                </a14:m>
+                <a:r>
+                  <a:rPr lang="en-US" sz="2800" b="1" dirty="0">
+                    <a:solidFill>
+                      <a:srgbClr val="018185"/>
+                    </a:solidFill>
+                    <a:latin typeface="Arial" pitchFamily="34" charset="0"/>
+                    <a:ea typeface="Arial" pitchFamily="34" charset="-122"/>
+                    <a:cs typeface="Arial" pitchFamily="34" charset="-120"/>
+                  </a:rPr>
+                  <a:t> to </a:t>
+                </a:r>
+                <a14:m>
+                  <m:oMath xmlns:m="http://schemas.openxmlformats.org/officeDocument/2006/math">
+                    <m:sSub>
+                      <m:sSubPr>
+                        <m:ctrlPr>
+                          <a:rPr lang="en-US" sz="2800" b="1" i="1" dirty="0">
+                            <a:solidFill>
+                              <a:srgbClr val="018185"/>
+                            </a:solidFill>
+                            <a:latin typeface="Cambria Math" panose="02040503050406030204" pitchFamily="18" charset="0"/>
+                            <a:ea typeface="Arial" pitchFamily="34" charset="-122"/>
+                            <a:cs typeface="Arial" pitchFamily="34" charset="-120"/>
+                          </a:rPr>
+                        </m:ctrlPr>
+                      </m:sSubPr>
+                      <m:e>
+                        <m:r>
+                          <a:rPr lang="en-US" sz="2800" b="1" i="1" dirty="0">
+                            <a:solidFill>
+                              <a:srgbClr val="018185"/>
+                            </a:solidFill>
+                            <a:latin typeface="Cambria Math" panose="02040503050406030204" pitchFamily="18" charset="0"/>
+                            <a:ea typeface="Arial" pitchFamily="34" charset="-122"/>
+                            <a:cs typeface="Arial" pitchFamily="34" charset="-120"/>
+                          </a:rPr>
+                          <m:t>𝒎</m:t>
+                        </m:r>
+                      </m:e>
+                      <m:sub>
+                        <m:r>
+                          <a:rPr lang="en-US" sz="2800" b="1" i="1" dirty="0">
+                            <a:solidFill>
+                              <a:srgbClr val="018185"/>
+                            </a:solidFill>
+                            <a:latin typeface="Cambria Math" panose="02040503050406030204" pitchFamily="18" charset="0"/>
+                            <a:ea typeface="Arial" pitchFamily="34" charset="-122"/>
+                            <a:cs typeface="Arial" pitchFamily="34" charset="-120"/>
+                          </a:rPr>
+                          <m:t>𝒂</m:t>
+                        </m:r>
+                      </m:sub>
+                    </m:sSub>
+                    <m:r>
+                      <a:rPr lang="en-US" sz="2800" b="1" i="1" dirty="0">
+                        <a:solidFill>
+                          <a:srgbClr val="018185"/>
+                        </a:solidFill>
+                        <a:latin typeface="Cambria Math" panose="02040503050406030204" pitchFamily="18" charset="0"/>
+                        <a:ea typeface="Arial" pitchFamily="34" charset="-122"/>
+                        <a:cs typeface="Arial" pitchFamily="34" charset="-120"/>
+                      </a:rPr>
+                      <m:t>=</m:t>
+                    </m:r>
+                    <m:r>
+                      <a:rPr lang="en-US" sz="2800" b="1" i="1" dirty="0">
+                        <a:solidFill>
+                          <a:srgbClr val="018185"/>
+                        </a:solidFill>
+                        <a:latin typeface="Cambria Math" panose="02040503050406030204" pitchFamily="18" charset="0"/>
+                        <a:ea typeface="Arial" pitchFamily="34" charset="-122"/>
+                        <a:cs typeface="Arial" pitchFamily="34" charset="-120"/>
+                      </a:rPr>
+                      <m:t>𝟎</m:t>
+                    </m:r>
+                    <m:r>
+                      <a:rPr lang="en-US" sz="2800" b="1" i="1" dirty="0">
+                        <a:solidFill>
+                          <a:srgbClr val="018185"/>
+                        </a:solidFill>
+                        <a:latin typeface="Cambria Math" panose="02040503050406030204" pitchFamily="18" charset="0"/>
+                        <a:ea typeface="Arial" pitchFamily="34" charset="-122"/>
+                        <a:cs typeface="Arial" pitchFamily="34" charset="-120"/>
+                      </a:rPr>
+                      <m:t>.</m:t>
+                    </m:r>
+                    <m:r>
+                      <a:rPr lang="en-US" sz="2800" b="1" i="1" dirty="0" smtClean="0">
+                        <a:solidFill>
+                          <a:srgbClr val="018185"/>
+                        </a:solidFill>
+                        <a:latin typeface="Cambria Math" panose="02040503050406030204" pitchFamily="18" charset="0"/>
+                        <a:ea typeface="Arial" pitchFamily="34" charset="-122"/>
+                        <a:cs typeface="Arial" pitchFamily="34" charset="-120"/>
+                      </a:rPr>
+                      <m:t>𝟗</m:t>
+                    </m:r>
+                    <m:r>
+                      <a:rPr lang="en-US" sz="2800" b="1" i="1" dirty="0">
+                        <a:solidFill>
+                          <a:srgbClr val="018185"/>
+                        </a:solidFill>
+                        <a:latin typeface="Cambria Math" panose="02040503050406030204" pitchFamily="18" charset="0"/>
+                        <a:ea typeface="Arial" pitchFamily="34" charset="-122"/>
+                        <a:cs typeface="Arial" pitchFamily="34" charset="-120"/>
+                      </a:rPr>
+                      <m:t> </m:t>
+                    </m:r>
+                  </m:oMath>
+                </a14:m>
+                <a:endParaRPr lang="en-US" sz="2800" dirty="0">
+                  <a:solidFill>
+                    <a:srgbClr val="1F2933"/>
+                  </a:solidFill>
+                  <a:latin typeface="Arial" pitchFamily="34" charset="0"/>
+                  <a:ea typeface="Arial" pitchFamily="34" charset="-122"/>
+                  <a:cs typeface="Arial" pitchFamily="34" charset="-120"/>
+                </a:endParaRPr>
+              </a:p>
+            </p:txBody>
+          </p:sp>
+        </mc:Choice>
+        <mc:Fallback>
+          <p:sp>
+            <p:nvSpPr>
+              <p:cNvPr id="281" name="TextBox 280">
+                <a:extLst>
+                  <a:ext uri="{FF2B5EF4-FFF2-40B4-BE49-F238E27FC236}">
+                    <a16:creationId xmlns:a16="http://schemas.microsoft.com/office/drawing/2014/main" id="{7DFE32DC-A4A8-15E5-7416-F69C1C9A60BA}"/>
+                  </a:ext>
+                </a:extLst>
+              </p:cNvPr>
+              <p:cNvSpPr txBox="1">
+                <a:spLocks noRot="1" noChangeAspect="1" noMove="1" noResize="1" noEditPoints="1" noAdjustHandles="1" noChangeArrowheads="1" noChangeShapeType="1" noTextEdit="1"/>
+              </p:cNvSpPr>
+              <p:nvPr/>
+            </p:nvSpPr>
+            <p:spPr>
+              <a:xfrm>
+                <a:off x="20325632" y="19545277"/>
+                <a:ext cx="9224606" cy="523220"/>
+              </a:xfrm>
+              <a:prstGeom prst="rect">
+                <a:avLst/>
+              </a:prstGeom>
+              <a:blipFill>
+                <a:blip r:embed="rId12"/>
+                <a:stretch>
+                  <a:fillRect t="-11628" b="-31395"/>
+                </a:stretch>
+              </a:blipFill>
+            </p:spPr>
+            <p:txBody>
+              <a:bodyPr/>
+              <a:lstStyle/>
+              <a:p>
+                <a:r>
+                  <a:rPr lang="sv-SE">
+                    <a:noFill/>
+                  </a:rPr>
+                  <a:t> </a:t>
+                </a:r>
+              </a:p>
+            </p:txBody>
+          </p:sp>
+        </mc:Fallback>
+      </mc:AlternateContent>
+      <p:sp>
+        <p:nvSpPr>
+          <p:cNvPr id="282" name="TextBox 281">
+            <a:extLst>
+              <a:ext uri="{FF2B5EF4-FFF2-40B4-BE49-F238E27FC236}">
+                <a16:creationId xmlns:a16="http://schemas.microsoft.com/office/drawing/2014/main" id="{A8DFAC36-96C4-909A-A308-5199390C5B49}"/>
+              </a:ext>
+            </a:extLst>
+          </p:cNvPr>
+          <p:cNvSpPr txBox="1"/>
+          <p:nvPr/>
+        </p:nvSpPr>
+        <p:spPr>
+          <a:xfrm>
+            <a:off x="23315552" y="16874158"/>
+            <a:ext cx="4345704" cy="523220"/>
+          </a:xfrm>
+          <a:prstGeom prst="rect">
+            <a:avLst/>
+          </a:prstGeom>
+          <a:noFill/>
+        </p:spPr>
+        <p:txBody>
+          <a:bodyPr wrap="square">
+            <a:spAutoFit/>
+          </a:bodyPr>
+          <a:lstStyle/>
+          <a:p>
+            <a:pPr algn="just">
+              <a:spcBef>
+                <a:spcPts val="2400"/>
+              </a:spcBef>
+              <a:buClr>
+                <a:srgbClr val="018185"/>
+              </a:buClr>
+            </a:pPr>
+            <a:r>
+              <a:rPr lang="en-US" sz="2800" dirty="0">
+                <a:solidFill>
+                  <a:srgbClr val="1F2933"/>
+                </a:solidFill>
+                <a:latin typeface="Arial" pitchFamily="34" charset="0"/>
+                <a:ea typeface="Arial" pitchFamily="34" charset="-122"/>
+                <a:cs typeface="Arial" pitchFamily="34" charset="-120"/>
+              </a:rPr>
+              <a:t>Hotspot temperature rise:</a:t>
+            </a:r>
+          </a:p>
+        </p:txBody>
+      </p:sp>
+      <p:pic>
+        <p:nvPicPr>
+          <p:cNvPr id="284" name="Picture 283">
+            <a:extLst>
+              <a:ext uri="{FF2B5EF4-FFF2-40B4-BE49-F238E27FC236}">
+                <a16:creationId xmlns:a16="http://schemas.microsoft.com/office/drawing/2014/main" id="{5235C193-817A-CB4F-1BD4-FC8B967DA9B2}"/>
+              </a:ext>
+            </a:extLst>
+          </p:cNvPr>
+          <p:cNvPicPr>
+            <a:picLocks noChangeAspect="1"/>
+          </p:cNvPicPr>
+          <p:nvPr/>
+        </p:nvPicPr>
+        <p:blipFill>
+          <a:blip r:embed="rId13"/>
+          <a:stretch>
+            <a:fillRect/>
+          </a:stretch>
+        </p:blipFill>
+        <p:spPr>
+          <a:xfrm>
+            <a:off x="2868941" y="26765174"/>
+            <a:ext cx="4699204" cy="1471360"/>
+          </a:xfrm>
+          <a:prstGeom prst="rect">
+            <a:avLst/>
+          </a:prstGeom>
+        </p:spPr>
+      </p:pic>
+      <p:pic>
+        <p:nvPicPr>
+          <p:cNvPr id="286" name="Picture 285">
+            <a:extLst>
+              <a:ext uri="{FF2B5EF4-FFF2-40B4-BE49-F238E27FC236}">
+                <a16:creationId xmlns:a16="http://schemas.microsoft.com/office/drawing/2014/main" id="{944282C9-77D1-E236-FF43-84413F1A63D3}"/>
+              </a:ext>
+            </a:extLst>
+          </p:cNvPr>
+          <p:cNvPicPr>
+            <a:picLocks noChangeAspect="1"/>
+          </p:cNvPicPr>
+          <p:nvPr/>
+        </p:nvPicPr>
+        <p:blipFill>
+          <a:blip r:embed="rId14"/>
+          <a:stretch>
+            <a:fillRect/>
+          </a:stretch>
+        </p:blipFill>
+        <p:spPr>
+          <a:xfrm>
+            <a:off x="1949489" y="25025968"/>
+            <a:ext cx="7584541" cy="1061074"/>
+          </a:xfrm>
+          <a:prstGeom prst="rect">
+            <a:avLst/>
+          </a:prstGeom>
+        </p:spPr>
+      </p:pic>
+      <p:sp>
+        <p:nvSpPr>
+          <p:cNvPr id="287" name="テキスト ボックス 5">
+            <a:extLst>
+              <a:ext uri="{FF2B5EF4-FFF2-40B4-BE49-F238E27FC236}">
+                <a16:creationId xmlns:a16="http://schemas.microsoft.com/office/drawing/2014/main" id="{1195C6E3-27E5-2293-88BE-56FDDCFE4081}"/>
+              </a:ext>
+            </a:extLst>
+          </p:cNvPr>
+          <p:cNvSpPr txBox="1"/>
+          <p:nvPr/>
+        </p:nvSpPr>
+        <p:spPr>
+          <a:xfrm>
+            <a:off x="571315" y="26283231"/>
+            <a:ext cx="9149205" cy="523220"/>
+          </a:xfrm>
+          <a:prstGeom prst="rect">
+            <a:avLst/>
+          </a:prstGeom>
+          <a:noFill/>
+        </p:spPr>
+        <p:txBody>
+          <a:bodyPr wrap="square" rtlCol="0">
+            <a:spAutoFit/>
+          </a:bodyPr>
+          <a:lstStyle/>
+          <a:p>
+            <a:pPr marL="685800" indent="-685800" algn="just">
+              <a:spcBef>
+                <a:spcPts val="2400"/>
+              </a:spcBef>
+              <a:buClr>
+                <a:srgbClr val="018185"/>
+              </a:buClr>
+              <a:buFont typeface="Wingdings" panose="05000000000000000000" pitchFamily="2" charset="2"/>
+              <a:buChar char="q"/>
+            </a:pPr>
+            <a:r>
+              <a:rPr lang="en-US" sz="2800" dirty="0">
+                <a:solidFill>
+                  <a:srgbClr val="1F2933"/>
+                </a:solidFill>
+                <a:latin typeface="Arial" pitchFamily="34" charset="0"/>
+                <a:ea typeface="Arial" pitchFamily="34" charset="-122"/>
+                <a:cs typeface="Arial" pitchFamily="34" charset="-120"/>
+              </a:rPr>
+              <a:t>Total RMS calculation :</a:t>
+            </a:r>
+          </a:p>
+        </p:txBody>
+      </p:sp>
+      <p:pic>
+        <p:nvPicPr>
+          <p:cNvPr id="289" name="Picture 288">
+            <a:extLst>
+              <a:ext uri="{FF2B5EF4-FFF2-40B4-BE49-F238E27FC236}">
+                <a16:creationId xmlns:a16="http://schemas.microsoft.com/office/drawing/2014/main" id="{10686CB0-710E-6FF8-7CEA-57FF6720CE60}"/>
+              </a:ext>
+            </a:extLst>
+          </p:cNvPr>
+          <p:cNvPicPr>
+            <a:picLocks noChangeAspect="1"/>
+          </p:cNvPicPr>
+          <p:nvPr/>
+        </p:nvPicPr>
+        <p:blipFill>
+          <a:blip r:embed="rId15"/>
+          <a:stretch>
+            <a:fillRect/>
+          </a:stretch>
+        </p:blipFill>
+        <p:spPr>
+          <a:xfrm>
+            <a:off x="4513387" y="23455043"/>
+            <a:ext cx="4460814" cy="935745"/>
+          </a:xfrm>
+          <a:prstGeom prst="rect">
+            <a:avLst/>
+          </a:prstGeom>
+        </p:spPr>
+      </p:pic>
+      <p:pic>
+        <p:nvPicPr>
+          <p:cNvPr id="291" name="Picture 290">
+            <a:extLst>
+              <a:ext uri="{FF2B5EF4-FFF2-40B4-BE49-F238E27FC236}">
+                <a16:creationId xmlns:a16="http://schemas.microsoft.com/office/drawing/2014/main" id="{C77FAB7F-DEFF-2CBF-6F57-5A567F276D45}"/>
+              </a:ext>
+            </a:extLst>
+          </p:cNvPr>
+          <p:cNvPicPr>
+            <a:picLocks noChangeAspect="1"/>
+          </p:cNvPicPr>
+          <p:nvPr/>
+        </p:nvPicPr>
+        <p:blipFill>
+          <a:blip r:embed="rId16"/>
+          <a:stretch>
+            <a:fillRect/>
+          </a:stretch>
+        </p:blipFill>
+        <p:spPr>
+          <a:xfrm>
+            <a:off x="3077391" y="13256416"/>
+            <a:ext cx="5110735" cy="958433"/>
+          </a:xfrm>
+          <a:prstGeom prst="rect">
+            <a:avLst/>
+          </a:prstGeom>
+        </p:spPr>
+      </p:pic>
+      <p:pic>
+        <p:nvPicPr>
+          <p:cNvPr id="293" name="Picture 292">
+            <a:extLst>
+              <a:ext uri="{FF2B5EF4-FFF2-40B4-BE49-F238E27FC236}">
+                <a16:creationId xmlns:a16="http://schemas.microsoft.com/office/drawing/2014/main" id="{075B99A7-A289-9D5E-E716-71BF249282A3}"/>
+              </a:ext>
+            </a:extLst>
+          </p:cNvPr>
+          <p:cNvPicPr>
+            <a:picLocks noChangeAspect="1"/>
+          </p:cNvPicPr>
+          <p:nvPr/>
+        </p:nvPicPr>
+        <p:blipFill>
+          <a:blip r:embed="rId17"/>
+          <a:stretch>
+            <a:fillRect/>
+          </a:stretch>
+        </p:blipFill>
+        <p:spPr>
+          <a:xfrm>
+            <a:off x="2570614" y="15680940"/>
+            <a:ext cx="6284670" cy="830658"/>
+          </a:xfrm>
+          <a:prstGeom prst="rect">
+            <a:avLst/>
+          </a:prstGeom>
+        </p:spPr>
+      </p:pic>
+      <p:pic>
+        <p:nvPicPr>
+          <p:cNvPr id="295" name="Picture 294">
+            <a:extLst>
+              <a:ext uri="{FF2B5EF4-FFF2-40B4-BE49-F238E27FC236}">
+                <a16:creationId xmlns:a16="http://schemas.microsoft.com/office/drawing/2014/main" id="{0B7B0E56-7303-EF48-526B-46D5B788312E}"/>
+              </a:ext>
+            </a:extLst>
+          </p:cNvPr>
+          <p:cNvPicPr>
+            <a:picLocks noChangeAspect="1"/>
+          </p:cNvPicPr>
+          <p:nvPr/>
+        </p:nvPicPr>
+        <p:blipFill>
+          <a:blip r:embed="rId18"/>
+          <a:stretch>
+            <a:fillRect/>
+          </a:stretch>
+        </p:blipFill>
+        <p:spPr>
+          <a:xfrm>
+            <a:off x="2222192" y="18135322"/>
+            <a:ext cx="6821133" cy="1032946"/>
+          </a:xfrm>
+          <a:prstGeom prst="rect">
+            <a:avLst/>
+          </a:prstGeom>
+        </p:spPr>
+      </p:pic>
+      <p:pic>
+        <p:nvPicPr>
+          <p:cNvPr id="297" name="Picture 296">
+            <a:extLst>
+              <a:ext uri="{FF2B5EF4-FFF2-40B4-BE49-F238E27FC236}">
+                <a16:creationId xmlns:a16="http://schemas.microsoft.com/office/drawing/2014/main" id="{C203FA9B-CB41-D020-F61C-CE924288C282}"/>
+              </a:ext>
+            </a:extLst>
+          </p:cNvPr>
+          <p:cNvPicPr>
+            <a:picLocks noChangeAspect="1"/>
+          </p:cNvPicPr>
+          <p:nvPr/>
+        </p:nvPicPr>
+        <p:blipFill>
+          <a:blip r:embed="rId19"/>
+          <a:stretch>
+            <a:fillRect/>
+          </a:stretch>
+        </p:blipFill>
+        <p:spPr>
+          <a:xfrm>
+            <a:off x="12014177" y="20139175"/>
+            <a:ext cx="7312381" cy="1183872"/>
+          </a:xfrm>
+          <a:prstGeom prst="rect">
+            <a:avLst/>
+          </a:prstGeom>
+        </p:spPr>
+      </p:pic>
+      <p:pic>
+        <p:nvPicPr>
+          <p:cNvPr id="299" name="Picture 298">
+            <a:extLst>
+              <a:ext uri="{FF2B5EF4-FFF2-40B4-BE49-F238E27FC236}">
+                <a16:creationId xmlns:a16="http://schemas.microsoft.com/office/drawing/2014/main" id="{DFB7F334-D727-AFFD-7387-4C9FA758B85D}"/>
+              </a:ext>
+            </a:extLst>
+          </p:cNvPr>
+          <p:cNvPicPr>
+            <a:picLocks noChangeAspect="1"/>
+          </p:cNvPicPr>
+          <p:nvPr/>
+        </p:nvPicPr>
+        <p:blipFill>
+          <a:blip r:embed="rId20"/>
+          <a:stretch>
+            <a:fillRect/>
+          </a:stretch>
+        </p:blipFill>
+        <p:spPr>
+          <a:xfrm>
+            <a:off x="11410780" y="22589214"/>
+            <a:ext cx="3239279" cy="594120"/>
+          </a:xfrm>
+          <a:prstGeom prst="rect">
+            <a:avLst/>
+          </a:prstGeom>
+        </p:spPr>
+      </p:pic>
+      <p:pic>
+        <p:nvPicPr>
+          <p:cNvPr id="301" name="Picture 300">
+            <a:extLst>
+              <a:ext uri="{FF2B5EF4-FFF2-40B4-BE49-F238E27FC236}">
+                <a16:creationId xmlns:a16="http://schemas.microsoft.com/office/drawing/2014/main" id="{76D40AC8-4402-7158-47C8-A0FDB9F3C600}"/>
+              </a:ext>
+            </a:extLst>
+          </p:cNvPr>
+          <p:cNvPicPr>
+            <a:picLocks noChangeAspect="1"/>
+          </p:cNvPicPr>
+          <p:nvPr/>
+        </p:nvPicPr>
+        <p:blipFill>
+          <a:blip r:embed="rId21"/>
+          <a:stretch>
+            <a:fillRect/>
+          </a:stretch>
+        </p:blipFill>
+        <p:spPr>
+          <a:xfrm>
+            <a:off x="15046972" y="22420355"/>
+            <a:ext cx="4773700" cy="944651"/>
+          </a:xfrm>
+          <a:prstGeom prst="rect">
+            <a:avLst/>
+          </a:prstGeom>
+        </p:spPr>
+      </p:pic>
+      <p:pic>
+        <p:nvPicPr>
+          <p:cNvPr id="303" name="Picture 302">
+            <a:extLst>
+              <a:ext uri="{FF2B5EF4-FFF2-40B4-BE49-F238E27FC236}">
+                <a16:creationId xmlns:a16="http://schemas.microsoft.com/office/drawing/2014/main" id="{47A713CE-ADF9-7D1E-6F00-178FB567B099}"/>
+              </a:ext>
+            </a:extLst>
+          </p:cNvPr>
+          <p:cNvPicPr>
+            <a:picLocks noChangeAspect="1"/>
+          </p:cNvPicPr>
+          <p:nvPr/>
+        </p:nvPicPr>
+        <p:blipFill>
+          <a:blip r:embed="rId22"/>
+          <a:stretch>
+            <a:fillRect/>
+          </a:stretch>
+        </p:blipFill>
+        <p:spPr>
+          <a:xfrm>
+            <a:off x="11525905" y="24453901"/>
+            <a:ext cx="2703713" cy="558376"/>
+          </a:xfrm>
+          <a:prstGeom prst="rect">
+            <a:avLst/>
+          </a:prstGeom>
+        </p:spPr>
+      </p:pic>
+      <p:pic>
+        <p:nvPicPr>
+          <p:cNvPr id="305" name="Picture 304">
+            <a:extLst>
+              <a:ext uri="{FF2B5EF4-FFF2-40B4-BE49-F238E27FC236}">
+                <a16:creationId xmlns:a16="http://schemas.microsoft.com/office/drawing/2014/main" id="{9849CEF5-11E5-34EC-AE49-0AEFBBA6C6A2}"/>
+              </a:ext>
+            </a:extLst>
+          </p:cNvPr>
+          <p:cNvPicPr>
+            <a:picLocks noChangeAspect="1"/>
+          </p:cNvPicPr>
+          <p:nvPr/>
+        </p:nvPicPr>
+        <p:blipFill>
+          <a:blip r:embed="rId23"/>
+          <a:stretch>
+            <a:fillRect/>
+          </a:stretch>
+        </p:blipFill>
+        <p:spPr>
+          <a:xfrm>
+            <a:off x="14542513" y="24300394"/>
+            <a:ext cx="5212765" cy="806339"/>
+          </a:xfrm>
+          <a:prstGeom prst="rect">
+            <a:avLst/>
+          </a:prstGeom>
+        </p:spPr>
+      </p:pic>
+      <p:pic>
+        <p:nvPicPr>
+          <p:cNvPr id="307" name="Picture 306">
+            <a:extLst>
+              <a:ext uri="{FF2B5EF4-FFF2-40B4-BE49-F238E27FC236}">
+                <a16:creationId xmlns:a16="http://schemas.microsoft.com/office/drawing/2014/main" id="{0A71B696-9848-4E4A-39C6-575264BBF0B5}"/>
+              </a:ext>
+            </a:extLst>
+          </p:cNvPr>
+          <p:cNvPicPr>
+            <a:picLocks noChangeAspect="1"/>
+          </p:cNvPicPr>
+          <p:nvPr/>
+        </p:nvPicPr>
+        <p:blipFill>
+          <a:blip r:embed="rId24"/>
+          <a:stretch>
+            <a:fillRect/>
+          </a:stretch>
+        </p:blipFill>
+        <p:spPr>
+          <a:xfrm>
+            <a:off x="11911755" y="25719305"/>
+            <a:ext cx="7075697" cy="660290"/>
+          </a:xfrm>
+          <a:prstGeom prst="rect">
+            <a:avLst/>
+          </a:prstGeom>
+        </p:spPr>
+      </p:pic>
+      <p:pic>
+        <p:nvPicPr>
+          <p:cNvPr id="309" name="Picture 308">
+            <a:extLst>
+              <a:ext uri="{FF2B5EF4-FFF2-40B4-BE49-F238E27FC236}">
+                <a16:creationId xmlns:a16="http://schemas.microsoft.com/office/drawing/2014/main" id="{A6B1B496-C0A7-B1DF-5B88-98E97BF87E25}"/>
+              </a:ext>
+            </a:extLst>
+          </p:cNvPr>
+          <p:cNvPicPr>
+            <a:picLocks noChangeAspect="1"/>
+          </p:cNvPicPr>
+          <p:nvPr/>
+        </p:nvPicPr>
+        <p:blipFill>
+          <a:blip r:embed="rId25"/>
+          <a:stretch>
+            <a:fillRect/>
+          </a:stretch>
+        </p:blipFill>
+        <p:spPr>
+          <a:xfrm>
+            <a:off x="10875540" y="26983872"/>
+            <a:ext cx="9111344" cy="1252662"/>
+          </a:xfrm>
+          <a:prstGeom prst="rect">
+            <a:avLst/>
+          </a:prstGeom>
+        </p:spPr>
+      </p:pic>
+      <p:pic>
+        <p:nvPicPr>
+          <p:cNvPr id="311" name="Picture 310">
+            <a:extLst>
+              <a:ext uri="{FF2B5EF4-FFF2-40B4-BE49-F238E27FC236}">
+                <a16:creationId xmlns:a16="http://schemas.microsoft.com/office/drawing/2014/main" id="{E1215D9C-0A7A-D505-E56B-79B8216BF405}"/>
+              </a:ext>
+            </a:extLst>
+          </p:cNvPr>
+          <p:cNvPicPr>
+            <a:picLocks noChangeAspect="1"/>
+          </p:cNvPicPr>
+          <p:nvPr/>
+        </p:nvPicPr>
+        <p:blipFill>
+          <a:blip r:embed="rId26">
+            <a:extLst>
+              <a:ext uri="{28A0092B-C50C-407E-A947-70E740481C1C}">
+                <a14:useLocalDpi xmlns:a14="http://schemas.microsoft.com/office/drawing/2010/main" val="0"/>
+              </a:ext>
+            </a:extLst>
+          </a:blip>
+          <a:stretch>
+            <a:fillRect/>
+          </a:stretch>
+        </p:blipFill>
+        <p:spPr>
+          <a:xfrm>
+            <a:off x="2777674" y="29336974"/>
+            <a:ext cx="4881738" cy="2819098"/>
+          </a:xfrm>
+          <a:prstGeom prst="rect">
+            <a:avLst/>
+          </a:prstGeom>
+        </p:spPr>
+      </p:pic>
+      <p:pic>
+        <p:nvPicPr>
+          <p:cNvPr id="313" name="Picture 312">
+            <a:extLst>
+              <a:ext uri="{FF2B5EF4-FFF2-40B4-BE49-F238E27FC236}">
+                <a16:creationId xmlns:a16="http://schemas.microsoft.com/office/drawing/2014/main" id="{53463ECD-8879-6C60-4B5C-2E5DE42F6B78}"/>
+              </a:ext>
+            </a:extLst>
+          </p:cNvPr>
+          <p:cNvPicPr>
+            <a:picLocks noChangeAspect="1"/>
+          </p:cNvPicPr>
+          <p:nvPr/>
+        </p:nvPicPr>
+        <p:blipFill>
+          <a:blip r:embed="rId27">
+            <a:extLst>
+              <a:ext uri="{28A0092B-C50C-407E-A947-70E740481C1C}">
+                <a14:useLocalDpi xmlns:a14="http://schemas.microsoft.com/office/drawing/2010/main" val="0"/>
+              </a:ext>
+            </a:extLst>
+          </a:blip>
+          <a:stretch>
+            <a:fillRect/>
+          </a:stretch>
+        </p:blipFill>
+        <p:spPr>
+          <a:xfrm>
+            <a:off x="12472133" y="5393284"/>
+            <a:ext cx="5127731" cy="2519091"/>
+          </a:xfrm>
+          <a:prstGeom prst="rect">
+            <a:avLst/>
+          </a:prstGeom>
+        </p:spPr>
+      </p:pic>
+      <p:pic>
+        <p:nvPicPr>
+          <p:cNvPr id="315" name="Picture 314">
+            <a:extLst>
+              <a:ext uri="{FF2B5EF4-FFF2-40B4-BE49-F238E27FC236}">
+                <a16:creationId xmlns:a16="http://schemas.microsoft.com/office/drawing/2014/main" id="{CFA5F135-51E0-848F-0778-91F0E4AD5E03}"/>
+              </a:ext>
+            </a:extLst>
+          </p:cNvPr>
+          <p:cNvPicPr>
+            <a:picLocks noChangeAspect="1"/>
+          </p:cNvPicPr>
+          <p:nvPr/>
+        </p:nvPicPr>
+        <p:blipFill>
+          <a:blip r:embed="rId28">
+            <a:extLst>
+              <a:ext uri="{28A0092B-C50C-407E-A947-70E740481C1C}">
+                <a14:useLocalDpi xmlns:a14="http://schemas.microsoft.com/office/drawing/2010/main" val="0"/>
+              </a:ext>
+            </a:extLst>
+          </a:blip>
+          <a:stretch>
+            <a:fillRect/>
+          </a:stretch>
+        </p:blipFill>
+        <p:spPr>
+          <a:xfrm>
+            <a:off x="2161543" y="20512862"/>
+            <a:ext cx="6784492" cy="2801824"/>
+          </a:xfrm>
+          <a:prstGeom prst="rect">
+            <a:avLst/>
+          </a:prstGeom>
+        </p:spPr>
+      </p:pic>
+      <p:pic>
+        <p:nvPicPr>
+          <p:cNvPr id="317" name="Picture 316">
+            <a:extLst>
+              <a:ext uri="{FF2B5EF4-FFF2-40B4-BE49-F238E27FC236}">
+                <a16:creationId xmlns:a16="http://schemas.microsoft.com/office/drawing/2014/main" id="{BCE3FFD9-6E20-1CB4-2F07-703ABE3A1B9E}"/>
+              </a:ext>
+            </a:extLst>
+          </p:cNvPr>
+          <p:cNvPicPr>
+            <a:picLocks noChangeAspect="1"/>
+          </p:cNvPicPr>
+          <p:nvPr/>
+        </p:nvPicPr>
+        <p:blipFill>
+          <a:blip r:embed="rId29">
+            <a:extLst>
+              <a:ext uri="{28A0092B-C50C-407E-A947-70E740481C1C}">
+                <a14:useLocalDpi xmlns:a14="http://schemas.microsoft.com/office/drawing/2010/main" val="0"/>
+              </a:ext>
+            </a:extLst>
+          </a:blip>
+          <a:stretch>
+            <a:fillRect/>
+          </a:stretch>
+        </p:blipFill>
+        <p:spPr>
+          <a:xfrm>
+            <a:off x="1187137" y="32162254"/>
+            <a:ext cx="8277713" cy="9865031"/>
+          </a:xfrm>
+          <a:prstGeom prst="rect">
+            <a:avLst/>
+          </a:prstGeom>
+        </p:spPr>
+      </p:pic>
+      <p:pic>
+        <p:nvPicPr>
+          <p:cNvPr id="319" name="Picture 318">
+            <a:extLst>
+              <a:ext uri="{FF2B5EF4-FFF2-40B4-BE49-F238E27FC236}">
+                <a16:creationId xmlns:a16="http://schemas.microsoft.com/office/drawing/2014/main" id="{C4E9F1BF-027C-F118-297E-827F97B4B84C}"/>
+              </a:ext>
+            </a:extLst>
+          </p:cNvPr>
+          <p:cNvPicPr>
+            <a:picLocks noChangeAspect="1"/>
+          </p:cNvPicPr>
+          <p:nvPr/>
+        </p:nvPicPr>
+        <p:blipFill>
+          <a:blip r:embed="rId30">
+            <a:extLst>
+              <a:ext uri="{28A0092B-C50C-407E-A947-70E740481C1C}">
+                <a14:useLocalDpi xmlns:a14="http://schemas.microsoft.com/office/drawing/2010/main" val="0"/>
+              </a:ext>
+            </a:extLst>
+          </a:blip>
+          <a:stretch>
+            <a:fillRect/>
+          </a:stretch>
+        </p:blipFill>
+        <p:spPr>
+          <a:xfrm>
+            <a:off x="11051493" y="8079443"/>
+            <a:ext cx="8066236" cy="9839183"/>
+          </a:xfrm>
+          <a:prstGeom prst="rect">
+            <a:avLst/>
+          </a:prstGeom>
+        </p:spPr>
+      </p:pic>
+      <p:pic>
+        <p:nvPicPr>
+          <p:cNvPr id="323" name="Picture 322">
+            <a:extLst>
+              <a:ext uri="{FF2B5EF4-FFF2-40B4-BE49-F238E27FC236}">
+                <a16:creationId xmlns:a16="http://schemas.microsoft.com/office/drawing/2014/main" id="{BE278E0E-5070-E474-E2AA-1944F8614EE9}"/>
+              </a:ext>
+            </a:extLst>
+          </p:cNvPr>
+          <p:cNvPicPr>
+            <a:picLocks noChangeAspect="1"/>
+          </p:cNvPicPr>
+          <p:nvPr/>
+        </p:nvPicPr>
+        <p:blipFill>
+          <a:blip r:embed="rId31">
+            <a:extLst>
+              <a:ext uri="{28A0092B-C50C-407E-A947-70E740481C1C}">
+                <a14:useLocalDpi xmlns:a14="http://schemas.microsoft.com/office/drawing/2010/main" val="0"/>
+              </a:ext>
+            </a:extLst>
+          </a:blip>
+          <a:stretch>
+            <a:fillRect/>
+          </a:stretch>
+        </p:blipFill>
+        <p:spPr>
+          <a:xfrm>
+            <a:off x="10827014" y="29313880"/>
+            <a:ext cx="8612044" cy="7071600"/>
+          </a:xfrm>
+          <a:prstGeom prst="rect">
+            <a:avLst/>
+          </a:prstGeom>
+        </p:spPr>
+      </p:pic>
+      <p:pic>
+        <p:nvPicPr>
+          <p:cNvPr id="325" name="Picture 324">
+            <a:extLst>
+              <a:ext uri="{FF2B5EF4-FFF2-40B4-BE49-F238E27FC236}">
+                <a16:creationId xmlns:a16="http://schemas.microsoft.com/office/drawing/2014/main" id="{C32ED6D9-D697-F844-589B-10164294837E}"/>
+              </a:ext>
+            </a:extLst>
+          </p:cNvPr>
+          <p:cNvPicPr>
+            <a:picLocks noChangeAspect="1"/>
+          </p:cNvPicPr>
+          <p:nvPr/>
+        </p:nvPicPr>
+        <p:blipFill>
+          <a:blip r:embed="rId32">
+            <a:extLst>
+              <a:ext uri="{28A0092B-C50C-407E-A947-70E740481C1C}">
+                <a14:useLocalDpi xmlns:a14="http://schemas.microsoft.com/office/drawing/2010/main" val="0"/>
+              </a:ext>
+            </a:extLst>
+          </a:blip>
+          <a:stretch>
+            <a:fillRect/>
+          </a:stretch>
+        </p:blipFill>
+        <p:spPr>
+          <a:xfrm>
+            <a:off x="11329171" y="36462232"/>
+            <a:ext cx="7894417" cy="3446477"/>
+          </a:xfrm>
+          <a:prstGeom prst="rect">
+            <a:avLst/>
+          </a:prstGeom>
+        </p:spPr>
+      </p:pic>
+      <p:pic>
+        <p:nvPicPr>
+          <p:cNvPr id="327" name="Picture 326">
+            <a:extLst>
+              <a:ext uri="{FF2B5EF4-FFF2-40B4-BE49-F238E27FC236}">
+                <a16:creationId xmlns:a16="http://schemas.microsoft.com/office/drawing/2014/main" id="{5DC99C9F-8A94-EE29-0FD2-1DE5917C2898}"/>
+              </a:ext>
+            </a:extLst>
+          </p:cNvPr>
+          <p:cNvPicPr>
+            <a:picLocks noChangeAspect="1"/>
+          </p:cNvPicPr>
+          <p:nvPr/>
+        </p:nvPicPr>
+        <p:blipFill>
+          <a:blip r:embed="rId33">
+            <a:extLst>
+              <a:ext uri="{28A0092B-C50C-407E-A947-70E740481C1C}">
+                <a14:useLocalDpi xmlns:a14="http://schemas.microsoft.com/office/drawing/2010/main" val="0"/>
+              </a:ext>
+            </a:extLst>
+          </a:blip>
+          <a:stretch>
+            <a:fillRect/>
+          </a:stretch>
+        </p:blipFill>
+        <p:spPr>
+          <a:xfrm>
+            <a:off x="20451151" y="6067832"/>
+            <a:ext cx="9224606" cy="9224606"/>
+          </a:xfrm>
+          <a:prstGeom prst="rect">
+            <a:avLst/>
+          </a:prstGeom>
+        </p:spPr>
+      </p:pic>
+      <p:pic>
+        <p:nvPicPr>
+          <p:cNvPr id="329" name="Picture 328">
+            <a:extLst>
+              <a:ext uri="{FF2B5EF4-FFF2-40B4-BE49-F238E27FC236}">
+                <a16:creationId xmlns:a16="http://schemas.microsoft.com/office/drawing/2014/main" id="{678738A0-5F6A-EDE7-8F06-E359FF61CC82}"/>
+              </a:ext>
+            </a:extLst>
+          </p:cNvPr>
+          <p:cNvPicPr>
+            <a:picLocks noChangeAspect="1"/>
+          </p:cNvPicPr>
+          <p:nvPr/>
+        </p:nvPicPr>
+        <p:blipFill>
+          <a:blip r:embed="rId34">
+            <a:extLst>
+              <a:ext uri="{28A0092B-C50C-407E-A947-70E740481C1C}">
+                <a14:useLocalDpi xmlns:a14="http://schemas.microsoft.com/office/drawing/2010/main" val="0"/>
+              </a:ext>
+            </a:extLst>
+          </a:blip>
+          <a:stretch>
+            <a:fillRect/>
+          </a:stretch>
+        </p:blipFill>
+        <p:spPr>
+          <a:xfrm>
+            <a:off x="20676768" y="20305710"/>
+            <a:ext cx="9149205" cy="9149205"/>
+          </a:xfrm>
+          <a:prstGeom prst="rect">
+            <a:avLst/>
+          </a:prstGeom>
+        </p:spPr>
+      </p:pic>
+      <mc:AlternateContent xmlns:mc="http://schemas.openxmlformats.org/markup-compatibility/2006">
+        <mc:Choice xmlns:a14="http://schemas.microsoft.com/office/drawing/2010/main" Requires="a14">
+          <p:sp>
+            <p:nvSpPr>
+              <p:cNvPr id="331" name="TextBox 330">
+                <a:extLst>
+                  <a:ext uri="{FF2B5EF4-FFF2-40B4-BE49-F238E27FC236}">
+                    <a16:creationId xmlns:a16="http://schemas.microsoft.com/office/drawing/2014/main" id="{D15B1A18-AD0F-657F-BFAD-B74BD5E64BE1}"/>
+                  </a:ext>
+                </a:extLst>
+              </p:cNvPr>
+              <p:cNvSpPr txBox="1"/>
+              <p:nvPr/>
+            </p:nvSpPr>
+            <p:spPr>
+              <a:xfrm>
+                <a:off x="13890158" y="32497758"/>
+                <a:ext cx="3180917" cy="369332"/>
+              </a:xfrm>
+              <a:prstGeom prst="rect">
+                <a:avLst/>
+              </a:prstGeom>
+              <a:noFill/>
+            </p:spPr>
+            <p:txBody>
+              <a:bodyPr wrap="square">
+                <a:spAutoFit/>
+              </a:bodyPr>
+              <a:lstStyle/>
+              <a:p>
+                <a14:m>
+                  <m:oMath xmlns:m="http://schemas.openxmlformats.org/officeDocument/2006/math">
+                    <m:sSub>
+                      <m:sSubPr>
+                        <m:ctrlPr>
+                          <a:rPr lang="en-US" sz="1800" b="1" i="1" dirty="0" smtClean="0">
+                            <a:solidFill>
+                              <a:srgbClr val="018185"/>
+                            </a:solidFill>
+                            <a:latin typeface="Cambria Math" panose="02040503050406030204" pitchFamily="18" charset="0"/>
+                            <a:ea typeface="Arial" pitchFamily="34" charset="-122"/>
+                            <a:cs typeface="Arial" pitchFamily="34" charset="-120"/>
+                          </a:rPr>
+                        </m:ctrlPr>
+                      </m:sSubPr>
+                      <m:e>
+                        <m:r>
+                          <a:rPr lang="en-US" sz="1800" b="1" i="1" dirty="0" smtClean="0">
+                            <a:solidFill>
+                              <a:srgbClr val="018185"/>
+                            </a:solidFill>
+                            <a:latin typeface="Cambria Math" panose="02040503050406030204" pitchFamily="18" charset="0"/>
+                            <a:ea typeface="Arial" pitchFamily="34" charset="-122"/>
+                            <a:cs typeface="Arial" pitchFamily="34" charset="-120"/>
+                          </a:rPr>
+                          <m:t>𝒎</m:t>
+                        </m:r>
+                      </m:e>
+                      <m:sub>
+                        <m:r>
+                          <a:rPr lang="en-US" sz="1800" b="1" i="1" dirty="0" smtClean="0">
+                            <a:solidFill>
+                              <a:srgbClr val="018185"/>
+                            </a:solidFill>
+                            <a:latin typeface="Cambria Math" panose="02040503050406030204" pitchFamily="18" charset="0"/>
+                            <a:ea typeface="Arial" pitchFamily="34" charset="-122"/>
+                            <a:cs typeface="Arial" pitchFamily="34" charset="-120"/>
+                          </a:rPr>
+                          <m:t>𝒂</m:t>
+                        </m:r>
+                      </m:sub>
+                    </m:sSub>
+                    <m:r>
+                      <a:rPr lang="en-US" sz="1800" b="1" i="1" dirty="0" smtClean="0">
+                        <a:solidFill>
+                          <a:srgbClr val="018185"/>
+                        </a:solidFill>
+                        <a:latin typeface="Cambria Math" panose="02040503050406030204" pitchFamily="18" charset="0"/>
+                        <a:ea typeface="Arial" pitchFamily="34" charset="-122"/>
+                        <a:cs typeface="Arial" pitchFamily="34" charset="-120"/>
+                      </a:rPr>
+                      <m:t>=</m:t>
+                    </m:r>
+                    <m:r>
+                      <a:rPr lang="en-US" sz="1800" b="1" i="1" dirty="0" smtClean="0">
+                        <a:solidFill>
+                          <a:srgbClr val="018185"/>
+                        </a:solidFill>
+                        <a:latin typeface="Cambria Math" panose="02040503050406030204" pitchFamily="18" charset="0"/>
+                        <a:ea typeface="Arial" pitchFamily="34" charset="-122"/>
+                        <a:cs typeface="Arial" pitchFamily="34" charset="-120"/>
+                      </a:rPr>
+                      <m:t>𝟎</m:t>
+                    </m:r>
+                    <m:r>
+                      <a:rPr lang="en-US" sz="1800" b="1" i="1" dirty="0" smtClean="0">
+                        <a:solidFill>
+                          <a:srgbClr val="018185"/>
+                        </a:solidFill>
+                        <a:latin typeface="Cambria Math" panose="02040503050406030204" pitchFamily="18" charset="0"/>
+                        <a:ea typeface="Arial" pitchFamily="34" charset="-122"/>
+                        <a:cs typeface="Arial" pitchFamily="34" charset="-120"/>
+                      </a:rPr>
+                      <m:t>.</m:t>
+                    </m:r>
+                    <m:r>
+                      <a:rPr lang="en-US" sz="1800" b="1" i="1" dirty="0" smtClean="0">
+                        <a:solidFill>
+                          <a:srgbClr val="018185"/>
+                        </a:solidFill>
+                        <a:latin typeface="Cambria Math" panose="02040503050406030204" pitchFamily="18" charset="0"/>
+                        <a:ea typeface="Arial" pitchFamily="34" charset="-122"/>
+                        <a:cs typeface="Arial" pitchFamily="34" charset="-120"/>
+                      </a:rPr>
+                      <m:t>𝟔</m:t>
+                    </m:r>
+                    <m:r>
+                      <a:rPr lang="en-US" sz="1800" b="1" i="1" dirty="0" smtClean="0">
+                        <a:solidFill>
+                          <a:srgbClr val="018185"/>
+                        </a:solidFill>
+                        <a:latin typeface="Cambria Math" panose="02040503050406030204" pitchFamily="18" charset="0"/>
+                        <a:ea typeface="Arial" pitchFamily="34" charset="-122"/>
+                        <a:cs typeface="Arial" pitchFamily="34" charset="-120"/>
+                      </a:rPr>
+                      <m:t> </m:t>
+                    </m:r>
+                  </m:oMath>
+                </a14:m>
+                <a:r>
+                  <a:rPr lang="en-US" sz="1800" b="1" dirty="0">
+                    <a:solidFill>
+                      <a:srgbClr val="018185"/>
+                    </a:solidFill>
+                    <a:latin typeface="Arial" pitchFamily="34" charset="0"/>
+                    <a:ea typeface="Arial" pitchFamily="34" charset="-122"/>
+                    <a:cs typeface="Arial" pitchFamily="34" charset="-120"/>
+                  </a:rPr>
+                  <a:t>, </a:t>
+                </a:r>
+                <a14:m>
+                  <m:oMath xmlns:m="http://schemas.openxmlformats.org/officeDocument/2006/math">
+                    <m:r>
+                      <a:rPr lang="en-US" sz="1800" b="1" i="1" dirty="0" smtClean="0">
+                        <a:solidFill>
+                          <a:srgbClr val="018185"/>
+                        </a:solidFill>
+                        <a:latin typeface="Cambria Math" panose="02040503050406030204" pitchFamily="18" charset="0"/>
+                        <a:ea typeface="Arial" pitchFamily="34" charset="-122"/>
+                        <a:cs typeface="Arial" pitchFamily="34" charset="-120"/>
+                      </a:rPr>
+                      <m:t>𝒑</m:t>
+                    </m:r>
+                    <m:r>
+                      <a:rPr lang="en-US" sz="1800" b="1" i="1" dirty="0" smtClean="0">
+                        <a:solidFill>
+                          <a:srgbClr val="018185"/>
+                        </a:solidFill>
+                        <a:latin typeface="Cambria Math" panose="02040503050406030204" pitchFamily="18" charset="0"/>
+                        <a:ea typeface="Arial" pitchFamily="34" charset="-122"/>
+                        <a:cs typeface="Arial" pitchFamily="34" charset="-120"/>
+                      </a:rPr>
+                      <m:t>.</m:t>
+                    </m:r>
+                    <m:r>
+                      <a:rPr lang="en-US" sz="1800" b="1" i="1" dirty="0" smtClean="0">
+                        <a:solidFill>
+                          <a:srgbClr val="018185"/>
+                        </a:solidFill>
+                        <a:latin typeface="Cambria Math" panose="02040503050406030204" pitchFamily="18" charset="0"/>
+                        <a:ea typeface="Arial" pitchFamily="34" charset="-122"/>
+                        <a:cs typeface="Arial" pitchFamily="34" charset="-120"/>
+                      </a:rPr>
+                      <m:t>𝒇</m:t>
+                    </m:r>
+                    <m:r>
+                      <a:rPr lang="en-US" sz="1800" b="1" i="1" dirty="0" smtClean="0">
+                        <a:solidFill>
+                          <a:srgbClr val="018185"/>
+                        </a:solidFill>
+                        <a:latin typeface="Cambria Math" panose="02040503050406030204" pitchFamily="18" charset="0"/>
+                        <a:ea typeface="Arial" pitchFamily="34" charset="-122"/>
+                        <a:cs typeface="Arial" pitchFamily="34" charset="-120"/>
+                      </a:rPr>
+                      <m:t>.= </m:t>
+                    </m:r>
+                    <m:r>
+                      <a:rPr lang="en-US" sz="1800" b="1" i="1" dirty="0" smtClean="0">
+                        <a:solidFill>
+                          <a:srgbClr val="018185"/>
+                        </a:solidFill>
+                        <a:latin typeface="Cambria Math" panose="02040503050406030204" pitchFamily="18" charset="0"/>
+                        <a:ea typeface="Arial" pitchFamily="34" charset="-122"/>
+                        <a:cs typeface="Arial" pitchFamily="34" charset="-120"/>
+                      </a:rPr>
+                      <m:t>𝟎</m:t>
+                    </m:r>
+                    <m:r>
+                      <a:rPr lang="en-US" sz="1800" b="1" i="1" dirty="0" smtClean="0">
+                        <a:solidFill>
+                          <a:srgbClr val="018185"/>
+                        </a:solidFill>
+                        <a:latin typeface="Cambria Math" panose="02040503050406030204" pitchFamily="18" charset="0"/>
+                        <a:ea typeface="Arial" pitchFamily="34" charset="-122"/>
+                        <a:cs typeface="Arial" pitchFamily="34" charset="-120"/>
+                      </a:rPr>
+                      <m:t>.</m:t>
+                    </m:r>
+                    <m:r>
+                      <a:rPr lang="en-US" sz="1800" b="1" i="1" dirty="0" smtClean="0">
+                        <a:solidFill>
+                          <a:srgbClr val="018185"/>
+                        </a:solidFill>
+                        <a:latin typeface="Cambria Math" panose="02040503050406030204" pitchFamily="18" charset="0"/>
+                        <a:ea typeface="Arial" pitchFamily="34" charset="-122"/>
+                        <a:cs typeface="Arial" pitchFamily="34" charset="-120"/>
+                      </a:rPr>
+                      <m:t>𝟗</m:t>
+                    </m:r>
+                  </m:oMath>
+                </a14:m>
+                <a:endParaRPr lang="sv-SE" dirty="0"/>
+              </a:p>
+            </p:txBody>
+          </p:sp>
+        </mc:Choice>
+        <mc:Fallback>
+          <p:sp>
+            <p:nvSpPr>
+              <p:cNvPr id="331" name="TextBox 330">
+                <a:extLst>
+                  <a:ext uri="{FF2B5EF4-FFF2-40B4-BE49-F238E27FC236}">
+                    <a16:creationId xmlns:a16="http://schemas.microsoft.com/office/drawing/2014/main" id="{D15B1A18-AD0F-657F-BFAD-B74BD5E64BE1}"/>
+                  </a:ext>
+                </a:extLst>
+              </p:cNvPr>
+              <p:cNvSpPr txBox="1">
+                <a:spLocks noRot="1" noChangeAspect="1" noMove="1" noResize="1" noEditPoints="1" noAdjustHandles="1" noChangeArrowheads="1" noChangeShapeType="1" noTextEdit="1"/>
+              </p:cNvSpPr>
+              <p:nvPr/>
+            </p:nvSpPr>
+            <p:spPr>
+              <a:xfrm>
+                <a:off x="13890158" y="32497758"/>
+                <a:ext cx="3180917" cy="369332"/>
+              </a:xfrm>
+              <a:prstGeom prst="rect">
+                <a:avLst/>
+              </a:prstGeom>
+              <a:blipFill>
+                <a:blip r:embed="rId35"/>
+                <a:stretch>
+                  <a:fillRect t="-9836" b="-24590"/>
+                </a:stretch>
+              </a:blipFill>
+            </p:spPr>
+            <p:txBody>
+              <a:bodyPr/>
+              <a:lstStyle/>
+              <a:p>
+                <a:r>
+                  <a:rPr lang="sv-SE">
+                    <a:noFill/>
+                  </a:rPr>
+                  <a:t> </a:t>
+                </a:r>
+              </a:p>
+            </p:txBody>
+          </p:sp>
+        </mc:Fallback>
+      </mc:AlternateContent>
+      <mc:AlternateContent xmlns:mc="http://schemas.openxmlformats.org/markup-compatibility/2006">
+        <mc:Choice xmlns:a14="http://schemas.microsoft.com/office/drawing/2010/main" Requires="a14">
+          <p:sp>
+            <p:nvSpPr>
+              <p:cNvPr id="332" name="TextBox 331">
+                <a:extLst>
+                  <a:ext uri="{FF2B5EF4-FFF2-40B4-BE49-F238E27FC236}">
+                    <a16:creationId xmlns:a16="http://schemas.microsoft.com/office/drawing/2014/main" id="{A4481EC4-D099-CB43-7909-7947A5D44F48}"/>
+                  </a:ext>
+                </a:extLst>
+              </p:cNvPr>
+              <p:cNvSpPr txBox="1"/>
+              <p:nvPr/>
+            </p:nvSpPr>
+            <p:spPr>
+              <a:xfrm>
+                <a:off x="13903743" y="35907233"/>
+                <a:ext cx="3180917" cy="369332"/>
+              </a:xfrm>
+              <a:prstGeom prst="rect">
+                <a:avLst/>
+              </a:prstGeom>
+              <a:noFill/>
+            </p:spPr>
+            <p:txBody>
+              <a:bodyPr wrap="square">
+                <a:spAutoFit/>
+              </a:bodyPr>
+              <a:lstStyle/>
+              <a:p>
+                <a14:m>
+                  <m:oMath xmlns:m="http://schemas.openxmlformats.org/officeDocument/2006/math">
+                    <m:sSub>
+                      <m:sSubPr>
+                        <m:ctrlPr>
+                          <a:rPr lang="en-US" sz="1800" b="1" i="1" dirty="0" smtClean="0">
+                            <a:solidFill>
+                              <a:srgbClr val="018185"/>
+                            </a:solidFill>
+                            <a:latin typeface="Cambria Math" panose="02040503050406030204" pitchFamily="18" charset="0"/>
+                            <a:ea typeface="Arial" pitchFamily="34" charset="-122"/>
+                            <a:cs typeface="Arial" pitchFamily="34" charset="-120"/>
+                          </a:rPr>
+                        </m:ctrlPr>
+                      </m:sSubPr>
+                      <m:e>
+                        <m:r>
+                          <a:rPr lang="en-US" sz="1800" b="1" i="1" dirty="0" smtClean="0">
+                            <a:solidFill>
+                              <a:srgbClr val="018185"/>
+                            </a:solidFill>
+                            <a:latin typeface="Cambria Math" panose="02040503050406030204" pitchFamily="18" charset="0"/>
+                            <a:ea typeface="Arial" pitchFamily="34" charset="-122"/>
+                            <a:cs typeface="Arial" pitchFamily="34" charset="-120"/>
+                          </a:rPr>
+                          <m:t>𝒎</m:t>
+                        </m:r>
+                      </m:e>
+                      <m:sub>
+                        <m:r>
+                          <a:rPr lang="en-US" sz="1800" b="1" i="1" dirty="0" smtClean="0">
+                            <a:solidFill>
+                              <a:srgbClr val="018185"/>
+                            </a:solidFill>
+                            <a:latin typeface="Cambria Math" panose="02040503050406030204" pitchFamily="18" charset="0"/>
+                            <a:ea typeface="Arial" pitchFamily="34" charset="-122"/>
+                            <a:cs typeface="Arial" pitchFamily="34" charset="-120"/>
+                          </a:rPr>
+                          <m:t>𝒂</m:t>
+                        </m:r>
+                      </m:sub>
+                    </m:sSub>
+                    <m:r>
+                      <a:rPr lang="en-US" sz="1800" b="1" i="1" dirty="0" smtClean="0">
+                        <a:solidFill>
+                          <a:srgbClr val="018185"/>
+                        </a:solidFill>
+                        <a:latin typeface="Cambria Math" panose="02040503050406030204" pitchFamily="18" charset="0"/>
+                        <a:ea typeface="Arial" pitchFamily="34" charset="-122"/>
+                        <a:cs typeface="Arial" pitchFamily="34" charset="-120"/>
+                      </a:rPr>
+                      <m:t>=</m:t>
+                    </m:r>
+                    <m:r>
+                      <a:rPr lang="en-US" sz="1800" b="1" i="1" dirty="0" smtClean="0">
+                        <a:solidFill>
+                          <a:srgbClr val="018185"/>
+                        </a:solidFill>
+                        <a:latin typeface="Cambria Math" panose="02040503050406030204" pitchFamily="18" charset="0"/>
+                        <a:ea typeface="Arial" pitchFamily="34" charset="-122"/>
+                        <a:cs typeface="Arial" pitchFamily="34" charset="-120"/>
+                      </a:rPr>
+                      <m:t>𝟎</m:t>
+                    </m:r>
+                    <m:r>
+                      <a:rPr lang="en-US" sz="1800" b="1" i="1" dirty="0" smtClean="0">
+                        <a:solidFill>
+                          <a:srgbClr val="018185"/>
+                        </a:solidFill>
+                        <a:latin typeface="Cambria Math" panose="02040503050406030204" pitchFamily="18" charset="0"/>
+                        <a:ea typeface="Arial" pitchFamily="34" charset="-122"/>
+                        <a:cs typeface="Arial" pitchFamily="34" charset="-120"/>
+                      </a:rPr>
+                      <m:t>.</m:t>
+                    </m:r>
+                    <m:r>
+                      <a:rPr lang="en-US" sz="1800" b="1" i="1" dirty="0" smtClean="0">
+                        <a:solidFill>
+                          <a:srgbClr val="018185"/>
+                        </a:solidFill>
+                        <a:latin typeface="Cambria Math" panose="02040503050406030204" pitchFamily="18" charset="0"/>
+                        <a:ea typeface="Arial" pitchFamily="34" charset="-122"/>
+                        <a:cs typeface="Arial" pitchFamily="34" charset="-120"/>
+                      </a:rPr>
+                      <m:t>𝟖</m:t>
+                    </m:r>
+                    <m:r>
+                      <a:rPr lang="en-US" sz="1800" b="1" i="1" dirty="0" smtClean="0">
+                        <a:solidFill>
+                          <a:srgbClr val="018185"/>
+                        </a:solidFill>
+                        <a:latin typeface="Cambria Math" panose="02040503050406030204" pitchFamily="18" charset="0"/>
+                        <a:ea typeface="Arial" pitchFamily="34" charset="-122"/>
+                        <a:cs typeface="Arial" pitchFamily="34" charset="-120"/>
+                      </a:rPr>
+                      <m:t> </m:t>
+                    </m:r>
+                  </m:oMath>
+                </a14:m>
+                <a:r>
+                  <a:rPr lang="en-US" sz="1800" b="1" dirty="0">
+                    <a:solidFill>
+                      <a:srgbClr val="018185"/>
+                    </a:solidFill>
+                    <a:latin typeface="Arial" pitchFamily="34" charset="0"/>
+                    <a:ea typeface="Arial" pitchFamily="34" charset="-122"/>
+                    <a:cs typeface="Arial" pitchFamily="34" charset="-120"/>
+                  </a:rPr>
+                  <a:t>, </a:t>
+                </a:r>
+                <a14:m>
+                  <m:oMath xmlns:m="http://schemas.openxmlformats.org/officeDocument/2006/math">
+                    <m:r>
+                      <a:rPr lang="en-US" sz="1800" b="1" i="1" dirty="0" smtClean="0">
+                        <a:solidFill>
+                          <a:srgbClr val="018185"/>
+                        </a:solidFill>
+                        <a:latin typeface="Cambria Math" panose="02040503050406030204" pitchFamily="18" charset="0"/>
+                        <a:ea typeface="Arial" pitchFamily="34" charset="-122"/>
+                        <a:cs typeface="Arial" pitchFamily="34" charset="-120"/>
+                      </a:rPr>
+                      <m:t>𝒑</m:t>
+                    </m:r>
+                    <m:r>
+                      <a:rPr lang="en-US" sz="1800" b="1" i="1" dirty="0" smtClean="0">
+                        <a:solidFill>
+                          <a:srgbClr val="018185"/>
+                        </a:solidFill>
+                        <a:latin typeface="Cambria Math" panose="02040503050406030204" pitchFamily="18" charset="0"/>
+                        <a:ea typeface="Arial" pitchFamily="34" charset="-122"/>
+                        <a:cs typeface="Arial" pitchFamily="34" charset="-120"/>
+                      </a:rPr>
+                      <m:t>.</m:t>
+                    </m:r>
+                    <m:r>
+                      <a:rPr lang="en-US" sz="1800" b="1" i="1" dirty="0" smtClean="0">
+                        <a:solidFill>
+                          <a:srgbClr val="018185"/>
+                        </a:solidFill>
+                        <a:latin typeface="Cambria Math" panose="02040503050406030204" pitchFamily="18" charset="0"/>
+                        <a:ea typeface="Arial" pitchFamily="34" charset="-122"/>
+                        <a:cs typeface="Arial" pitchFamily="34" charset="-120"/>
+                      </a:rPr>
+                      <m:t>𝒇</m:t>
+                    </m:r>
+                    <m:r>
+                      <a:rPr lang="en-US" sz="1800" b="1" i="1" dirty="0" smtClean="0">
+                        <a:solidFill>
+                          <a:srgbClr val="018185"/>
+                        </a:solidFill>
+                        <a:latin typeface="Cambria Math" panose="02040503050406030204" pitchFamily="18" charset="0"/>
+                        <a:ea typeface="Arial" pitchFamily="34" charset="-122"/>
+                        <a:cs typeface="Arial" pitchFamily="34" charset="-120"/>
+                      </a:rPr>
+                      <m:t>.= </m:t>
+                    </m:r>
+                    <m:r>
+                      <a:rPr lang="en-US" sz="1800" b="1" i="1" dirty="0" smtClean="0">
+                        <a:solidFill>
+                          <a:srgbClr val="018185"/>
+                        </a:solidFill>
+                        <a:latin typeface="Cambria Math" panose="02040503050406030204" pitchFamily="18" charset="0"/>
+                        <a:ea typeface="Arial" pitchFamily="34" charset="-122"/>
+                        <a:cs typeface="Arial" pitchFamily="34" charset="-120"/>
+                      </a:rPr>
+                      <m:t>𝟎</m:t>
+                    </m:r>
+                    <m:r>
+                      <a:rPr lang="en-US" sz="1800" b="1" i="1" dirty="0" smtClean="0">
+                        <a:solidFill>
+                          <a:srgbClr val="018185"/>
+                        </a:solidFill>
+                        <a:latin typeface="Cambria Math" panose="02040503050406030204" pitchFamily="18" charset="0"/>
+                        <a:ea typeface="Arial" pitchFamily="34" charset="-122"/>
+                        <a:cs typeface="Arial" pitchFamily="34" charset="-120"/>
+                      </a:rPr>
+                      <m:t>.</m:t>
+                    </m:r>
+                    <m:r>
+                      <a:rPr lang="en-US" sz="1800" b="1" i="1" dirty="0" smtClean="0">
+                        <a:solidFill>
+                          <a:srgbClr val="018185"/>
+                        </a:solidFill>
+                        <a:latin typeface="Cambria Math" panose="02040503050406030204" pitchFamily="18" charset="0"/>
+                        <a:ea typeface="Arial" pitchFamily="34" charset="-122"/>
+                        <a:cs typeface="Arial" pitchFamily="34" charset="-120"/>
+                      </a:rPr>
+                      <m:t>𝟗𝟓</m:t>
+                    </m:r>
+                  </m:oMath>
+                </a14:m>
+                <a:endParaRPr lang="sv-SE" dirty="0"/>
+              </a:p>
+            </p:txBody>
+          </p:sp>
+        </mc:Choice>
+        <mc:Fallback>
+          <p:sp>
+            <p:nvSpPr>
+              <p:cNvPr id="332" name="TextBox 331">
+                <a:extLst>
+                  <a:ext uri="{FF2B5EF4-FFF2-40B4-BE49-F238E27FC236}">
+                    <a16:creationId xmlns:a16="http://schemas.microsoft.com/office/drawing/2014/main" id="{A4481EC4-D099-CB43-7909-7947A5D44F48}"/>
+                  </a:ext>
+                </a:extLst>
+              </p:cNvPr>
+              <p:cNvSpPr txBox="1">
+                <a:spLocks noRot="1" noChangeAspect="1" noMove="1" noResize="1" noEditPoints="1" noAdjustHandles="1" noChangeArrowheads="1" noChangeShapeType="1" noTextEdit="1"/>
+              </p:cNvSpPr>
+              <p:nvPr/>
+            </p:nvSpPr>
+            <p:spPr>
+              <a:xfrm>
+                <a:off x="13903743" y="35907233"/>
+                <a:ext cx="3180917" cy="369332"/>
+              </a:xfrm>
+              <a:prstGeom prst="rect">
+                <a:avLst/>
+              </a:prstGeom>
+              <a:blipFill>
+                <a:blip r:embed="rId36"/>
+                <a:stretch>
+                  <a:fillRect t="-8197" b="-24590"/>
+                </a:stretch>
+              </a:blipFill>
+            </p:spPr>
+            <p:txBody>
+              <a:bodyPr/>
+              <a:lstStyle/>
+              <a:p>
+                <a:r>
+                  <a:rPr lang="sv-SE">
+                    <a:noFill/>
+                  </a:rPr>
+                  <a:t> </a:t>
+                </a:r>
+              </a:p>
+            </p:txBody>
+          </p:sp>
+        </mc:Fallback>
+      </mc:AlternateContent>
     </p:spTree>
     <p:extLst>
       <p:ext uri="{BB962C8B-B14F-4D97-AF65-F5344CB8AC3E}">
@@ -7420,6 +10462,321 @@
       </a:minorFont>
     </a:fontScheme>
     <a:fmtScheme name="Office テーマ">
+      <a:fillStyleLst>
+        <a:solidFill>
+          <a:schemeClr val="phClr"/>
+        </a:solidFill>
+        <a:gradFill rotWithShape="1">
+          <a:gsLst>
+            <a:gs pos="0">
+              <a:schemeClr val="phClr">
+                <a:lumMod val="110000"/>
+                <a:satMod val="105000"/>
+                <a:tint val="67000"/>
+              </a:schemeClr>
+            </a:gs>
+            <a:gs pos="50000">
+              <a:schemeClr val="phClr">
+                <a:lumMod val="105000"/>
+                <a:satMod val="103000"/>
+                <a:tint val="73000"/>
+              </a:schemeClr>
+            </a:gs>
+            <a:gs pos="100000">
+              <a:schemeClr val="phClr">
+                <a:lumMod val="105000"/>
+                <a:satMod val="109000"/>
+                <a:tint val="81000"/>
+              </a:schemeClr>
+            </a:gs>
+          </a:gsLst>
+          <a:lin ang="5400000" scaled="0"/>
+        </a:gradFill>
+        <a:gradFill rotWithShape="1">
+          <a:gsLst>
+            <a:gs pos="0">
+              <a:schemeClr val="phClr">
+                <a:satMod val="103000"/>
+                <a:lumMod val="102000"/>
+                <a:tint val="94000"/>
+              </a:schemeClr>
+            </a:gs>
+            <a:gs pos="50000">
+              <a:schemeClr val="phClr">
+                <a:satMod val="110000"/>
+                <a:lumMod val="100000"/>
+                <a:shade val="100000"/>
+              </a:schemeClr>
+            </a:gs>
+            <a:gs pos="100000">
+              <a:schemeClr val="phClr">
+                <a:lumMod val="99000"/>
+                <a:satMod val="120000"/>
+                <a:shade val="78000"/>
+              </a:schemeClr>
+            </a:gs>
+          </a:gsLst>
+          <a:lin ang="5400000" scaled="0"/>
+        </a:gradFill>
+      </a:fillStyleLst>
+      <a:lnStyleLst>
+        <a:ln w="12700" cap="flat" cmpd="sng" algn="ctr">
+          <a:solidFill>
+            <a:schemeClr val="phClr"/>
+          </a:solidFill>
+          <a:prstDash val="solid"/>
+          <a:miter lim="800000"/>
+        </a:ln>
+        <a:ln w="19050" cap="flat" cmpd="sng" algn="ctr">
+          <a:solidFill>
+            <a:schemeClr val="phClr"/>
+          </a:solidFill>
+          <a:prstDash val="solid"/>
+          <a:miter lim="800000"/>
+        </a:ln>
+        <a:ln w="25400" cap="flat" cmpd="sng" algn="ctr">
+          <a:solidFill>
+            <a:schemeClr val="phClr"/>
+          </a:solidFill>
+          <a:prstDash val="solid"/>
+          <a:miter lim="800000"/>
+        </a:ln>
+      </a:lnStyleLst>
+      <a:effectStyleLst>
+        <a:effectStyle>
+          <a:effectLst/>
+        </a:effectStyle>
+        <a:effectStyle>
+          <a:effectLst/>
+        </a:effectStyle>
+        <a:effectStyle>
+          <a:effectLst>
+            <a:outerShdw blurRad="57150" dist="19050" dir="5400000" algn="ctr" rotWithShape="0">
+              <a:srgbClr val="000000">
+                <a:alpha val="63000"/>
+              </a:srgbClr>
+            </a:outerShdw>
+          </a:effectLst>
+        </a:effectStyle>
+      </a:effectStyleLst>
+      <a:bgFillStyleLst>
+        <a:solidFill>
+          <a:schemeClr val="phClr"/>
+        </a:solidFill>
+        <a:solidFill>
+          <a:schemeClr val="phClr">
+            <a:tint val="95000"/>
+            <a:satMod val="170000"/>
+          </a:schemeClr>
+        </a:solidFill>
+        <a:gradFill rotWithShape="1">
+          <a:gsLst>
+            <a:gs pos="0">
+              <a:schemeClr val="phClr">
+                <a:tint val="93000"/>
+                <a:satMod val="150000"/>
+                <a:shade val="98000"/>
+                <a:lumMod val="102000"/>
+              </a:schemeClr>
+            </a:gs>
+            <a:gs pos="50000">
+              <a:schemeClr val="phClr">
+                <a:tint val="98000"/>
+                <a:satMod val="130000"/>
+                <a:shade val="90000"/>
+                <a:lumMod val="103000"/>
+              </a:schemeClr>
+            </a:gs>
+            <a:gs pos="100000">
+              <a:schemeClr val="phClr">
+                <a:shade val="63000"/>
+                <a:satMod val="120000"/>
+              </a:schemeClr>
+            </a:gs>
+          </a:gsLst>
+          <a:lin ang="5400000" scaled="0"/>
+        </a:gradFill>
+      </a:bgFillStyleLst>
+    </a:fmtScheme>
+  </a:themeElements>
+  <a:objectDefaults>
+    <a:lnDef>
+      <a:spPr/>
+      <a:bodyPr/>
+      <a:lstStyle/>
+      <a:style>
+        <a:lnRef idx="2">
+          <a:schemeClr val="accent1"/>
+        </a:lnRef>
+        <a:fillRef idx="0">
+          <a:schemeClr val="accent1"/>
+        </a:fillRef>
+        <a:effectRef idx="1">
+          <a:schemeClr val="accent1"/>
+        </a:effectRef>
+        <a:fontRef idx="minor">
+          <a:schemeClr val="tx1"/>
+        </a:fontRef>
+      </a:style>
+    </a:lnDef>
+  </a:objectDefaults>
+  <a:extraClrSchemeLst/>
+  <a:extLst>
+    <a:ext uri="{05A4C25C-085E-4340-85A3-A5531E510DB2}">
+      <thm15:themeFamily xmlns:thm15="http://schemas.microsoft.com/office/thememl/2012/main" name="Office Theme" id="{2E142A2C-CD16-42D6-873A-C26D2A0506FA}" vid="{1BDDFF52-6CD6-40A5-AB3C-68EB2F1E4D0A}"/>
+    </a:ext>
+  </a:extLst>
+</a:theme>
+</file>
+
+<file path=ppt/theme/theme2.xml><?xml version="1.0" encoding="utf-8"?>
+<a:theme xmlns:a="http://schemas.openxmlformats.org/drawingml/2006/main" name="Office Theme">
+  <a:themeElements>
+    <a:clrScheme name="Office">
+      <a:dk1>
+        <a:sysClr val="windowText" lastClr="000000"/>
+      </a:dk1>
+      <a:lt1>
+        <a:sysClr val="window" lastClr="FFFFFF"/>
+      </a:lt1>
+      <a:dk2>
+        <a:srgbClr val="0E2841"/>
+      </a:dk2>
+      <a:lt2>
+        <a:srgbClr val="E8E8E8"/>
+      </a:lt2>
+      <a:accent1>
+        <a:srgbClr val="156082"/>
+      </a:accent1>
+      <a:accent2>
+        <a:srgbClr val="E97132"/>
+      </a:accent2>
+      <a:accent3>
+        <a:srgbClr val="196B24"/>
+      </a:accent3>
+      <a:accent4>
+        <a:srgbClr val="0F9ED5"/>
+      </a:accent4>
+      <a:accent5>
+        <a:srgbClr val="A02B93"/>
+      </a:accent5>
+      <a:accent6>
+        <a:srgbClr val="4EA72E"/>
+      </a:accent6>
+      <a:hlink>
+        <a:srgbClr val="467886"/>
+      </a:hlink>
+      <a:folHlink>
+        <a:srgbClr val="96607D"/>
+      </a:folHlink>
+    </a:clrScheme>
+    <a:fontScheme name="Office">
+      <a:majorFont>
+        <a:latin typeface="Aptos Display" panose="02110004020202020204"/>
+        <a:ea typeface=""/>
+        <a:cs typeface=""/>
+        <a:font script="Jpan" typeface="游ゴシック Light"/>
+        <a:font script="Hang" typeface="맑은 고딕"/>
+        <a:font script="Hans" typeface="等线 Light"/>
+        <a:font script="Hant" typeface="新細明體"/>
+        <a:font script="Arab" typeface="Times New Roman"/>
+        <a:font script="Hebr" typeface="Times New Roman"/>
+        <a:font script="Thai" typeface="Angsana New"/>
+        <a:font script="Ethi" typeface="Nyala"/>
+        <a:font script="Beng" typeface="Vrinda"/>
+        <a:font script="Gujr" typeface="Shruti"/>
+        <a:font script="Khmr" typeface="MoolBoran"/>
+        <a:font script="Knda" typeface="Tunga"/>
+        <a:font script="Guru" typeface="Raavi"/>
+        <a:font script="Cans" typeface="Euphemia"/>
+        <a:font script="Cher" typeface="Plantagenet Cherokee"/>
+        <a:font script="Yiii" typeface="Microsoft Yi Baiti"/>
+        <a:font script="Tibt" typeface="Microsoft Himalaya"/>
+        <a:font script="Thaa" typeface="MV Boli"/>
+        <a:font script="Deva" typeface="Mangal"/>
+        <a:font script="Telu" typeface="Gautami"/>
+        <a:font script="Taml" typeface="Latha"/>
+        <a:font script="Syrc" typeface="Estrangelo Edessa"/>
+        <a:font script="Orya" typeface="Kalinga"/>
+        <a:font script="Mlym" typeface="Kartika"/>
+        <a:font script="Laoo" typeface="DokChampa"/>
+        <a:font script="Sinh" typeface="Iskoola Pota"/>
+        <a:font script="Mong" typeface="Mongolian Baiti"/>
+        <a:font script="Viet" typeface="Times New Roman"/>
+        <a:font script="Uigh" typeface="Microsoft Uighur"/>
+        <a:font script="Geor" typeface="Sylfaen"/>
+        <a:font script="Armn" typeface="Arial"/>
+        <a:font script="Bugi" typeface="Leelawadee UI"/>
+        <a:font script="Bopo" typeface="Microsoft JhengHei"/>
+        <a:font script="Java" typeface="Javanese Text"/>
+        <a:font script="Lisu" typeface="Segoe UI"/>
+        <a:font script="Mymr" typeface="Myanmar Text"/>
+        <a:font script="Nkoo" typeface="Ebrima"/>
+        <a:font script="Olck" typeface="Nirmala UI"/>
+        <a:font script="Osma" typeface="Ebrima"/>
+        <a:font script="Phag" typeface="Phagspa"/>
+        <a:font script="Syrn" typeface="Estrangelo Edessa"/>
+        <a:font script="Syrj" typeface="Estrangelo Edessa"/>
+        <a:font script="Syre" typeface="Estrangelo Edessa"/>
+        <a:font script="Sora" typeface="Nirmala UI"/>
+        <a:font script="Tale" typeface="Microsoft Tai Le"/>
+        <a:font script="Talu" typeface="Microsoft New Tai Lue"/>
+        <a:font script="Tfng" typeface="Ebrima"/>
+      </a:majorFont>
+      <a:minorFont>
+        <a:latin typeface="Aptos" panose="02110004020202020204"/>
+        <a:ea typeface=""/>
+        <a:cs typeface=""/>
+        <a:font script="Jpan" typeface="游ゴシック"/>
+        <a:font script="Hang" typeface="맑은 고딕"/>
+        <a:font script="Hans" typeface="等线"/>
+        <a:font script="Hant" typeface="新細明體"/>
+        <a:font script="Arab" typeface="Arial"/>
+        <a:font script="Hebr" typeface="Arial"/>
+        <a:font script="Thai" typeface="Cordia New"/>
+        <a:font script="Ethi" typeface="Nyala"/>
+        <a:font script="Beng" typeface="Vrinda"/>
+        <a:font script="Gujr" typeface="Shruti"/>
+        <a:font script="Khmr" typeface="DaunPenh"/>
+        <a:font script="Knda" typeface="Tunga"/>
+        <a:font script="Guru" typeface="Raavi"/>
+        <a:font script="Cans" typeface="Euphemia"/>
+        <a:font script="Cher" typeface="Plantagenet Cherokee"/>
+        <a:font script="Yiii" typeface="Microsoft Yi Baiti"/>
+        <a:font script="Tibt" typeface="Microsoft Himalaya"/>
+        <a:font script="Thaa" typeface="MV Boli"/>
+        <a:font script="Deva" typeface="Mangal"/>
+        <a:font script="Telu" typeface="Gautami"/>
+        <a:font script="Taml" typeface="Latha"/>
+        <a:font script="Syrc" typeface="Estrangelo Edessa"/>
+        <a:font script="Orya" typeface="Kalinga"/>
+        <a:font script="Mlym" typeface="Kartika"/>
+        <a:font script="Laoo" typeface="DokChampa"/>
+        <a:font script="Sinh" typeface="Iskoola Pota"/>
+        <a:font script="Mong" typeface="Mongolian Baiti"/>
+        <a:font script="Viet" typeface="Arial"/>
+        <a:font script="Uigh" typeface="Microsoft Uighur"/>
+        <a:font script="Geor" typeface="Sylfaen"/>
+        <a:font script="Armn" typeface="Arial"/>
+        <a:font script="Bugi" typeface="Leelawadee UI"/>
+        <a:font script="Bopo" typeface="Microsoft JhengHei"/>
+        <a:font script="Java" typeface="Javanese Text"/>
+        <a:font script="Lisu" typeface="Segoe UI"/>
+        <a:font script="Mymr" typeface="Myanmar Text"/>
+        <a:font script="Nkoo" typeface="Ebrima"/>
+        <a:font script="Olck" typeface="Nirmala UI"/>
+        <a:font script="Osma" typeface="Ebrima"/>
+        <a:font script="Phag" typeface="Phagspa"/>
+        <a:font script="Syrn" typeface="Estrangelo Edessa"/>
+        <a:font script="Syrj" typeface="Estrangelo Edessa"/>
+        <a:font script="Syre" typeface="Estrangelo Edessa"/>
+        <a:font script="Sora" typeface="Nirmala UI"/>
+        <a:font script="Tale" typeface="Microsoft Tai Le"/>
+        <a:font script="Talu" typeface="Microsoft New Tai Lue"/>
+        <a:font script="Tfng" typeface="Ebrima"/>
+      </a:minorFont>
+    </a:fontScheme>
+    <a:fmtScheme name="Office">
       <a:fillStyleLst>
         <a:solidFill>
           <a:schemeClr val="phClr"/>
@@ -7811,10 +11168,16 @@
 <file path=customXml/itemProps1.xml><?xml version="1.0" encoding="utf-8"?>
 <ds:datastoreItem xmlns:ds="http://schemas.openxmlformats.org/officeDocument/2006/customXml" ds:itemID="{956DD067-9E13-49D6-9472-89662B46F2FE}">
   <ds:schemaRefs>
+    <ds:schemaRef ds:uri="http://schemas.openxmlformats.org/package/2006/metadata/core-properties"/>
+    <ds:schemaRef ds:uri="http://schemas.microsoft.com/office/2006/documentManagement/types"/>
+    <ds:schemaRef ds:uri="98d2721f-eecf-4e40-8c6d-8362eea2291f"/>
+    <ds:schemaRef ds:uri="http://schemas.microsoft.com/office/infopath/2007/PartnerControls"/>
+    <ds:schemaRef ds:uri="http://www.w3.org/XML/1998/namespace"/>
+    <ds:schemaRef ds:uri="http://purl.org/dc/elements/1.1/"/>
+    <ds:schemaRef ds:uri="http://purl.org/dc/dcmitype/"/>
+    <ds:schemaRef ds:uri="6c0a9c51-223e-40eb-be5b-a75f95f5efa0"/>
     <ds:schemaRef ds:uri="http://schemas.microsoft.com/office/2006/metadata/properties"/>
-    <ds:schemaRef ds:uri="http://schemas.microsoft.com/office/infopath/2007/PartnerControls"/>
-    <ds:schemaRef ds:uri="98d2721f-eecf-4e40-8c6d-8362eea2291f"/>
-    <ds:schemaRef ds:uri="6c0a9c51-223e-40eb-be5b-a75f95f5efa0"/>
+    <ds:schemaRef ds:uri="http://purl.org/dc/terms/"/>
   </ds:schemaRefs>
 </ds:datastoreItem>
 </file>
